--- a/02-languages/01-teoria/01 Introducción a Javascript.pptx
+++ b/02-languages/01-teoria/01 Introducción a Javascript.pptx
@@ -561,604 +561,80 @@
           <a:bodyPr/>
           <a:lstStyle/>
           <a:p>
-            <a:r>
-              <a:rPr lang="es-ES" b="0" dirty="0">
-                <a:solidFill>
-                  <a:srgbClr val="D4D4D4"/>
-                </a:solidFill>
-                <a:effectLst/>
-                <a:highlight>
-                  <a:srgbClr val="1E1E1E"/>
-                </a:highlight>
-                <a:latin typeface="Dank Mono Regular" panose="00000509000000000000" pitchFamily="50" charset="0"/>
-              </a:rPr>
-              <a:t>Si nos pidieran imaginar el mundo web, mas concretamente el </a:t>
-            </a:r>
-            <a:r>
-              <a:rPr lang="es-ES" b="0" i="1" dirty="0">
-                <a:solidFill>
-                  <a:srgbClr val="D4D4D4"/>
-                </a:solidFill>
-                <a:effectLst/>
-                <a:highlight>
-                  <a:srgbClr val="1E1E1E"/>
-                </a:highlight>
-                <a:latin typeface="Dank Mono Regular" panose="00000509000000000000" pitchFamily="50" charset="0"/>
-              </a:rPr>
-              <a:t>frontend</a:t>
-            </a:r>
-            <a:r>
-              <a:rPr lang="es-ES" b="0" dirty="0">
-                <a:solidFill>
-                  <a:srgbClr val="D4D4D4"/>
-                </a:solidFill>
-                <a:effectLst/>
-                <a:highlight>
-                  <a:srgbClr val="1E1E1E"/>
-                </a:highlight>
-                <a:latin typeface="Dank Mono Regular" panose="00000509000000000000" pitchFamily="50" charset="0"/>
-              </a:rPr>
-              <a:t>, como un plato comestible, diríamos que su receta estaría formada fundamentalmente por 3 ingredientes:</a:t>
-            </a:r>
-          </a:p>
-          <a:p>
-            <a:pPr marL="171450" indent="-171450">
-              <a:buFontTx/>
-              <a:buChar char="-"/>
-            </a:pPr>
-            <a:r>
-              <a:rPr lang="es-ES" b="0" dirty="0">
-                <a:solidFill>
-                  <a:srgbClr val="D4D4D4"/>
-                </a:solidFill>
-                <a:effectLst/>
-                <a:highlight>
-                  <a:srgbClr val="1E1E1E"/>
-                </a:highlight>
-                <a:latin typeface="Dank Mono Regular" panose="00000509000000000000" pitchFamily="50" charset="0"/>
-              </a:rPr>
-              <a:t>Estructura y Contenido.</a:t>
-            </a:r>
-          </a:p>
-          <a:p>
-            <a:pPr marL="171450" indent="-171450">
-              <a:buFontTx/>
-              <a:buChar char="-"/>
-            </a:pPr>
-            <a:r>
-              <a:rPr lang="es-ES" b="0" dirty="0">
-                <a:solidFill>
-                  <a:srgbClr val="D4D4D4"/>
-                </a:solidFill>
-                <a:effectLst/>
-                <a:highlight>
-                  <a:srgbClr val="1E1E1E"/>
-                </a:highlight>
-                <a:latin typeface="Dank Mono Regular" panose="00000509000000000000" pitchFamily="50" charset="0"/>
-              </a:rPr>
-              <a:t>Presentación y Estilo.</a:t>
-            </a:r>
-          </a:p>
-          <a:p>
-            <a:pPr marL="171450" indent="-171450">
-              <a:buFontTx/>
-              <a:buChar char="-"/>
-            </a:pPr>
-            <a:r>
-              <a:rPr lang="es-ES" b="0" dirty="0">
-                <a:solidFill>
-                  <a:srgbClr val="D4D4D4"/>
-                </a:solidFill>
-                <a:effectLst/>
-                <a:highlight>
-                  <a:srgbClr val="1E1E1E"/>
-                </a:highlight>
-                <a:latin typeface="Dank Mono Regular" panose="00000509000000000000" pitchFamily="50" charset="0"/>
-              </a:rPr>
-              <a:t>Comportamiento.</a:t>
-            </a:r>
-          </a:p>
-          <a:p>
-            <a:pPr marL="0" indent="0">
-              <a:buFontTx/>
-              <a:buNone/>
-            </a:pPr>
-            <a:endParaRPr lang="es-ES" b="0" dirty="0">
-              <a:solidFill>
-                <a:srgbClr val="D4D4D4"/>
-              </a:solidFill>
-              <a:effectLst/>
-              <a:highlight>
-                <a:srgbClr val="1E1E1E"/>
-              </a:highlight>
-              <a:latin typeface="Dank Mono Regular" panose="00000509000000000000" pitchFamily="50" charset="0"/>
-            </a:endParaRPr>
-          </a:p>
-          <a:p>
-            <a:pPr marL="0" indent="0">
-              <a:buFontTx/>
-              <a:buNone/>
-            </a:pPr>
-            <a:r>
-              <a:rPr lang="es-ES" b="0" dirty="0">
-                <a:solidFill>
-                  <a:srgbClr val="D4D4D4"/>
-                </a:solidFill>
-                <a:effectLst/>
-                <a:highlight>
-                  <a:srgbClr val="1E1E1E"/>
-                </a:highlight>
-                <a:latin typeface="Dank Mono Regular" panose="00000509000000000000" pitchFamily="50" charset="0"/>
-              </a:rPr>
-              <a:t>Para entender mejor el rol de cada ingrediente y que aporta al mundo web, vamos a hacerlo cronológicamente, viajando al pasado.  En los albores de internet, los navegadores era poco más que visores de documentos remotos de texto. Las páginas eran muy estáticas y consistían fundamentalmente en:</a:t>
-            </a:r>
-          </a:p>
-          <a:p>
-            <a:endParaRPr lang="es-ES" b="0" dirty="0">
-              <a:solidFill>
-                <a:srgbClr val="D4D4D4"/>
-              </a:solidFill>
-              <a:effectLst/>
-              <a:highlight>
-                <a:srgbClr val="1E1E1E"/>
-              </a:highlight>
-              <a:latin typeface="Dank Mono Regular" panose="00000509000000000000" pitchFamily="50" charset="0"/>
-            </a:endParaRPr>
-          </a:p>
-          <a:p>
-            <a:pPr marL="171450" indent="-171450">
-              <a:buFont typeface="Arial" panose="020B0604020202020204" pitchFamily="34" charset="0"/>
-              <a:buChar char="•"/>
-            </a:pPr>
-            <a:r>
-              <a:rPr lang="es-ES" b="1" dirty="0">
-                <a:solidFill>
-                  <a:srgbClr val="569CD6"/>
-                </a:solidFill>
-                <a:effectLst/>
-                <a:highlight>
-                  <a:srgbClr val="1E1E1E"/>
-                </a:highlight>
-                <a:latin typeface="Dank Mono Regular" panose="00000509000000000000" pitchFamily="50" charset="0"/>
-              </a:rPr>
-              <a:t>Estructura y Contenido</a:t>
-            </a:r>
-            <a:r>
-              <a:rPr lang="es-ES" b="0" dirty="0">
-                <a:solidFill>
-                  <a:srgbClr val="D4D4D4"/>
-                </a:solidFill>
-                <a:effectLst/>
-                <a:highlight>
-                  <a:srgbClr val="1E1E1E"/>
-                </a:highlight>
-                <a:latin typeface="Dank Mono Regular" panose="00000509000000000000" pitchFamily="50" charset="0"/>
-              </a:rPr>
-              <a:t>, es decir, contenido estructurado gracias al lenguaje de etiquetas </a:t>
-            </a:r>
-            <a:r>
-              <a:rPr lang="es-ES" b="0" dirty="0">
-                <a:solidFill>
-                  <a:srgbClr val="CE9178"/>
-                </a:solidFill>
-                <a:effectLst/>
-                <a:highlight>
-                  <a:srgbClr val="1E1E1E"/>
-                </a:highlight>
-                <a:latin typeface="Dank Mono Regular" panose="00000509000000000000" pitchFamily="50" charset="0"/>
-              </a:rPr>
-              <a:t>`HTML`</a:t>
-            </a:r>
-            <a:r>
-              <a:rPr lang="es-ES" b="0" dirty="0">
-                <a:solidFill>
-                  <a:srgbClr val="D4D4D4"/>
-                </a:solidFill>
-                <a:effectLst/>
-                <a:highlight>
-                  <a:srgbClr val="1E1E1E"/>
-                </a:highlight>
-                <a:latin typeface="Dank Mono Regular" panose="00000509000000000000" pitchFamily="50" charset="0"/>
-              </a:rPr>
-              <a:t>. Proporciona el "esqueleto" de nuestra página, su estructura, y añade semántica a los elementos (define cual es el propósito, les da significado). Esto ayuda a los navegadores a renderizar correctamente el contenido, a los buscadores a indexarlo adecuadamente, o a los usuarios a entender mejor el contenido (accesibilidad, tecnologías de asistencia). </a:t>
-            </a:r>
-          </a:p>
-          <a:p>
-            <a:pPr marL="171450" indent="-171450">
-              <a:buFont typeface="Arial" panose="020B0604020202020204" pitchFamily="34" charset="0"/>
-              <a:buChar char="•"/>
-            </a:pPr>
-            <a:endParaRPr lang="es-ES" b="1" dirty="0">
-              <a:solidFill>
-                <a:srgbClr val="569CD6"/>
-              </a:solidFill>
-              <a:effectLst/>
-              <a:highlight>
-                <a:srgbClr val="1E1E1E"/>
-              </a:highlight>
-              <a:latin typeface="Dank Mono Regular" panose="00000509000000000000" pitchFamily="50" charset="0"/>
-            </a:endParaRPr>
-          </a:p>
-          <a:p>
-            <a:pPr marL="0" indent="0">
-              <a:buFont typeface="Arial" panose="020B0604020202020204" pitchFamily="34" charset="0"/>
-              <a:buNone/>
-            </a:pPr>
-            <a:r>
-              <a:rPr lang="es-ES" b="0" dirty="0">
-                <a:solidFill>
-                  <a:srgbClr val="569CD6"/>
-                </a:solidFill>
-                <a:effectLst/>
-                <a:highlight>
-                  <a:srgbClr val="1E1E1E"/>
-                </a:highlight>
-                <a:latin typeface="Dank Mono Regular" panose="00000509000000000000" pitchFamily="50" charset="0"/>
-              </a:rPr>
-              <a:t>Internet evolucionaba a pasos agigantados y el público demandaba documentos más atractivos. Se pone el foco en:</a:t>
-            </a:r>
-          </a:p>
-          <a:p>
-            <a:pPr marL="0" indent="0">
-              <a:buFont typeface="Arial" panose="020B0604020202020204" pitchFamily="34" charset="0"/>
-              <a:buNone/>
-            </a:pPr>
-            <a:endParaRPr lang="es-ES" b="1" dirty="0">
-              <a:solidFill>
-                <a:srgbClr val="569CD6"/>
-              </a:solidFill>
-              <a:effectLst/>
-              <a:highlight>
-                <a:srgbClr val="1E1E1E"/>
-              </a:highlight>
-              <a:latin typeface="Dank Mono Regular" panose="00000509000000000000" pitchFamily="50" charset="0"/>
-            </a:endParaRPr>
-          </a:p>
-          <a:p>
-            <a:pPr marL="171450" indent="-171450">
-              <a:buFont typeface="Arial" panose="020B0604020202020204" pitchFamily="34" charset="0"/>
-              <a:buChar char="•"/>
-            </a:pPr>
-            <a:r>
-              <a:rPr lang="es-ES" b="1" dirty="0">
-                <a:solidFill>
-                  <a:srgbClr val="569CD6"/>
-                </a:solidFill>
-                <a:effectLst/>
-                <a:highlight>
-                  <a:srgbClr val="1E1E1E"/>
-                </a:highlight>
-                <a:latin typeface="Dank Mono Regular" panose="00000509000000000000" pitchFamily="50" charset="0"/>
-              </a:rPr>
-              <a:t>Presentación y Estilo</a:t>
-            </a:r>
-            <a:r>
-              <a:rPr lang="es-ES" b="0" dirty="0">
-                <a:solidFill>
-                  <a:srgbClr val="D4D4D4"/>
-                </a:solidFill>
-                <a:effectLst/>
-                <a:highlight>
-                  <a:srgbClr val="1E1E1E"/>
-                </a:highlight>
-                <a:latin typeface="Dank Mono Regular" panose="00000509000000000000" pitchFamily="50" charset="0"/>
-              </a:rPr>
-              <a:t>. Para mejorar estéticamente estos documentos, aparece un nuevo lenguaje llamado </a:t>
-            </a:r>
-            <a:r>
-              <a:rPr lang="es-ES" b="0" dirty="0">
-                <a:solidFill>
-                  <a:srgbClr val="CE9178"/>
-                </a:solidFill>
-                <a:effectLst/>
-                <a:highlight>
-                  <a:srgbClr val="1E1E1E"/>
-                </a:highlight>
-                <a:latin typeface="Dank Mono Regular" panose="00000509000000000000" pitchFamily="50" charset="0"/>
-              </a:rPr>
-              <a:t>`CSS`</a:t>
-            </a:r>
-            <a:r>
-              <a:rPr lang="es-ES" b="0" dirty="0">
-                <a:solidFill>
-                  <a:srgbClr val="D4D4D4"/>
-                </a:solidFill>
-                <a:effectLst/>
-                <a:highlight>
-                  <a:srgbClr val="1E1E1E"/>
-                </a:highlight>
-                <a:latin typeface="Dank Mono Regular" panose="00000509000000000000" pitchFamily="50" charset="0"/>
-              </a:rPr>
-              <a:t> que proporciona reglas de estilado que nos permiten adornar o enriquecer el formato de estos documentos. Su misión es la de controlar colores, tamaños, posiciones, animaciones, diseño responsivo, etc. </a:t>
-            </a:r>
-          </a:p>
-          <a:p>
-            <a:pPr marL="171450" indent="-171450">
-              <a:buFont typeface="Arial" panose="020B0604020202020204" pitchFamily="34" charset="0"/>
-              <a:buChar char="•"/>
-            </a:pPr>
-            <a:endParaRPr lang="es-ES" b="0" dirty="0">
-              <a:solidFill>
-                <a:srgbClr val="D4D4D4"/>
-              </a:solidFill>
-              <a:effectLst/>
-              <a:highlight>
-                <a:srgbClr val="1E1E1E"/>
-              </a:highlight>
-              <a:latin typeface="Dank Mono Regular" panose="00000509000000000000" pitchFamily="50" charset="0"/>
-            </a:endParaRPr>
-          </a:p>
-          <a:p>
-            <a:pPr marL="0" indent="0">
-              <a:buFont typeface="Arial" panose="020B0604020202020204" pitchFamily="34" charset="0"/>
-              <a:buNone/>
-            </a:pPr>
-            <a:r>
-              <a:rPr lang="es-ES" b="0" dirty="0">
-                <a:solidFill>
-                  <a:srgbClr val="D4D4D4"/>
-                </a:solidFill>
-                <a:effectLst/>
-                <a:highlight>
-                  <a:srgbClr val="1E1E1E"/>
-                </a:highlight>
-                <a:latin typeface="Dank Mono Regular" panose="00000509000000000000" pitchFamily="50" charset="0"/>
-              </a:rPr>
-              <a:t>Se consigue dar un salto cualitativo a las páginas web, pero hasta ahora, las páginas no dejaban de ser documentos estáticos con algunas pocas interacciones con el usuario, como clicar enlaces o pulsar botones. Faltaba un lenguaje de programación, integrado y ejecutado en el propio navegador, que convirtiese estos documentos en aplicaciones, es decir, que las dotase de </a:t>
-            </a:r>
-            <a:r>
-              <a:rPr lang="es-ES" b="1" dirty="0">
-                <a:solidFill>
-                  <a:srgbClr val="569CD6"/>
-                </a:solidFill>
-                <a:effectLst/>
-                <a:highlight>
-                  <a:srgbClr val="1E1E1E"/>
-                </a:highlight>
-                <a:latin typeface="Dank Mono Regular" panose="00000509000000000000" pitchFamily="50" charset="0"/>
-              </a:rPr>
-              <a:t>comportamiento</a:t>
-            </a:r>
-            <a:r>
-              <a:rPr lang="es-ES" b="0" dirty="0">
-                <a:solidFill>
-                  <a:srgbClr val="D4D4D4"/>
-                </a:solidFill>
-                <a:effectLst/>
-                <a:highlight>
-                  <a:srgbClr val="1E1E1E"/>
-                </a:highlight>
-                <a:latin typeface="Dank Mono Regular" panose="00000509000000000000" pitchFamily="50" charset="0"/>
-              </a:rPr>
-              <a:t>.</a:t>
-            </a:r>
-          </a:p>
-          <a:p>
-            <a:pPr marL="0" marR="0" lvl="0" indent="0" defTabSz="914400" eaLnBrk="1" fontAlgn="auto" latinLnBrk="0" hangingPunct="1">
-              <a:lnSpc>
-                <a:spcPct val="100000"/>
-              </a:lnSpc>
-              <a:spcBef>
-                <a:spcPts val="0"/>
-              </a:spcBef>
-              <a:spcAft>
-                <a:spcPts val="0"/>
-              </a:spcAft>
-              <a:buClrTx/>
-              <a:buSzTx/>
-              <a:buFontTx/>
-              <a:buNone/>
-              <a:tabLst/>
-              <a:defRPr/>
-            </a:pPr>
-            <a:endParaRPr lang="es-ES" dirty="0"/>
-          </a:p>
-          <a:p>
-            <a:pPr marL="171450" marR="0" lvl="0" indent="-171450" defTabSz="914400" eaLnBrk="1" fontAlgn="auto" latinLnBrk="0" hangingPunct="1">
-              <a:lnSpc>
-                <a:spcPct val="100000"/>
-              </a:lnSpc>
-              <a:spcBef>
-                <a:spcPts val="0"/>
-              </a:spcBef>
-              <a:spcAft>
-                <a:spcPts val="0"/>
-              </a:spcAft>
-              <a:buClrTx/>
-              <a:buSzTx/>
-              <a:buFont typeface="Arial" panose="020B0604020202020204" pitchFamily="34" charset="0"/>
-              <a:buChar char="•"/>
-              <a:tabLst/>
-              <a:defRPr/>
-            </a:pPr>
-            <a:r>
-              <a:rPr lang="es-ES" b="1" dirty="0">
-                <a:solidFill>
-                  <a:srgbClr val="569CD6"/>
-                </a:solidFill>
-                <a:effectLst/>
-                <a:highlight>
-                  <a:srgbClr val="1E1E1E"/>
-                </a:highlight>
-                <a:latin typeface="Dank Mono Regular" panose="00000509000000000000" pitchFamily="50" charset="0"/>
-              </a:rPr>
-              <a:t>JavaScript:</a:t>
-            </a:r>
-            <a:r>
-              <a:rPr lang="es-ES" dirty="0"/>
-              <a:t> </a:t>
-            </a:r>
-            <a:r>
-              <a:rPr lang="es-ES" b="0" dirty="0">
-                <a:solidFill>
-                  <a:srgbClr val="D4D4D4"/>
-                </a:solidFill>
-                <a:effectLst/>
-                <a:highlight>
-                  <a:srgbClr val="1E1E1E"/>
-                </a:highlight>
-                <a:latin typeface="Dank Mono Regular" panose="00000509000000000000" pitchFamily="50" charset="0"/>
-              </a:rPr>
-              <a:t>Y aquí es donde entró en juego el lenguaje JavaScript, que fue creado específicamente para complementar o enriquecer páginas y aplicaciones web, de ahí que esté estrechamente vinculado al mundo del frontend. Originalmente era un lenguaje de scripting ligero y por tanto su rol quedó acotado a añadir eventos, interacción con el usuario, peticiones a servidor, etc. Hoy día ha evolucionado tanto que permite añadir cualquier tipo de lógica de propósito general a nuestras aplicaciones. </a:t>
-            </a:r>
-          </a:p>
-          <a:p>
-            <a:pPr marL="171450" marR="0" lvl="0" indent="-171450" defTabSz="914400" eaLnBrk="1" fontAlgn="auto" latinLnBrk="0" hangingPunct="1">
-              <a:lnSpc>
-                <a:spcPct val="100000"/>
-              </a:lnSpc>
-              <a:spcBef>
-                <a:spcPts val="0"/>
-              </a:spcBef>
-              <a:spcAft>
-                <a:spcPts val="0"/>
-              </a:spcAft>
-              <a:buClrTx/>
-              <a:buSzTx/>
-              <a:buFont typeface="Arial" panose="020B0604020202020204" pitchFamily="34" charset="0"/>
-              <a:buChar char="•"/>
-              <a:tabLst/>
-              <a:defRPr/>
-            </a:pPr>
-            <a:endParaRPr lang="es-ES" b="0" dirty="0">
-              <a:solidFill>
-                <a:srgbClr val="D4D4D4"/>
-              </a:solidFill>
-              <a:effectLst/>
-              <a:highlight>
-                <a:srgbClr val="1E1E1E"/>
-              </a:highlight>
-              <a:latin typeface="Dank Mono Regular" panose="00000509000000000000" pitchFamily="50" charset="0"/>
-            </a:endParaRPr>
-          </a:p>
-          <a:p>
-            <a:pPr marL="0" marR="0" lvl="0" indent="0" defTabSz="914400" eaLnBrk="1" fontAlgn="auto" latinLnBrk="0" hangingPunct="1">
-              <a:lnSpc>
-                <a:spcPct val="100000"/>
-              </a:lnSpc>
-              <a:spcBef>
-                <a:spcPts val="0"/>
-              </a:spcBef>
-              <a:spcAft>
-                <a:spcPts val="0"/>
-              </a:spcAft>
-              <a:buClrTx/>
-              <a:buSzTx/>
-              <a:buFont typeface="Arial" panose="020B0604020202020204" pitchFamily="34" charset="0"/>
-              <a:buNone/>
-              <a:tabLst/>
-              <a:defRPr/>
-            </a:pPr>
-            <a:r>
-              <a:rPr lang="es-ES" b="0" dirty="0">
-                <a:solidFill>
-                  <a:srgbClr val="D4D4D4"/>
-                </a:solidFill>
-                <a:effectLst/>
-                <a:highlight>
-                  <a:srgbClr val="1E1E1E"/>
-                </a:highlight>
-                <a:latin typeface="Dank Mono Regular" panose="00000509000000000000" pitchFamily="50" charset="0"/>
-              </a:rPr>
-              <a:t>Tal ha sido su éxito que a día de hoy se ha convertido, </a:t>
-            </a:r>
-            <a:r>
-              <a:rPr lang="es-ES" b="0" i="1" dirty="0">
-                <a:solidFill>
-                  <a:srgbClr val="D4D4D4"/>
-                </a:solidFill>
-                <a:effectLst/>
-                <a:highlight>
-                  <a:srgbClr val="1E1E1E"/>
-                </a:highlight>
-                <a:latin typeface="Dank Mono Regular" panose="00000509000000000000" pitchFamily="50" charset="0"/>
-              </a:rPr>
-              <a:t>_de facto_</a:t>
-            </a:r>
-            <a:r>
-              <a:rPr lang="es-ES" b="0" dirty="0">
-                <a:solidFill>
-                  <a:srgbClr val="D4D4D4"/>
-                </a:solidFill>
-                <a:effectLst/>
-                <a:highlight>
-                  <a:srgbClr val="1E1E1E"/>
-                </a:highlight>
-                <a:latin typeface="Dank Mono Regular" panose="00000509000000000000" pitchFamily="50" charset="0"/>
-              </a:rPr>
-              <a:t>, en el lenguaje de la web, y podemos encontrarlo integrado en todo tipo de dispositivos conectados.</a:t>
-            </a:r>
-            <a:br>
-              <a:rPr lang="es-ES" b="0" dirty="0">
-                <a:solidFill>
-                  <a:srgbClr val="D4D4D4"/>
-                </a:solidFill>
-                <a:effectLst/>
-                <a:highlight>
-                  <a:srgbClr val="1E1E1E"/>
-                </a:highlight>
-                <a:latin typeface="Dank Mono Regular" panose="00000509000000000000" pitchFamily="50" charset="0"/>
-              </a:rPr>
-            </a:br>
-            <a:br>
-              <a:rPr lang="es-ES" b="0" dirty="0">
-                <a:solidFill>
-                  <a:srgbClr val="D4D4D4"/>
-                </a:solidFill>
-                <a:effectLst/>
-                <a:highlight>
-                  <a:srgbClr val="1E1E1E"/>
-                </a:highlight>
-                <a:latin typeface="Dank Mono Regular" panose="00000509000000000000" pitchFamily="50" charset="0"/>
-              </a:rPr>
-            </a:br>
-            <a:r>
-              <a:rPr lang="es-ES" b="0" dirty="0">
-                <a:solidFill>
-                  <a:srgbClr val="D4D4D4"/>
-                </a:solidFill>
-                <a:effectLst/>
-                <a:highlight>
-                  <a:srgbClr val="1E1E1E"/>
-                </a:highlight>
-                <a:latin typeface="Dank Mono Regular" panose="00000509000000000000" pitchFamily="50" charset="0"/>
-              </a:rPr>
-              <a:t>NOTA: En esta </a:t>
-            </a:r>
-            <a:r>
-              <a:rPr lang="es-ES" b="0" dirty="0" err="1">
-                <a:solidFill>
-                  <a:srgbClr val="D4D4D4"/>
-                </a:solidFill>
-                <a:effectLst/>
-                <a:highlight>
-                  <a:srgbClr val="1E1E1E"/>
-                </a:highlight>
-                <a:latin typeface="Dank Mono Regular" panose="00000509000000000000" pitchFamily="50" charset="0"/>
-              </a:rPr>
-              <a:t>slide</a:t>
-            </a:r>
-            <a:r>
-              <a:rPr lang="es-ES" b="0" dirty="0">
-                <a:solidFill>
-                  <a:srgbClr val="D4D4D4"/>
-                </a:solidFill>
-                <a:effectLst/>
-                <a:highlight>
-                  <a:srgbClr val="1E1E1E"/>
-                </a:highlight>
-                <a:latin typeface="Dank Mono Regular" panose="00000509000000000000" pitchFamily="50" charset="0"/>
-              </a:rPr>
-              <a:t> hemos representado la “receta” de la web con sus 3 ingredientes fundamentales. Sin embargo, los hemos pintado de forma proporcional o equitativa: con el mismo tamaño. Esto pudo ser así durante el nacimiento de JS puesto que su misión era apoyar a los otros 2 lenguajes añadiendo capacidades ligeras de scriptings, es decir, permitiendo ejecutar pequeños trozos de código puntualmente para hacer alguna que otra tarea. La realidad es que a medida que maduraban las aplicaciones, lo hacían gracias al enorme crecimiento de JavaScript con respecto a los otros 2. JS ha tomando un gran peso e impacto a la hora de confeccionar aplicaciones web en la actualidad.</a:t>
-            </a:r>
-            <a:endParaRPr lang="es-ES" dirty="0"/>
+            <a:endParaRPr lang="es-ES"/>
           </a:p>
         </p:txBody>
       </p:sp>
     </p:spTree>
     <p:extLst>
       <p:ext uri="{BB962C8B-B14F-4D97-AF65-F5344CB8AC3E}">
-        <p14:creationId xmlns:p14="http://schemas.microsoft.com/office/powerpoint/2010/main" val="891860792"/>
+        <p14:creationId xmlns:p14="http://schemas.microsoft.com/office/powerpoint/2010/main" val="512129466"/>
+      </p:ext>
+    </p:extLst>
+  </p:cSld>
+  <p:clrMapOvr>
+    <a:masterClrMapping/>
+  </p:clrMapOvr>
+</p:notes>
+</file>
+
+<file path=ppt/notesSlides/notesSlide10.xml><?xml version="1.0" encoding="utf-8"?>
+<p:notes xmlns:a="http://schemas.openxmlformats.org/drawingml/2006/main" xmlns:r="http://schemas.openxmlformats.org/officeDocument/2006/relationships" xmlns:p="http://schemas.openxmlformats.org/presentationml/2006/main">
+  <p:cSld>
+    <p:spTree>
+      <p:nvGrpSpPr>
+        <p:cNvPr id="1" name=""/>
+        <p:cNvGrpSpPr/>
+        <p:nvPr/>
+      </p:nvGrpSpPr>
+      <p:grpSpPr>
+        <a:xfrm>
+          <a:off x="0" y="0"/>
+          <a:ext cx="0" cy="0"/>
+          <a:chOff x="0" y="0"/>
+          <a:chExt cx="0" cy="0"/>
+        </a:xfrm>
+      </p:grpSpPr>
+      <p:sp>
+        <p:nvSpPr>
+          <p:cNvPr id="2" name="Marcador de imagen de diapositiva 1"/>
+          <p:cNvSpPr>
+            <a:spLocks noGrp="1" noRot="1" noChangeAspect="1"/>
+          </p:cNvSpPr>
+          <p:nvPr>
+            <p:ph type="sldImg"/>
+          </p:nvPr>
+        </p:nvSpPr>
+        <p:spPr>
+          <a:xfrm>
+            <a:off x="381000" y="685800"/>
+            <a:ext cx="6096000" cy="3429000"/>
+          </a:xfrm>
+        </p:spPr>
+      </p:sp>
+      <p:sp>
+        <p:nvSpPr>
+          <p:cNvPr id="3" name="Marcador de notas 2"/>
+          <p:cNvSpPr>
+            <a:spLocks noGrp="1"/>
+          </p:cNvSpPr>
+          <p:nvPr>
+            <p:ph type="body" idx="1"/>
+          </p:nvPr>
+        </p:nvSpPr>
+        <p:spPr/>
+        <p:txBody>
+          <a:bodyPr/>
+          <a:lstStyle/>
+          <a:p>
+            <a:endParaRPr lang="es-ES"/>
+          </a:p>
+        </p:txBody>
+      </p:sp>
+    </p:spTree>
+    <p:extLst>
+      <p:ext uri="{BB962C8B-B14F-4D97-AF65-F5344CB8AC3E}">
+        <p14:creationId xmlns:p14="http://schemas.microsoft.com/office/powerpoint/2010/main" val="3683430324"/>
       </p:ext>
     </p:extLst>
   </p:cSld>
@@ -1218,59 +694,603 @@
           <a:lstStyle/>
           <a:p>
             <a:r>
+              <a:rPr lang="es-ES" b="0" dirty="0">
+                <a:solidFill>
+                  <a:srgbClr val="D4D4D4"/>
+                </a:solidFill>
+                <a:effectLst/>
+                <a:highlight>
+                  <a:srgbClr val="1E1E1E"/>
+                </a:highlight>
+                <a:latin typeface="Dank Mono Regular" panose="00000509000000000000" pitchFamily="50" charset="0"/>
+              </a:rPr>
+              <a:t>Si nos pidieran imaginar el mundo web, mas concretamente el </a:t>
+            </a:r>
+            <a:r>
+              <a:rPr lang="es-ES" b="0" i="1" dirty="0">
+                <a:solidFill>
+                  <a:srgbClr val="D4D4D4"/>
+                </a:solidFill>
+                <a:effectLst/>
+                <a:highlight>
+                  <a:srgbClr val="1E1E1E"/>
+                </a:highlight>
+                <a:latin typeface="Dank Mono Regular" panose="00000509000000000000" pitchFamily="50" charset="0"/>
+              </a:rPr>
+              <a:t>frontend</a:t>
+            </a:r>
+            <a:r>
+              <a:rPr lang="es-ES" b="0" dirty="0">
+                <a:solidFill>
+                  <a:srgbClr val="D4D4D4"/>
+                </a:solidFill>
+                <a:effectLst/>
+                <a:highlight>
+                  <a:srgbClr val="1E1E1E"/>
+                </a:highlight>
+                <a:latin typeface="Dank Mono Regular" panose="00000509000000000000" pitchFamily="50" charset="0"/>
+              </a:rPr>
+              <a:t>, como un plato comestible, diríamos que su receta estaría formada fundamentalmente por 3 ingredientes:</a:t>
+            </a:r>
+          </a:p>
+          <a:p>
+            <a:pPr marL="171450" indent="-171450">
+              <a:buFontTx/>
+              <a:buChar char="-"/>
+            </a:pPr>
+            <a:r>
+              <a:rPr lang="es-ES" b="0" dirty="0">
+                <a:solidFill>
+                  <a:srgbClr val="D4D4D4"/>
+                </a:solidFill>
+                <a:effectLst/>
+                <a:highlight>
+                  <a:srgbClr val="1E1E1E"/>
+                </a:highlight>
+                <a:latin typeface="Dank Mono Regular" panose="00000509000000000000" pitchFamily="50" charset="0"/>
+              </a:rPr>
+              <a:t>Estructura y Contenido.</a:t>
+            </a:r>
+          </a:p>
+          <a:p>
+            <a:pPr marL="171450" indent="-171450">
+              <a:buFontTx/>
+              <a:buChar char="-"/>
+            </a:pPr>
+            <a:r>
+              <a:rPr lang="es-ES" b="0" dirty="0">
+                <a:solidFill>
+                  <a:srgbClr val="D4D4D4"/>
+                </a:solidFill>
+                <a:effectLst/>
+                <a:highlight>
+                  <a:srgbClr val="1E1E1E"/>
+                </a:highlight>
+                <a:latin typeface="Dank Mono Regular" panose="00000509000000000000" pitchFamily="50" charset="0"/>
+              </a:rPr>
+              <a:t>Presentación y Estilo.</a:t>
+            </a:r>
+          </a:p>
+          <a:p>
+            <a:pPr marL="171450" indent="-171450">
+              <a:buFontTx/>
+              <a:buChar char="-"/>
+            </a:pPr>
+            <a:r>
+              <a:rPr lang="es-ES" b="0" dirty="0">
+                <a:solidFill>
+                  <a:srgbClr val="D4D4D4"/>
+                </a:solidFill>
+                <a:effectLst/>
+                <a:highlight>
+                  <a:srgbClr val="1E1E1E"/>
+                </a:highlight>
+                <a:latin typeface="Dank Mono Regular" panose="00000509000000000000" pitchFamily="50" charset="0"/>
+              </a:rPr>
+              <a:t>Comportamiento.</a:t>
+            </a:r>
+          </a:p>
+          <a:p>
+            <a:pPr marL="0" indent="0">
+              <a:buFontTx/>
+              <a:buNone/>
+            </a:pPr>
+            <a:endParaRPr lang="es-ES" b="0" dirty="0">
+              <a:solidFill>
+                <a:srgbClr val="D4D4D4"/>
+              </a:solidFill>
+              <a:effectLst/>
+              <a:highlight>
+                <a:srgbClr val="1E1E1E"/>
+              </a:highlight>
+              <a:latin typeface="Dank Mono Regular" panose="00000509000000000000" pitchFamily="50" charset="0"/>
+            </a:endParaRPr>
+          </a:p>
+          <a:p>
+            <a:pPr marL="0" indent="0">
+              <a:buFontTx/>
+              <a:buNone/>
+            </a:pPr>
+            <a:r>
+              <a:rPr lang="es-ES" b="0" dirty="0">
+                <a:solidFill>
+                  <a:srgbClr val="D4D4D4"/>
+                </a:solidFill>
+                <a:effectLst/>
+                <a:highlight>
+                  <a:srgbClr val="1E1E1E"/>
+                </a:highlight>
+                <a:latin typeface="Dank Mono Regular" panose="00000509000000000000" pitchFamily="50" charset="0"/>
+              </a:rPr>
+              <a:t>Para entender mejor el rol de cada ingrediente y que aporta al mundo web, vamos a hacerlo cronológicamente, viajando al pasado.  En los albores de internet, los navegadores era poco más que visores de documentos remotos de texto. Las páginas eran muy estáticas y consistían fundamentalmente en:</a:t>
+            </a:r>
+          </a:p>
+          <a:p>
+            <a:endParaRPr lang="es-ES" b="0" dirty="0">
+              <a:solidFill>
+                <a:srgbClr val="D4D4D4"/>
+              </a:solidFill>
+              <a:effectLst/>
+              <a:highlight>
+                <a:srgbClr val="1E1E1E"/>
+              </a:highlight>
+              <a:latin typeface="Dank Mono Regular" panose="00000509000000000000" pitchFamily="50" charset="0"/>
+            </a:endParaRPr>
+          </a:p>
+          <a:p>
+            <a:pPr marL="171450" indent="-171450">
+              <a:buFont typeface="Arial" panose="020B0604020202020204" pitchFamily="34" charset="0"/>
+              <a:buChar char="•"/>
+            </a:pPr>
+            <a:r>
+              <a:rPr lang="es-ES" b="1" dirty="0">
+                <a:solidFill>
+                  <a:srgbClr val="569CD6"/>
+                </a:solidFill>
+                <a:effectLst/>
+                <a:highlight>
+                  <a:srgbClr val="1E1E1E"/>
+                </a:highlight>
+                <a:latin typeface="Dank Mono Regular" panose="00000509000000000000" pitchFamily="50" charset="0"/>
+              </a:rPr>
+              <a:t>Estructura y Contenido</a:t>
+            </a:r>
+            <a:r>
+              <a:rPr lang="es-ES" b="0" dirty="0">
+                <a:solidFill>
+                  <a:srgbClr val="D4D4D4"/>
+                </a:solidFill>
+                <a:effectLst/>
+                <a:highlight>
+                  <a:srgbClr val="1E1E1E"/>
+                </a:highlight>
+                <a:latin typeface="Dank Mono Regular" panose="00000509000000000000" pitchFamily="50" charset="0"/>
+              </a:rPr>
+              <a:t>, es decir, contenido estructurado gracias al lenguaje de etiquetas </a:t>
+            </a:r>
+            <a:r>
+              <a:rPr lang="es-ES" b="0" dirty="0">
+                <a:solidFill>
+                  <a:srgbClr val="CE9178"/>
+                </a:solidFill>
+                <a:effectLst/>
+                <a:highlight>
+                  <a:srgbClr val="1E1E1E"/>
+                </a:highlight>
+                <a:latin typeface="Dank Mono Regular" panose="00000509000000000000" pitchFamily="50" charset="0"/>
+              </a:rPr>
+              <a:t>`HTML`</a:t>
+            </a:r>
+            <a:r>
+              <a:rPr lang="es-ES" b="0" dirty="0">
+                <a:solidFill>
+                  <a:srgbClr val="D4D4D4"/>
+                </a:solidFill>
+                <a:effectLst/>
+                <a:highlight>
+                  <a:srgbClr val="1E1E1E"/>
+                </a:highlight>
+                <a:latin typeface="Dank Mono Regular" panose="00000509000000000000" pitchFamily="50" charset="0"/>
+              </a:rPr>
+              <a:t>. Proporciona el "esqueleto" de nuestra página, su estructura, y añade semántica a los elementos (define cual es el propósito, les da significado). Esto ayuda a los navegadores a renderizar correctamente el contenido, a los buscadores a indexarlo adecuadamente, o a los usuarios a entender mejor el contenido (accesibilidad, tecnologías de asistencia). </a:t>
+            </a:r>
+          </a:p>
+          <a:p>
+            <a:pPr marL="171450" indent="-171450">
+              <a:buFont typeface="Arial" panose="020B0604020202020204" pitchFamily="34" charset="0"/>
+              <a:buChar char="•"/>
+            </a:pPr>
+            <a:endParaRPr lang="es-ES" b="1" dirty="0">
+              <a:solidFill>
+                <a:srgbClr val="569CD6"/>
+              </a:solidFill>
+              <a:effectLst/>
+              <a:highlight>
+                <a:srgbClr val="1E1E1E"/>
+              </a:highlight>
+              <a:latin typeface="Dank Mono Regular" panose="00000509000000000000" pitchFamily="50" charset="0"/>
+            </a:endParaRPr>
+          </a:p>
+          <a:p>
+            <a:pPr marL="0" indent="0">
+              <a:buFont typeface="Arial" panose="020B0604020202020204" pitchFamily="34" charset="0"/>
+              <a:buNone/>
+            </a:pPr>
+            <a:r>
+              <a:rPr lang="es-ES" b="0" dirty="0">
+                <a:solidFill>
+                  <a:srgbClr val="569CD6"/>
+                </a:solidFill>
+                <a:effectLst/>
+                <a:highlight>
+                  <a:srgbClr val="1E1E1E"/>
+                </a:highlight>
+                <a:latin typeface="Dank Mono Regular" panose="00000509000000000000" pitchFamily="50" charset="0"/>
+              </a:rPr>
+              <a:t>Internet evolucionaba a pasos agigantados y el público demandaba documentos más atractivos. Se pone el foco en:</a:t>
+            </a:r>
+          </a:p>
+          <a:p>
+            <a:pPr marL="0" indent="0">
+              <a:buFont typeface="Arial" panose="020B0604020202020204" pitchFamily="34" charset="0"/>
+              <a:buNone/>
+            </a:pPr>
+            <a:endParaRPr lang="es-ES" b="1" dirty="0">
+              <a:solidFill>
+                <a:srgbClr val="569CD6"/>
+              </a:solidFill>
+              <a:effectLst/>
+              <a:highlight>
+                <a:srgbClr val="1E1E1E"/>
+              </a:highlight>
+              <a:latin typeface="Dank Mono Regular" panose="00000509000000000000" pitchFamily="50" charset="0"/>
+            </a:endParaRPr>
+          </a:p>
+          <a:p>
+            <a:pPr marL="171450" indent="-171450">
+              <a:buFont typeface="Arial" panose="020B0604020202020204" pitchFamily="34" charset="0"/>
+              <a:buChar char="•"/>
+            </a:pPr>
+            <a:r>
+              <a:rPr lang="es-ES" b="1" dirty="0">
+                <a:solidFill>
+                  <a:srgbClr val="569CD6"/>
+                </a:solidFill>
+                <a:effectLst/>
+                <a:highlight>
+                  <a:srgbClr val="1E1E1E"/>
+                </a:highlight>
+                <a:latin typeface="Dank Mono Regular" panose="00000509000000000000" pitchFamily="50" charset="0"/>
+              </a:rPr>
+              <a:t>Presentación y Estilo</a:t>
+            </a:r>
+            <a:r>
+              <a:rPr lang="es-ES" b="0" dirty="0">
+                <a:solidFill>
+                  <a:srgbClr val="D4D4D4"/>
+                </a:solidFill>
+                <a:effectLst/>
+                <a:highlight>
+                  <a:srgbClr val="1E1E1E"/>
+                </a:highlight>
+                <a:latin typeface="Dank Mono Regular" panose="00000509000000000000" pitchFamily="50" charset="0"/>
+              </a:rPr>
+              <a:t>. Para mejorar estéticamente estos documentos, aparece un nuevo lenguaje llamado </a:t>
+            </a:r>
+            <a:r>
+              <a:rPr lang="es-ES" b="0" dirty="0">
+                <a:solidFill>
+                  <a:srgbClr val="CE9178"/>
+                </a:solidFill>
+                <a:effectLst/>
+                <a:highlight>
+                  <a:srgbClr val="1E1E1E"/>
+                </a:highlight>
+                <a:latin typeface="Dank Mono Regular" panose="00000509000000000000" pitchFamily="50" charset="0"/>
+              </a:rPr>
+              <a:t>`CSS`</a:t>
+            </a:r>
+            <a:r>
+              <a:rPr lang="es-ES" b="0" dirty="0">
+                <a:solidFill>
+                  <a:srgbClr val="D4D4D4"/>
+                </a:solidFill>
+                <a:effectLst/>
+                <a:highlight>
+                  <a:srgbClr val="1E1E1E"/>
+                </a:highlight>
+                <a:latin typeface="Dank Mono Regular" panose="00000509000000000000" pitchFamily="50" charset="0"/>
+              </a:rPr>
+              <a:t> que proporciona reglas de estilado que nos permiten adornar o enriquecer el formato de estos documentos. Su misión es la de controlar colores, tamaños, posiciones, animaciones, diseño responsivo, etc. </a:t>
+            </a:r>
+          </a:p>
+          <a:p>
+            <a:pPr marL="171450" indent="-171450">
+              <a:buFont typeface="Arial" panose="020B0604020202020204" pitchFamily="34" charset="0"/>
+              <a:buChar char="•"/>
+            </a:pPr>
+            <a:endParaRPr lang="es-ES" b="0" dirty="0">
+              <a:solidFill>
+                <a:srgbClr val="D4D4D4"/>
+              </a:solidFill>
+              <a:effectLst/>
+              <a:highlight>
+                <a:srgbClr val="1E1E1E"/>
+              </a:highlight>
+              <a:latin typeface="Dank Mono Regular" panose="00000509000000000000" pitchFamily="50" charset="0"/>
+            </a:endParaRPr>
+          </a:p>
+          <a:p>
+            <a:pPr marL="0" indent="0">
+              <a:buFont typeface="Arial" panose="020B0604020202020204" pitchFamily="34" charset="0"/>
+              <a:buNone/>
+            </a:pPr>
+            <a:r>
+              <a:rPr lang="es-ES" b="0" dirty="0">
+                <a:solidFill>
+                  <a:srgbClr val="D4D4D4"/>
+                </a:solidFill>
+                <a:effectLst/>
+                <a:highlight>
+                  <a:srgbClr val="1E1E1E"/>
+                </a:highlight>
+                <a:latin typeface="Dank Mono Regular" panose="00000509000000000000" pitchFamily="50" charset="0"/>
+              </a:rPr>
+              <a:t>Se consigue dar un salto cualitativo a las páginas web, pero hasta ahora, las páginas no dejaban de ser documentos estáticos con algunas pocas interacciones con el usuario, como clicar enlaces o pulsar botones. Faltaba un lenguaje de programación, integrado y ejecutado en el propio navegador, que convirtiese estos documentos en aplicaciones, es decir, que las dotase de </a:t>
+            </a:r>
+            <a:r>
+              <a:rPr lang="es-ES" b="1" dirty="0">
+                <a:solidFill>
+                  <a:srgbClr val="569CD6"/>
+                </a:solidFill>
+                <a:effectLst/>
+                <a:highlight>
+                  <a:srgbClr val="1E1E1E"/>
+                </a:highlight>
+                <a:latin typeface="Dank Mono Regular" panose="00000509000000000000" pitchFamily="50" charset="0"/>
+              </a:rPr>
+              <a:t>comportamiento</a:t>
+            </a:r>
+            <a:r>
+              <a:rPr lang="es-ES" b="0" dirty="0">
+                <a:solidFill>
+                  <a:srgbClr val="D4D4D4"/>
+                </a:solidFill>
+                <a:effectLst/>
+                <a:highlight>
+                  <a:srgbClr val="1E1E1E"/>
+                </a:highlight>
+                <a:latin typeface="Dank Mono Regular" panose="00000509000000000000" pitchFamily="50" charset="0"/>
+              </a:rPr>
+              <a:t>.</a:t>
+            </a:r>
+          </a:p>
+          <a:p>
+            <a:pPr marL="0" marR="0" lvl="0" indent="0" defTabSz="914400" eaLnBrk="1" fontAlgn="auto" latinLnBrk="0" hangingPunct="1">
+              <a:lnSpc>
+                <a:spcPct val="100000"/>
+              </a:lnSpc>
+              <a:spcBef>
+                <a:spcPts val="0"/>
+              </a:spcBef>
+              <a:spcAft>
+                <a:spcPts val="0"/>
+              </a:spcAft>
+              <a:buClrTx/>
+              <a:buSzTx/>
+              <a:buFontTx/>
+              <a:buNone/>
+              <a:tabLst/>
+              <a:defRPr/>
+            </a:pPr>
+            <a:endParaRPr lang="es-ES" dirty="0"/>
+          </a:p>
+          <a:p>
+            <a:pPr marL="171450" marR="0" lvl="0" indent="-171450" defTabSz="914400" eaLnBrk="1" fontAlgn="auto" latinLnBrk="0" hangingPunct="1">
+              <a:lnSpc>
+                <a:spcPct val="100000"/>
+              </a:lnSpc>
+              <a:spcBef>
+                <a:spcPts val="0"/>
+              </a:spcBef>
+              <a:spcAft>
+                <a:spcPts val="0"/>
+              </a:spcAft>
+              <a:buClrTx/>
+              <a:buSzTx/>
+              <a:buFont typeface="Arial" panose="020B0604020202020204" pitchFamily="34" charset="0"/>
+              <a:buChar char="•"/>
+              <a:tabLst/>
+              <a:defRPr/>
+            </a:pPr>
+            <a:r>
+              <a:rPr lang="es-ES" b="1" dirty="0">
+                <a:solidFill>
+                  <a:srgbClr val="569CD6"/>
+                </a:solidFill>
+                <a:effectLst/>
+                <a:highlight>
+                  <a:srgbClr val="1E1E1E"/>
+                </a:highlight>
+                <a:latin typeface="Dank Mono Regular" panose="00000509000000000000" pitchFamily="50" charset="0"/>
+              </a:rPr>
+              <a:t>JavaScript:</a:t>
+            </a:r>
+            <a:r>
               <a:rPr lang="es-ES" dirty="0"/>
-              <a:t>Si atendemos al peso real que tiene cada ingrediente en la actualidad, la foto cambiaría significativamente.</a:t>
+              <a:t> </a:t>
+            </a:r>
+            <a:r>
+              <a:rPr lang="es-ES" b="0" dirty="0">
+                <a:solidFill>
+                  <a:srgbClr val="D4D4D4"/>
+                </a:solidFill>
+                <a:effectLst/>
+                <a:highlight>
+                  <a:srgbClr val="1E1E1E"/>
+                </a:highlight>
+                <a:latin typeface="Dank Mono Regular" panose="00000509000000000000" pitchFamily="50" charset="0"/>
+              </a:rPr>
+              <a:t>Y aquí es donde entró en juego el lenguaje JavaScript, que fue creado específicamente para complementar o enriquecer páginas y aplicaciones web, de ahí que esté estrechamente vinculado al mundo del frontend. Originalmente era un lenguaje de scripting ligero y por tanto su rol quedó acotado a añadir eventos, interacción con el usuario, peticiones a servidor, etc. Hoy día ha evolucionado tanto que permite añadir cualquier tipo de lógica de propósito general a nuestras aplicaciones. </a:t>
+            </a:r>
+          </a:p>
+          <a:p>
+            <a:pPr marL="171450" marR="0" lvl="0" indent="-171450" defTabSz="914400" eaLnBrk="1" fontAlgn="auto" latinLnBrk="0" hangingPunct="1">
+              <a:lnSpc>
+                <a:spcPct val="100000"/>
+              </a:lnSpc>
+              <a:spcBef>
+                <a:spcPts val="0"/>
+              </a:spcBef>
+              <a:spcAft>
+                <a:spcPts val="0"/>
+              </a:spcAft>
+              <a:buClrTx/>
+              <a:buSzTx/>
+              <a:buFont typeface="Arial" panose="020B0604020202020204" pitchFamily="34" charset="0"/>
+              <a:buChar char="•"/>
+              <a:tabLst/>
+              <a:defRPr/>
+            </a:pPr>
+            <a:endParaRPr lang="es-ES" b="0" dirty="0">
+              <a:solidFill>
+                <a:srgbClr val="D4D4D4"/>
+              </a:solidFill>
+              <a:effectLst/>
+              <a:highlight>
+                <a:srgbClr val="1E1E1E"/>
+              </a:highlight>
+              <a:latin typeface="Dank Mono Regular" panose="00000509000000000000" pitchFamily="50" charset="0"/>
+            </a:endParaRPr>
+          </a:p>
+          <a:p>
+            <a:pPr marL="0" marR="0" lvl="0" indent="0" defTabSz="914400" eaLnBrk="1" fontAlgn="auto" latinLnBrk="0" hangingPunct="1">
+              <a:lnSpc>
+                <a:spcPct val="100000"/>
+              </a:lnSpc>
+              <a:spcBef>
+                <a:spcPts val="0"/>
+              </a:spcBef>
+              <a:spcAft>
+                <a:spcPts val="0"/>
+              </a:spcAft>
+              <a:buClrTx/>
+              <a:buSzTx/>
+              <a:buFont typeface="Arial" panose="020B0604020202020204" pitchFamily="34" charset="0"/>
+              <a:buNone/>
+              <a:tabLst/>
+              <a:defRPr/>
+            </a:pPr>
+            <a:r>
+              <a:rPr lang="es-ES" b="0" dirty="0">
+                <a:solidFill>
+                  <a:srgbClr val="D4D4D4"/>
+                </a:solidFill>
+                <a:effectLst/>
+                <a:highlight>
+                  <a:srgbClr val="1E1E1E"/>
+                </a:highlight>
+                <a:latin typeface="Dank Mono Regular" panose="00000509000000000000" pitchFamily="50" charset="0"/>
+              </a:rPr>
+              <a:t>Tal ha sido su éxito que a día de hoy se ha convertido, </a:t>
+            </a:r>
+            <a:r>
+              <a:rPr lang="es-ES" b="0" i="1" dirty="0">
+                <a:solidFill>
+                  <a:srgbClr val="D4D4D4"/>
+                </a:solidFill>
+                <a:effectLst/>
+                <a:highlight>
+                  <a:srgbClr val="1E1E1E"/>
+                </a:highlight>
+                <a:latin typeface="Dank Mono Regular" panose="00000509000000000000" pitchFamily="50" charset="0"/>
+              </a:rPr>
+              <a:t>_de facto_</a:t>
+            </a:r>
+            <a:r>
+              <a:rPr lang="es-ES" b="0" dirty="0">
+                <a:solidFill>
+                  <a:srgbClr val="D4D4D4"/>
+                </a:solidFill>
+                <a:effectLst/>
+                <a:highlight>
+                  <a:srgbClr val="1E1E1E"/>
+                </a:highlight>
+                <a:latin typeface="Dank Mono Regular" panose="00000509000000000000" pitchFamily="50" charset="0"/>
+              </a:rPr>
+              <a:t>, en el lenguaje de la web, y podemos encontrarlo integrado en todo tipo de dispositivos conectados.</a:t>
             </a:r>
             <a:br>
-              <a:rPr lang="es-ES" dirty="0"/>
+              <a:rPr lang="es-ES" b="0" dirty="0">
+                <a:solidFill>
+                  <a:srgbClr val="D4D4D4"/>
+                </a:solidFill>
+                <a:effectLst/>
+                <a:highlight>
+                  <a:srgbClr val="1E1E1E"/>
+                </a:highlight>
+                <a:latin typeface="Dank Mono Regular" panose="00000509000000000000" pitchFamily="50" charset="0"/>
+              </a:rPr>
             </a:br>
             <a:br>
-              <a:rPr lang="es-ES" dirty="0"/>
+              <a:rPr lang="es-ES" b="0" dirty="0">
+                <a:solidFill>
+                  <a:srgbClr val="D4D4D4"/>
+                </a:solidFill>
+                <a:effectLst/>
+                <a:highlight>
+                  <a:srgbClr val="1E1E1E"/>
+                </a:highlight>
+                <a:latin typeface="Dank Mono Regular" panose="00000509000000000000" pitchFamily="50" charset="0"/>
+              </a:rPr>
             </a:br>
             <a:r>
-              <a:rPr lang="es-ES" dirty="0"/>
-              <a:t>JavaScript, que originalmente vino a cubrir la necesidad de un lenguaje de propósito general para las tareas mas comunes de la web, se ha convertido en el protagonista. Tanto es así, que los </a:t>
-            </a:r>
-            <a:r>
-              <a:rPr lang="es-ES" dirty="0" err="1"/>
-              <a:t>frameworks</a:t>
-            </a:r>
-            <a:r>
-              <a:rPr lang="es-ES" dirty="0"/>
-              <a:t> modernos (basados en JS) para la construcción de aplicaciones web permiten la generación dinámica de contenido (HTML) y estilo (CSS) desde el propio lenguaje JS. Esto es, no necesitamos recurrir a la forma clásica de hacer aplicaciones con páginas físicas (HTML + CSS) reales que una vez cargadas en el Navegador se traducen al DOM (modelo en memoria que representa el documento visible), sino que dicho documento será generado dinámicamente desde el lenguaje JS una vez se ejecute nuestra aplicación, inyectando nodos al DOM y sus reglas de estilo. Es posible hacerlo gracias a la incorporación de sintaxis que permiten simular HTML desde JS (JSX) o reglas de estilo desde JS (</a:t>
-            </a:r>
-            <a:r>
-              <a:rPr lang="es-ES" dirty="0" err="1"/>
-              <a:t>css</a:t>
-            </a:r>
-            <a:r>
-              <a:rPr lang="es-ES" dirty="0"/>
-              <a:t>-</a:t>
-            </a:r>
-            <a:r>
-              <a:rPr lang="es-ES" dirty="0" err="1"/>
-              <a:t>in-js</a:t>
-            </a:r>
-            <a:r>
-              <a:rPr lang="es-ES" dirty="0"/>
-              <a:t>).</a:t>
-            </a:r>
-          </a:p>
-          <a:p>
-            <a:br>
-              <a:rPr lang="es-ES" dirty="0"/>
-            </a:br>
-            <a:r>
-              <a:rPr lang="es-ES" dirty="0"/>
-              <a:t>Se puede decir que JS le ha robado protagonismo a los otros 2 ingredientes, ahora más que nunca.</a:t>
-            </a:r>
+              <a:rPr lang="es-ES" b="0" dirty="0">
+                <a:solidFill>
+                  <a:srgbClr val="D4D4D4"/>
+                </a:solidFill>
+                <a:effectLst/>
+                <a:highlight>
+                  <a:srgbClr val="1E1E1E"/>
+                </a:highlight>
+                <a:latin typeface="Dank Mono Regular" panose="00000509000000000000" pitchFamily="50" charset="0"/>
+              </a:rPr>
+              <a:t>NOTA: En esta </a:t>
+            </a:r>
+            <a:r>
+              <a:rPr lang="es-ES" b="0" dirty="0" err="1">
+                <a:solidFill>
+                  <a:srgbClr val="D4D4D4"/>
+                </a:solidFill>
+                <a:effectLst/>
+                <a:highlight>
+                  <a:srgbClr val="1E1E1E"/>
+                </a:highlight>
+                <a:latin typeface="Dank Mono Regular" panose="00000509000000000000" pitchFamily="50" charset="0"/>
+              </a:rPr>
+              <a:t>slide</a:t>
+            </a:r>
+            <a:r>
+              <a:rPr lang="es-ES" b="0" dirty="0">
+                <a:solidFill>
+                  <a:srgbClr val="D4D4D4"/>
+                </a:solidFill>
+                <a:effectLst/>
+                <a:highlight>
+                  <a:srgbClr val="1E1E1E"/>
+                </a:highlight>
+                <a:latin typeface="Dank Mono Regular" panose="00000509000000000000" pitchFamily="50" charset="0"/>
+              </a:rPr>
+              <a:t> hemos representado la “receta” de la web con sus 3 ingredientes fundamentales. Sin embargo, los hemos pintado de forma proporcional o equitativa: con el mismo tamaño. Esto pudo ser así durante el nacimiento de JS puesto que su misión era apoyar a los otros 2 lenguajes añadiendo capacidades ligeras de scriptings, es decir, permitiendo ejecutar pequeños trozos de código puntualmente para hacer alguna que otra tarea. La realidad es que a medida que maduraban las aplicaciones, lo hacían gracias al enorme crecimiento de JavaScript con respecto a los otros 2. JS ha tomando un gran peso e impacto a la hora de confeccionar aplicaciones web en la actualidad.</a:t>
+            </a:r>
+            <a:endParaRPr lang="es-ES" dirty="0"/>
           </a:p>
         </p:txBody>
       </p:sp>
     </p:spTree>
     <p:extLst>
       <p:ext uri="{BB962C8B-B14F-4D97-AF65-F5344CB8AC3E}">
-        <p14:creationId xmlns:p14="http://schemas.microsoft.com/office/powerpoint/2010/main" val="4064694548"/>
+        <p14:creationId xmlns:p14="http://schemas.microsoft.com/office/powerpoint/2010/main" val="891860792"/>
       </p:ext>
     </p:extLst>
   </p:cSld>
@@ -1330,507 +1350,59 @@
           <a:lstStyle/>
           <a:p>
             <a:r>
-              <a:rPr lang="es-ES" b="0" dirty="0">
-                <a:solidFill>
-                  <a:srgbClr val="D4D4D4"/>
-                </a:solidFill>
-                <a:effectLst/>
-                <a:highlight>
-                  <a:srgbClr val="1E1E1E"/>
-                </a:highlight>
-                <a:latin typeface="Dank Mono Regular" panose="00000509000000000000" pitchFamily="50" charset="0"/>
-              </a:rPr>
-              <a:t>- En los comienzos de internet, </a:t>
-            </a:r>
-            <a:r>
-              <a:rPr lang="es-ES" b="1" dirty="0">
-                <a:solidFill>
-                  <a:srgbClr val="569CD6"/>
-                </a:solidFill>
-                <a:effectLst/>
-                <a:highlight>
-                  <a:srgbClr val="1E1E1E"/>
-                </a:highlight>
-                <a:latin typeface="Dank Mono Regular" panose="00000509000000000000" pitchFamily="50" charset="0"/>
-              </a:rPr>
-              <a:t>Netscape</a:t>
-            </a:r>
-            <a:r>
-              <a:rPr lang="es-ES" b="0" dirty="0">
-                <a:solidFill>
-                  <a:srgbClr val="D4D4D4"/>
-                </a:solidFill>
-                <a:effectLst/>
-                <a:highlight>
-                  <a:srgbClr val="1E1E1E"/>
-                </a:highlight>
-                <a:latin typeface="Dank Mono Regular" panose="00000509000000000000" pitchFamily="50" charset="0"/>
-              </a:rPr>
-              <a:t> aliado con </a:t>
-            </a:r>
-            <a:r>
-              <a:rPr lang="es-ES" b="1" dirty="0" err="1">
-                <a:solidFill>
-                  <a:srgbClr val="569CD6"/>
-                </a:solidFill>
-                <a:effectLst/>
-                <a:highlight>
-                  <a:srgbClr val="1E1E1E"/>
-                </a:highlight>
-                <a:latin typeface="Dank Mono Regular" panose="00000509000000000000" pitchFamily="50" charset="0"/>
-              </a:rPr>
-              <a:t>Sun</a:t>
-            </a:r>
-            <a:r>
-              <a:rPr lang="es-ES" b="1" dirty="0">
-                <a:solidFill>
-                  <a:srgbClr val="569CD6"/>
-                </a:solidFill>
-                <a:effectLst/>
-                <a:highlight>
-                  <a:srgbClr val="1E1E1E"/>
-                </a:highlight>
-                <a:latin typeface="Dank Mono Regular" panose="00000509000000000000" pitchFamily="50" charset="0"/>
-              </a:rPr>
-              <a:t> Microsystems</a:t>
-            </a:r>
-            <a:r>
-              <a:rPr lang="es-ES" b="0" dirty="0">
-                <a:solidFill>
-                  <a:srgbClr val="D4D4D4"/>
-                </a:solidFill>
-                <a:effectLst/>
-                <a:highlight>
-                  <a:srgbClr val="1E1E1E"/>
-                </a:highlight>
-                <a:latin typeface="Dank Mono Regular" panose="00000509000000000000" pitchFamily="50" charset="0"/>
-              </a:rPr>
-              <a:t> competían con </a:t>
-            </a:r>
-            <a:r>
-              <a:rPr lang="es-ES" b="1" dirty="0">
-                <a:solidFill>
-                  <a:srgbClr val="569CD6"/>
-                </a:solidFill>
-                <a:effectLst/>
-                <a:highlight>
-                  <a:srgbClr val="1E1E1E"/>
-                </a:highlight>
-                <a:latin typeface="Dank Mono Regular" panose="00000509000000000000" pitchFamily="50" charset="0"/>
-              </a:rPr>
-              <a:t>Microsoft</a:t>
-            </a:r>
-            <a:r>
-              <a:rPr lang="es-ES" b="0" dirty="0">
-                <a:solidFill>
-                  <a:srgbClr val="D4D4D4"/>
-                </a:solidFill>
-                <a:effectLst/>
-                <a:highlight>
-                  <a:srgbClr val="1E1E1E"/>
-                </a:highlight>
-                <a:latin typeface="Dank Mono Regular" panose="00000509000000000000" pitchFamily="50" charset="0"/>
-              </a:rPr>
-              <a:t> en tecnologías web.</a:t>
+              <a:rPr lang="es-ES" dirty="0"/>
+              <a:t>Si atendemos al peso real que tiene cada ingrediente en la actualidad, la foto cambiaría significativamente.</a:t>
+            </a:r>
+            <a:br>
+              <a:rPr lang="es-ES" dirty="0"/>
+            </a:br>
+            <a:br>
+              <a:rPr lang="es-ES" dirty="0"/>
+            </a:br>
+            <a:r>
+              <a:rPr lang="es-ES" dirty="0"/>
+              <a:t>JavaScript, que originalmente vino a cubrir la necesidad de un lenguaje de propósito general para las tareas mas comunes de la web, se ha convertido en el protagonista. Tanto es así, que los </a:t>
+            </a:r>
+            <a:r>
+              <a:rPr lang="es-ES" dirty="0" err="1"/>
+              <a:t>frameworks</a:t>
+            </a:r>
+            <a:r>
+              <a:rPr lang="es-ES" dirty="0"/>
+              <a:t> modernos (basados en JS) para la construcción de aplicaciones web permiten la generación dinámica de contenido (HTML) y estilo (CSS) desde el propio lenguaje JS. Esto es, no necesitamos recurrir a la forma clásica de hacer aplicaciones con páginas físicas (HTML + CSS) reales que una vez cargadas en el Navegador se traducen al DOM (modelo en memoria que representa el documento visible), sino que dicho documento será generado dinámicamente desde el lenguaje JS una vez se ejecute nuestra aplicación, inyectando nodos al DOM y sus reglas de estilo. Es posible hacerlo gracias a la incorporación de sintaxis que permiten simular HTML desde JS (JSX) o reglas de estilo desde JS (</a:t>
+            </a:r>
+            <a:r>
+              <a:rPr lang="es-ES" dirty="0" err="1"/>
+              <a:t>css</a:t>
+            </a:r>
+            <a:r>
+              <a:rPr lang="es-ES" dirty="0"/>
+              <a:t>-</a:t>
+            </a:r>
+            <a:r>
+              <a:rPr lang="es-ES" dirty="0" err="1"/>
+              <a:t>in-js</a:t>
+            </a:r>
+            <a:r>
+              <a:rPr lang="es-ES" dirty="0"/>
+              <a:t>).</a:t>
             </a:r>
           </a:p>
           <a:p>
-            <a:r>
-              <a:rPr lang="es-ES" b="0" dirty="0">
-                <a:solidFill>
-                  <a:srgbClr val="D4D4D4"/>
-                </a:solidFill>
-                <a:effectLst/>
-                <a:highlight>
-                  <a:srgbClr val="1E1E1E"/>
-                </a:highlight>
-                <a:latin typeface="Dank Mono Regular" panose="00000509000000000000" pitchFamily="50" charset="0"/>
-              </a:rPr>
-              <a:t>- Se necesitaba un lenguaje de scripting ligero para dotar de comportamiento a las páginas web, hasta ahora simples documentos de texto, y convertirlas en aplicaciones ricas, completas, capaces de resolver problemas de propósito general. Quedaros con la palabra “script” que estaba de moda en aquella época, pues daba la sensación de potencia y ligereza a la vez.</a:t>
-            </a:r>
-          </a:p>
-          <a:p>
-            <a:r>
-              <a:rPr lang="es-ES" b="0" dirty="0">
-                <a:solidFill>
-                  <a:srgbClr val="D4D4D4"/>
-                </a:solidFill>
-                <a:effectLst/>
-                <a:highlight>
-                  <a:srgbClr val="1E1E1E"/>
-                </a:highlight>
-                <a:latin typeface="Dank Mono Regular" panose="00000509000000000000" pitchFamily="50" charset="0"/>
-              </a:rPr>
-              <a:t>- También estaba de moda Java, era el rey de la escena, pero se desechó la idea de utilizarlo. </a:t>
-            </a:r>
-            <a:r>
-              <a:rPr lang="es-ES" b="1" dirty="0">
-                <a:solidFill>
-                  <a:srgbClr val="569CD6"/>
-                </a:solidFill>
-                <a:effectLst/>
-                <a:highlight>
-                  <a:srgbClr val="1E1E1E"/>
-                </a:highlight>
-                <a:latin typeface="Dank Mono Regular" panose="00000509000000000000" pitchFamily="50" charset="0"/>
-              </a:rPr>
-              <a:t>Brendan </a:t>
-            </a:r>
-            <a:r>
-              <a:rPr lang="es-ES" b="1" dirty="0" err="1">
-                <a:solidFill>
-                  <a:srgbClr val="569CD6"/>
-                </a:solidFill>
-                <a:effectLst/>
-                <a:highlight>
-                  <a:srgbClr val="1E1E1E"/>
-                </a:highlight>
-                <a:latin typeface="Dank Mono Regular" panose="00000509000000000000" pitchFamily="50" charset="0"/>
-              </a:rPr>
-              <a:t>Eich</a:t>
-            </a:r>
-            <a:r>
-              <a:rPr lang="es-ES" b="0" dirty="0">
-                <a:solidFill>
-                  <a:srgbClr val="D4D4D4"/>
-                </a:solidFill>
-                <a:effectLst/>
-                <a:highlight>
-                  <a:srgbClr val="1E1E1E"/>
-                </a:highlight>
-                <a:latin typeface="Dank Mono Regular" panose="00000509000000000000" pitchFamily="50" charset="0"/>
-              </a:rPr>
-              <a:t> fue contratado para desarrollar el prototipo de este lenguaje, para lo que tardó </a:t>
-            </a:r>
-            <a:r>
-              <a:rPr lang="es-ES" b="1" dirty="0">
-                <a:solidFill>
-                  <a:srgbClr val="569CD6"/>
-                </a:solidFill>
-                <a:effectLst/>
-                <a:highlight>
-                  <a:srgbClr val="1E1E1E"/>
-                </a:highlight>
-                <a:latin typeface="Dank Mono Regular" panose="00000509000000000000" pitchFamily="50" charset="0"/>
-              </a:rPr>
-              <a:t>10 días</a:t>
-            </a:r>
-            <a:r>
-              <a:rPr lang="es-ES" b="0" dirty="0">
-                <a:solidFill>
-                  <a:srgbClr val="D4D4D4"/>
-                </a:solidFill>
-                <a:effectLst/>
-                <a:highlight>
-                  <a:srgbClr val="1E1E1E"/>
-                </a:highlight>
-                <a:latin typeface="Dank Mono Regular" panose="00000509000000000000" pitchFamily="50" charset="0"/>
-              </a:rPr>
-              <a:t>. Era 1995.</a:t>
-            </a:r>
-          </a:p>
-          <a:p>
-            <a:r>
-              <a:rPr lang="es-ES" b="0" dirty="0">
-                <a:solidFill>
-                  <a:srgbClr val="D4D4D4"/>
-                </a:solidFill>
-                <a:effectLst/>
-                <a:highlight>
-                  <a:srgbClr val="1E1E1E"/>
-                </a:highlight>
-                <a:latin typeface="Dank Mono Regular" panose="00000509000000000000" pitchFamily="50" charset="0"/>
-              </a:rPr>
-              <a:t>- Como casi siempre ocurre con los prototipos, se convirtió mágicamente en producto final por falta de tiempo para probarlo y experimentar con el.</a:t>
-            </a:r>
-          </a:p>
-          <a:p>
-            <a:r>
-              <a:rPr lang="es-ES" b="0" dirty="0">
-                <a:solidFill>
-                  <a:srgbClr val="D4D4D4"/>
-                </a:solidFill>
-                <a:effectLst/>
-                <a:highlight>
-                  <a:srgbClr val="1E1E1E"/>
-                </a:highlight>
-                <a:latin typeface="Dank Mono Regular" panose="00000509000000000000" pitchFamily="50" charset="0"/>
-              </a:rPr>
-              <a:t>- Su nombre en clave era </a:t>
-            </a:r>
-            <a:r>
-              <a:rPr lang="es-ES" b="0" i="1" dirty="0">
-                <a:solidFill>
-                  <a:srgbClr val="D4D4D4"/>
-                </a:solidFill>
-                <a:effectLst/>
-                <a:highlight>
-                  <a:srgbClr val="1E1E1E"/>
-                </a:highlight>
-                <a:latin typeface="Dank Mono Regular" panose="00000509000000000000" pitchFamily="50" charset="0"/>
-              </a:rPr>
-              <a:t>Mocha</a:t>
-            </a:r>
-            <a:r>
-              <a:rPr lang="es-ES" b="0" dirty="0">
-                <a:solidFill>
-                  <a:srgbClr val="D4D4D4"/>
-                </a:solidFill>
-                <a:effectLst/>
-                <a:highlight>
-                  <a:srgbClr val="1E1E1E"/>
-                </a:highlight>
-                <a:latin typeface="Dank Mono Regular" panose="00000509000000000000" pitchFamily="50" charset="0"/>
-              </a:rPr>
-              <a:t>, mientras que oficialmente se le bautizó como </a:t>
-            </a:r>
-            <a:r>
-              <a:rPr lang="es-ES" b="0" i="1" dirty="0" err="1">
-                <a:solidFill>
-                  <a:srgbClr val="D4D4D4"/>
-                </a:solidFill>
-                <a:effectLst/>
-                <a:highlight>
-                  <a:srgbClr val="1E1E1E"/>
-                </a:highlight>
-                <a:latin typeface="Dank Mono Regular" panose="00000509000000000000" pitchFamily="50" charset="0"/>
-              </a:rPr>
-              <a:t>LiveScript</a:t>
-            </a:r>
-            <a:r>
-              <a:rPr lang="es-ES" b="0" dirty="0">
-                <a:solidFill>
-                  <a:srgbClr val="D4D4D4"/>
-                </a:solidFill>
-                <a:effectLst/>
-                <a:highlight>
-                  <a:srgbClr val="1E1E1E"/>
-                </a:highlight>
-                <a:latin typeface="Dank Mono Regular" panose="00000509000000000000" pitchFamily="50" charset="0"/>
-              </a:rPr>
-              <a:t>. Pero poco más tarde, por ganar tracción con al popularidad de Java, se le rebautizó como </a:t>
-            </a:r>
-            <a:r>
-              <a:rPr lang="es-ES" b="1" dirty="0">
-                <a:solidFill>
-                  <a:srgbClr val="569CD6"/>
-                </a:solidFill>
-                <a:effectLst/>
-                <a:highlight>
-                  <a:srgbClr val="1E1E1E"/>
-                </a:highlight>
-                <a:latin typeface="Dank Mono Regular" panose="00000509000000000000" pitchFamily="50" charset="0"/>
-              </a:rPr>
-              <a:t>JavaScript</a:t>
-            </a:r>
-            <a:r>
-              <a:rPr lang="es-ES" b="0" dirty="0">
-                <a:solidFill>
-                  <a:srgbClr val="D4D4D4"/>
-                </a:solidFill>
-                <a:effectLst/>
-                <a:highlight>
-                  <a:srgbClr val="1E1E1E"/>
-                </a:highlight>
-                <a:latin typeface="Dank Mono Regular" panose="00000509000000000000" pitchFamily="50" charset="0"/>
-              </a:rPr>
-              <a:t>. Si bien su sintaxis se parece a la de Java (que a su vez se inspira en C) no tiene nada que ver con este lenguaje.</a:t>
-            </a:r>
-          </a:p>
-          <a:p>
-            <a:pPr marL="0" marR="0" lvl="0" indent="0" defTabSz="914400" eaLnBrk="1" fontAlgn="auto" latinLnBrk="0" hangingPunct="1">
-              <a:lnSpc>
-                <a:spcPct val="100000"/>
-              </a:lnSpc>
-              <a:spcBef>
-                <a:spcPts val="0"/>
-              </a:spcBef>
-              <a:spcAft>
-                <a:spcPts val="0"/>
-              </a:spcAft>
-              <a:buClrTx/>
-              <a:buSzTx/>
-              <a:buFontTx/>
-              <a:buNone/>
-              <a:tabLst/>
-              <a:defRPr/>
-            </a:pPr>
-            <a:r>
-              <a:rPr lang="es-ES" b="0" dirty="0">
-                <a:solidFill>
-                  <a:srgbClr val="D4D4D4"/>
-                </a:solidFill>
-                <a:effectLst/>
-                <a:highlight>
-                  <a:srgbClr val="1E1E1E"/>
-                </a:highlight>
-                <a:latin typeface="Dank Mono Regular" panose="00000509000000000000" pitchFamily="50" charset="0"/>
-              </a:rPr>
-              <a:t>- En 1996 su máximo competidor, Microsoft, decide unirse al enemigo y acaba adoptándolo, marcando así el comienzo de la gran popularidad de este lenguaje que finalmente fue estandarizado en 1997 por la organización ECMA International con el nombre técnico de </a:t>
-            </a:r>
-            <a:r>
-              <a:rPr lang="es-ES" b="1" dirty="0">
-                <a:solidFill>
-                  <a:srgbClr val="569CD6"/>
-                </a:solidFill>
-                <a:effectLst/>
-                <a:highlight>
-                  <a:srgbClr val="1E1E1E"/>
-                </a:highlight>
-                <a:latin typeface="Dank Mono Regular" panose="00000509000000000000" pitchFamily="50" charset="0"/>
-              </a:rPr>
-              <a:t>ECMAScript</a:t>
-            </a:r>
-            <a:r>
-              <a:rPr lang="es-ES" b="0" dirty="0">
-                <a:solidFill>
-                  <a:srgbClr val="D4D4D4"/>
-                </a:solidFill>
-                <a:effectLst/>
-                <a:highlight>
-                  <a:srgbClr val="1E1E1E"/>
-                </a:highlight>
-                <a:latin typeface="Dank Mono Regular" panose="00000509000000000000" pitchFamily="50" charset="0"/>
-              </a:rPr>
-              <a:t>. (ECMA = </a:t>
-            </a:r>
-            <a:r>
-              <a:rPr lang="es-ES" b="0" dirty="0" err="1">
-                <a:solidFill>
-                  <a:srgbClr val="D4D4D4"/>
-                </a:solidFill>
-                <a:effectLst/>
-                <a:highlight>
-                  <a:srgbClr val="1E1E1E"/>
-                </a:highlight>
-                <a:latin typeface="Dank Mono Regular" panose="00000509000000000000" pitchFamily="50" charset="0"/>
-              </a:rPr>
-              <a:t>European</a:t>
-            </a:r>
-            <a:r>
-              <a:rPr lang="es-ES" b="0" dirty="0">
-                <a:solidFill>
-                  <a:srgbClr val="D4D4D4"/>
-                </a:solidFill>
-                <a:effectLst/>
-                <a:highlight>
-                  <a:srgbClr val="1E1E1E"/>
-                </a:highlight>
-                <a:latin typeface="Dank Mono Regular" panose="00000509000000000000" pitchFamily="50" charset="0"/>
-              </a:rPr>
-              <a:t> </a:t>
-            </a:r>
-            <a:r>
-              <a:rPr lang="es-ES" b="0" dirty="0" err="1">
-                <a:solidFill>
-                  <a:srgbClr val="D4D4D4"/>
-                </a:solidFill>
-                <a:effectLst/>
-                <a:highlight>
-                  <a:srgbClr val="1E1E1E"/>
-                </a:highlight>
-                <a:latin typeface="Dank Mono Regular" panose="00000509000000000000" pitchFamily="50" charset="0"/>
-              </a:rPr>
-              <a:t>Computer</a:t>
-            </a:r>
-            <a:r>
-              <a:rPr lang="es-ES" b="0" dirty="0">
-                <a:solidFill>
-                  <a:srgbClr val="D4D4D4"/>
-                </a:solidFill>
-                <a:effectLst/>
-                <a:highlight>
-                  <a:srgbClr val="1E1E1E"/>
-                </a:highlight>
-                <a:latin typeface="Dank Mono Regular" panose="00000509000000000000" pitchFamily="50" charset="0"/>
-              </a:rPr>
-              <a:t> Manufacture </a:t>
-            </a:r>
-            <a:r>
-              <a:rPr lang="es-ES" b="0" dirty="0" err="1">
-                <a:solidFill>
-                  <a:srgbClr val="D4D4D4"/>
-                </a:solidFill>
-                <a:effectLst/>
-                <a:highlight>
-                  <a:srgbClr val="1E1E1E"/>
-                </a:highlight>
-                <a:latin typeface="Dank Mono Regular" panose="00000509000000000000" pitchFamily="50" charset="0"/>
-              </a:rPr>
-              <a:t>Association</a:t>
-            </a:r>
-            <a:r>
-              <a:rPr lang="es-ES" b="0" dirty="0">
-                <a:solidFill>
-                  <a:srgbClr val="D4D4D4"/>
-                </a:solidFill>
-                <a:effectLst/>
-                <a:highlight>
-                  <a:srgbClr val="1E1E1E"/>
-                </a:highlight>
-                <a:latin typeface="Dank Mono Regular" panose="00000509000000000000" pitchFamily="50" charset="0"/>
-              </a:rPr>
-              <a:t>, si bien empezó siendo una asociación de fabricantes europeos de ordenadores, a día de hoy es una institución que estandariza procesos, lenguajes y demás elementos relacionados con IT).</a:t>
-            </a:r>
             <a:br>
-              <a:rPr lang="es-ES" b="0" dirty="0">
-                <a:solidFill>
-                  <a:srgbClr val="D4D4D4"/>
-                </a:solidFill>
-                <a:effectLst/>
-                <a:highlight>
-                  <a:srgbClr val="1E1E1E"/>
-                </a:highlight>
-                <a:latin typeface="Dank Mono Regular" panose="00000509000000000000" pitchFamily="50" charset="0"/>
-              </a:rPr>
+              <a:rPr lang="es-ES" dirty="0"/>
             </a:br>
-            <a:br>
-              <a:rPr lang="es-ES" b="0" dirty="0">
-                <a:solidFill>
-                  <a:srgbClr val="D4D4D4"/>
-                </a:solidFill>
-                <a:effectLst/>
-                <a:highlight>
-                  <a:srgbClr val="1E1E1E"/>
-                </a:highlight>
-                <a:latin typeface="Dank Mono Regular" panose="00000509000000000000" pitchFamily="50" charset="0"/>
-              </a:rPr>
-            </a:br>
-            <a:r>
-              <a:rPr lang="es-ES" b="0" dirty="0">
-                <a:solidFill>
-                  <a:srgbClr val="D4D4D4"/>
-                </a:solidFill>
-                <a:effectLst/>
-                <a:highlight>
-                  <a:srgbClr val="1E1E1E"/>
-                </a:highlight>
-                <a:latin typeface="Dank Mono Regular" panose="00000509000000000000" pitchFamily="50" charset="0"/>
-              </a:rPr>
-              <a:t>A día de hoy es habitual llamar a este lenguaje con su nombre oficial JavaScript (abreviado como JS), o su nombre técnico ECMAScript (abreviado como ES).</a:t>
-            </a:r>
-          </a:p>
-          <a:p>
-            <a:endParaRPr lang="es-ES" b="0" u="sng" dirty="0">
-              <a:solidFill>
-                <a:srgbClr val="D4D4D4"/>
-              </a:solidFill>
-              <a:effectLst/>
-              <a:highlight>
-                <a:srgbClr val="1E1E1E"/>
-              </a:highlight>
-              <a:latin typeface="Dank Mono Regular" panose="00000509000000000000" pitchFamily="50" charset="0"/>
-            </a:endParaRPr>
-          </a:p>
-          <a:p>
-            <a:endParaRPr lang="es-ES" dirty="0"/>
+            <a:r>
+              <a:rPr lang="es-ES" dirty="0"/>
+              <a:t>Se puede decir que JS le ha robado protagonismo a los otros 2 ingredientes, ahora más que nunca.</a:t>
+            </a:r>
           </a:p>
         </p:txBody>
       </p:sp>
     </p:spTree>
     <p:extLst>
       <p:ext uri="{BB962C8B-B14F-4D97-AF65-F5344CB8AC3E}">
-        <p14:creationId xmlns:p14="http://schemas.microsoft.com/office/powerpoint/2010/main" val="3432464847"/>
+        <p14:creationId xmlns:p14="http://schemas.microsoft.com/office/powerpoint/2010/main" val="4064694548"/>
       </p:ext>
     </p:extLst>
   </p:cSld>
@@ -1900,7 +1472,7 @@
                 </a:highlight>
                 <a:latin typeface="Dank Mono Regular" panose="00000509000000000000" pitchFamily="50" charset="0"/>
               </a:rPr>
-              <a:t>- </a:t>
+              <a:t>- En los comienzos de internet, </a:t>
             </a:r>
             <a:r>
               <a:rPr lang="es-ES" b="1" dirty="0">
@@ -1913,7 +1485,7 @@
                 </a:highlight>
                 <a:latin typeface="Dank Mono Regular" panose="00000509000000000000" pitchFamily="50" charset="0"/>
               </a:rPr>
-              <a:t>Multiparadigma</a:t>
+              <a:t>Netscape</a:t>
             </a:r>
             <a:r>
               <a:rPr lang="es-ES" b="0" dirty="0">
@@ -1926,10 +1498,464 @@
                 </a:highlight>
                 <a:latin typeface="Dank Mono Regular" panose="00000509000000000000" pitchFamily="50" charset="0"/>
               </a:rPr>
-              <a:t>. Si bien JS se considera un lenguaje orientado a prototipos, soporta diferentes paradigmas. Esto significa que podemos adoptar distintos enfoques de entre los más habituales en el mundo de la programación, como por ejemplo:</a:t>
+              <a:t> aliado con </a:t>
+            </a:r>
+            <a:r>
+              <a:rPr lang="es-ES" b="1" dirty="0" err="1">
+                <a:solidFill>
+                  <a:srgbClr val="569CD6"/>
+                </a:solidFill>
+                <a:effectLst/>
+                <a:highlight>
+                  <a:srgbClr val="1E1E1E"/>
+                </a:highlight>
+                <a:latin typeface="Dank Mono Regular" panose="00000509000000000000" pitchFamily="50" charset="0"/>
+              </a:rPr>
+              <a:t>Sun</a:t>
+            </a:r>
+            <a:r>
+              <a:rPr lang="es-ES" b="1" dirty="0">
+                <a:solidFill>
+                  <a:srgbClr val="569CD6"/>
+                </a:solidFill>
+                <a:effectLst/>
+                <a:highlight>
+                  <a:srgbClr val="1E1E1E"/>
+                </a:highlight>
+                <a:latin typeface="Dank Mono Regular" panose="00000509000000000000" pitchFamily="50" charset="0"/>
+              </a:rPr>
+              <a:t> Microsystems</a:t>
+            </a:r>
+            <a:r>
+              <a:rPr lang="es-ES" b="0" dirty="0">
+                <a:solidFill>
+                  <a:srgbClr val="D4D4D4"/>
+                </a:solidFill>
+                <a:effectLst/>
+                <a:highlight>
+                  <a:srgbClr val="1E1E1E"/>
+                </a:highlight>
+                <a:latin typeface="Dank Mono Regular" panose="00000509000000000000" pitchFamily="50" charset="0"/>
+              </a:rPr>
+              <a:t> competían con </a:t>
+            </a:r>
+            <a:r>
+              <a:rPr lang="es-ES" b="1" dirty="0">
+                <a:solidFill>
+                  <a:srgbClr val="569CD6"/>
+                </a:solidFill>
+                <a:effectLst/>
+                <a:highlight>
+                  <a:srgbClr val="1E1E1E"/>
+                </a:highlight>
+                <a:latin typeface="Dank Mono Regular" panose="00000509000000000000" pitchFamily="50" charset="0"/>
+              </a:rPr>
+              <a:t>Microsoft</a:t>
+            </a:r>
+            <a:r>
+              <a:rPr lang="es-ES" b="0" dirty="0">
+                <a:solidFill>
+                  <a:srgbClr val="D4D4D4"/>
+                </a:solidFill>
+                <a:effectLst/>
+                <a:highlight>
+                  <a:srgbClr val="1E1E1E"/>
+                </a:highlight>
+                <a:latin typeface="Dank Mono Regular" panose="00000509000000000000" pitchFamily="50" charset="0"/>
+              </a:rPr>
+              <a:t> en tecnologías web.</a:t>
             </a:r>
           </a:p>
           <a:p>
+            <a:r>
+              <a:rPr lang="es-ES" b="0" dirty="0">
+                <a:solidFill>
+                  <a:srgbClr val="D4D4D4"/>
+                </a:solidFill>
+                <a:effectLst/>
+                <a:highlight>
+                  <a:srgbClr val="1E1E1E"/>
+                </a:highlight>
+                <a:latin typeface="Dank Mono Regular" panose="00000509000000000000" pitchFamily="50" charset="0"/>
+              </a:rPr>
+              <a:t>- Se necesitaba un lenguaje de scripting ligero para dotar de comportamiento a las páginas web, hasta ahora simples documentos de texto, y convertirlas en aplicaciones ricas, completas, capaces de resolver problemas de propósito general. Quedaros con la palabra “script” que estaba de moda en aquella época, pues daba la sensación de potencia y ligereza a la vez.</a:t>
+            </a:r>
+          </a:p>
+          <a:p>
+            <a:r>
+              <a:rPr lang="es-ES" b="0" dirty="0">
+                <a:solidFill>
+                  <a:srgbClr val="D4D4D4"/>
+                </a:solidFill>
+                <a:effectLst/>
+                <a:highlight>
+                  <a:srgbClr val="1E1E1E"/>
+                </a:highlight>
+                <a:latin typeface="Dank Mono Regular" panose="00000509000000000000" pitchFamily="50" charset="0"/>
+              </a:rPr>
+              <a:t>- También estaba de moda Java, era el rey de la escena ya además ya estaba en el navegador </a:t>
+            </a:r>
+            <a:r>
+              <a:rPr lang="es-ES" b="0" dirty="0" err="1">
+                <a:solidFill>
+                  <a:srgbClr val="D4D4D4"/>
+                </a:solidFill>
+                <a:effectLst/>
+                <a:highlight>
+                  <a:srgbClr val="1E1E1E"/>
+                </a:highlight>
+                <a:latin typeface="Dank Mono Regular" panose="00000509000000000000" pitchFamily="50" charset="0"/>
+              </a:rPr>
+              <a:t>via</a:t>
+            </a:r>
+            <a:r>
+              <a:rPr lang="es-ES" b="0" dirty="0">
+                <a:solidFill>
+                  <a:srgbClr val="D4D4D4"/>
+                </a:solidFill>
+                <a:effectLst/>
+                <a:highlight>
+                  <a:srgbClr val="1E1E1E"/>
+                </a:highlight>
+                <a:latin typeface="Dank Mono Regular" panose="00000509000000000000" pitchFamily="50" charset="0"/>
+              </a:rPr>
+              <a:t> applets, pero se desechó la idea de utilizarlo. Se pensó mas bien en un lenguaje complementario a Java, algo tipo ‘lite’. </a:t>
+            </a:r>
+            <a:r>
+              <a:rPr lang="es-ES" b="1" dirty="0">
+                <a:solidFill>
+                  <a:srgbClr val="569CD6"/>
+                </a:solidFill>
+                <a:effectLst/>
+                <a:highlight>
+                  <a:srgbClr val="1E1E1E"/>
+                </a:highlight>
+                <a:latin typeface="Dank Mono Regular" panose="00000509000000000000" pitchFamily="50" charset="0"/>
+              </a:rPr>
+              <a:t>Brendan </a:t>
+            </a:r>
+            <a:r>
+              <a:rPr lang="es-ES" b="1" dirty="0" err="1">
+                <a:solidFill>
+                  <a:srgbClr val="569CD6"/>
+                </a:solidFill>
+                <a:effectLst/>
+                <a:highlight>
+                  <a:srgbClr val="1E1E1E"/>
+                </a:highlight>
+                <a:latin typeface="Dank Mono Regular" panose="00000509000000000000" pitchFamily="50" charset="0"/>
+              </a:rPr>
+              <a:t>Eich</a:t>
+            </a:r>
+            <a:r>
+              <a:rPr lang="es-ES" b="0" dirty="0">
+                <a:solidFill>
+                  <a:srgbClr val="D4D4D4"/>
+                </a:solidFill>
+                <a:effectLst/>
+                <a:highlight>
+                  <a:srgbClr val="1E1E1E"/>
+                </a:highlight>
+                <a:latin typeface="Dank Mono Regular" panose="00000509000000000000" pitchFamily="50" charset="0"/>
+              </a:rPr>
+              <a:t> fue contratado para desarrollar el prototipo de este lenguaje, para lo que tardó </a:t>
+            </a:r>
+            <a:r>
+              <a:rPr lang="es-ES" b="1" dirty="0">
+                <a:solidFill>
+                  <a:srgbClr val="569CD6"/>
+                </a:solidFill>
+                <a:effectLst/>
+                <a:highlight>
+                  <a:srgbClr val="1E1E1E"/>
+                </a:highlight>
+                <a:latin typeface="Dank Mono Regular" panose="00000509000000000000" pitchFamily="50" charset="0"/>
+              </a:rPr>
+              <a:t>10 días</a:t>
+            </a:r>
+            <a:r>
+              <a:rPr lang="es-ES" b="0" dirty="0">
+                <a:solidFill>
+                  <a:srgbClr val="D4D4D4"/>
+                </a:solidFill>
+                <a:effectLst/>
+                <a:highlight>
+                  <a:srgbClr val="1E1E1E"/>
+                </a:highlight>
+                <a:latin typeface="Dank Mono Regular" panose="00000509000000000000" pitchFamily="50" charset="0"/>
+              </a:rPr>
+              <a:t>. Era 1995.</a:t>
+            </a:r>
+          </a:p>
+          <a:p>
+            <a:r>
+              <a:rPr lang="es-ES" b="0" dirty="0">
+                <a:solidFill>
+                  <a:srgbClr val="D4D4D4"/>
+                </a:solidFill>
+                <a:effectLst/>
+                <a:highlight>
+                  <a:srgbClr val="1E1E1E"/>
+                </a:highlight>
+                <a:latin typeface="Dank Mono Regular" panose="00000509000000000000" pitchFamily="50" charset="0"/>
+              </a:rPr>
+              <a:t>- Como casi siempre ocurre con los prototipos, se convirtió mágicamente en producto final por falta de tiempo para probarlo y experimentar con el.</a:t>
+            </a:r>
+          </a:p>
+          <a:p>
+            <a:r>
+              <a:rPr lang="es-ES" b="0" dirty="0">
+                <a:solidFill>
+                  <a:srgbClr val="D4D4D4"/>
+                </a:solidFill>
+                <a:effectLst/>
+                <a:highlight>
+                  <a:srgbClr val="1E1E1E"/>
+                </a:highlight>
+                <a:latin typeface="Dank Mono Regular" panose="00000509000000000000" pitchFamily="50" charset="0"/>
+              </a:rPr>
+              <a:t>- Su nombre en clave era </a:t>
+            </a:r>
+            <a:r>
+              <a:rPr lang="es-ES" b="0" i="1" dirty="0">
+                <a:solidFill>
+                  <a:srgbClr val="D4D4D4"/>
+                </a:solidFill>
+                <a:effectLst/>
+                <a:highlight>
+                  <a:srgbClr val="1E1E1E"/>
+                </a:highlight>
+                <a:latin typeface="Dank Mono Regular" panose="00000509000000000000" pitchFamily="50" charset="0"/>
+              </a:rPr>
+              <a:t>Mocha</a:t>
+            </a:r>
+            <a:r>
+              <a:rPr lang="es-ES" b="0" dirty="0">
+                <a:solidFill>
+                  <a:srgbClr val="D4D4D4"/>
+                </a:solidFill>
+                <a:effectLst/>
+                <a:highlight>
+                  <a:srgbClr val="1E1E1E"/>
+                </a:highlight>
+                <a:latin typeface="Dank Mono Regular" panose="00000509000000000000" pitchFamily="50" charset="0"/>
+              </a:rPr>
+              <a:t>, mientras que oficialmente se le bautizó como </a:t>
+            </a:r>
+            <a:r>
+              <a:rPr lang="es-ES" b="0" i="1" dirty="0" err="1">
+                <a:solidFill>
+                  <a:srgbClr val="D4D4D4"/>
+                </a:solidFill>
+                <a:effectLst/>
+                <a:highlight>
+                  <a:srgbClr val="1E1E1E"/>
+                </a:highlight>
+                <a:latin typeface="Dank Mono Regular" panose="00000509000000000000" pitchFamily="50" charset="0"/>
+              </a:rPr>
+              <a:t>LiveScript</a:t>
+            </a:r>
+            <a:r>
+              <a:rPr lang="es-ES" b="0" dirty="0">
+                <a:solidFill>
+                  <a:srgbClr val="D4D4D4"/>
+                </a:solidFill>
+                <a:effectLst/>
+                <a:highlight>
+                  <a:srgbClr val="1E1E1E"/>
+                </a:highlight>
+                <a:latin typeface="Dank Mono Regular" panose="00000509000000000000" pitchFamily="50" charset="0"/>
+              </a:rPr>
+              <a:t>. Pero poco más tarde, por ganar tracción con al popularidad de Java, se le rebautizó como </a:t>
+            </a:r>
+            <a:r>
+              <a:rPr lang="es-ES" b="1" dirty="0">
+                <a:solidFill>
+                  <a:srgbClr val="569CD6"/>
+                </a:solidFill>
+                <a:effectLst/>
+                <a:highlight>
+                  <a:srgbClr val="1E1E1E"/>
+                </a:highlight>
+                <a:latin typeface="Dank Mono Regular" panose="00000509000000000000" pitchFamily="50" charset="0"/>
+              </a:rPr>
+              <a:t>JavaScript</a:t>
+            </a:r>
+            <a:r>
+              <a:rPr lang="es-ES" b="0" dirty="0">
+                <a:solidFill>
+                  <a:srgbClr val="D4D4D4"/>
+                </a:solidFill>
+                <a:effectLst/>
+                <a:highlight>
+                  <a:srgbClr val="1E1E1E"/>
+                </a:highlight>
+                <a:latin typeface="Dank Mono Regular" panose="00000509000000000000" pitchFamily="50" charset="0"/>
+              </a:rPr>
+              <a:t>. Si bien su sintaxis se parece a la de Java (que a su vez se inspira en C) no tiene nada que ver con este lenguaje.</a:t>
+            </a:r>
+          </a:p>
+          <a:p>
+            <a:pPr marL="0" marR="0" lvl="0" indent="0" defTabSz="914400" eaLnBrk="1" fontAlgn="auto" latinLnBrk="0" hangingPunct="1">
+              <a:lnSpc>
+                <a:spcPct val="100000"/>
+              </a:lnSpc>
+              <a:spcBef>
+                <a:spcPts val="0"/>
+              </a:spcBef>
+              <a:spcAft>
+                <a:spcPts val="0"/>
+              </a:spcAft>
+              <a:buClrTx/>
+              <a:buSzTx/>
+              <a:buFontTx/>
+              <a:buNone/>
+              <a:tabLst/>
+              <a:defRPr/>
+            </a:pPr>
+            <a:r>
+              <a:rPr lang="es-ES" b="0" dirty="0">
+                <a:solidFill>
+                  <a:srgbClr val="D4D4D4"/>
+                </a:solidFill>
+                <a:effectLst/>
+                <a:highlight>
+                  <a:srgbClr val="1E1E1E"/>
+                </a:highlight>
+                <a:latin typeface="Dank Mono Regular" panose="00000509000000000000" pitchFamily="50" charset="0"/>
+              </a:rPr>
+              <a:t>- En 1996 su máximo competidor, Microsoft, hizo ingeniería inversa de JavaScript para evitar la marca registrada y crea su propia implementación llamada </a:t>
+            </a:r>
+            <a:r>
+              <a:rPr lang="es-ES" b="0" dirty="0" err="1">
+                <a:solidFill>
+                  <a:srgbClr val="D4D4D4"/>
+                </a:solidFill>
+                <a:effectLst/>
+                <a:highlight>
+                  <a:srgbClr val="1E1E1E"/>
+                </a:highlight>
+                <a:latin typeface="Dank Mono Regular" panose="00000509000000000000" pitchFamily="50" charset="0"/>
+              </a:rPr>
+              <a:t>Jscript</a:t>
+            </a:r>
+            <a:r>
+              <a:rPr lang="es-ES" b="0" dirty="0">
+                <a:solidFill>
+                  <a:srgbClr val="D4D4D4"/>
+                </a:solidFill>
+                <a:effectLst/>
+                <a:highlight>
+                  <a:srgbClr val="1E1E1E"/>
+                </a:highlight>
+                <a:latin typeface="Dank Mono Regular" panose="00000509000000000000" pitchFamily="50" charset="0"/>
+              </a:rPr>
+              <a:t>. Sin embargo, no lo hicieron muy bien, y las incompatibilidades entre ambas implementaciones hicieron que finalmente se estandarizara una única implementación en 1997, marcando así el comienzo de la gran popularidad de este lenguaje. Fue la organización ECMA International la encargada del estándar, con el nombre técnico de </a:t>
+            </a:r>
+            <a:r>
+              <a:rPr lang="es-ES" b="1" dirty="0">
+                <a:solidFill>
+                  <a:srgbClr val="569CD6"/>
+                </a:solidFill>
+                <a:effectLst/>
+                <a:highlight>
+                  <a:srgbClr val="1E1E1E"/>
+                </a:highlight>
+                <a:latin typeface="Dank Mono Regular" panose="00000509000000000000" pitchFamily="50" charset="0"/>
+              </a:rPr>
+              <a:t>ECMAScript</a:t>
+            </a:r>
+            <a:r>
+              <a:rPr lang="es-ES" b="0" dirty="0">
+                <a:solidFill>
+                  <a:srgbClr val="D4D4D4"/>
+                </a:solidFill>
+                <a:effectLst/>
+                <a:highlight>
+                  <a:srgbClr val="1E1E1E"/>
+                </a:highlight>
+                <a:latin typeface="Dank Mono Regular" panose="00000509000000000000" pitchFamily="50" charset="0"/>
+              </a:rPr>
+              <a:t>. (ECMA = </a:t>
+            </a:r>
+            <a:r>
+              <a:rPr lang="es-ES" b="0" dirty="0" err="1">
+                <a:solidFill>
+                  <a:srgbClr val="D4D4D4"/>
+                </a:solidFill>
+                <a:effectLst/>
+                <a:highlight>
+                  <a:srgbClr val="1E1E1E"/>
+                </a:highlight>
+                <a:latin typeface="Dank Mono Regular" panose="00000509000000000000" pitchFamily="50" charset="0"/>
+              </a:rPr>
+              <a:t>European</a:t>
+            </a:r>
+            <a:r>
+              <a:rPr lang="es-ES" b="0" dirty="0">
+                <a:solidFill>
+                  <a:srgbClr val="D4D4D4"/>
+                </a:solidFill>
+                <a:effectLst/>
+                <a:highlight>
+                  <a:srgbClr val="1E1E1E"/>
+                </a:highlight>
+                <a:latin typeface="Dank Mono Regular" panose="00000509000000000000" pitchFamily="50" charset="0"/>
+              </a:rPr>
+              <a:t> </a:t>
+            </a:r>
+            <a:r>
+              <a:rPr lang="es-ES" b="0" dirty="0" err="1">
+                <a:solidFill>
+                  <a:srgbClr val="D4D4D4"/>
+                </a:solidFill>
+                <a:effectLst/>
+                <a:highlight>
+                  <a:srgbClr val="1E1E1E"/>
+                </a:highlight>
+                <a:latin typeface="Dank Mono Regular" panose="00000509000000000000" pitchFamily="50" charset="0"/>
+              </a:rPr>
+              <a:t>Computer</a:t>
+            </a:r>
+            <a:r>
+              <a:rPr lang="es-ES" b="0" dirty="0">
+                <a:solidFill>
+                  <a:srgbClr val="D4D4D4"/>
+                </a:solidFill>
+                <a:effectLst/>
+                <a:highlight>
+                  <a:srgbClr val="1E1E1E"/>
+                </a:highlight>
+                <a:latin typeface="Dank Mono Regular" panose="00000509000000000000" pitchFamily="50" charset="0"/>
+              </a:rPr>
+              <a:t> Manufactures </a:t>
+            </a:r>
+            <a:r>
+              <a:rPr lang="es-ES" b="0" dirty="0" err="1">
+                <a:solidFill>
+                  <a:srgbClr val="D4D4D4"/>
+                </a:solidFill>
+                <a:effectLst/>
+                <a:highlight>
+                  <a:srgbClr val="1E1E1E"/>
+                </a:highlight>
+                <a:latin typeface="Dank Mono Regular" panose="00000509000000000000" pitchFamily="50" charset="0"/>
+              </a:rPr>
+              <a:t>Association</a:t>
+            </a:r>
+            <a:r>
+              <a:rPr lang="es-ES" b="0" dirty="0">
+                <a:solidFill>
+                  <a:srgbClr val="D4D4D4"/>
+                </a:solidFill>
+                <a:effectLst/>
+                <a:highlight>
+                  <a:srgbClr val="1E1E1E"/>
+                </a:highlight>
+                <a:latin typeface="Dank Mono Regular" panose="00000509000000000000" pitchFamily="50" charset="0"/>
+              </a:rPr>
+              <a:t>, si bien empezó siendo una asociación de fabricantes europeos de ordenadores, a día de hoy es una institución que estandariza procesos, lenguajes y demás elementos relacionados con IT).</a:t>
+            </a:r>
             <a:br>
               <a:rPr lang="es-ES" b="0" dirty="0">
                 <a:solidFill>
@@ -1942,51 +1968,6 @@
                 <a:latin typeface="Dank Mono Regular" panose="00000509000000000000" pitchFamily="50" charset="0"/>
               </a:rPr>
             </a:br>
-            <a:r>
-              <a:rPr lang="es-ES" b="0" dirty="0">
-                <a:solidFill>
-                  <a:srgbClr val="D4D4D4"/>
-                </a:solidFill>
-                <a:effectLst/>
-                <a:highlight>
-                  <a:srgbClr val="1E1E1E"/>
-                </a:highlight>
-                <a:latin typeface="Dank Mono Regular" panose="00000509000000000000" pitchFamily="50" charset="0"/>
-              </a:rPr>
-              <a:t>  - Programación orientada a objetos (OOP), donde las clases son la pieza fundamental y en ellas abstraemos datos y manejo de esos datos.</a:t>
-            </a:r>
-          </a:p>
-          <a:p>
-            <a:r>
-              <a:rPr lang="es-ES" b="0" dirty="0">
-                <a:solidFill>
-                  <a:srgbClr val="D4D4D4"/>
-                </a:solidFill>
-                <a:effectLst/>
-                <a:highlight>
-                  <a:srgbClr val="1E1E1E"/>
-                </a:highlight>
-                <a:latin typeface="Dank Mono Regular" panose="00000509000000000000" pitchFamily="50" charset="0"/>
-              </a:rPr>
-              <a:t>  - Programación funcional, en cuyo caso las funciones son el elemento estrella.</a:t>
-            </a:r>
-          </a:p>
-          <a:p>
-            <a:r>
-              <a:rPr lang="es-ES" b="0" dirty="0">
-                <a:solidFill>
-                  <a:srgbClr val="D4D4D4"/>
-                </a:solidFill>
-                <a:effectLst/>
-                <a:highlight>
-                  <a:srgbClr val="1E1E1E"/>
-                </a:highlight>
-                <a:latin typeface="Dank Mono Regular" panose="00000509000000000000" pitchFamily="50" charset="0"/>
-              </a:rPr>
-              <a:t>  - O la programación imperativa donde no abstraemos en clases o funciones e indicamos paso a paso las instrucciones a realizar para conseguir una tarea.</a:t>
-            </a:r>
-          </a:p>
-          <a:p>
             <a:br>
               <a:rPr lang="es-ES" b="0" dirty="0">
                 <a:solidFill>
@@ -2010,37 +1991,11 @@
                 </a:highlight>
                 <a:latin typeface="Dank Mono Regular" panose="00000509000000000000" pitchFamily="50" charset="0"/>
               </a:rPr>
-              <a:t>- </a:t>
-            </a:r>
-            <a:r>
-              <a:rPr lang="es-ES" b="1" dirty="0">
-                <a:solidFill>
-                  <a:srgbClr val="569CD6"/>
-                </a:solidFill>
-                <a:effectLst/>
-                <a:highlight>
-                  <a:srgbClr val="1E1E1E"/>
-                </a:highlight>
-                <a:latin typeface="Dank Mono Regular" panose="00000509000000000000" pitchFamily="50" charset="0"/>
-              </a:rPr>
-              <a:t>Dinámico e Interpretado</a:t>
-            </a:r>
-            <a:r>
-              <a:rPr lang="es-ES" b="0" dirty="0">
-                <a:solidFill>
-                  <a:srgbClr val="D4D4D4"/>
-                </a:solidFill>
-                <a:effectLst/>
-                <a:highlight>
-                  <a:srgbClr val="1E1E1E"/>
-                </a:highlight>
-                <a:latin typeface="Dank Mono Regular" panose="00000509000000000000" pitchFamily="50" charset="0"/>
-              </a:rPr>
-              <a:t>. Lo que implica que no se requiera de una compilación previa con la que obtener los artefactos de salida que finalmente serán ejecutados, como puede pasar por ejemplo con C que es compilado a binario, sino que el lenguaje que nosotros escribimos es directamente consumido por el navegador, quien lo interpreta y lo ejecuta**.</a:t>
+              <a:t>A día de hoy es habitual llamar a este lenguaje con su nombre oficial JavaScript (abreviado como JS), o su nombre técnico ECMAScript (abreviado como ES).</a:t>
             </a:r>
           </a:p>
           <a:p>
-            <a:endParaRPr lang="es-ES" b="0" dirty="0">
+            <a:endParaRPr lang="es-ES" b="0" u="sng" dirty="0">
               <a:solidFill>
                 <a:srgbClr val="D4D4D4"/>
               </a:solidFill>
@@ -2052,594 +2007,6 @@
             </a:endParaRPr>
           </a:p>
           <a:p>
-            <a:r>
-              <a:rPr lang="es-ES" b="0" dirty="0">
-                <a:solidFill>
-                  <a:srgbClr val="D4D4D4"/>
-                </a:solidFill>
-                <a:effectLst/>
-                <a:highlight>
-                  <a:srgbClr val="1E1E1E"/>
-                </a:highlight>
-                <a:latin typeface="Dank Mono Regular" panose="00000509000000000000" pitchFamily="50" charset="0"/>
-              </a:rPr>
-              <a:t>NOTA**: Hay que añadir un matiz importante a estas definiciones, y es que se suelen usar para clasificar los lenguajes de forma binaria en lenguajes dinámicos vs estáticos, o lenguajes compilados vs interpretados. Sin embargo no siempre las cosas son blancas o negras, y al realidad es que, si bien JS está mas cerca de ser un lenguaje dinámico e interpretado para el desarrollador, el motor o intérprete que ejecuta JS si que realiza una compilación previa del mismo, en la que además puede aplicar ciertas optimizaciones o incluso detectar errores y evitar totalmente la ejecución. Lo que sucede es que esta compilación es lo que se conoce como compilación JIT (</a:t>
-            </a:r>
-            <a:r>
-              <a:rPr lang="es-ES" b="0" dirty="0" err="1">
-                <a:solidFill>
-                  <a:srgbClr val="D4D4D4"/>
-                </a:solidFill>
-                <a:effectLst/>
-                <a:highlight>
-                  <a:srgbClr val="1E1E1E"/>
-                </a:highlight>
-                <a:latin typeface="Dank Mono Regular" panose="00000509000000000000" pitchFamily="50" charset="0"/>
-              </a:rPr>
-              <a:t>just</a:t>
-            </a:r>
-            <a:r>
-              <a:rPr lang="es-ES" b="0" dirty="0">
-                <a:solidFill>
-                  <a:srgbClr val="D4D4D4"/>
-                </a:solidFill>
-                <a:effectLst/>
-                <a:highlight>
-                  <a:srgbClr val="1E1E1E"/>
-                </a:highlight>
-                <a:latin typeface="Dank Mono Regular" panose="00000509000000000000" pitchFamily="50" charset="0"/>
-              </a:rPr>
-              <a:t>-</a:t>
-            </a:r>
-            <a:r>
-              <a:rPr lang="es-ES" b="0" dirty="0" err="1">
-                <a:solidFill>
-                  <a:srgbClr val="D4D4D4"/>
-                </a:solidFill>
-                <a:effectLst/>
-                <a:highlight>
-                  <a:srgbClr val="1E1E1E"/>
-                </a:highlight>
-                <a:latin typeface="Dank Mono Regular" panose="00000509000000000000" pitchFamily="50" charset="0"/>
-              </a:rPr>
-              <a:t>in-time</a:t>
-            </a:r>
-            <a:r>
-              <a:rPr lang="es-ES" b="0" dirty="0">
-                <a:solidFill>
-                  <a:srgbClr val="D4D4D4"/>
-                </a:solidFill>
-                <a:effectLst/>
-                <a:highlight>
-                  <a:srgbClr val="1E1E1E"/>
-                </a:highlight>
-                <a:latin typeface="Dank Mono Regular" panose="00000509000000000000" pitchFamily="50" charset="0"/>
-              </a:rPr>
-              <a:t>) o ‘al vuelo’, y es transparente para el desarrollador y el usuario puesto que la hace el motor en caliente a medida que </a:t>
-            </a:r>
-            <a:r>
-              <a:rPr lang="es-ES" b="0" dirty="0" err="1">
-                <a:solidFill>
-                  <a:srgbClr val="D4D4D4"/>
-                </a:solidFill>
-                <a:effectLst/>
-                <a:highlight>
-                  <a:srgbClr val="1E1E1E"/>
-                </a:highlight>
-                <a:latin typeface="Dank Mono Regular" panose="00000509000000000000" pitchFamily="50" charset="0"/>
-              </a:rPr>
-              <a:t>parsea</a:t>
-            </a:r>
-            <a:r>
-              <a:rPr lang="es-ES" b="0" dirty="0">
-                <a:solidFill>
-                  <a:srgbClr val="D4D4D4"/>
-                </a:solidFill>
-                <a:effectLst/>
-                <a:highlight>
-                  <a:srgbClr val="1E1E1E"/>
-                </a:highlight>
-                <a:latin typeface="Dank Mono Regular" panose="00000509000000000000" pitchFamily="50" charset="0"/>
-              </a:rPr>
-              <a:t> y ejecuta la aplicación.</a:t>
-            </a:r>
-          </a:p>
-          <a:p>
-            <a:br>
-              <a:rPr lang="es-ES" b="0" dirty="0">
-                <a:solidFill>
-                  <a:srgbClr val="D4D4D4"/>
-                </a:solidFill>
-                <a:effectLst/>
-                <a:highlight>
-                  <a:srgbClr val="1E1E1E"/>
-                </a:highlight>
-                <a:latin typeface="Dank Mono Regular" panose="00000509000000000000" pitchFamily="50" charset="0"/>
-              </a:rPr>
-            </a:br>
-            <a:r>
-              <a:rPr lang="es-ES" b="0" dirty="0">
-                <a:solidFill>
-                  <a:srgbClr val="D4D4D4"/>
-                </a:solidFill>
-                <a:effectLst/>
-                <a:highlight>
-                  <a:srgbClr val="1E1E1E"/>
-                </a:highlight>
-                <a:latin typeface="Dank Mono Regular" panose="00000509000000000000" pitchFamily="50" charset="0"/>
-              </a:rPr>
-              <a:t>- </a:t>
-            </a:r>
-            <a:r>
-              <a:rPr lang="es-ES" b="1" dirty="0">
-                <a:solidFill>
-                  <a:srgbClr val="569CD6"/>
-                </a:solidFill>
-                <a:effectLst/>
-                <a:highlight>
-                  <a:srgbClr val="1E1E1E"/>
-                </a:highlight>
-                <a:latin typeface="Dank Mono Regular" panose="00000509000000000000" pitchFamily="50" charset="0"/>
-              </a:rPr>
-              <a:t>Multipropósito</a:t>
-            </a:r>
-            <a:r>
-              <a:rPr lang="es-ES" b="0" dirty="0">
-                <a:solidFill>
-                  <a:srgbClr val="D4D4D4"/>
-                </a:solidFill>
-                <a:effectLst/>
-                <a:highlight>
-                  <a:srgbClr val="1E1E1E"/>
-                </a:highlight>
-                <a:latin typeface="Dank Mono Regular" panose="00000509000000000000" pitchFamily="50" charset="0"/>
-              </a:rPr>
-              <a:t>. No sólo puede emplearse de lado de cliente, es decir, en el navegador, sino también de lado del servidor. </a:t>
-            </a:r>
-            <a:br>
-              <a:rPr lang="es-ES" b="0" dirty="0">
-                <a:solidFill>
-                  <a:srgbClr val="D4D4D4"/>
-                </a:solidFill>
-                <a:effectLst/>
-                <a:highlight>
-                  <a:srgbClr val="1E1E1E"/>
-                </a:highlight>
-                <a:latin typeface="Dank Mono Regular" panose="00000509000000000000" pitchFamily="50" charset="0"/>
-              </a:rPr>
-            </a:br>
-            <a:endParaRPr lang="es-ES" b="0" dirty="0">
-              <a:solidFill>
-                <a:srgbClr val="D4D4D4"/>
-              </a:solidFill>
-              <a:effectLst/>
-              <a:highlight>
-                <a:srgbClr val="1E1E1E"/>
-              </a:highlight>
-              <a:latin typeface="Dank Mono Regular" panose="00000509000000000000" pitchFamily="50" charset="0"/>
-            </a:endParaRPr>
-          </a:p>
-          <a:p>
-            <a:r>
-              <a:rPr lang="es-ES" b="0" dirty="0">
-                <a:solidFill>
-                  <a:srgbClr val="D4D4D4"/>
-                </a:solidFill>
-                <a:effectLst/>
-                <a:highlight>
-                  <a:srgbClr val="1E1E1E"/>
-                </a:highlight>
-                <a:latin typeface="Dank Mono Regular" panose="00000509000000000000" pitchFamily="50" charset="0"/>
-              </a:rPr>
-              <a:t>Esto es posible gracias a plataformas como Node.js. </a:t>
-            </a:r>
-            <a:r>
-              <a:rPr lang="es-ES" b="0" dirty="0" err="1">
-                <a:solidFill>
-                  <a:srgbClr val="D4D4D4"/>
-                </a:solidFill>
-                <a:effectLst/>
-                <a:highlight>
-                  <a:srgbClr val="1E1E1E"/>
-                </a:highlight>
-                <a:latin typeface="Dank Mono Regular" panose="00000509000000000000" pitchFamily="50" charset="0"/>
-              </a:rPr>
-              <a:t>Node</a:t>
-            </a:r>
-            <a:r>
-              <a:rPr lang="es-ES" b="0" dirty="0">
-                <a:solidFill>
-                  <a:srgbClr val="D4D4D4"/>
-                </a:solidFill>
-                <a:effectLst/>
-                <a:highlight>
-                  <a:srgbClr val="1E1E1E"/>
-                </a:highlight>
-                <a:latin typeface="Dank Mono Regular" panose="00000509000000000000" pitchFamily="50" charset="0"/>
-              </a:rPr>
-              <a:t> es fundamentalmente el motor V8 de Google extraído o “portado” como una aplicación </a:t>
-            </a:r>
-            <a:r>
-              <a:rPr lang="es-ES" b="0" i="1" dirty="0" err="1">
-                <a:solidFill>
-                  <a:srgbClr val="D4D4D4"/>
-                </a:solidFill>
-                <a:effectLst/>
-                <a:highlight>
-                  <a:srgbClr val="1E1E1E"/>
-                </a:highlight>
-                <a:latin typeface="Dank Mono Regular" panose="00000509000000000000" pitchFamily="50" charset="0"/>
-              </a:rPr>
-              <a:t>standalone</a:t>
-            </a:r>
-            <a:r>
-              <a:rPr lang="es-ES" b="0" dirty="0">
-                <a:solidFill>
-                  <a:srgbClr val="D4D4D4"/>
-                </a:solidFill>
-                <a:effectLst/>
-                <a:highlight>
-                  <a:srgbClr val="1E1E1E"/>
-                </a:highlight>
-                <a:latin typeface="Dank Mono Regular" panose="00000509000000000000" pitchFamily="50" charset="0"/>
-              </a:rPr>
-              <a:t> que podemos instalar en cualquier máquina. Este motor v8 es la pieza que utiliza el navegador </a:t>
-            </a:r>
-            <a:r>
-              <a:rPr lang="es-ES" b="0" dirty="0" err="1">
-                <a:solidFill>
-                  <a:srgbClr val="D4D4D4"/>
-                </a:solidFill>
-                <a:effectLst/>
-                <a:highlight>
-                  <a:srgbClr val="1E1E1E"/>
-                </a:highlight>
-                <a:latin typeface="Dank Mono Regular" panose="00000509000000000000" pitchFamily="50" charset="0"/>
-              </a:rPr>
-              <a:t>Chromium</a:t>
-            </a:r>
-            <a:r>
-              <a:rPr lang="es-ES" b="0" dirty="0">
-                <a:solidFill>
-                  <a:srgbClr val="D4D4D4"/>
-                </a:solidFill>
-                <a:effectLst/>
-                <a:highlight>
-                  <a:srgbClr val="1E1E1E"/>
-                </a:highlight>
-                <a:latin typeface="Dank Mono Regular" panose="00000509000000000000" pitchFamily="50" charset="0"/>
-              </a:rPr>
-              <a:t> para poder interpretar y ejecutar código JavaScript.</a:t>
-            </a:r>
-          </a:p>
-          <a:p>
-            <a:br>
-              <a:rPr lang="es-ES" b="0" dirty="0">
-                <a:solidFill>
-                  <a:srgbClr val="D4D4D4"/>
-                </a:solidFill>
-                <a:effectLst/>
-                <a:highlight>
-                  <a:srgbClr val="1E1E1E"/>
-                </a:highlight>
-                <a:latin typeface="Dank Mono Regular" panose="00000509000000000000" pitchFamily="50" charset="0"/>
-              </a:rPr>
-            </a:br>
-            <a:r>
-              <a:rPr lang="es-ES" b="0" dirty="0">
-                <a:solidFill>
-                  <a:srgbClr val="D4D4D4"/>
-                </a:solidFill>
-                <a:effectLst/>
-                <a:highlight>
-                  <a:srgbClr val="1E1E1E"/>
-                </a:highlight>
-                <a:latin typeface="Dank Mono Regular" panose="00000509000000000000" pitchFamily="50" charset="0"/>
-              </a:rPr>
-              <a:t>Por lo tanto, gracias a </a:t>
-            </a:r>
-            <a:r>
-              <a:rPr lang="es-ES" b="0" dirty="0" err="1">
-                <a:solidFill>
-                  <a:srgbClr val="D4D4D4"/>
-                </a:solidFill>
-                <a:effectLst/>
-                <a:highlight>
-                  <a:srgbClr val="1E1E1E"/>
-                </a:highlight>
-                <a:latin typeface="Dank Mono Regular" panose="00000509000000000000" pitchFamily="50" charset="0"/>
-              </a:rPr>
-              <a:t>Node</a:t>
-            </a:r>
-            <a:r>
-              <a:rPr lang="es-ES" b="0" dirty="0">
-                <a:solidFill>
-                  <a:srgbClr val="D4D4D4"/>
-                </a:solidFill>
-                <a:effectLst/>
-                <a:highlight>
-                  <a:srgbClr val="1E1E1E"/>
-                </a:highlight>
-                <a:latin typeface="Dank Mono Regular" panose="00000509000000000000" pitchFamily="50" charset="0"/>
-              </a:rPr>
-              <a:t>, ahora tenemos el </a:t>
-            </a:r>
-            <a:r>
-              <a:rPr lang="es-ES" b="0" dirty="0" err="1">
-                <a:solidFill>
-                  <a:srgbClr val="D4D4D4"/>
-                </a:solidFill>
-                <a:effectLst/>
-                <a:highlight>
-                  <a:srgbClr val="1E1E1E"/>
-                </a:highlight>
-                <a:latin typeface="Dank Mono Regular" panose="00000509000000000000" pitchFamily="50" charset="0"/>
-              </a:rPr>
-              <a:t>engine</a:t>
-            </a:r>
-            <a:r>
-              <a:rPr lang="es-ES" b="0" dirty="0">
-                <a:solidFill>
-                  <a:srgbClr val="D4D4D4"/>
-                </a:solidFill>
-                <a:effectLst/>
-                <a:highlight>
-                  <a:srgbClr val="1E1E1E"/>
-                </a:highlight>
-                <a:latin typeface="Dank Mono Regular" panose="00000509000000000000" pitchFamily="50" charset="0"/>
-              </a:rPr>
-              <a:t> de Chrome allá donde queramos, haciendo posible ejecutar JavaScript fuera de un navegador, por ejemplo, en un servidor.</a:t>
-            </a:r>
-          </a:p>
-          <a:p>
-            <a:br>
-              <a:rPr lang="es-ES" b="0" dirty="0">
-                <a:solidFill>
-                  <a:srgbClr val="D4D4D4"/>
-                </a:solidFill>
-                <a:effectLst/>
-                <a:highlight>
-                  <a:srgbClr val="1E1E1E"/>
-                </a:highlight>
-                <a:latin typeface="Dank Mono Regular" panose="00000509000000000000" pitchFamily="50" charset="0"/>
-              </a:rPr>
-            </a:br>
-            <a:r>
-              <a:rPr lang="es-ES" b="0" dirty="0">
-                <a:solidFill>
-                  <a:srgbClr val="D4D4D4"/>
-                </a:solidFill>
-                <a:effectLst/>
-                <a:highlight>
-                  <a:srgbClr val="1E1E1E"/>
-                </a:highlight>
-                <a:latin typeface="Dank Mono Regular" panose="00000509000000000000" pitchFamily="50" charset="0"/>
-              </a:rPr>
-              <a:t>- </a:t>
-            </a:r>
-            <a:r>
-              <a:rPr lang="es-ES" b="1" dirty="0">
-                <a:solidFill>
-                  <a:srgbClr val="569CD6"/>
-                </a:solidFill>
-                <a:effectLst/>
-                <a:highlight>
-                  <a:srgbClr val="1E1E1E"/>
-                </a:highlight>
-                <a:latin typeface="Dank Mono Regular" panose="00000509000000000000" pitchFamily="50" charset="0"/>
-              </a:rPr>
-              <a:t>Objetos</a:t>
-            </a:r>
-            <a:r>
-              <a:rPr lang="es-ES" b="0" dirty="0">
-                <a:solidFill>
-                  <a:srgbClr val="D4D4D4"/>
-                </a:solidFill>
-                <a:effectLst/>
-                <a:highlight>
-                  <a:srgbClr val="1E1E1E"/>
-                </a:highlight>
-                <a:latin typeface="Dank Mono Regular" panose="00000509000000000000" pitchFamily="50" charset="0"/>
-              </a:rPr>
-              <a:t>. El lenguaje nos da de serie los objetos (no confundir con clases) y es el elemento estrella del lenguaje. Os adelanto algo que repetiremos en muchas sesiones: “en JS todo son objetos”.</a:t>
-            </a:r>
-            <a:br>
-              <a:rPr lang="es-ES" b="0" dirty="0">
-                <a:solidFill>
-                  <a:srgbClr val="D4D4D4"/>
-                </a:solidFill>
-                <a:effectLst/>
-                <a:highlight>
-                  <a:srgbClr val="1E1E1E"/>
-                </a:highlight>
-                <a:latin typeface="Dank Mono Regular" panose="00000509000000000000" pitchFamily="50" charset="0"/>
-              </a:rPr>
-            </a:br>
-            <a:endParaRPr lang="es-ES" b="0" dirty="0">
-              <a:solidFill>
-                <a:srgbClr val="D4D4D4"/>
-              </a:solidFill>
-              <a:effectLst/>
-              <a:highlight>
-                <a:srgbClr val="1E1E1E"/>
-              </a:highlight>
-              <a:latin typeface="Dank Mono Regular" panose="00000509000000000000" pitchFamily="50" charset="0"/>
-            </a:endParaRPr>
-          </a:p>
-          <a:p>
-            <a:r>
-              <a:rPr lang="es-ES" b="0" dirty="0">
-                <a:solidFill>
-                  <a:srgbClr val="D4D4D4"/>
-                </a:solidFill>
-                <a:effectLst/>
-                <a:highlight>
-                  <a:srgbClr val="1E1E1E"/>
-                </a:highlight>
-                <a:latin typeface="Dank Mono Regular" panose="00000509000000000000" pitchFamily="50" charset="0"/>
-              </a:rPr>
-              <a:t>- </a:t>
-            </a:r>
-            <a:r>
-              <a:rPr lang="es-ES" b="1" dirty="0">
-                <a:solidFill>
-                  <a:srgbClr val="569CD6"/>
-                </a:solidFill>
-                <a:effectLst/>
-                <a:highlight>
-                  <a:srgbClr val="1E1E1E"/>
-                </a:highlight>
-                <a:latin typeface="Dank Mono Regular" panose="00000509000000000000" pitchFamily="50" charset="0"/>
-              </a:rPr>
-              <a:t>Prototipos.</a:t>
-            </a:r>
-            <a:r>
-              <a:rPr lang="es-ES" b="0" dirty="0">
-                <a:solidFill>
-                  <a:srgbClr val="D4D4D4"/>
-                </a:solidFill>
-                <a:effectLst/>
-                <a:highlight>
-                  <a:srgbClr val="1E1E1E"/>
-                </a:highlight>
-                <a:latin typeface="Dank Mono Regular" panose="00000509000000000000" pitchFamily="50" charset="0"/>
-              </a:rPr>
-              <a:t> Los prototipos son un mecanismo del lenguaje que permiten enriquecer a los objetos y poder generar un sistema de herencia más potente que la herencia clásica con clases.</a:t>
-            </a:r>
-          </a:p>
-          <a:p>
-            <a:br>
-              <a:rPr lang="es-ES" b="0" dirty="0">
-                <a:solidFill>
-                  <a:srgbClr val="D4D4D4"/>
-                </a:solidFill>
-                <a:effectLst/>
-                <a:highlight>
-                  <a:srgbClr val="1E1E1E"/>
-                </a:highlight>
-                <a:latin typeface="Dank Mono Regular" panose="00000509000000000000" pitchFamily="50" charset="0"/>
-              </a:rPr>
-            </a:br>
-            <a:r>
-              <a:rPr lang="es-ES" b="0" dirty="0">
-                <a:solidFill>
-                  <a:srgbClr val="D4D4D4"/>
-                </a:solidFill>
-                <a:effectLst/>
-                <a:highlight>
-                  <a:srgbClr val="1E1E1E"/>
-                </a:highlight>
-                <a:latin typeface="Dank Mono Regular" panose="00000509000000000000" pitchFamily="50" charset="0"/>
-              </a:rPr>
-              <a:t>- </a:t>
-            </a:r>
-            <a:r>
-              <a:rPr lang="es-ES" b="1" dirty="0">
-                <a:solidFill>
-                  <a:srgbClr val="569CD6"/>
-                </a:solidFill>
-                <a:effectLst/>
-                <a:highlight>
-                  <a:srgbClr val="1E1E1E"/>
-                </a:highlight>
-                <a:latin typeface="Dank Mono Regular" panose="00000509000000000000" pitchFamily="50" charset="0"/>
-              </a:rPr>
-              <a:t>JSON</a:t>
-            </a:r>
-            <a:r>
-              <a:rPr lang="es-ES" b="0" dirty="0">
-                <a:solidFill>
-                  <a:srgbClr val="D4D4D4"/>
-                </a:solidFill>
-                <a:effectLst/>
-                <a:highlight>
-                  <a:srgbClr val="1E1E1E"/>
-                </a:highlight>
-                <a:latin typeface="Dank Mono Regular" panose="00000509000000000000" pitchFamily="50" charset="0"/>
-              </a:rPr>
-              <a:t>. También de serie nos proporciona una notación literal de objetos, con lo que poder serializar objetos hacia afuera de nuestro código (es decir, exportar, por ejemplo hacia un fichero de texto) y </a:t>
-            </a:r>
-            <a:r>
-              <a:rPr lang="es-ES" b="0" dirty="0" err="1">
-                <a:solidFill>
-                  <a:srgbClr val="D4D4D4"/>
-                </a:solidFill>
-                <a:effectLst/>
-                <a:highlight>
-                  <a:srgbClr val="1E1E1E"/>
-                </a:highlight>
-                <a:latin typeface="Dank Mono Regular" panose="00000509000000000000" pitchFamily="50" charset="0"/>
-              </a:rPr>
-              <a:t>deserializar</a:t>
-            </a:r>
-            <a:r>
-              <a:rPr lang="es-ES" b="0" dirty="0">
-                <a:solidFill>
-                  <a:srgbClr val="D4D4D4"/>
-                </a:solidFill>
-                <a:effectLst/>
-                <a:highlight>
-                  <a:srgbClr val="1E1E1E"/>
-                </a:highlight>
-                <a:latin typeface="Dank Mono Regular" panose="00000509000000000000" pitchFamily="50" charset="0"/>
-              </a:rPr>
-              <a:t> (lo que equivale a importar objetos desde el exterior hacia nuestro código).</a:t>
-            </a:r>
-          </a:p>
-          <a:p>
-            <a:br>
-              <a:rPr lang="es-ES" b="0" dirty="0">
-                <a:solidFill>
-                  <a:srgbClr val="D4D4D4"/>
-                </a:solidFill>
-                <a:effectLst/>
-                <a:highlight>
-                  <a:srgbClr val="1E1E1E"/>
-                </a:highlight>
-                <a:latin typeface="Dank Mono Regular" panose="00000509000000000000" pitchFamily="50" charset="0"/>
-              </a:rPr>
-            </a:br>
-            <a:r>
-              <a:rPr lang="es-ES" b="0" dirty="0">
-                <a:solidFill>
-                  <a:srgbClr val="D4D4D4"/>
-                </a:solidFill>
-                <a:effectLst/>
-                <a:highlight>
-                  <a:srgbClr val="1E1E1E"/>
-                </a:highlight>
-                <a:latin typeface="Dank Mono Regular" panose="00000509000000000000" pitchFamily="50" charset="0"/>
-              </a:rPr>
-              <a:t>- </a:t>
-            </a:r>
-            <a:r>
-              <a:rPr lang="es-ES" b="1" dirty="0">
-                <a:solidFill>
-                  <a:srgbClr val="569CD6"/>
-                </a:solidFill>
-                <a:effectLst/>
-                <a:highlight>
-                  <a:srgbClr val="1E1E1E"/>
-                </a:highlight>
-                <a:latin typeface="Dank Mono Regular" panose="00000509000000000000" pitchFamily="50" charset="0"/>
-              </a:rPr>
-              <a:t>Popularidad e Importancia</a:t>
-            </a:r>
-            <a:r>
-              <a:rPr lang="es-ES" b="0" dirty="0">
-                <a:solidFill>
-                  <a:srgbClr val="D4D4D4"/>
-                </a:solidFill>
-                <a:effectLst/>
-                <a:highlight>
-                  <a:srgbClr val="1E1E1E"/>
-                </a:highlight>
-                <a:latin typeface="Dank Mono Regular" panose="00000509000000000000" pitchFamily="50" charset="0"/>
-              </a:rPr>
-              <a:t>. JavaScript es el estándar de la web y esto lo convierte en el lenguaje más utilizado del mundo.</a:t>
-            </a:r>
-          </a:p>
-          <a:p>
             <a:endParaRPr lang="es-ES" dirty="0"/>
           </a:p>
         </p:txBody>
@@ -2647,7 +2014,7 @@
     </p:spTree>
     <p:extLst>
       <p:ext uri="{BB962C8B-B14F-4D97-AF65-F5344CB8AC3E}">
-        <p14:creationId xmlns:p14="http://schemas.microsoft.com/office/powerpoint/2010/main" val="3147683687"/>
+        <p14:creationId xmlns:p14="http://schemas.microsoft.com/office/powerpoint/2010/main" val="3432464847"/>
       </p:ext>
     </p:extLst>
   </p:cSld>
@@ -2707,146 +2074,795 @@
           <a:lstStyle/>
           <a:p>
             <a:r>
-              <a:rPr lang="es-ES" dirty="0"/>
-              <a:t>Nos vamos a detener brevemente a tratar un tema de gran importancia en el ecosistema web como es la compatibilidad, y veremos el tipo de compatibilidad que ofrecen los 3 lenguajes principales involucrados en el mundo web. </a:t>
-            </a:r>
-            <a:br>
-              <a:rPr lang="es-ES" dirty="0"/>
-            </a:br>
-            <a:r>
-              <a:rPr lang="es-ES" dirty="0"/>
-              <a:t>La idea con esta </a:t>
-            </a:r>
-            <a:r>
-              <a:rPr lang="es-ES" dirty="0" err="1"/>
-              <a:t>slide</a:t>
-            </a:r>
-            <a:r>
-              <a:rPr lang="es-ES" dirty="0"/>
-              <a:t> es concienciar del motivo por el cual, en muchas ocasiones, se ha denostado a JavaScript como un lenguaje con fallos y comportamientos extraños. Veámoslo, en resumen:</a:t>
+              <a:rPr lang="es-ES" b="0" dirty="0">
+                <a:solidFill>
+                  <a:srgbClr val="D4D4D4"/>
+                </a:solidFill>
+                <a:effectLst/>
+                <a:highlight>
+                  <a:srgbClr val="1E1E1E"/>
+                </a:highlight>
+                <a:latin typeface="Dank Mono Regular" panose="00000509000000000000" pitchFamily="50" charset="0"/>
+              </a:rPr>
+              <a:t>- </a:t>
+            </a:r>
+            <a:r>
+              <a:rPr lang="es-ES" b="1" dirty="0">
+                <a:solidFill>
+                  <a:srgbClr val="569CD6"/>
+                </a:solidFill>
+                <a:effectLst/>
+                <a:highlight>
+                  <a:srgbClr val="1E1E1E"/>
+                </a:highlight>
+                <a:latin typeface="Dank Mono Regular" panose="00000509000000000000" pitchFamily="50" charset="0"/>
+              </a:rPr>
+              <a:t>Multiparadigma</a:t>
+            </a:r>
+            <a:r>
+              <a:rPr lang="es-ES" b="0" dirty="0">
+                <a:solidFill>
+                  <a:srgbClr val="D4D4D4"/>
+                </a:solidFill>
+                <a:effectLst/>
+                <a:highlight>
+                  <a:srgbClr val="1E1E1E"/>
+                </a:highlight>
+                <a:latin typeface="Dank Mono Regular" panose="00000509000000000000" pitchFamily="50" charset="0"/>
+              </a:rPr>
+              <a:t>. Si bien JS se considera un lenguaje orientado a prototipos, soporta diferentes paradigmas. Esto significa que podemos adoptar distintos enfoques de entre los más habituales en el mundo de la programación, como por ejemplo:</a:t>
             </a:r>
           </a:p>
           <a:p>
-            <a:endParaRPr lang="es-ES" dirty="0"/>
+            <a:br>
+              <a:rPr lang="es-ES" b="0" dirty="0">
+                <a:solidFill>
+                  <a:srgbClr val="D4D4D4"/>
+                </a:solidFill>
+                <a:effectLst/>
+                <a:highlight>
+                  <a:srgbClr val="1E1E1E"/>
+                </a:highlight>
+                <a:latin typeface="Dank Mono Regular" panose="00000509000000000000" pitchFamily="50" charset="0"/>
+              </a:rPr>
+            </a:br>
+            <a:r>
+              <a:rPr lang="es-ES" b="0" dirty="0">
+                <a:solidFill>
+                  <a:srgbClr val="D4D4D4"/>
+                </a:solidFill>
+                <a:effectLst/>
+                <a:highlight>
+                  <a:srgbClr val="1E1E1E"/>
+                </a:highlight>
+                <a:latin typeface="Dank Mono Regular" panose="00000509000000000000" pitchFamily="50" charset="0"/>
+              </a:rPr>
+              <a:t>  - Programación orientada a objetos (OOP), donde las clases son la pieza fundamental y en ellas abstraemos datos y manejo de esos datos.</a:t>
+            </a:r>
           </a:p>
           <a:p>
-            <a:pPr algn="l">
-              <a:buFont typeface="Arial" panose="020B0604020202020204" pitchFamily="34" charset="0"/>
-              <a:buChar char="•"/>
-            </a:pPr>
-            <a:r>
-              <a:rPr lang="es-ES" b="0" i="0" dirty="0">
-                <a:solidFill>
-                  <a:srgbClr val="D1D2D3"/>
+            <a:r>
+              <a:rPr lang="es-ES" b="0" dirty="0">
+                <a:solidFill>
+                  <a:srgbClr val="D4D4D4"/>
                 </a:solidFill>
                 <a:effectLst/>
-                <a:latin typeface="Slack-Lato"/>
+                <a:highlight>
+                  <a:srgbClr val="1E1E1E"/>
+                </a:highlight>
+                <a:latin typeface="Dank Mono Regular" panose="00000509000000000000" pitchFamily="50" charset="0"/>
               </a:rPr>
-              <a:t> La compatibilidad hacia atrás implica que cualquier </a:t>
-            </a:r>
-            <a:r>
-              <a:rPr lang="es-ES" b="0" i="0" dirty="0" err="1">
-                <a:solidFill>
-                  <a:srgbClr val="D1D2D3"/>
-                </a:solidFill>
-                <a:effectLst/>
-                <a:latin typeface="Slack-Lato"/>
-              </a:rPr>
-              <a:t>feature</a:t>
-            </a:r>
-            <a:r>
-              <a:rPr lang="es-ES" b="0" i="0" dirty="0">
-                <a:solidFill>
-                  <a:srgbClr val="D1D2D3"/>
-                </a:solidFill>
-                <a:effectLst/>
-                <a:latin typeface="Slack-Lato"/>
-              </a:rPr>
-              <a:t> del lenguaje debe ser soportada pase el tiempo que pase, con el objetivo de que programas antiguos no "se rompan" en navegadores nuevos. Cualquier web por antiguo que sea su código va a funcionar hoy día. JS es compatible hacia atrás, y esto puede explicar que ciertas decisiones del lenguaje que podrían considerarse polémicas hoy día, son herencia histórica que no puede deshacerse.</a:t>
+              <a:t>  - Programación funcional, en cuyo caso las funciones son el elemento estrella.</a:t>
             </a:r>
           </a:p>
           <a:p>
-            <a:pPr algn="l">
-              <a:buFont typeface="Arial" panose="020B0604020202020204" pitchFamily="34" charset="0"/>
-              <a:buChar char="•"/>
-            </a:pPr>
-            <a:r>
-              <a:rPr lang="es-ES" b="0" i="0" dirty="0">
-                <a:solidFill>
-                  <a:srgbClr val="D1D2D3"/>
+            <a:r>
+              <a:rPr lang="es-ES" b="0" dirty="0">
+                <a:solidFill>
+                  <a:srgbClr val="D4D4D4"/>
                 </a:solidFill>
                 <a:effectLst/>
-                <a:latin typeface="Slack-Lato"/>
+                <a:highlight>
+                  <a:srgbClr val="1E1E1E"/>
+                </a:highlight>
+                <a:latin typeface="Dank Mono Regular" panose="00000509000000000000" pitchFamily="50" charset="0"/>
               </a:rPr>
-              <a:t> La compatibilidad hacia adelante, al contrario, implica que </a:t>
-            </a:r>
-            <a:r>
-              <a:rPr lang="es-ES" b="0" i="0" dirty="0" err="1">
-                <a:solidFill>
-                  <a:srgbClr val="D1D2D3"/>
+              <a:t>  - O la programación imperativa donde no abstraemos en clases o funciones e indicamos paso a paso las instrucciones a realizar para conseguir una tarea.</a:t>
+            </a:r>
+          </a:p>
+          <a:p>
+            <a:br>
+              <a:rPr lang="es-ES" b="0" dirty="0">
+                <a:solidFill>
+                  <a:srgbClr val="D4D4D4"/>
                 </a:solidFill>
                 <a:effectLst/>
-                <a:latin typeface="Slack-Lato"/>
+                <a:highlight>
+                  <a:srgbClr val="1E1E1E"/>
+                </a:highlight>
+                <a:latin typeface="Dank Mono Regular" panose="00000509000000000000" pitchFamily="50" charset="0"/>
               </a:rPr>
-              <a:t>features</a:t>
-            </a:r>
-            <a:r>
-              <a:rPr lang="es-ES" b="0" i="0" dirty="0">
-                <a:solidFill>
-                  <a:srgbClr val="D1D2D3"/>
+            </a:br>
+            <a:r>
+              <a:rPr lang="es-ES" b="0" dirty="0">
+                <a:solidFill>
+                  <a:srgbClr val="D4D4D4"/>
                 </a:solidFill>
                 <a:effectLst/>
-                <a:latin typeface="Slack-Lato"/>
+                <a:highlight>
+                  <a:srgbClr val="1E1E1E"/>
+                </a:highlight>
+                <a:latin typeface="Dank Mono Regular" panose="00000509000000000000" pitchFamily="50" charset="0"/>
               </a:rPr>
-              <a:t> o sintaxis novedosas del lenguaje no van a provocar errores si se ejecutan en navegadores antiguos o sin soporte. Esto se hace ignorando lo que el </a:t>
-            </a:r>
-            <a:r>
-              <a:rPr lang="es-ES" b="0" i="0" dirty="0" err="1">
-                <a:solidFill>
-                  <a:srgbClr val="D1D2D3"/>
+              <a:t>- </a:t>
+            </a:r>
+            <a:r>
+              <a:rPr lang="es-ES" b="1" dirty="0">
+                <a:solidFill>
+                  <a:srgbClr val="569CD6"/>
                 </a:solidFill>
                 <a:effectLst/>
-                <a:latin typeface="Slack-Lato"/>
+                <a:highlight>
+                  <a:srgbClr val="1E1E1E"/>
+                </a:highlight>
+                <a:latin typeface="Dank Mono Regular" panose="00000509000000000000" pitchFamily="50" charset="0"/>
+              </a:rPr>
+              <a:t>Dinámico e Interpretado</a:t>
+            </a:r>
+            <a:r>
+              <a:rPr lang="es-ES" b="0" dirty="0">
+                <a:solidFill>
+                  <a:srgbClr val="D4D4D4"/>
+                </a:solidFill>
+                <a:effectLst/>
+                <a:highlight>
+                  <a:srgbClr val="1E1E1E"/>
+                </a:highlight>
+                <a:latin typeface="Dank Mono Regular" panose="00000509000000000000" pitchFamily="50" charset="0"/>
+              </a:rPr>
+              <a:t>. Lo que implica que no se requiera de una compilación previa con la que obtener los artefactos de salida que finalmente serán ejecutados, como puede pasar por ejemplo con C que es compilado a binario, sino que el lenguaje que nosotros escribimos es directamente consumido por el navegador, quien lo interpreta y lo ejecuta**.</a:t>
+            </a:r>
+          </a:p>
+          <a:p>
+            <a:endParaRPr lang="es-ES" b="0" dirty="0">
+              <a:solidFill>
+                <a:srgbClr val="D4D4D4"/>
+              </a:solidFill>
+              <a:effectLst/>
+              <a:highlight>
+                <a:srgbClr val="1E1E1E"/>
+              </a:highlight>
+              <a:latin typeface="Dank Mono Regular" panose="00000509000000000000" pitchFamily="50" charset="0"/>
+            </a:endParaRPr>
+          </a:p>
+          <a:p>
+            <a:r>
+              <a:rPr lang="es-ES" b="0" dirty="0">
+                <a:solidFill>
+                  <a:srgbClr val="D4D4D4"/>
+                </a:solidFill>
+                <a:effectLst/>
+                <a:highlight>
+                  <a:srgbClr val="1E1E1E"/>
+                </a:highlight>
+                <a:latin typeface="Dank Mono Regular" panose="00000509000000000000" pitchFamily="50" charset="0"/>
+              </a:rPr>
+              <a:t>NOTA**: Hay que añadir un matiz importante a estas definiciones, y es que se suelen usar para clasificar los lenguajes de forma binaria en lenguajes dinámicos vs estáticos, o lenguajes compilados vs interpretados. Sin embargo no siempre las cosas son blancas o negras, y al realidad es que, si bien JS está mas cerca de ser un lenguaje dinámico e interpretado desde el punto de vista del desarrollador, no es un lenguaje puramente interpretado. </a:t>
+            </a:r>
+            <a:r>
+              <a:rPr lang="es-ES" b="0" u="sng" dirty="0">
+                <a:solidFill>
+                  <a:srgbClr val="D4D4D4"/>
+                </a:solidFill>
+                <a:effectLst/>
+                <a:highlight>
+                  <a:srgbClr val="1E1E1E"/>
+                </a:highlight>
+                <a:latin typeface="Dank Mono Regular" panose="00000509000000000000" pitchFamily="50" charset="0"/>
+              </a:rPr>
+              <a:t>El</a:t>
+            </a:r>
+            <a:r>
+              <a:rPr lang="es-ES" b="0" dirty="0">
+                <a:solidFill>
+                  <a:srgbClr val="D4D4D4"/>
+                </a:solidFill>
+                <a:effectLst/>
+                <a:highlight>
+                  <a:srgbClr val="1E1E1E"/>
+                </a:highlight>
+                <a:latin typeface="Dank Mono Regular" panose="00000509000000000000" pitchFamily="50" charset="0"/>
+              </a:rPr>
+              <a:t> motor o intérprete que ejecuta JS si que realiza una compilación previa del mismo, en la que además puede aplicar ciertas optimizaciones o incluso detectar errores y evitar totalmente la ejecución. Lo que sucede es que esta compilación es lo que se conoce como compilación JIT (</a:t>
+            </a:r>
+            <a:r>
+              <a:rPr lang="es-ES" b="0" dirty="0" err="1">
+                <a:solidFill>
+                  <a:srgbClr val="D4D4D4"/>
+                </a:solidFill>
+                <a:effectLst/>
+                <a:highlight>
+                  <a:srgbClr val="1E1E1E"/>
+                </a:highlight>
+                <a:latin typeface="Dank Mono Regular" panose="00000509000000000000" pitchFamily="50" charset="0"/>
+              </a:rPr>
+              <a:t>just</a:t>
+            </a:r>
+            <a:r>
+              <a:rPr lang="es-ES" b="0" dirty="0">
+                <a:solidFill>
+                  <a:srgbClr val="D4D4D4"/>
+                </a:solidFill>
+                <a:effectLst/>
+                <a:highlight>
+                  <a:srgbClr val="1E1E1E"/>
+                </a:highlight>
+                <a:latin typeface="Dank Mono Regular" panose="00000509000000000000" pitchFamily="50" charset="0"/>
+              </a:rPr>
+              <a:t>-</a:t>
+            </a:r>
+            <a:r>
+              <a:rPr lang="es-ES" b="0" dirty="0" err="1">
+                <a:solidFill>
+                  <a:srgbClr val="D4D4D4"/>
+                </a:solidFill>
+                <a:effectLst/>
+                <a:highlight>
+                  <a:srgbClr val="1E1E1E"/>
+                </a:highlight>
+                <a:latin typeface="Dank Mono Regular" panose="00000509000000000000" pitchFamily="50" charset="0"/>
+              </a:rPr>
+              <a:t>in-time</a:t>
+            </a:r>
+            <a:r>
+              <a:rPr lang="es-ES" b="0" dirty="0">
+                <a:solidFill>
+                  <a:srgbClr val="D4D4D4"/>
+                </a:solidFill>
+                <a:effectLst/>
+                <a:highlight>
+                  <a:srgbClr val="1E1E1E"/>
+                </a:highlight>
+                <a:latin typeface="Dank Mono Regular" panose="00000509000000000000" pitchFamily="50" charset="0"/>
+              </a:rPr>
+              <a:t>) o ‘al vuelo’, y es transparente para el desarrollador y el usuario puesto que la hace el motor en caliente a medida que </a:t>
+            </a:r>
+            <a:r>
+              <a:rPr lang="es-ES" b="0" dirty="0" err="1">
+                <a:solidFill>
+                  <a:srgbClr val="D4D4D4"/>
+                </a:solidFill>
+                <a:effectLst/>
+                <a:highlight>
+                  <a:srgbClr val="1E1E1E"/>
+                </a:highlight>
+                <a:latin typeface="Dank Mono Regular" panose="00000509000000000000" pitchFamily="50" charset="0"/>
+              </a:rPr>
+              <a:t>parsea</a:t>
+            </a:r>
+            <a:r>
+              <a:rPr lang="es-ES" b="0" dirty="0">
+                <a:solidFill>
+                  <a:srgbClr val="D4D4D4"/>
+                </a:solidFill>
+                <a:effectLst/>
+                <a:highlight>
+                  <a:srgbClr val="1E1E1E"/>
+                </a:highlight>
+                <a:latin typeface="Dank Mono Regular" panose="00000509000000000000" pitchFamily="50" charset="0"/>
+              </a:rPr>
+              <a:t> y ejecuta la aplicación.</a:t>
+            </a:r>
+          </a:p>
+          <a:p>
+            <a:br>
+              <a:rPr lang="es-ES" b="0" dirty="0">
+                <a:solidFill>
+                  <a:srgbClr val="D4D4D4"/>
+                </a:solidFill>
+                <a:effectLst/>
+                <a:highlight>
+                  <a:srgbClr val="1E1E1E"/>
+                </a:highlight>
+                <a:latin typeface="Dank Mono Regular" panose="00000509000000000000" pitchFamily="50" charset="0"/>
+              </a:rPr>
+            </a:br>
+            <a:r>
+              <a:rPr lang="es-ES" b="0" dirty="0">
+                <a:solidFill>
+                  <a:srgbClr val="D4D4D4"/>
+                </a:solidFill>
+                <a:effectLst/>
+                <a:highlight>
+                  <a:srgbClr val="1E1E1E"/>
+                </a:highlight>
+                <a:latin typeface="Dank Mono Regular" panose="00000509000000000000" pitchFamily="50" charset="0"/>
+              </a:rPr>
+              <a:t>- </a:t>
+            </a:r>
+            <a:r>
+              <a:rPr lang="es-ES" b="1" dirty="0">
+                <a:solidFill>
+                  <a:srgbClr val="569CD6"/>
+                </a:solidFill>
+                <a:effectLst/>
+                <a:highlight>
+                  <a:srgbClr val="1E1E1E"/>
+                </a:highlight>
+                <a:latin typeface="Dank Mono Regular" panose="00000509000000000000" pitchFamily="50" charset="0"/>
+              </a:rPr>
+              <a:t>Multipropósito</a:t>
+            </a:r>
+            <a:r>
+              <a:rPr lang="es-ES" b="0" dirty="0">
+                <a:solidFill>
+                  <a:srgbClr val="D4D4D4"/>
+                </a:solidFill>
+                <a:effectLst/>
+                <a:highlight>
+                  <a:srgbClr val="1E1E1E"/>
+                </a:highlight>
+                <a:latin typeface="Dank Mono Regular" panose="00000509000000000000" pitchFamily="50" charset="0"/>
+              </a:rPr>
+              <a:t>. No sólo puede emplearse de lado de cliente, es decir, en el navegador, sino también de lado del servidor. </a:t>
+            </a:r>
+            <a:br>
+              <a:rPr lang="es-ES" b="0" dirty="0">
+                <a:solidFill>
+                  <a:srgbClr val="D4D4D4"/>
+                </a:solidFill>
+                <a:effectLst/>
+                <a:highlight>
+                  <a:srgbClr val="1E1E1E"/>
+                </a:highlight>
+                <a:latin typeface="Dank Mono Regular" panose="00000509000000000000" pitchFamily="50" charset="0"/>
+              </a:rPr>
+            </a:br>
+            <a:endParaRPr lang="es-ES" b="0" dirty="0">
+              <a:solidFill>
+                <a:srgbClr val="D4D4D4"/>
+              </a:solidFill>
+              <a:effectLst/>
+              <a:highlight>
+                <a:srgbClr val="1E1E1E"/>
+              </a:highlight>
+              <a:latin typeface="Dank Mono Regular" panose="00000509000000000000" pitchFamily="50" charset="0"/>
+            </a:endParaRPr>
+          </a:p>
+          <a:p>
+            <a:r>
+              <a:rPr lang="es-ES" b="0" dirty="0">
+                <a:solidFill>
+                  <a:srgbClr val="D4D4D4"/>
+                </a:solidFill>
+                <a:effectLst/>
+                <a:highlight>
+                  <a:srgbClr val="1E1E1E"/>
+                </a:highlight>
+                <a:latin typeface="Dank Mono Regular" panose="00000509000000000000" pitchFamily="50" charset="0"/>
+              </a:rPr>
+              <a:t>Esto es posible gracias a plataformas como Node.js. </a:t>
+            </a:r>
+            <a:r>
+              <a:rPr lang="es-ES" b="0" dirty="0" err="1">
+                <a:solidFill>
+                  <a:srgbClr val="D4D4D4"/>
+                </a:solidFill>
+                <a:effectLst/>
+                <a:highlight>
+                  <a:srgbClr val="1E1E1E"/>
+                </a:highlight>
+                <a:latin typeface="Dank Mono Regular" panose="00000509000000000000" pitchFamily="50" charset="0"/>
+              </a:rPr>
+              <a:t>Node</a:t>
+            </a:r>
+            <a:r>
+              <a:rPr lang="es-ES" b="0" dirty="0">
+                <a:solidFill>
+                  <a:srgbClr val="D4D4D4"/>
+                </a:solidFill>
+                <a:effectLst/>
+                <a:highlight>
+                  <a:srgbClr val="1E1E1E"/>
+                </a:highlight>
+                <a:latin typeface="Dank Mono Regular" panose="00000509000000000000" pitchFamily="50" charset="0"/>
+              </a:rPr>
+              <a:t> es fundamentalmente el motor V8 de Google extraído o “portado” como una aplicación </a:t>
+            </a:r>
+            <a:r>
+              <a:rPr lang="es-ES" b="0" i="1" dirty="0" err="1">
+                <a:solidFill>
+                  <a:srgbClr val="D4D4D4"/>
+                </a:solidFill>
+                <a:effectLst/>
+                <a:highlight>
+                  <a:srgbClr val="1E1E1E"/>
+                </a:highlight>
+                <a:latin typeface="Dank Mono Regular" panose="00000509000000000000" pitchFamily="50" charset="0"/>
+              </a:rPr>
+              <a:t>standalone</a:t>
+            </a:r>
+            <a:r>
+              <a:rPr lang="es-ES" b="0" dirty="0">
+                <a:solidFill>
+                  <a:srgbClr val="D4D4D4"/>
+                </a:solidFill>
+                <a:effectLst/>
+                <a:highlight>
+                  <a:srgbClr val="1E1E1E"/>
+                </a:highlight>
+                <a:latin typeface="Dank Mono Regular" panose="00000509000000000000" pitchFamily="50" charset="0"/>
+              </a:rPr>
+              <a:t> que podemos instalar en cualquier máquina. Este motor v8 es la pieza que utiliza el navegador </a:t>
+            </a:r>
+            <a:r>
+              <a:rPr lang="es-ES" b="0" dirty="0" err="1">
+                <a:solidFill>
+                  <a:srgbClr val="D4D4D4"/>
+                </a:solidFill>
+                <a:effectLst/>
+                <a:highlight>
+                  <a:srgbClr val="1E1E1E"/>
+                </a:highlight>
+                <a:latin typeface="Dank Mono Regular" panose="00000509000000000000" pitchFamily="50" charset="0"/>
+              </a:rPr>
+              <a:t>Chromium</a:t>
+            </a:r>
+            <a:r>
+              <a:rPr lang="es-ES" b="0" dirty="0">
+                <a:solidFill>
+                  <a:srgbClr val="D4D4D4"/>
+                </a:solidFill>
+                <a:effectLst/>
+                <a:highlight>
+                  <a:srgbClr val="1E1E1E"/>
+                </a:highlight>
+                <a:latin typeface="Dank Mono Regular" panose="00000509000000000000" pitchFamily="50" charset="0"/>
+              </a:rPr>
+              <a:t> para poder interpretar y ejecutar código JavaScript.</a:t>
+            </a:r>
+          </a:p>
+          <a:p>
+            <a:br>
+              <a:rPr lang="es-ES" b="0" dirty="0">
+                <a:solidFill>
+                  <a:srgbClr val="D4D4D4"/>
+                </a:solidFill>
+                <a:effectLst/>
+                <a:highlight>
+                  <a:srgbClr val="1E1E1E"/>
+                </a:highlight>
+                <a:latin typeface="Dank Mono Regular" panose="00000509000000000000" pitchFamily="50" charset="0"/>
+              </a:rPr>
+            </a:br>
+            <a:r>
+              <a:rPr lang="es-ES" b="0" dirty="0">
+                <a:solidFill>
+                  <a:srgbClr val="D4D4D4"/>
+                </a:solidFill>
+                <a:effectLst/>
+                <a:highlight>
+                  <a:srgbClr val="1E1E1E"/>
+                </a:highlight>
+                <a:latin typeface="Dank Mono Regular" panose="00000509000000000000" pitchFamily="50" charset="0"/>
+              </a:rPr>
+              <a:t>Por lo tanto, gracias a </a:t>
+            </a:r>
+            <a:r>
+              <a:rPr lang="es-ES" b="0" dirty="0" err="1">
+                <a:solidFill>
+                  <a:srgbClr val="D4D4D4"/>
+                </a:solidFill>
+                <a:effectLst/>
+                <a:highlight>
+                  <a:srgbClr val="1E1E1E"/>
+                </a:highlight>
+                <a:latin typeface="Dank Mono Regular" panose="00000509000000000000" pitchFamily="50" charset="0"/>
+              </a:rPr>
+              <a:t>Node</a:t>
+            </a:r>
+            <a:r>
+              <a:rPr lang="es-ES" b="0" dirty="0">
+                <a:solidFill>
+                  <a:srgbClr val="D4D4D4"/>
+                </a:solidFill>
+                <a:effectLst/>
+                <a:highlight>
+                  <a:srgbClr val="1E1E1E"/>
+                </a:highlight>
+                <a:latin typeface="Dank Mono Regular" panose="00000509000000000000" pitchFamily="50" charset="0"/>
+              </a:rPr>
+              <a:t>, ahora tenemos el </a:t>
+            </a:r>
+            <a:r>
+              <a:rPr lang="es-ES" b="0" dirty="0" err="1">
+                <a:solidFill>
+                  <a:srgbClr val="D4D4D4"/>
+                </a:solidFill>
+                <a:effectLst/>
+                <a:highlight>
+                  <a:srgbClr val="1E1E1E"/>
+                </a:highlight>
+                <a:latin typeface="Dank Mono Regular" panose="00000509000000000000" pitchFamily="50" charset="0"/>
               </a:rPr>
               <a:t>engine</a:t>
             </a:r>
             <a:r>
-              <a:rPr lang="es-ES" b="0" i="0" dirty="0">
-                <a:solidFill>
-                  <a:srgbClr val="D1D2D3"/>
+              <a:rPr lang="es-ES" b="0" dirty="0">
+                <a:solidFill>
+                  <a:srgbClr val="D4D4D4"/>
                 </a:solidFill>
                 <a:effectLst/>
-                <a:latin typeface="Slack-Lato"/>
+                <a:highlight>
+                  <a:srgbClr val="1E1E1E"/>
+                </a:highlight>
+                <a:latin typeface="Dank Mono Regular" panose="00000509000000000000" pitchFamily="50" charset="0"/>
               </a:rPr>
-              <a:t> 'no entiende', pero como es lógico, en un programa de propósito general como JS esto no tendría mucho sentido porque no sería factible. Sin embargo, en lenguajes de propósito reducido como HTML o CSS si que se puede aplicar la compatibilidad hacia adelante y no hacia atrás: estos lenguajes son mucho más declarativos y representan un conjunto de reglas (CSS) o conjunto de etiquetas/nodos (HTML) y por tanto podemos obviar aquellas reglas o etiquetas que no entendamos sin interferir con el resto.</a:t>
-            </a:r>
+              <a:t> de Chrome allá donde queramos, haciendo posible ejecutar JavaScript fuera de un navegador, por ejemplo, en un servidor.</a:t>
+            </a:r>
+          </a:p>
+          <a:p>
             <a:br>
-              <a:rPr lang="es-ES" b="0" i="0" dirty="0">
-                <a:solidFill>
-                  <a:srgbClr val="D1D2D3"/>
+              <a:rPr lang="es-ES" b="0" dirty="0">
+                <a:solidFill>
+                  <a:srgbClr val="D4D4D4"/>
                 </a:solidFill>
                 <a:effectLst/>
-                <a:latin typeface="Slack-Lato"/>
+                <a:highlight>
+                  <a:srgbClr val="1E1E1E"/>
+                </a:highlight>
+                <a:latin typeface="Dank Mono Regular" panose="00000509000000000000" pitchFamily="50" charset="0"/>
               </a:rPr>
             </a:br>
+            <a:r>
+              <a:rPr lang="es-ES" b="0" dirty="0">
+                <a:solidFill>
+                  <a:srgbClr val="D4D4D4"/>
+                </a:solidFill>
+                <a:effectLst/>
+                <a:highlight>
+                  <a:srgbClr val="1E1E1E"/>
+                </a:highlight>
+                <a:latin typeface="Dank Mono Regular" panose="00000509000000000000" pitchFamily="50" charset="0"/>
+              </a:rPr>
+              <a:t>- </a:t>
+            </a:r>
+            <a:r>
+              <a:rPr lang="es-ES" b="1" dirty="0">
+                <a:solidFill>
+                  <a:srgbClr val="569CD6"/>
+                </a:solidFill>
+                <a:effectLst/>
+                <a:highlight>
+                  <a:srgbClr val="1E1E1E"/>
+                </a:highlight>
+                <a:latin typeface="Dank Mono Regular" panose="00000509000000000000" pitchFamily="50" charset="0"/>
+              </a:rPr>
+              <a:t>Objetos</a:t>
+            </a:r>
+            <a:r>
+              <a:rPr lang="es-ES" b="0" dirty="0">
+                <a:solidFill>
+                  <a:srgbClr val="D4D4D4"/>
+                </a:solidFill>
+                <a:effectLst/>
+                <a:highlight>
+                  <a:srgbClr val="1E1E1E"/>
+                </a:highlight>
+                <a:latin typeface="Dank Mono Regular" panose="00000509000000000000" pitchFamily="50" charset="0"/>
+              </a:rPr>
+              <a:t>. El lenguaje nos da de serie los objetos (no confundir con clases) y es el elemento estrella del lenguaje. Os adelanto algo que repetiremos en muchas sesiones: “Casi todo en JS son objetos, o se comporta como si lo fuera gracias al </a:t>
+            </a:r>
+            <a:r>
+              <a:rPr lang="es-ES" b="0" dirty="0" err="1">
+                <a:solidFill>
+                  <a:srgbClr val="D4D4D4"/>
+                </a:solidFill>
+                <a:effectLst/>
+                <a:highlight>
+                  <a:srgbClr val="1E1E1E"/>
+                </a:highlight>
+                <a:latin typeface="Dank Mono Regular" panose="00000509000000000000" pitchFamily="50" charset="0"/>
+              </a:rPr>
+              <a:t>auto-boxing</a:t>
+            </a:r>
+            <a:r>
+              <a:rPr lang="es-ES" b="0" dirty="0">
+                <a:solidFill>
+                  <a:srgbClr val="D4D4D4"/>
+                </a:solidFill>
+                <a:effectLst/>
+                <a:highlight>
+                  <a:srgbClr val="1E1E1E"/>
+                </a:highlight>
+                <a:latin typeface="Dank Mono Regular" panose="00000509000000000000" pitchFamily="50" charset="0"/>
+              </a:rPr>
+              <a:t>. Los primitivos son la excepción”. </a:t>
+            </a:r>
+          </a:p>
+          <a:p>
+            <a:endParaRPr lang="es-ES" b="0" dirty="0">
+              <a:solidFill>
+                <a:srgbClr val="D4D4D4"/>
+              </a:solidFill>
+              <a:effectLst/>
+              <a:highlight>
+                <a:srgbClr val="1E1E1E"/>
+              </a:highlight>
+              <a:latin typeface="Dank Mono Regular" panose="00000509000000000000" pitchFamily="50" charset="0"/>
+            </a:endParaRPr>
+          </a:p>
+          <a:p>
+            <a:r>
+              <a:rPr lang="es-ES" b="0" dirty="0">
+                <a:solidFill>
+                  <a:srgbClr val="D4D4D4"/>
+                </a:solidFill>
+                <a:effectLst/>
+                <a:highlight>
+                  <a:srgbClr val="1E1E1E"/>
+                </a:highlight>
+                <a:latin typeface="Dank Mono Regular" panose="00000509000000000000" pitchFamily="50" charset="0"/>
+              </a:rPr>
+              <a:t>- </a:t>
+            </a:r>
+            <a:r>
+              <a:rPr lang="es-ES" b="1" dirty="0">
+                <a:solidFill>
+                  <a:srgbClr val="569CD6"/>
+                </a:solidFill>
+                <a:effectLst/>
+                <a:highlight>
+                  <a:srgbClr val="1E1E1E"/>
+                </a:highlight>
+                <a:latin typeface="Dank Mono Regular" panose="00000509000000000000" pitchFamily="50" charset="0"/>
+              </a:rPr>
+              <a:t>Prototipos.</a:t>
+            </a:r>
+            <a:r>
+              <a:rPr lang="es-ES" b="0" dirty="0">
+                <a:solidFill>
+                  <a:srgbClr val="D4D4D4"/>
+                </a:solidFill>
+                <a:effectLst/>
+                <a:highlight>
+                  <a:srgbClr val="1E1E1E"/>
+                </a:highlight>
+                <a:latin typeface="Dank Mono Regular" panose="00000509000000000000" pitchFamily="50" charset="0"/>
+              </a:rPr>
+              <a:t> Los prototipos son un mecanismo del lenguaje que permiten enriquecer a los objetos y poder generar un sistema de herencia más flexible que la herencia clásica con clases.</a:t>
+            </a:r>
+          </a:p>
+          <a:p>
             <a:br>
-              <a:rPr lang="es-ES" b="0" i="0" dirty="0">
-                <a:solidFill>
-                  <a:srgbClr val="D1D2D3"/>
+              <a:rPr lang="es-ES" b="0" dirty="0">
+                <a:solidFill>
+                  <a:srgbClr val="D4D4D4"/>
                 </a:solidFill>
                 <a:effectLst/>
-                <a:latin typeface="Slack-Lato"/>
+                <a:highlight>
+                  <a:srgbClr val="1E1E1E"/>
+                </a:highlight>
+                <a:latin typeface="Dank Mono Regular" panose="00000509000000000000" pitchFamily="50" charset="0"/>
               </a:rPr>
             </a:br>
             <a:r>
-              <a:rPr lang="es-ES" b="0" i="0" dirty="0">
-                <a:solidFill>
-                  <a:srgbClr val="D1D2D3"/>
+              <a:rPr lang="es-ES" b="0" dirty="0">
+                <a:solidFill>
+                  <a:srgbClr val="D4D4D4"/>
                 </a:solidFill>
                 <a:effectLst/>
-                <a:latin typeface="Slack-Lato"/>
+                <a:highlight>
+                  <a:srgbClr val="1E1E1E"/>
+                </a:highlight>
+                <a:latin typeface="Dank Mono Regular" panose="00000509000000000000" pitchFamily="50" charset="0"/>
               </a:rPr>
-              <a:t>Como Nota al margen: la gran mayoría de los comportamientos que se critican a JS tienen que ver con su compatibilidad hacia atrás. Lo que es liberado en JS tiene que permanecer siempre, no podemos borrarlo o rehacerlo. Pagaremos el precio de arrastrar dichos comportamientos, pero a cambio evitamos que se rompa la web.</a:t>
+              <a:t>- </a:t>
+            </a:r>
+            <a:r>
+              <a:rPr lang="es-ES" b="1" dirty="0">
+                <a:solidFill>
+                  <a:srgbClr val="569CD6"/>
+                </a:solidFill>
+                <a:effectLst/>
+                <a:highlight>
+                  <a:srgbClr val="1E1E1E"/>
+                </a:highlight>
+                <a:latin typeface="Dank Mono Regular" panose="00000509000000000000" pitchFamily="50" charset="0"/>
+              </a:rPr>
+              <a:t>JSON</a:t>
+            </a:r>
+            <a:r>
+              <a:rPr lang="es-ES" b="0" dirty="0">
+                <a:solidFill>
+                  <a:srgbClr val="D4D4D4"/>
+                </a:solidFill>
+                <a:effectLst/>
+                <a:highlight>
+                  <a:srgbClr val="1E1E1E"/>
+                </a:highlight>
+                <a:latin typeface="Dank Mono Regular" panose="00000509000000000000" pitchFamily="50" charset="0"/>
+              </a:rPr>
+              <a:t>. También de serie nos proporciona una notación literal de objetos, con lo que poder serializar objetos hacia afuera de nuestro código (es decir, exportar, por ejemplo hacia un fichero de texto) y </a:t>
+            </a:r>
+            <a:r>
+              <a:rPr lang="es-ES" b="0" dirty="0" err="1">
+                <a:solidFill>
+                  <a:srgbClr val="D4D4D4"/>
+                </a:solidFill>
+                <a:effectLst/>
+                <a:highlight>
+                  <a:srgbClr val="1E1E1E"/>
+                </a:highlight>
+                <a:latin typeface="Dank Mono Regular" panose="00000509000000000000" pitchFamily="50" charset="0"/>
+              </a:rPr>
+              <a:t>deserializar</a:t>
+            </a:r>
+            <a:r>
+              <a:rPr lang="es-ES" b="0" dirty="0">
+                <a:solidFill>
+                  <a:srgbClr val="D4D4D4"/>
+                </a:solidFill>
+                <a:effectLst/>
+                <a:highlight>
+                  <a:srgbClr val="1E1E1E"/>
+                </a:highlight>
+                <a:latin typeface="Dank Mono Regular" panose="00000509000000000000" pitchFamily="50" charset="0"/>
+              </a:rPr>
+              <a:t> (lo que equivale a importar objetos desde el exterior hacia nuestro código).</a:t>
+            </a:r>
+          </a:p>
+          <a:p>
+            <a:br>
+              <a:rPr lang="es-ES" b="0" dirty="0">
+                <a:solidFill>
+                  <a:srgbClr val="D4D4D4"/>
+                </a:solidFill>
+                <a:effectLst/>
+                <a:highlight>
+                  <a:srgbClr val="1E1E1E"/>
+                </a:highlight>
+                <a:latin typeface="Dank Mono Regular" panose="00000509000000000000" pitchFamily="50" charset="0"/>
+              </a:rPr>
+            </a:br>
+            <a:r>
+              <a:rPr lang="es-ES" b="0" dirty="0">
+                <a:solidFill>
+                  <a:srgbClr val="D4D4D4"/>
+                </a:solidFill>
+                <a:effectLst/>
+                <a:highlight>
+                  <a:srgbClr val="1E1E1E"/>
+                </a:highlight>
+                <a:latin typeface="Dank Mono Regular" panose="00000509000000000000" pitchFamily="50" charset="0"/>
+              </a:rPr>
+              <a:t>- </a:t>
+            </a:r>
+            <a:r>
+              <a:rPr lang="es-ES" b="1" dirty="0">
+                <a:solidFill>
+                  <a:srgbClr val="569CD6"/>
+                </a:solidFill>
+                <a:effectLst/>
+                <a:highlight>
+                  <a:srgbClr val="1E1E1E"/>
+                </a:highlight>
+                <a:latin typeface="Dank Mono Regular" panose="00000509000000000000" pitchFamily="50" charset="0"/>
+              </a:rPr>
+              <a:t>Popularidad e Importancia</a:t>
+            </a:r>
+            <a:r>
+              <a:rPr lang="es-ES" b="0" dirty="0">
+                <a:solidFill>
+                  <a:srgbClr val="D4D4D4"/>
+                </a:solidFill>
+                <a:effectLst/>
+                <a:highlight>
+                  <a:srgbClr val="1E1E1E"/>
+                </a:highlight>
+                <a:latin typeface="Dank Mono Regular" panose="00000509000000000000" pitchFamily="50" charset="0"/>
+              </a:rPr>
+              <a:t>. JavaScript es el estándar de la web y esto lo convierte en el lenguaje más utilizado del mundo.</a:t>
             </a:r>
           </a:p>
           <a:p>
@@ -2857,7 +2873,7 @@
     </p:spTree>
     <p:extLst>
       <p:ext uri="{BB962C8B-B14F-4D97-AF65-F5344CB8AC3E}">
-        <p14:creationId xmlns:p14="http://schemas.microsoft.com/office/powerpoint/2010/main" val="2554531523"/>
+        <p14:creationId xmlns:p14="http://schemas.microsoft.com/office/powerpoint/2010/main" val="3147683687"/>
       </p:ext>
     </p:extLst>
   </p:cSld>
@@ -2917,795 +2933,147 @@
           <a:lstStyle/>
           <a:p>
             <a:r>
-              <a:rPr lang="es-ES" b="0" dirty="0">
-                <a:solidFill>
-                  <a:srgbClr val="D4D4D4"/>
-                </a:solidFill>
-                <a:effectLst/>
-                <a:highlight>
-                  <a:srgbClr val="1E1E1E"/>
-                </a:highlight>
-                <a:latin typeface="Dank Mono Regular" panose="00000509000000000000" pitchFamily="50" charset="0"/>
-              </a:rPr>
-              <a:t>JavaScript evoluciona en base a </a:t>
-            </a:r>
-            <a:r>
-              <a:rPr lang="es-ES" b="0" i="1" dirty="0">
-                <a:solidFill>
-                  <a:srgbClr val="D4D4D4"/>
-                </a:solidFill>
-                <a:effectLst/>
-                <a:highlight>
-                  <a:srgbClr val="1E1E1E"/>
-                </a:highlight>
-                <a:latin typeface="Dank Mono Regular" panose="00000509000000000000" pitchFamily="50" charset="0"/>
-              </a:rPr>
-              <a:t>releases</a:t>
-            </a:r>
-            <a:r>
-              <a:rPr lang="es-ES" b="0" dirty="0">
-                <a:solidFill>
-                  <a:srgbClr val="D4D4D4"/>
-                </a:solidFill>
-                <a:effectLst/>
-                <a:highlight>
-                  <a:srgbClr val="1E1E1E"/>
-                </a:highlight>
-                <a:latin typeface="Dank Mono Regular" panose="00000509000000000000" pitchFamily="50" charset="0"/>
-              </a:rPr>
-              <a:t>, es decir, se liberan nuevas versiones del lenguaje con un conjunto de nuevas características.</a:t>
+              <a:rPr lang="es-ES" dirty="0"/>
+              <a:t>Nos vamos a detener brevemente a tratar un tema de gran importancia en el ecosistema web como es la compatibilidad, y veremos el tipo de compatibilidad que ofrecen los 3 lenguajes principales involucrados en el mundo web. </a:t>
+            </a:r>
+            <a:br>
+              <a:rPr lang="es-ES" dirty="0"/>
+            </a:br>
+            <a:r>
+              <a:rPr lang="es-ES" dirty="0"/>
+              <a:t>La idea con esta </a:t>
+            </a:r>
+            <a:r>
+              <a:rPr lang="es-ES" dirty="0" err="1"/>
+              <a:t>slide</a:t>
+            </a:r>
+            <a:r>
+              <a:rPr lang="es-ES" dirty="0"/>
+              <a:t> es concienciar del motivo por el cual, en muchas ocasiones, se ha denostado a JavaScript como un lenguaje con fallos y comportamientos extraños. Veámoslo, en resumen:</a:t>
             </a:r>
           </a:p>
           <a:p>
+            <a:endParaRPr lang="es-ES" dirty="0"/>
+          </a:p>
+          <a:p>
+            <a:pPr algn="l">
+              <a:buFont typeface="Arial" panose="020B0604020202020204" pitchFamily="34" charset="0"/>
+              <a:buChar char="•"/>
+            </a:pPr>
+            <a:r>
+              <a:rPr lang="es-ES" b="0" i="0" dirty="0">
+                <a:solidFill>
+                  <a:srgbClr val="D1D2D3"/>
+                </a:solidFill>
+                <a:effectLst/>
+                <a:latin typeface="Slack-Lato"/>
+              </a:rPr>
+              <a:t> La compatibilidad hacia atrás implica que cualquier </a:t>
+            </a:r>
+            <a:r>
+              <a:rPr lang="es-ES" b="0" i="0" dirty="0" err="1">
+                <a:solidFill>
+                  <a:srgbClr val="D1D2D3"/>
+                </a:solidFill>
+                <a:effectLst/>
+                <a:latin typeface="Slack-Lato"/>
+              </a:rPr>
+              <a:t>feature</a:t>
+            </a:r>
+            <a:r>
+              <a:rPr lang="es-ES" b="0" i="0" dirty="0">
+                <a:solidFill>
+                  <a:srgbClr val="D1D2D3"/>
+                </a:solidFill>
+                <a:effectLst/>
+                <a:latin typeface="Slack-Lato"/>
+              </a:rPr>
+              <a:t> del lenguaje, por antigua que sea, debe ser soportada pase el tiempo que pase, con el objetivo de que programas antiguos no "se rompan" en navegadores nuevos. Cualquier web por antiguo que sea su código va a funcionar hoy día. JS es compatible hacia atrás, y esto puede explicar que ciertas decisiones del lenguaje que podrían considerarse polémicas hoy día, son herencia histórica que no puede deshacerse.</a:t>
+            </a:r>
+          </a:p>
+          <a:p>
+            <a:pPr algn="l">
+              <a:buFont typeface="Arial" panose="020B0604020202020204" pitchFamily="34" charset="0"/>
+              <a:buChar char="•"/>
+            </a:pPr>
+            <a:r>
+              <a:rPr lang="es-ES" b="0" i="0" dirty="0">
+                <a:solidFill>
+                  <a:srgbClr val="D1D2D3"/>
+                </a:solidFill>
+                <a:effectLst/>
+                <a:latin typeface="Slack-Lato"/>
+              </a:rPr>
+              <a:t> La compatibilidad hacia adelante, al contrario, implica que </a:t>
+            </a:r>
+            <a:r>
+              <a:rPr lang="es-ES" b="0" i="0" dirty="0" err="1">
+                <a:solidFill>
+                  <a:srgbClr val="D1D2D3"/>
+                </a:solidFill>
+                <a:effectLst/>
+                <a:latin typeface="Slack-Lato"/>
+              </a:rPr>
+              <a:t>features</a:t>
+            </a:r>
+            <a:r>
+              <a:rPr lang="es-ES" b="0" i="0" dirty="0">
+                <a:solidFill>
+                  <a:srgbClr val="D1D2D3"/>
+                </a:solidFill>
+                <a:effectLst/>
+                <a:latin typeface="Slack-Lato"/>
+              </a:rPr>
+              <a:t> o sintaxis novedosas del lenguaje no van a provocar errores si se ejecutan en navegadores antiguos o sin soporte. Esto se hace ignorando lo que el </a:t>
+            </a:r>
+            <a:r>
+              <a:rPr lang="es-ES" b="0" i="0" dirty="0" err="1">
+                <a:solidFill>
+                  <a:srgbClr val="D1D2D3"/>
+                </a:solidFill>
+                <a:effectLst/>
+                <a:latin typeface="Slack-Lato"/>
+              </a:rPr>
+              <a:t>engine</a:t>
+            </a:r>
+            <a:r>
+              <a:rPr lang="es-ES" b="0" i="0" dirty="0">
+                <a:solidFill>
+                  <a:srgbClr val="D1D2D3"/>
+                </a:solidFill>
+                <a:effectLst/>
+                <a:latin typeface="Slack-Lato"/>
+              </a:rPr>
+              <a:t> 'no entiende', pero como es lógico, en un programa de propósito general como JS esto no tendría mucho sentido porque no sería factible. Sin embargo, en lenguajes de propósito reducido como HTML o CSS si que se puede aplicar la compatibilidad hacia adelante y no hacia atrás: estos lenguajes son mucho más declarativos y representan un conjunto de reglas (CSS) o conjunto de etiquetas/nodos (HTML) y por tanto podemos obviar aquellas reglas o etiquetas que no entendamos sin interferir con el resto.</a:t>
+            </a:r>
             <a:br>
-              <a:rPr lang="es-ES" b="0" dirty="0">
-                <a:solidFill>
-                  <a:srgbClr val="D4D4D4"/>
+              <a:rPr lang="es-ES" b="0" i="0" dirty="0">
+                <a:solidFill>
+                  <a:srgbClr val="D1D2D3"/>
                 </a:solidFill>
                 <a:effectLst/>
-                <a:highlight>
-                  <a:srgbClr val="1E1E1E"/>
-                </a:highlight>
-                <a:latin typeface="Dank Mono Regular" panose="00000509000000000000" pitchFamily="50" charset="0"/>
+                <a:latin typeface="Slack-Lato"/>
               </a:rPr>
             </a:br>
-            <a:r>
-              <a:rPr lang="es-ES" b="0" dirty="0">
-                <a:solidFill>
-                  <a:srgbClr val="D4D4D4"/>
+            <a:br>
+              <a:rPr lang="es-ES" b="0" i="0" dirty="0">
+                <a:solidFill>
+                  <a:srgbClr val="D1D2D3"/>
                 </a:solidFill>
                 <a:effectLst/>
-                <a:highlight>
-                  <a:srgbClr val="1E1E1E"/>
-                </a:highlight>
-                <a:latin typeface="Dank Mono Regular" panose="00000509000000000000" pitchFamily="50" charset="0"/>
-              </a:rPr>
-              <a:t>Si bien las primeras versiones o releases fueron un poco caóticas, menos regulares o más orgánicas, principalmente debido a que sucedieron a medida que se necesitaban nuevas características del lenguaje, a partir de 2015 se decidió estandarizar las releases y hacerlas anuales.</a:t>
-            </a:r>
-          </a:p>
-          <a:p>
-            <a:br>
-              <a:rPr lang="es-ES" b="0" dirty="0">
-                <a:solidFill>
-                  <a:srgbClr val="D4D4D4"/>
-                </a:solidFill>
-                <a:effectLst/>
-                <a:highlight>
-                  <a:srgbClr val="1E1E1E"/>
-                </a:highlight>
-                <a:latin typeface="Dank Mono Regular" panose="00000509000000000000" pitchFamily="50" charset="0"/>
+                <a:latin typeface="Slack-Lato"/>
               </a:rPr>
             </a:br>
             <a:r>
-              <a:rPr lang="es-ES" b="0" dirty="0">
-                <a:solidFill>
-                  <a:srgbClr val="D4D4D4"/>
+              <a:rPr lang="es-ES" b="0" i="0" dirty="0">
+                <a:solidFill>
+                  <a:srgbClr val="D1D2D3"/>
                 </a:solidFill>
                 <a:effectLst/>
-                <a:highlight>
-                  <a:srgbClr val="1E1E1E"/>
-                </a:highlight>
-                <a:latin typeface="Dank Mono Regular" panose="00000509000000000000" pitchFamily="50" charset="0"/>
+                <a:latin typeface="Slack-Lato"/>
               </a:rPr>
-              <a:t>En este proceso estandarizado, existe un comité de expertos llamado TC39 que apadrina las nuevas propuestas que la comunidad sugiere (cualquiera de nosotros puede hacerlo) y las promociona en diferentes </a:t>
-            </a:r>
-            <a:r>
-              <a:rPr lang="es-ES" b="0" i="1" dirty="0" err="1">
-                <a:solidFill>
-                  <a:srgbClr val="D4D4D4"/>
-                </a:solidFill>
-                <a:effectLst/>
-                <a:highlight>
-                  <a:srgbClr val="1E1E1E"/>
-                </a:highlight>
-                <a:latin typeface="Dank Mono Regular" panose="00000509000000000000" pitchFamily="50" charset="0"/>
-              </a:rPr>
-              <a:t>stages</a:t>
-            </a:r>
-            <a:r>
-              <a:rPr lang="es-ES" b="0" dirty="0">
-                <a:solidFill>
-                  <a:srgbClr val="D4D4D4"/>
-                </a:solidFill>
-                <a:effectLst/>
-                <a:highlight>
-                  <a:srgbClr val="1E1E1E"/>
-                </a:highlight>
-                <a:latin typeface="Dank Mono Regular" panose="00000509000000000000" pitchFamily="50" charset="0"/>
-              </a:rPr>
-              <a:t> del 1 al 4 en función del grado de madurez. De modo que si una nueva característica alcanza el </a:t>
-            </a:r>
-            <a:r>
-              <a:rPr lang="es-ES" b="0" i="1" dirty="0">
-                <a:solidFill>
-                  <a:srgbClr val="D4D4D4"/>
-                </a:solidFill>
-                <a:effectLst/>
-                <a:highlight>
-                  <a:srgbClr val="1E1E1E"/>
-                </a:highlight>
-                <a:latin typeface="Dank Mono Regular" panose="00000509000000000000" pitchFamily="50" charset="0"/>
-              </a:rPr>
-              <a:t>stage</a:t>
-            </a:r>
-            <a:r>
-              <a:rPr lang="es-ES" b="0" dirty="0">
-                <a:solidFill>
-                  <a:srgbClr val="D4D4D4"/>
-                </a:solidFill>
-                <a:effectLst/>
-                <a:highlight>
-                  <a:srgbClr val="1E1E1E"/>
-                </a:highlight>
-                <a:latin typeface="Dank Mono Regular" panose="00000509000000000000" pitchFamily="50" charset="0"/>
-              </a:rPr>
-              <a:t> 4 significa que va a ser liberada con la siguiente </a:t>
-            </a:r>
-            <a:r>
-              <a:rPr lang="es-ES" b="0" dirty="0" err="1">
-                <a:solidFill>
-                  <a:srgbClr val="D4D4D4"/>
-                </a:solidFill>
-                <a:effectLst/>
-                <a:highlight>
-                  <a:srgbClr val="1E1E1E"/>
-                </a:highlight>
-                <a:latin typeface="Dank Mono Regular" panose="00000509000000000000" pitchFamily="50" charset="0"/>
-              </a:rPr>
-              <a:t>release</a:t>
-            </a:r>
-            <a:r>
-              <a:rPr lang="es-ES" b="0" dirty="0">
-                <a:solidFill>
-                  <a:srgbClr val="D4D4D4"/>
-                </a:solidFill>
-                <a:effectLst/>
-                <a:highlight>
-                  <a:srgbClr val="1E1E1E"/>
-                </a:highlight>
-                <a:latin typeface="Dank Mono Regular" panose="00000509000000000000" pitchFamily="50" charset="0"/>
-              </a:rPr>
-              <a:t> anual.</a:t>
-            </a:r>
-          </a:p>
-          <a:p>
-            <a:endParaRPr lang="es-ES" b="0" dirty="0">
-              <a:solidFill>
-                <a:srgbClr val="D4D4D4"/>
-              </a:solidFill>
-              <a:effectLst/>
-              <a:highlight>
-                <a:srgbClr val="1E1E1E"/>
-              </a:highlight>
-              <a:latin typeface="Dank Mono Regular" panose="00000509000000000000" pitchFamily="50" charset="0"/>
-            </a:endParaRPr>
-          </a:p>
-          <a:p>
-            <a:r>
-              <a:rPr lang="es-ES" b="0" dirty="0">
-                <a:solidFill>
-                  <a:srgbClr val="D4D4D4"/>
-                </a:solidFill>
-                <a:effectLst/>
-                <a:highlight>
-                  <a:srgbClr val="1E1E1E"/>
-                </a:highlight>
-                <a:latin typeface="Dank Mono Regular" panose="00000509000000000000" pitchFamily="50" charset="0"/>
-              </a:rPr>
-              <a:t>Lo cierto es que en cuanto a compatibilidad lo importante no es tanto la versión sino la característica en si. Es decir, cada nueva característica se lanza englobada en una </a:t>
-            </a:r>
-            <a:r>
-              <a:rPr lang="es-ES" b="0" dirty="0" err="1">
-                <a:solidFill>
-                  <a:srgbClr val="D4D4D4"/>
-                </a:solidFill>
-                <a:effectLst/>
-                <a:highlight>
-                  <a:srgbClr val="1E1E1E"/>
-                </a:highlight>
-                <a:latin typeface="Dank Mono Regular" panose="00000509000000000000" pitchFamily="50" charset="0"/>
-              </a:rPr>
-              <a:t>release</a:t>
-            </a:r>
-            <a:r>
-              <a:rPr lang="es-ES" b="0" dirty="0">
-                <a:solidFill>
-                  <a:srgbClr val="D4D4D4"/>
-                </a:solidFill>
-                <a:effectLst/>
-                <a:highlight>
-                  <a:srgbClr val="1E1E1E"/>
-                </a:highlight>
-                <a:latin typeface="Dank Mono Regular" panose="00000509000000000000" pitchFamily="50" charset="0"/>
-              </a:rPr>
-              <a:t>, esto es cierto, pero un navegador o plataforma podría soportar total o parcialmente dicha </a:t>
-            </a:r>
-            <a:r>
-              <a:rPr lang="es-ES" b="0" dirty="0" err="1">
-                <a:solidFill>
-                  <a:srgbClr val="D4D4D4"/>
-                </a:solidFill>
-                <a:effectLst/>
-                <a:highlight>
-                  <a:srgbClr val="1E1E1E"/>
-                </a:highlight>
-                <a:latin typeface="Dank Mono Regular" panose="00000509000000000000" pitchFamily="50" charset="0"/>
-              </a:rPr>
-              <a:t>release</a:t>
-            </a:r>
-            <a:r>
-              <a:rPr lang="es-ES" b="0" dirty="0">
-                <a:solidFill>
-                  <a:srgbClr val="D4D4D4"/>
-                </a:solidFill>
-                <a:effectLst/>
-                <a:highlight>
-                  <a:srgbClr val="1E1E1E"/>
-                </a:highlight>
-                <a:latin typeface="Dank Mono Regular" panose="00000509000000000000" pitchFamily="50" charset="0"/>
-              </a:rPr>
-              <a:t>. En la práctica, la compatibilidad se especifica por característica y no tanto por </a:t>
-            </a:r>
-            <a:r>
-              <a:rPr lang="es-ES" b="0" dirty="0" err="1">
-                <a:solidFill>
-                  <a:srgbClr val="D4D4D4"/>
-                </a:solidFill>
-                <a:effectLst/>
-                <a:highlight>
-                  <a:srgbClr val="1E1E1E"/>
-                </a:highlight>
-                <a:latin typeface="Dank Mono Regular" panose="00000509000000000000" pitchFamily="50" charset="0"/>
-              </a:rPr>
-              <a:t>release</a:t>
-            </a:r>
-            <a:r>
-              <a:rPr lang="es-ES" b="0" dirty="0">
-                <a:solidFill>
-                  <a:srgbClr val="D4D4D4"/>
-                </a:solidFill>
-                <a:effectLst/>
-                <a:highlight>
-                  <a:srgbClr val="1E1E1E"/>
-                </a:highlight>
-                <a:latin typeface="Dank Mono Regular" panose="00000509000000000000" pitchFamily="50" charset="0"/>
-              </a:rPr>
-              <a:t>. Por ello tenemos una matriz famosa de compatibilidad en donde se listan todas las características del lenguaje y los navegadores o </a:t>
-            </a:r>
-            <a:r>
-              <a:rPr lang="es-ES" b="0" dirty="0" err="1">
-                <a:solidFill>
-                  <a:srgbClr val="D4D4D4"/>
-                </a:solidFill>
-                <a:effectLst/>
-                <a:highlight>
-                  <a:srgbClr val="1E1E1E"/>
-                </a:highlight>
-                <a:latin typeface="Dank Mono Regular" panose="00000509000000000000" pitchFamily="50" charset="0"/>
-              </a:rPr>
-              <a:t>engines</a:t>
-            </a:r>
-            <a:r>
-              <a:rPr lang="es-ES" b="0" dirty="0">
-                <a:solidFill>
-                  <a:srgbClr val="D4D4D4"/>
-                </a:solidFill>
-                <a:effectLst/>
-                <a:highlight>
-                  <a:srgbClr val="1E1E1E"/>
-                </a:highlight>
-                <a:latin typeface="Dank Mono Regular" panose="00000509000000000000" pitchFamily="50" charset="0"/>
-              </a:rPr>
-              <a:t> (disponibles a </a:t>
-            </a:r>
-            <a:r>
-              <a:rPr lang="es-ES" b="0" dirty="0" err="1">
-                <a:solidFill>
-                  <a:srgbClr val="D4D4D4"/>
-                </a:solidFill>
-                <a:effectLst/>
-                <a:highlight>
-                  <a:srgbClr val="1E1E1E"/>
-                </a:highlight>
-                <a:latin typeface="Dank Mono Regular" panose="00000509000000000000" pitchFamily="50" charset="0"/>
-              </a:rPr>
-              <a:t>dia</a:t>
-            </a:r>
-            <a:r>
-              <a:rPr lang="es-ES" b="0" dirty="0">
-                <a:solidFill>
-                  <a:srgbClr val="D4D4D4"/>
-                </a:solidFill>
-                <a:effectLst/>
-                <a:highlight>
-                  <a:srgbClr val="1E1E1E"/>
-                </a:highlight>
-                <a:latin typeface="Dank Mono Regular" panose="00000509000000000000" pitchFamily="50" charset="0"/>
-              </a:rPr>
-              <a:t> de hoy) que las soportan. Como curiosidad, se dice que los </a:t>
-            </a:r>
-            <a:r>
-              <a:rPr lang="es-ES" b="0" i="1" dirty="0" err="1">
-                <a:solidFill>
-                  <a:srgbClr val="D4D4D4"/>
-                </a:solidFill>
-                <a:effectLst/>
-                <a:highlight>
-                  <a:srgbClr val="1E1E1E"/>
-                </a:highlight>
-                <a:latin typeface="Dank Mono Regular" panose="00000509000000000000" pitchFamily="50" charset="0"/>
-              </a:rPr>
-              <a:t>ever</a:t>
-            </a:r>
-            <a:r>
-              <a:rPr lang="es-ES" b="0" i="1" dirty="0">
-                <a:solidFill>
-                  <a:srgbClr val="D4D4D4"/>
-                </a:solidFill>
-                <a:effectLst/>
-                <a:highlight>
-                  <a:srgbClr val="1E1E1E"/>
-                </a:highlight>
-                <a:latin typeface="Dank Mono Regular" panose="00000509000000000000" pitchFamily="50" charset="0"/>
-              </a:rPr>
-              <a:t> </a:t>
-            </a:r>
-            <a:r>
-              <a:rPr lang="es-ES" b="0" i="1" dirty="0" err="1">
-                <a:solidFill>
-                  <a:srgbClr val="D4D4D4"/>
-                </a:solidFill>
-                <a:effectLst/>
-                <a:highlight>
-                  <a:srgbClr val="1E1E1E"/>
-                </a:highlight>
-                <a:latin typeface="Dank Mono Regular" panose="00000509000000000000" pitchFamily="50" charset="0"/>
-              </a:rPr>
-              <a:t>green</a:t>
-            </a:r>
-            <a:r>
-              <a:rPr lang="es-ES" b="0" i="1" dirty="0">
-                <a:solidFill>
-                  <a:srgbClr val="D4D4D4"/>
-                </a:solidFill>
-                <a:effectLst/>
-                <a:highlight>
-                  <a:srgbClr val="1E1E1E"/>
-                </a:highlight>
-                <a:latin typeface="Dank Mono Regular" panose="00000509000000000000" pitchFamily="50" charset="0"/>
-              </a:rPr>
-              <a:t> browsers</a:t>
-            </a:r>
-            <a:r>
-              <a:rPr lang="es-ES" b="0" dirty="0">
-                <a:solidFill>
-                  <a:srgbClr val="D4D4D4"/>
-                </a:solidFill>
-                <a:effectLst/>
-                <a:highlight>
-                  <a:srgbClr val="1E1E1E"/>
-                </a:highlight>
-                <a:latin typeface="Dank Mono Regular" panose="00000509000000000000" pitchFamily="50" charset="0"/>
-              </a:rPr>
-              <a:t> o simplemente </a:t>
-            </a:r>
-            <a:r>
-              <a:rPr lang="es-ES" b="0" i="1" dirty="0" err="1">
-                <a:solidFill>
-                  <a:srgbClr val="D4D4D4"/>
-                </a:solidFill>
-                <a:effectLst/>
-                <a:highlight>
-                  <a:srgbClr val="1E1E1E"/>
-                </a:highlight>
-                <a:latin typeface="Dank Mono Regular" panose="00000509000000000000" pitchFamily="50" charset="0"/>
-              </a:rPr>
-              <a:t>green</a:t>
-            </a:r>
-            <a:r>
-              <a:rPr lang="es-ES" b="0" i="1" dirty="0">
-                <a:solidFill>
-                  <a:srgbClr val="D4D4D4"/>
-                </a:solidFill>
-                <a:effectLst/>
-                <a:highlight>
-                  <a:srgbClr val="1E1E1E"/>
-                </a:highlight>
-                <a:latin typeface="Dank Mono Regular" panose="00000509000000000000" pitchFamily="50" charset="0"/>
-              </a:rPr>
-              <a:t> browsers</a:t>
-            </a:r>
-            <a:r>
-              <a:rPr lang="es-ES" b="0" dirty="0">
-                <a:solidFill>
-                  <a:srgbClr val="D4D4D4"/>
-                </a:solidFill>
-                <a:effectLst/>
-                <a:highlight>
-                  <a:srgbClr val="1E1E1E"/>
-                </a:highlight>
-                <a:latin typeface="Dank Mono Regular" panose="00000509000000000000" pitchFamily="50" charset="0"/>
-              </a:rPr>
-              <a:t> son aquellos que siempre están en verde, es decir, que soportan todas las características (no importa cuantas liberen, hacen un gran esfuerzo por mantenerse siempre actualizados).</a:t>
-            </a:r>
-          </a:p>
-          <a:p>
-            <a:br>
-              <a:rPr lang="es-ES" b="0" dirty="0">
-                <a:solidFill>
-                  <a:srgbClr val="D4D4D4"/>
-                </a:solidFill>
-                <a:effectLst/>
-                <a:highlight>
-                  <a:srgbClr val="1E1E1E"/>
-                </a:highlight>
-                <a:latin typeface="Dank Mono Regular" panose="00000509000000000000" pitchFamily="50" charset="0"/>
-              </a:rPr>
-            </a:br>
-            <a:r>
-              <a:rPr lang="es-ES" b="0" i="1" dirty="0">
-                <a:solidFill>
-                  <a:srgbClr val="D4D4D4"/>
-                </a:solidFill>
-                <a:effectLst/>
-                <a:highlight>
-                  <a:srgbClr val="1E1E1E"/>
-                </a:highlight>
-                <a:latin typeface="Dank Mono Regular" panose="00000509000000000000" pitchFamily="50" charset="0"/>
-              </a:rPr>
-              <a:t>&gt; De entre todas las releases, hay una de bastante importancia que solemos llamar el </a:t>
-            </a:r>
-            <a:r>
-              <a:rPr lang="es-ES" b="0" i="1" dirty="0" err="1">
-                <a:solidFill>
-                  <a:srgbClr val="D4D4D4"/>
-                </a:solidFill>
-                <a:effectLst/>
-                <a:highlight>
-                  <a:srgbClr val="1E1E1E"/>
-                </a:highlight>
-                <a:latin typeface="Dank Mono Regular" panose="00000509000000000000" pitchFamily="50" charset="0"/>
-              </a:rPr>
-              <a:t>baseline</a:t>
-            </a:r>
-            <a:r>
-              <a:rPr lang="es-ES" b="0" i="1" dirty="0">
-                <a:solidFill>
-                  <a:srgbClr val="D4D4D4"/>
-                </a:solidFill>
-                <a:effectLst/>
-                <a:highlight>
-                  <a:srgbClr val="1E1E1E"/>
-                </a:highlight>
-                <a:latin typeface="Dank Mono Regular" panose="00000509000000000000" pitchFamily="50" charset="0"/>
-              </a:rPr>
-              <a:t>. Se trata de la versión 5.0 o 5.1, y decimos que es el </a:t>
-            </a:r>
-            <a:r>
-              <a:rPr lang="es-ES" b="0" i="1" dirty="0" err="1">
-                <a:solidFill>
-                  <a:srgbClr val="D4D4D4"/>
-                </a:solidFill>
-                <a:effectLst/>
-                <a:highlight>
-                  <a:srgbClr val="1E1E1E"/>
-                </a:highlight>
-                <a:latin typeface="Dank Mono Regular" panose="00000509000000000000" pitchFamily="50" charset="0"/>
-              </a:rPr>
-              <a:t>baseline</a:t>
-            </a:r>
-            <a:r>
-              <a:rPr lang="es-ES" b="0" i="1" dirty="0">
-                <a:solidFill>
-                  <a:srgbClr val="D4D4D4"/>
-                </a:solidFill>
-                <a:effectLst/>
-                <a:highlight>
-                  <a:srgbClr val="1E1E1E"/>
-                </a:highlight>
-                <a:latin typeface="Dank Mono Regular" panose="00000509000000000000" pitchFamily="50" charset="0"/>
-              </a:rPr>
-              <a:t> porque todos los navegadores y plataformas que ejecutan JS, soportan todas las características contenidas hasta, al menos, dicho </a:t>
-            </a:r>
-            <a:r>
-              <a:rPr lang="es-ES" b="0" i="1" dirty="0" err="1">
-                <a:solidFill>
-                  <a:srgbClr val="D4D4D4"/>
-                </a:solidFill>
-                <a:effectLst/>
-                <a:highlight>
-                  <a:srgbClr val="1E1E1E"/>
-                </a:highlight>
-                <a:latin typeface="Dank Mono Regular" panose="00000509000000000000" pitchFamily="50" charset="0"/>
-              </a:rPr>
-              <a:t>baseline</a:t>
-            </a:r>
-            <a:r>
-              <a:rPr lang="es-ES" b="0" i="1" dirty="0">
-                <a:solidFill>
-                  <a:srgbClr val="D4D4D4"/>
-                </a:solidFill>
-                <a:effectLst/>
-                <a:highlight>
-                  <a:srgbClr val="1E1E1E"/>
-                </a:highlight>
-                <a:latin typeface="Dank Mono Regular" panose="00000509000000000000" pitchFamily="50" charset="0"/>
-              </a:rPr>
-              <a:t>.</a:t>
-            </a:r>
-          </a:p>
-          <a:p>
-            <a:endParaRPr lang="es-ES" b="0" i="1" dirty="0">
-              <a:solidFill>
-                <a:srgbClr val="D4D4D4"/>
-              </a:solidFill>
-              <a:effectLst/>
-              <a:highlight>
-                <a:srgbClr val="1E1E1E"/>
-              </a:highlight>
-              <a:latin typeface="Dank Mono Regular" panose="00000509000000000000" pitchFamily="50" charset="0"/>
-            </a:endParaRPr>
-          </a:p>
-          <a:p>
-            <a:r>
-              <a:rPr lang="es-ES" b="0" i="0" dirty="0">
-                <a:solidFill>
-                  <a:srgbClr val="D4D4D4"/>
-                </a:solidFill>
-                <a:effectLst/>
-                <a:highlight>
-                  <a:srgbClr val="1E1E1E"/>
-                </a:highlight>
-                <a:latin typeface="Dank Mono Regular" panose="00000509000000000000" pitchFamily="50" charset="0"/>
-              </a:rPr>
-              <a:t>Todo lo anterior al </a:t>
-            </a:r>
-            <a:r>
-              <a:rPr lang="es-ES" b="0" i="1" dirty="0" err="1">
-                <a:solidFill>
-                  <a:srgbClr val="D4D4D4"/>
-                </a:solidFill>
-                <a:effectLst/>
-                <a:highlight>
-                  <a:srgbClr val="1E1E1E"/>
-                </a:highlight>
-                <a:latin typeface="Dank Mono Regular" panose="00000509000000000000" pitchFamily="50" charset="0"/>
-              </a:rPr>
-              <a:t>baseline</a:t>
-            </a:r>
-            <a:r>
-              <a:rPr lang="es-ES" b="0" i="0" dirty="0">
-                <a:solidFill>
-                  <a:srgbClr val="D4D4D4"/>
-                </a:solidFill>
-                <a:effectLst/>
-                <a:highlight>
-                  <a:srgbClr val="1E1E1E"/>
-                </a:highlight>
-                <a:latin typeface="Dank Mono Regular" panose="00000509000000000000" pitchFamily="50" charset="0"/>
-              </a:rPr>
-              <a:t> podemos etiquetarlo como JS clásico, mientras que todo lo posterior se suele llamar JS moderno, o también </a:t>
-            </a:r>
-            <a:r>
-              <a:rPr lang="es-ES" b="0" i="0" dirty="0" err="1">
-                <a:solidFill>
-                  <a:srgbClr val="D4D4D4"/>
-                </a:solidFill>
-                <a:effectLst/>
-                <a:highlight>
-                  <a:srgbClr val="1E1E1E"/>
-                </a:highlight>
-                <a:latin typeface="Dank Mono Regular" panose="00000509000000000000" pitchFamily="50" charset="0"/>
-              </a:rPr>
-              <a:t>ESNext</a:t>
-            </a:r>
-            <a:r>
-              <a:rPr lang="es-ES" b="0" i="0" dirty="0">
-                <a:solidFill>
-                  <a:srgbClr val="D4D4D4"/>
-                </a:solidFill>
-                <a:effectLst/>
-                <a:highlight>
-                  <a:srgbClr val="1E1E1E"/>
-                </a:highlight>
-                <a:latin typeface="Dank Mono Regular" panose="00000509000000000000" pitchFamily="50" charset="0"/>
-              </a:rPr>
-              <a:t>. El motivo de tener un </a:t>
-            </a:r>
-            <a:r>
-              <a:rPr lang="es-ES" b="0" i="0" dirty="0" err="1">
-                <a:solidFill>
-                  <a:srgbClr val="D4D4D4"/>
-                </a:solidFill>
-                <a:effectLst/>
-                <a:highlight>
-                  <a:srgbClr val="1E1E1E"/>
-                </a:highlight>
-                <a:latin typeface="Dank Mono Regular" panose="00000509000000000000" pitchFamily="50" charset="0"/>
-              </a:rPr>
-              <a:t>baseline</a:t>
-            </a:r>
-            <a:r>
-              <a:rPr lang="es-ES" b="0" i="0" dirty="0">
-                <a:solidFill>
-                  <a:srgbClr val="D4D4D4"/>
-                </a:solidFill>
-                <a:effectLst/>
-                <a:highlight>
-                  <a:srgbClr val="1E1E1E"/>
-                </a:highlight>
-                <a:latin typeface="Dank Mono Regular" panose="00000509000000000000" pitchFamily="50" charset="0"/>
-              </a:rPr>
-              <a:t> es contar con una referencia de código que siempre será ejecutable sin errores, da igual en que navegador. Por otro lado, si como desarrollador quiero usar una característica que no está en el </a:t>
-            </a:r>
-            <a:r>
-              <a:rPr lang="es-ES" b="0" i="0" dirty="0" err="1">
-                <a:solidFill>
-                  <a:srgbClr val="D4D4D4"/>
-                </a:solidFill>
-                <a:effectLst/>
-                <a:highlight>
-                  <a:srgbClr val="1E1E1E"/>
-                </a:highlight>
-                <a:latin typeface="Dank Mono Regular" panose="00000509000000000000" pitchFamily="50" charset="0"/>
-              </a:rPr>
-              <a:t>baseline</a:t>
-            </a:r>
-            <a:r>
-              <a:rPr lang="es-ES" b="0" i="0" dirty="0">
-                <a:solidFill>
-                  <a:srgbClr val="D4D4D4"/>
-                </a:solidFill>
-                <a:effectLst/>
-                <a:highlight>
-                  <a:srgbClr val="1E1E1E"/>
-                </a:highlight>
-                <a:latin typeface="Dank Mono Regular" panose="00000509000000000000" pitchFamily="50" charset="0"/>
-              </a:rPr>
-              <a:t>, debo tener en cuenta que podría fallar en algún navegador que no la soporte. ¿Qué hacemos en tales casos? </a:t>
-            </a:r>
-            <a:r>
-              <a:rPr lang="es-ES" b="0" i="0" dirty="0" err="1">
-                <a:solidFill>
-                  <a:srgbClr val="D4D4D4"/>
-                </a:solidFill>
-                <a:effectLst/>
-                <a:highlight>
-                  <a:srgbClr val="1E1E1E"/>
-                </a:highlight>
-                <a:latin typeface="Dank Mono Regular" panose="00000509000000000000" pitchFamily="50" charset="0"/>
-              </a:rPr>
-              <a:t>Transpilar</a:t>
-            </a:r>
-            <a:r>
-              <a:rPr lang="es-ES" b="0" i="0" dirty="0">
-                <a:solidFill>
-                  <a:srgbClr val="D4D4D4"/>
-                </a:solidFill>
-                <a:effectLst/>
-                <a:highlight>
-                  <a:srgbClr val="1E1E1E"/>
-                </a:highlight>
-                <a:latin typeface="Dank Mono Regular" panose="00000509000000000000" pitchFamily="50" charset="0"/>
-              </a:rPr>
-              <a:t> para aplicar </a:t>
-            </a:r>
-            <a:r>
-              <a:rPr lang="es-ES" b="0" i="0" dirty="0" err="1">
-                <a:solidFill>
-                  <a:srgbClr val="D4D4D4"/>
-                </a:solidFill>
-                <a:effectLst/>
-                <a:highlight>
-                  <a:srgbClr val="1E1E1E"/>
-                </a:highlight>
-                <a:latin typeface="Dank Mono Regular" panose="00000509000000000000" pitchFamily="50" charset="0"/>
-              </a:rPr>
-              <a:t>polyfills</a:t>
-            </a:r>
-            <a:r>
-              <a:rPr lang="es-ES" b="0" i="0" dirty="0">
-                <a:solidFill>
-                  <a:srgbClr val="D4D4D4"/>
-                </a:solidFill>
-                <a:effectLst/>
-                <a:highlight>
-                  <a:srgbClr val="1E1E1E"/>
-                </a:highlight>
-                <a:latin typeface="Dank Mono Regular" panose="00000509000000000000" pitchFamily="50" charset="0"/>
-              </a:rPr>
-              <a:t> con los que compatibilizar mi código.</a:t>
-            </a:r>
-            <a:br>
-              <a:rPr lang="es-ES" b="0" i="0" dirty="0">
-                <a:solidFill>
-                  <a:srgbClr val="D4D4D4"/>
-                </a:solidFill>
-                <a:effectLst/>
-                <a:highlight>
-                  <a:srgbClr val="1E1E1E"/>
-                </a:highlight>
-                <a:latin typeface="Dank Mono Regular" panose="00000509000000000000" pitchFamily="50" charset="0"/>
-              </a:rPr>
-            </a:br>
-            <a:endParaRPr lang="es-ES" b="0" i="0" dirty="0">
-              <a:solidFill>
-                <a:srgbClr val="D4D4D4"/>
-              </a:solidFill>
-              <a:effectLst/>
-              <a:highlight>
-                <a:srgbClr val="1E1E1E"/>
-              </a:highlight>
-              <a:latin typeface="Dank Mono Regular" panose="00000509000000000000" pitchFamily="50" charset="0"/>
-            </a:endParaRPr>
-          </a:p>
-          <a:p>
-            <a:br>
-              <a:rPr lang="es-ES" b="0" dirty="0">
-                <a:solidFill>
-                  <a:srgbClr val="D4D4D4"/>
-                </a:solidFill>
-                <a:effectLst/>
-                <a:highlight>
-                  <a:srgbClr val="1E1E1E"/>
-                </a:highlight>
-                <a:latin typeface="Dank Mono Regular" panose="00000509000000000000" pitchFamily="50" charset="0"/>
-              </a:rPr>
-            </a:br>
-            <a:endParaRPr lang="es-ES" b="0" dirty="0">
-              <a:solidFill>
-                <a:srgbClr val="D4D4D4"/>
-              </a:solidFill>
-              <a:effectLst/>
-              <a:highlight>
-                <a:srgbClr val="1E1E1E"/>
-              </a:highlight>
-              <a:latin typeface="Dank Mono Regular" panose="00000509000000000000" pitchFamily="50" charset="0"/>
-            </a:endParaRPr>
-          </a:p>
-          <a:p>
-            <a:br>
-              <a:rPr lang="es-ES" b="0" dirty="0">
-                <a:solidFill>
-                  <a:srgbClr val="D4D4D4"/>
-                </a:solidFill>
-                <a:effectLst/>
-                <a:highlight>
-                  <a:srgbClr val="1E1E1E"/>
-                </a:highlight>
-                <a:latin typeface="Dank Mono Regular" panose="00000509000000000000" pitchFamily="50" charset="0"/>
-              </a:rPr>
-            </a:br>
-            <a:endParaRPr lang="es-ES" b="0" dirty="0">
-              <a:solidFill>
-                <a:srgbClr val="D4D4D4"/>
-              </a:solidFill>
-              <a:effectLst/>
-              <a:highlight>
-                <a:srgbClr val="1E1E1E"/>
-              </a:highlight>
-              <a:latin typeface="Dank Mono Regular" panose="00000509000000000000" pitchFamily="50" charset="0"/>
-            </a:endParaRPr>
+              <a:t>Como Nota al margen: la gran mayoría de los comportamientos que se critican a JS tienen que ver con su compatibilidad hacia atrás. Lo que es liberado en JS tiene que permanecer siempre, no podemos borrarlo o rehacerlo. Pagaremos el precio de arrastrar dichos comportamientos, pero a cambio evitamos que se rompa la web.</a:t>
+            </a:r>
           </a:p>
           <a:p>
             <a:endParaRPr lang="es-ES" dirty="0"/>
@@ -3715,7 +3083,7 @@
     </p:spTree>
     <p:extLst>
       <p:ext uri="{BB962C8B-B14F-4D97-AF65-F5344CB8AC3E}">
-        <p14:creationId xmlns:p14="http://schemas.microsoft.com/office/powerpoint/2010/main" val="1189325127"/>
+        <p14:creationId xmlns:p14="http://schemas.microsoft.com/office/powerpoint/2010/main" val="2554531523"/>
       </p:ext>
     </p:extLst>
   </p:cSld>
@@ -3775,6 +3143,799 @@
           <a:lstStyle/>
           <a:p>
             <a:r>
+              <a:rPr lang="es-ES" b="0" dirty="0">
+                <a:solidFill>
+                  <a:srgbClr val="D4D4D4"/>
+                </a:solidFill>
+                <a:effectLst/>
+                <a:highlight>
+                  <a:srgbClr val="1E1E1E"/>
+                </a:highlight>
+                <a:latin typeface="Dank Mono Regular" panose="00000509000000000000" pitchFamily="50" charset="0"/>
+              </a:rPr>
+              <a:t>JavaScript evoluciona en base a </a:t>
+            </a:r>
+            <a:r>
+              <a:rPr lang="es-ES" b="0" i="1" dirty="0">
+                <a:solidFill>
+                  <a:srgbClr val="D4D4D4"/>
+                </a:solidFill>
+                <a:effectLst/>
+                <a:highlight>
+                  <a:srgbClr val="1E1E1E"/>
+                </a:highlight>
+                <a:latin typeface="Dank Mono Regular" panose="00000509000000000000" pitchFamily="50" charset="0"/>
+              </a:rPr>
+              <a:t>releases</a:t>
+            </a:r>
+            <a:r>
+              <a:rPr lang="es-ES" b="0" dirty="0">
+                <a:solidFill>
+                  <a:srgbClr val="D4D4D4"/>
+                </a:solidFill>
+                <a:effectLst/>
+                <a:highlight>
+                  <a:srgbClr val="1E1E1E"/>
+                </a:highlight>
+                <a:latin typeface="Dank Mono Regular" panose="00000509000000000000" pitchFamily="50" charset="0"/>
+              </a:rPr>
+              <a:t>, es decir, se liberan nuevas versiones del lenguaje con un conjunto de nuevas características.</a:t>
+            </a:r>
+          </a:p>
+          <a:p>
+            <a:br>
+              <a:rPr lang="es-ES" b="0" dirty="0">
+                <a:solidFill>
+                  <a:srgbClr val="D4D4D4"/>
+                </a:solidFill>
+                <a:effectLst/>
+                <a:highlight>
+                  <a:srgbClr val="1E1E1E"/>
+                </a:highlight>
+                <a:latin typeface="Dank Mono Regular" panose="00000509000000000000" pitchFamily="50" charset="0"/>
+              </a:rPr>
+            </a:br>
+            <a:r>
+              <a:rPr lang="es-ES" b="0" dirty="0">
+                <a:solidFill>
+                  <a:srgbClr val="D4D4D4"/>
+                </a:solidFill>
+                <a:effectLst/>
+                <a:highlight>
+                  <a:srgbClr val="1E1E1E"/>
+                </a:highlight>
+                <a:latin typeface="Dank Mono Regular" panose="00000509000000000000" pitchFamily="50" charset="0"/>
+              </a:rPr>
+              <a:t>Si bien las primeras versiones o releases fueron un poco caóticas, menos regulares o más orgánicas, principalmente debido a que sucedieron a medida que se necesitaban nuevas características del lenguaje, a partir de 2015 se decidió estandarizar las releases y hacerlas anuales.</a:t>
+            </a:r>
+          </a:p>
+          <a:p>
+            <a:br>
+              <a:rPr lang="es-ES" b="0" dirty="0">
+                <a:solidFill>
+                  <a:srgbClr val="D4D4D4"/>
+                </a:solidFill>
+                <a:effectLst/>
+                <a:highlight>
+                  <a:srgbClr val="1E1E1E"/>
+                </a:highlight>
+                <a:latin typeface="Dank Mono Regular" panose="00000509000000000000" pitchFamily="50" charset="0"/>
+              </a:rPr>
+            </a:br>
+            <a:r>
+              <a:rPr lang="es-ES" b="0" dirty="0">
+                <a:solidFill>
+                  <a:srgbClr val="D4D4D4"/>
+                </a:solidFill>
+                <a:effectLst/>
+                <a:highlight>
+                  <a:srgbClr val="1E1E1E"/>
+                </a:highlight>
+                <a:latin typeface="Dank Mono Regular" panose="00000509000000000000" pitchFamily="50" charset="0"/>
+              </a:rPr>
+              <a:t>En este proceso estandarizado, existe un comité de expertos llamado TC39 que apadrina las nuevas propuestas que la comunidad sugiere (cualquiera de nosotros puede hacerlo) y las promociona en diferentes </a:t>
+            </a:r>
+            <a:r>
+              <a:rPr lang="es-ES" b="0" i="1" dirty="0" err="1">
+                <a:solidFill>
+                  <a:srgbClr val="D4D4D4"/>
+                </a:solidFill>
+                <a:effectLst/>
+                <a:highlight>
+                  <a:srgbClr val="1E1E1E"/>
+                </a:highlight>
+                <a:latin typeface="Dank Mono Regular" panose="00000509000000000000" pitchFamily="50" charset="0"/>
+              </a:rPr>
+              <a:t>stages</a:t>
+            </a:r>
+            <a:r>
+              <a:rPr lang="es-ES" b="0" dirty="0">
+                <a:solidFill>
+                  <a:srgbClr val="D4D4D4"/>
+                </a:solidFill>
+                <a:effectLst/>
+                <a:highlight>
+                  <a:srgbClr val="1E1E1E"/>
+                </a:highlight>
+                <a:latin typeface="Dank Mono Regular" panose="00000509000000000000" pitchFamily="50" charset="0"/>
+              </a:rPr>
+              <a:t> del 1 al 4 en función del grado de madurez. De modo que si una nueva característica alcanza el </a:t>
+            </a:r>
+            <a:r>
+              <a:rPr lang="es-ES" b="0" i="1" dirty="0">
+                <a:solidFill>
+                  <a:srgbClr val="D4D4D4"/>
+                </a:solidFill>
+                <a:effectLst/>
+                <a:highlight>
+                  <a:srgbClr val="1E1E1E"/>
+                </a:highlight>
+                <a:latin typeface="Dank Mono Regular" panose="00000509000000000000" pitchFamily="50" charset="0"/>
+              </a:rPr>
+              <a:t>stage</a:t>
+            </a:r>
+            <a:r>
+              <a:rPr lang="es-ES" b="0" dirty="0">
+                <a:solidFill>
+                  <a:srgbClr val="D4D4D4"/>
+                </a:solidFill>
+                <a:effectLst/>
+                <a:highlight>
+                  <a:srgbClr val="1E1E1E"/>
+                </a:highlight>
+                <a:latin typeface="Dank Mono Regular" panose="00000509000000000000" pitchFamily="50" charset="0"/>
+              </a:rPr>
+              <a:t> 4 significa que va a ser liberada con la siguiente </a:t>
+            </a:r>
+            <a:r>
+              <a:rPr lang="es-ES" b="0" dirty="0" err="1">
+                <a:solidFill>
+                  <a:srgbClr val="D4D4D4"/>
+                </a:solidFill>
+                <a:effectLst/>
+                <a:highlight>
+                  <a:srgbClr val="1E1E1E"/>
+                </a:highlight>
+                <a:latin typeface="Dank Mono Regular" panose="00000509000000000000" pitchFamily="50" charset="0"/>
+              </a:rPr>
+              <a:t>release</a:t>
+            </a:r>
+            <a:r>
+              <a:rPr lang="es-ES" b="0" dirty="0">
+                <a:solidFill>
+                  <a:srgbClr val="D4D4D4"/>
+                </a:solidFill>
+                <a:effectLst/>
+                <a:highlight>
+                  <a:srgbClr val="1E1E1E"/>
+                </a:highlight>
+                <a:latin typeface="Dank Mono Regular" panose="00000509000000000000" pitchFamily="50" charset="0"/>
+              </a:rPr>
+              <a:t> anual.</a:t>
+            </a:r>
+          </a:p>
+          <a:p>
+            <a:endParaRPr lang="es-ES" b="0" dirty="0">
+              <a:solidFill>
+                <a:srgbClr val="D4D4D4"/>
+              </a:solidFill>
+              <a:effectLst/>
+              <a:highlight>
+                <a:srgbClr val="1E1E1E"/>
+              </a:highlight>
+              <a:latin typeface="Dank Mono Regular" panose="00000509000000000000" pitchFamily="50" charset="0"/>
+            </a:endParaRPr>
+          </a:p>
+          <a:p>
+            <a:r>
+              <a:rPr lang="es-ES" b="0" dirty="0">
+                <a:solidFill>
+                  <a:srgbClr val="D4D4D4"/>
+                </a:solidFill>
+                <a:effectLst/>
+                <a:highlight>
+                  <a:srgbClr val="1E1E1E"/>
+                </a:highlight>
+                <a:latin typeface="Dank Mono Regular" panose="00000509000000000000" pitchFamily="50" charset="0"/>
+              </a:rPr>
+              <a:t>Lo cierto es que en cuanto a compatibilidad lo importante no es tanto la versión sino la característica en si. Es decir, cada nueva característica se lanza englobada en una </a:t>
+            </a:r>
+            <a:r>
+              <a:rPr lang="es-ES" b="0" dirty="0" err="1">
+                <a:solidFill>
+                  <a:srgbClr val="D4D4D4"/>
+                </a:solidFill>
+                <a:effectLst/>
+                <a:highlight>
+                  <a:srgbClr val="1E1E1E"/>
+                </a:highlight>
+                <a:latin typeface="Dank Mono Regular" panose="00000509000000000000" pitchFamily="50" charset="0"/>
+              </a:rPr>
+              <a:t>release</a:t>
+            </a:r>
+            <a:r>
+              <a:rPr lang="es-ES" b="0" dirty="0">
+                <a:solidFill>
+                  <a:srgbClr val="D4D4D4"/>
+                </a:solidFill>
+                <a:effectLst/>
+                <a:highlight>
+                  <a:srgbClr val="1E1E1E"/>
+                </a:highlight>
+                <a:latin typeface="Dank Mono Regular" panose="00000509000000000000" pitchFamily="50" charset="0"/>
+              </a:rPr>
+              <a:t>, esto es cierto, pero un navegador o plataforma podría soportar total o parcialmente dicha </a:t>
+            </a:r>
+            <a:r>
+              <a:rPr lang="es-ES" b="0" dirty="0" err="1">
+                <a:solidFill>
+                  <a:srgbClr val="D4D4D4"/>
+                </a:solidFill>
+                <a:effectLst/>
+                <a:highlight>
+                  <a:srgbClr val="1E1E1E"/>
+                </a:highlight>
+                <a:latin typeface="Dank Mono Regular" panose="00000509000000000000" pitchFamily="50" charset="0"/>
+              </a:rPr>
+              <a:t>release</a:t>
+            </a:r>
+            <a:r>
+              <a:rPr lang="es-ES" b="0" dirty="0">
+                <a:solidFill>
+                  <a:srgbClr val="D4D4D4"/>
+                </a:solidFill>
+                <a:effectLst/>
+                <a:highlight>
+                  <a:srgbClr val="1E1E1E"/>
+                </a:highlight>
+                <a:latin typeface="Dank Mono Regular" panose="00000509000000000000" pitchFamily="50" charset="0"/>
+              </a:rPr>
+              <a:t>. En la práctica, la compatibilidad se especifica por característica y no tanto por </a:t>
+            </a:r>
+            <a:r>
+              <a:rPr lang="es-ES" b="0" dirty="0" err="1">
+                <a:solidFill>
+                  <a:srgbClr val="D4D4D4"/>
+                </a:solidFill>
+                <a:effectLst/>
+                <a:highlight>
+                  <a:srgbClr val="1E1E1E"/>
+                </a:highlight>
+                <a:latin typeface="Dank Mono Regular" panose="00000509000000000000" pitchFamily="50" charset="0"/>
+              </a:rPr>
+              <a:t>release</a:t>
+            </a:r>
+            <a:r>
+              <a:rPr lang="es-ES" b="0" dirty="0">
+                <a:solidFill>
+                  <a:srgbClr val="D4D4D4"/>
+                </a:solidFill>
+                <a:effectLst/>
+                <a:highlight>
+                  <a:srgbClr val="1E1E1E"/>
+                </a:highlight>
+                <a:latin typeface="Dank Mono Regular" panose="00000509000000000000" pitchFamily="50" charset="0"/>
+              </a:rPr>
+              <a:t>. Por ello tenemos una matriz famosa de compatibilidad en donde se listan todas las características del lenguaje y los navegadores o </a:t>
+            </a:r>
+            <a:r>
+              <a:rPr lang="es-ES" b="0" dirty="0" err="1">
+                <a:solidFill>
+                  <a:srgbClr val="D4D4D4"/>
+                </a:solidFill>
+                <a:effectLst/>
+                <a:highlight>
+                  <a:srgbClr val="1E1E1E"/>
+                </a:highlight>
+                <a:latin typeface="Dank Mono Regular" panose="00000509000000000000" pitchFamily="50" charset="0"/>
+              </a:rPr>
+              <a:t>engines</a:t>
+            </a:r>
+            <a:r>
+              <a:rPr lang="es-ES" b="0" dirty="0">
+                <a:solidFill>
+                  <a:srgbClr val="D4D4D4"/>
+                </a:solidFill>
+                <a:effectLst/>
+                <a:highlight>
+                  <a:srgbClr val="1E1E1E"/>
+                </a:highlight>
+                <a:latin typeface="Dank Mono Regular" panose="00000509000000000000" pitchFamily="50" charset="0"/>
+              </a:rPr>
+              <a:t> (disponibles a </a:t>
+            </a:r>
+            <a:r>
+              <a:rPr lang="es-ES" b="0" dirty="0" err="1">
+                <a:solidFill>
+                  <a:srgbClr val="D4D4D4"/>
+                </a:solidFill>
+                <a:effectLst/>
+                <a:highlight>
+                  <a:srgbClr val="1E1E1E"/>
+                </a:highlight>
+                <a:latin typeface="Dank Mono Regular" panose="00000509000000000000" pitchFamily="50" charset="0"/>
+              </a:rPr>
+              <a:t>dia</a:t>
+            </a:r>
+            <a:r>
+              <a:rPr lang="es-ES" b="0" dirty="0">
+                <a:solidFill>
+                  <a:srgbClr val="D4D4D4"/>
+                </a:solidFill>
+                <a:effectLst/>
+                <a:highlight>
+                  <a:srgbClr val="1E1E1E"/>
+                </a:highlight>
+                <a:latin typeface="Dank Mono Regular" panose="00000509000000000000" pitchFamily="50" charset="0"/>
+              </a:rPr>
+              <a:t> de hoy) que las soportan. Como curiosidad, se dice que los </a:t>
+            </a:r>
+            <a:r>
+              <a:rPr lang="es-ES" b="0" i="1" dirty="0" err="1">
+                <a:solidFill>
+                  <a:srgbClr val="D4D4D4"/>
+                </a:solidFill>
+                <a:effectLst/>
+                <a:highlight>
+                  <a:srgbClr val="1E1E1E"/>
+                </a:highlight>
+                <a:latin typeface="Dank Mono Regular" panose="00000509000000000000" pitchFamily="50" charset="0"/>
+              </a:rPr>
+              <a:t>evergreen</a:t>
+            </a:r>
+            <a:r>
+              <a:rPr lang="es-ES" b="0" i="1" dirty="0">
+                <a:solidFill>
+                  <a:srgbClr val="D4D4D4"/>
+                </a:solidFill>
+                <a:effectLst/>
+                <a:highlight>
+                  <a:srgbClr val="1E1E1E"/>
+                </a:highlight>
+                <a:latin typeface="Dank Mono Regular" panose="00000509000000000000" pitchFamily="50" charset="0"/>
+              </a:rPr>
+              <a:t> browsers</a:t>
+            </a:r>
+            <a:r>
+              <a:rPr lang="es-ES" b="0" dirty="0">
+                <a:solidFill>
+                  <a:srgbClr val="D4D4D4"/>
+                </a:solidFill>
+                <a:effectLst/>
+                <a:highlight>
+                  <a:srgbClr val="1E1E1E"/>
+                </a:highlight>
+                <a:latin typeface="Dank Mono Regular" panose="00000509000000000000" pitchFamily="50" charset="0"/>
+              </a:rPr>
+              <a:t> (navegadores “perennes”, como los árboles) son aquellos que siempre se mantienen actualizados, es decir, que soportan todas las características (no importa cuantas liberen, hacen un gran esfuerzo por mantenerse siempre actualizados).</a:t>
+            </a:r>
+          </a:p>
+          <a:p>
+            <a:br>
+              <a:rPr lang="es-ES" b="0" dirty="0">
+                <a:solidFill>
+                  <a:srgbClr val="D4D4D4"/>
+                </a:solidFill>
+                <a:effectLst/>
+                <a:highlight>
+                  <a:srgbClr val="1E1E1E"/>
+                </a:highlight>
+                <a:latin typeface="Dank Mono Regular" panose="00000509000000000000" pitchFamily="50" charset="0"/>
+              </a:rPr>
+            </a:br>
+            <a:r>
+              <a:rPr lang="es-ES" b="0" i="1" dirty="0">
+                <a:solidFill>
+                  <a:srgbClr val="D4D4D4"/>
+                </a:solidFill>
+                <a:effectLst/>
+                <a:highlight>
+                  <a:srgbClr val="1E1E1E"/>
+                </a:highlight>
+                <a:latin typeface="Dank Mono Regular" panose="00000509000000000000" pitchFamily="50" charset="0"/>
+              </a:rPr>
+              <a:t>&gt; De entre todas las releases, hay una de bastante importancia que solemos llamar el </a:t>
+            </a:r>
+            <a:r>
+              <a:rPr lang="es-ES" b="0" i="1" dirty="0" err="1">
+                <a:solidFill>
+                  <a:srgbClr val="D4D4D4"/>
+                </a:solidFill>
+                <a:effectLst/>
+                <a:highlight>
+                  <a:srgbClr val="1E1E1E"/>
+                </a:highlight>
+                <a:latin typeface="Dank Mono Regular" panose="00000509000000000000" pitchFamily="50" charset="0"/>
+              </a:rPr>
+              <a:t>baseline</a:t>
+            </a:r>
+            <a:r>
+              <a:rPr lang="es-ES" b="0" i="1" dirty="0">
+                <a:solidFill>
+                  <a:srgbClr val="D4D4D4"/>
+                </a:solidFill>
+                <a:effectLst/>
+                <a:highlight>
+                  <a:srgbClr val="1E1E1E"/>
+                </a:highlight>
+                <a:latin typeface="Dank Mono Regular" panose="00000509000000000000" pitchFamily="50" charset="0"/>
+              </a:rPr>
+              <a:t> que además se va actualizando con el tiempo. Históricamente se trató durante bastantes años de la versión 5.0 o 5.1, aunque en la actualidad (2026) podemos decir que es ES2020+. Decimos que es el </a:t>
+            </a:r>
+            <a:r>
+              <a:rPr lang="es-ES" b="0" i="1" dirty="0" err="1">
+                <a:solidFill>
+                  <a:srgbClr val="D4D4D4"/>
+                </a:solidFill>
+                <a:effectLst/>
+                <a:highlight>
+                  <a:srgbClr val="1E1E1E"/>
+                </a:highlight>
+                <a:latin typeface="Dank Mono Regular" panose="00000509000000000000" pitchFamily="50" charset="0"/>
+              </a:rPr>
+              <a:t>baseline</a:t>
+            </a:r>
+            <a:r>
+              <a:rPr lang="es-ES" b="0" i="1" dirty="0">
+                <a:solidFill>
+                  <a:srgbClr val="D4D4D4"/>
+                </a:solidFill>
+                <a:effectLst/>
+                <a:highlight>
+                  <a:srgbClr val="1E1E1E"/>
+                </a:highlight>
+                <a:latin typeface="Dank Mono Regular" panose="00000509000000000000" pitchFamily="50" charset="0"/>
+              </a:rPr>
+              <a:t> porque todos los navegadores y plataformas que ejecutan JS, soportan todas las características contenidas hasta, al menos, dicho </a:t>
+            </a:r>
+            <a:r>
+              <a:rPr lang="es-ES" b="0" i="1" dirty="0" err="1">
+                <a:solidFill>
+                  <a:srgbClr val="D4D4D4"/>
+                </a:solidFill>
+                <a:effectLst/>
+                <a:highlight>
+                  <a:srgbClr val="1E1E1E"/>
+                </a:highlight>
+                <a:latin typeface="Dank Mono Regular" panose="00000509000000000000" pitchFamily="50" charset="0"/>
+              </a:rPr>
+              <a:t>baseline</a:t>
+            </a:r>
+            <a:r>
+              <a:rPr lang="es-ES" b="0" i="1" dirty="0">
+                <a:solidFill>
+                  <a:srgbClr val="D4D4D4"/>
+                </a:solidFill>
+                <a:effectLst/>
+                <a:highlight>
+                  <a:srgbClr val="1E1E1E"/>
+                </a:highlight>
+                <a:latin typeface="Dank Mono Regular" panose="00000509000000000000" pitchFamily="50" charset="0"/>
+              </a:rPr>
+              <a:t>.</a:t>
+            </a:r>
+          </a:p>
+          <a:p>
+            <a:endParaRPr lang="es-ES" b="0" i="1" dirty="0">
+              <a:solidFill>
+                <a:srgbClr val="D4D4D4"/>
+              </a:solidFill>
+              <a:effectLst/>
+              <a:highlight>
+                <a:srgbClr val="1E1E1E"/>
+              </a:highlight>
+              <a:latin typeface="Dank Mono Regular" panose="00000509000000000000" pitchFamily="50" charset="0"/>
+            </a:endParaRPr>
+          </a:p>
+          <a:p>
+            <a:r>
+              <a:rPr lang="es-ES" b="0" i="0" dirty="0">
+                <a:solidFill>
+                  <a:srgbClr val="D4D4D4"/>
+                </a:solidFill>
+                <a:effectLst/>
+                <a:highlight>
+                  <a:srgbClr val="1E1E1E"/>
+                </a:highlight>
+                <a:latin typeface="Dank Mono Regular" panose="00000509000000000000" pitchFamily="50" charset="0"/>
+              </a:rPr>
+              <a:t>Todo lo anterior al </a:t>
+            </a:r>
+            <a:r>
+              <a:rPr lang="es-ES" b="0" i="1" dirty="0" err="1">
+                <a:solidFill>
+                  <a:srgbClr val="D4D4D4"/>
+                </a:solidFill>
+                <a:effectLst/>
+                <a:highlight>
+                  <a:srgbClr val="1E1E1E"/>
+                </a:highlight>
+                <a:latin typeface="Dank Mono Regular" panose="00000509000000000000" pitchFamily="50" charset="0"/>
+              </a:rPr>
+              <a:t>baseline</a:t>
+            </a:r>
+            <a:r>
+              <a:rPr lang="es-ES" b="0" i="0" dirty="0">
+                <a:solidFill>
+                  <a:srgbClr val="D4D4D4"/>
+                </a:solidFill>
+                <a:effectLst/>
+                <a:highlight>
+                  <a:srgbClr val="1E1E1E"/>
+                </a:highlight>
+                <a:latin typeface="Dank Mono Regular" panose="00000509000000000000" pitchFamily="50" charset="0"/>
+              </a:rPr>
+              <a:t> podemos etiquetarlo como JS clásico, mientras que todo lo posterior se suele llamar JS moderno, o también </a:t>
+            </a:r>
+            <a:r>
+              <a:rPr lang="es-ES" b="0" i="0" dirty="0" err="1">
+                <a:solidFill>
+                  <a:srgbClr val="D4D4D4"/>
+                </a:solidFill>
+                <a:effectLst/>
+                <a:highlight>
+                  <a:srgbClr val="1E1E1E"/>
+                </a:highlight>
+                <a:latin typeface="Dank Mono Regular" panose="00000509000000000000" pitchFamily="50" charset="0"/>
+              </a:rPr>
+              <a:t>ESNext</a:t>
+            </a:r>
+            <a:r>
+              <a:rPr lang="es-ES" b="0" i="0" dirty="0">
+                <a:solidFill>
+                  <a:srgbClr val="D4D4D4"/>
+                </a:solidFill>
+                <a:effectLst/>
+                <a:highlight>
+                  <a:srgbClr val="1E1E1E"/>
+                </a:highlight>
+                <a:latin typeface="Dank Mono Regular" panose="00000509000000000000" pitchFamily="50" charset="0"/>
+              </a:rPr>
+              <a:t>. El motivo de tener un </a:t>
+            </a:r>
+            <a:r>
+              <a:rPr lang="es-ES" b="0" i="0" dirty="0" err="1">
+                <a:solidFill>
+                  <a:srgbClr val="D4D4D4"/>
+                </a:solidFill>
+                <a:effectLst/>
+                <a:highlight>
+                  <a:srgbClr val="1E1E1E"/>
+                </a:highlight>
+                <a:latin typeface="Dank Mono Regular" panose="00000509000000000000" pitchFamily="50" charset="0"/>
+              </a:rPr>
+              <a:t>baseline</a:t>
+            </a:r>
+            <a:r>
+              <a:rPr lang="es-ES" b="0" i="0" dirty="0">
+                <a:solidFill>
+                  <a:srgbClr val="D4D4D4"/>
+                </a:solidFill>
+                <a:effectLst/>
+                <a:highlight>
+                  <a:srgbClr val="1E1E1E"/>
+                </a:highlight>
+                <a:latin typeface="Dank Mono Regular" panose="00000509000000000000" pitchFamily="50" charset="0"/>
+              </a:rPr>
+              <a:t> es contar con una referencia de código que siempre será ejecutable sin errores, da igual en que navegador. Por otro lado, si como desarrollador quiero usar una característica que no está en el </a:t>
+            </a:r>
+            <a:r>
+              <a:rPr lang="es-ES" b="0" i="0" dirty="0" err="1">
+                <a:solidFill>
+                  <a:srgbClr val="D4D4D4"/>
+                </a:solidFill>
+                <a:effectLst/>
+                <a:highlight>
+                  <a:srgbClr val="1E1E1E"/>
+                </a:highlight>
+                <a:latin typeface="Dank Mono Regular" panose="00000509000000000000" pitchFamily="50" charset="0"/>
+              </a:rPr>
+              <a:t>baseline</a:t>
+            </a:r>
+            <a:r>
+              <a:rPr lang="es-ES" b="0" i="0" dirty="0">
+                <a:solidFill>
+                  <a:srgbClr val="D4D4D4"/>
+                </a:solidFill>
+                <a:effectLst/>
+                <a:highlight>
+                  <a:srgbClr val="1E1E1E"/>
+                </a:highlight>
+                <a:latin typeface="Dank Mono Regular" panose="00000509000000000000" pitchFamily="50" charset="0"/>
+              </a:rPr>
+              <a:t>, debo tener en cuenta que podría fallar en algún navegador que no la soporte. ¿Qué hacemos en tales casos? </a:t>
+            </a:r>
+            <a:r>
+              <a:rPr lang="es-ES" b="0" i="0" dirty="0" err="1">
+                <a:solidFill>
+                  <a:srgbClr val="D4D4D4"/>
+                </a:solidFill>
+                <a:effectLst/>
+                <a:highlight>
+                  <a:srgbClr val="1E1E1E"/>
+                </a:highlight>
+                <a:latin typeface="Dank Mono Regular" panose="00000509000000000000" pitchFamily="50" charset="0"/>
+              </a:rPr>
+              <a:t>Transpilar</a:t>
+            </a:r>
+            <a:r>
+              <a:rPr lang="es-ES" b="0" i="0" dirty="0">
+                <a:solidFill>
+                  <a:srgbClr val="D4D4D4"/>
+                </a:solidFill>
+                <a:effectLst/>
+                <a:highlight>
+                  <a:srgbClr val="1E1E1E"/>
+                </a:highlight>
+                <a:latin typeface="Dank Mono Regular" panose="00000509000000000000" pitchFamily="50" charset="0"/>
+              </a:rPr>
+              <a:t> para aplicar </a:t>
+            </a:r>
+            <a:r>
+              <a:rPr lang="es-ES" b="0" i="0" dirty="0" err="1">
+                <a:solidFill>
+                  <a:srgbClr val="D4D4D4"/>
+                </a:solidFill>
+                <a:effectLst/>
+                <a:highlight>
+                  <a:srgbClr val="1E1E1E"/>
+                </a:highlight>
+                <a:latin typeface="Dank Mono Regular" panose="00000509000000000000" pitchFamily="50" charset="0"/>
+              </a:rPr>
+              <a:t>polyfills</a:t>
+            </a:r>
+            <a:r>
+              <a:rPr lang="es-ES" b="0" i="0" dirty="0">
+                <a:solidFill>
+                  <a:srgbClr val="D4D4D4"/>
+                </a:solidFill>
+                <a:effectLst/>
+                <a:highlight>
+                  <a:srgbClr val="1E1E1E"/>
+                </a:highlight>
+                <a:latin typeface="Dank Mono Regular" panose="00000509000000000000" pitchFamily="50" charset="0"/>
+              </a:rPr>
+              <a:t> con los que compatibilizar mi código.</a:t>
+            </a:r>
+            <a:br>
+              <a:rPr lang="es-ES" b="0" i="0" dirty="0">
+                <a:solidFill>
+                  <a:srgbClr val="D4D4D4"/>
+                </a:solidFill>
+                <a:effectLst/>
+                <a:highlight>
+                  <a:srgbClr val="1E1E1E"/>
+                </a:highlight>
+                <a:latin typeface="Dank Mono Regular" panose="00000509000000000000" pitchFamily="50" charset="0"/>
+              </a:rPr>
+            </a:br>
+            <a:endParaRPr lang="es-ES" b="0" i="0" dirty="0">
+              <a:solidFill>
+                <a:srgbClr val="D4D4D4"/>
+              </a:solidFill>
+              <a:effectLst/>
+              <a:highlight>
+                <a:srgbClr val="1E1E1E"/>
+              </a:highlight>
+              <a:latin typeface="Dank Mono Regular" panose="00000509000000000000" pitchFamily="50" charset="0"/>
+            </a:endParaRPr>
+          </a:p>
+          <a:p>
+            <a:br>
+              <a:rPr lang="es-ES" b="0" dirty="0">
+                <a:solidFill>
+                  <a:srgbClr val="D4D4D4"/>
+                </a:solidFill>
+                <a:effectLst/>
+                <a:highlight>
+                  <a:srgbClr val="1E1E1E"/>
+                </a:highlight>
+                <a:latin typeface="Dank Mono Regular" panose="00000509000000000000" pitchFamily="50" charset="0"/>
+              </a:rPr>
+            </a:br>
+            <a:endParaRPr lang="es-ES" b="0" dirty="0">
+              <a:solidFill>
+                <a:srgbClr val="D4D4D4"/>
+              </a:solidFill>
+              <a:effectLst/>
+              <a:highlight>
+                <a:srgbClr val="1E1E1E"/>
+              </a:highlight>
+              <a:latin typeface="Dank Mono Regular" panose="00000509000000000000" pitchFamily="50" charset="0"/>
+            </a:endParaRPr>
+          </a:p>
+          <a:p>
+            <a:br>
+              <a:rPr lang="es-ES" b="0" dirty="0">
+                <a:solidFill>
+                  <a:srgbClr val="D4D4D4"/>
+                </a:solidFill>
+                <a:effectLst/>
+                <a:highlight>
+                  <a:srgbClr val="1E1E1E"/>
+                </a:highlight>
+                <a:latin typeface="Dank Mono Regular" panose="00000509000000000000" pitchFamily="50" charset="0"/>
+              </a:rPr>
+            </a:br>
+            <a:endParaRPr lang="es-ES" b="0" dirty="0">
+              <a:solidFill>
+                <a:srgbClr val="D4D4D4"/>
+              </a:solidFill>
+              <a:effectLst/>
+              <a:highlight>
+                <a:srgbClr val="1E1E1E"/>
+              </a:highlight>
+              <a:latin typeface="Dank Mono Regular" panose="00000509000000000000" pitchFamily="50" charset="0"/>
+            </a:endParaRPr>
+          </a:p>
+          <a:p>
+            <a:endParaRPr lang="es-ES" dirty="0"/>
+          </a:p>
+        </p:txBody>
+      </p:sp>
+    </p:spTree>
+    <p:extLst>
+      <p:ext uri="{BB962C8B-B14F-4D97-AF65-F5344CB8AC3E}">
+        <p14:creationId xmlns:p14="http://schemas.microsoft.com/office/powerpoint/2010/main" val="1189325127"/>
+      </p:ext>
+    </p:extLst>
+  </p:cSld>
+  <p:clrMapOvr>
+    <a:masterClrMapping/>
+  </p:clrMapOvr>
+</p:notes>
+</file>
+
+<file path=ppt/notesSlides/notesSlide8.xml><?xml version="1.0" encoding="utf-8"?>
+<p:notes xmlns:a="http://schemas.openxmlformats.org/drawingml/2006/main" xmlns:r="http://schemas.openxmlformats.org/officeDocument/2006/relationships" xmlns:p="http://schemas.openxmlformats.org/presentationml/2006/main">
+  <p:cSld>
+    <p:spTree>
+      <p:nvGrpSpPr>
+        <p:cNvPr id="1" name=""/>
+        <p:cNvGrpSpPr/>
+        <p:nvPr/>
+      </p:nvGrpSpPr>
+      <p:grpSpPr>
+        <a:xfrm>
+          <a:off x="0" y="0"/>
+          <a:ext cx="0" cy="0"/>
+          <a:chOff x="0" y="0"/>
+          <a:chExt cx="0" cy="0"/>
+        </a:xfrm>
+      </p:grpSpPr>
+      <p:sp>
+        <p:nvSpPr>
+          <p:cNvPr id="2" name="Marcador de imagen de diapositiva 1"/>
+          <p:cNvSpPr>
+            <a:spLocks noGrp="1" noRot="1" noChangeAspect="1"/>
+          </p:cNvSpPr>
+          <p:nvPr>
+            <p:ph type="sldImg"/>
+          </p:nvPr>
+        </p:nvSpPr>
+        <p:spPr>
+          <a:xfrm>
+            <a:off x="381000" y="685800"/>
+            <a:ext cx="6096000" cy="3429000"/>
+          </a:xfrm>
+        </p:spPr>
+      </p:sp>
+      <p:sp>
+        <p:nvSpPr>
+          <p:cNvPr id="3" name="Marcador de notas 2"/>
+          <p:cNvSpPr>
+            <a:spLocks noGrp="1"/>
+          </p:cNvSpPr>
+          <p:nvPr>
+            <p:ph type="body" idx="1"/>
+          </p:nvPr>
+        </p:nvSpPr>
+        <p:spPr/>
+        <p:txBody>
+          <a:bodyPr/>
+          <a:lstStyle/>
+          <a:p>
+            <a:r>
               <a:rPr lang="es-ES" dirty="0"/>
               <a:t>Esta </a:t>
             </a:r>
@@ -3866,6 +4027,72 @@
     <p:extLst>
       <p:ext uri="{BB962C8B-B14F-4D97-AF65-F5344CB8AC3E}">
         <p14:creationId xmlns:p14="http://schemas.microsoft.com/office/powerpoint/2010/main" val="791509554"/>
+      </p:ext>
+    </p:extLst>
+  </p:cSld>
+  <p:clrMapOvr>
+    <a:masterClrMapping/>
+  </p:clrMapOvr>
+</p:notes>
+</file>
+
+<file path=ppt/notesSlides/notesSlide9.xml><?xml version="1.0" encoding="utf-8"?>
+<p:notes xmlns:a="http://schemas.openxmlformats.org/drawingml/2006/main" xmlns:r="http://schemas.openxmlformats.org/officeDocument/2006/relationships" xmlns:p="http://schemas.openxmlformats.org/presentationml/2006/main">
+  <p:cSld>
+    <p:spTree>
+      <p:nvGrpSpPr>
+        <p:cNvPr id="1" name=""/>
+        <p:cNvGrpSpPr/>
+        <p:nvPr/>
+      </p:nvGrpSpPr>
+      <p:grpSpPr>
+        <a:xfrm>
+          <a:off x="0" y="0"/>
+          <a:ext cx="0" cy="0"/>
+          <a:chOff x="0" y="0"/>
+          <a:chExt cx="0" cy="0"/>
+        </a:xfrm>
+      </p:grpSpPr>
+      <p:sp>
+        <p:nvSpPr>
+          <p:cNvPr id="2" name="Marcador de imagen de diapositiva 1"/>
+          <p:cNvSpPr>
+            <a:spLocks noGrp="1" noRot="1" noChangeAspect="1"/>
+          </p:cNvSpPr>
+          <p:nvPr>
+            <p:ph type="sldImg"/>
+          </p:nvPr>
+        </p:nvSpPr>
+        <p:spPr>
+          <a:xfrm>
+            <a:off x="381000" y="685800"/>
+            <a:ext cx="6096000" cy="3429000"/>
+          </a:xfrm>
+        </p:spPr>
+      </p:sp>
+      <p:sp>
+        <p:nvSpPr>
+          <p:cNvPr id="3" name="Marcador de notas 2"/>
+          <p:cNvSpPr>
+            <a:spLocks noGrp="1"/>
+          </p:cNvSpPr>
+          <p:nvPr>
+            <p:ph type="body" idx="1"/>
+          </p:nvPr>
+        </p:nvSpPr>
+        <p:spPr/>
+        <p:txBody>
+          <a:bodyPr/>
+          <a:lstStyle/>
+          <a:p>
+            <a:endParaRPr lang="es-ES"/>
+          </a:p>
+        </p:txBody>
+      </p:sp>
+    </p:spTree>
+    <p:extLst>
+      <p:ext uri="{BB962C8B-B14F-4D97-AF65-F5344CB8AC3E}">
+        <p14:creationId xmlns:p14="http://schemas.microsoft.com/office/powerpoint/2010/main" val="3129371088"/>
       </p:ext>
     </p:extLst>
   </p:cSld>
@@ -5576,7 +5803,7 @@
           </a:ln>
           <a:extLst>
             <a:ext uri="{C572A759-6A51-4108-AA02-DFA0A04FC94B}">
-              <ma14:wrappingTextBoxFlag xmlns="" xmlns:m="http://schemas.openxmlformats.org/officeDocument/2006/math" xmlns:a14="http://schemas.microsoft.com/office/drawing/2010/main" xmlns:ma14="http://schemas.microsoft.com/office/mac/drawingml/2011/main" val="1"/>
+              <ma14:wrappingTextBoxFlag xmlns:ma14="http://schemas.microsoft.com/office/mac/drawingml/2011/main" xmlns:a14="http://schemas.microsoft.com/office/drawing/2010/main" xmlns:m="http://schemas.openxmlformats.org/officeDocument/2006/math" xmlns="" val="1"/>
             </a:ext>
           </a:extLst>
         </p:spPr>
@@ -5615,7 +5842,7 @@
           </a:ln>
           <a:extLst>
             <a:ext uri="{C572A759-6A51-4108-AA02-DFA0A04FC94B}">
-              <ma14:wrappingTextBoxFlag xmlns="" xmlns:m="http://schemas.openxmlformats.org/officeDocument/2006/math" xmlns:a14="http://schemas.microsoft.com/office/drawing/2010/main" xmlns:ma14="http://schemas.microsoft.com/office/mac/drawingml/2011/main" val="1"/>
+              <ma14:wrappingTextBoxFlag xmlns:ma14="http://schemas.microsoft.com/office/mac/drawingml/2011/main" xmlns:a14="http://schemas.microsoft.com/office/drawing/2010/main" xmlns:m="http://schemas.openxmlformats.org/officeDocument/2006/math" xmlns="" val="1"/>
             </a:ext>
           </a:extLst>
         </p:spPr>
@@ -6573,7 +6800,7 @@
           </a:ln>
           <a:extLst>
             <a:ext uri="{C572A759-6A51-4108-AA02-DFA0A04FC94B}">
-              <ma14:wrappingTextBoxFlag xmlns="" xmlns:m="http://schemas.openxmlformats.org/officeDocument/2006/math" xmlns:a14="http://schemas.microsoft.com/office/drawing/2010/main" xmlns:ma14="http://schemas.microsoft.com/office/mac/drawingml/2011/main" val="1"/>
+              <ma14:wrappingTextBoxFlag xmlns:ma14="http://schemas.microsoft.com/office/mac/drawingml/2011/main" xmlns:a14="http://schemas.microsoft.com/office/drawing/2010/main" xmlns:m="http://schemas.openxmlformats.org/officeDocument/2006/math" xmlns="" val="1"/>
             </a:ext>
           </a:extLst>
         </p:spPr>
@@ -6623,7 +6850,7 @@
           </a:ln>
           <a:extLst>
             <a:ext uri="{C572A759-6A51-4108-AA02-DFA0A04FC94B}">
-              <ma14:wrappingTextBoxFlag xmlns="" xmlns:m="http://schemas.openxmlformats.org/officeDocument/2006/math" xmlns:a14="http://schemas.microsoft.com/office/drawing/2010/main" xmlns:ma14="http://schemas.microsoft.com/office/mac/drawingml/2011/main" val="1"/>
+              <ma14:wrappingTextBoxFlag xmlns:ma14="http://schemas.microsoft.com/office/mac/drawingml/2011/main" xmlns:a14="http://schemas.microsoft.com/office/drawing/2010/main" xmlns:m="http://schemas.openxmlformats.org/officeDocument/2006/math" xmlns="" val="1"/>
             </a:ext>
           </a:extLst>
         </p:spPr>
@@ -6660,7 +6887,7 @@
           <p:nvPr/>
         </p:nvPicPr>
         <p:blipFill>
-          <a:blip r:embed="rId2"/>
+          <a:blip r:embed="rId3"/>
           <a:srcRect l="50688" r="13872" b="52337"/>
           <a:stretch>
             <a:fillRect/>
@@ -6750,7 +6977,7 @@
           <p:nvPr/>
         </p:nvPicPr>
         <p:blipFill>
-          <a:blip r:embed="rId2"/>
+          <a:blip r:embed="rId3"/>
           <a:stretch>
             <a:fillRect/>
           </a:stretch>
@@ -6777,7 +7004,7 @@
           <p:nvPr/>
         </p:nvPicPr>
         <p:blipFill>
-          <a:blip r:embed="rId3"/>
+          <a:blip r:embed="rId4"/>
           <a:stretch>
             <a:fillRect/>
           </a:stretch>
@@ -6804,7 +7031,7 @@
           <p:nvPr/>
         </p:nvPicPr>
         <p:blipFill>
-          <a:blip r:embed="rId4"/>
+          <a:blip r:embed="rId5"/>
           <a:stretch>
             <a:fillRect/>
           </a:stretch>
@@ -6831,7 +7058,7 @@
           <p:nvPr/>
         </p:nvPicPr>
         <p:blipFill>
-          <a:blip r:embed="rId5"/>
+          <a:blip r:embed="rId6"/>
           <a:stretch>
             <a:fillRect/>
           </a:stretch>
@@ -6858,7 +7085,7 @@
           <p:nvPr/>
         </p:nvPicPr>
         <p:blipFill>
-          <a:blip r:embed="rId6"/>
+          <a:blip r:embed="rId7"/>
           <a:stretch>
             <a:fillRect/>
           </a:stretch>
@@ -6912,7 +7139,7 @@
             <a:effectLst/>
             <a:extLst>
               <a:ext uri="{C572A759-6A51-4108-AA02-DFA0A04FC94B}">
-                <ma14:wrappingTextBoxFlag xmlns="" xmlns:m="http://schemas.openxmlformats.org/officeDocument/2006/math" xmlns:a14="http://schemas.microsoft.com/office/drawing/2010/main" xmlns:ma14="http://schemas.microsoft.com/office/mac/drawingml/2011/main" val="1"/>
+                <ma14:wrappingTextBoxFlag xmlns:ma14="http://schemas.microsoft.com/office/mac/drawingml/2011/main" xmlns:a14="http://schemas.microsoft.com/office/drawing/2010/main" xmlns:m="http://schemas.openxmlformats.org/officeDocument/2006/math" xmlns="" val="1"/>
               </a:ext>
             </a:extLst>
           </p:spPr>
@@ -6962,7 +7189,7 @@
             <a:effectLst/>
             <a:extLst>
               <a:ext uri="{C572A759-6A51-4108-AA02-DFA0A04FC94B}">
-                <ma14:wrappingTextBoxFlag xmlns="" xmlns:m="http://schemas.openxmlformats.org/officeDocument/2006/math" xmlns:a14="http://schemas.microsoft.com/office/drawing/2010/main" xmlns:ma14="http://schemas.microsoft.com/office/mac/drawingml/2011/main" val="1"/>
+                <ma14:wrappingTextBoxFlag xmlns:ma14="http://schemas.microsoft.com/office/mac/drawingml/2011/main" xmlns:a14="http://schemas.microsoft.com/office/drawing/2010/main" xmlns:m="http://schemas.openxmlformats.org/officeDocument/2006/math" xmlns="" val="1"/>
               </a:ext>
             </a:extLst>
           </p:spPr>
@@ -7012,7 +7239,7 @@
             <a:effectLst/>
             <a:extLst>
               <a:ext uri="{C572A759-6A51-4108-AA02-DFA0A04FC94B}">
-                <ma14:wrappingTextBoxFlag xmlns="" xmlns:m="http://schemas.openxmlformats.org/officeDocument/2006/math" xmlns:a14="http://schemas.microsoft.com/office/drawing/2010/main" xmlns:ma14="http://schemas.microsoft.com/office/mac/drawingml/2011/main" val="1"/>
+                <ma14:wrappingTextBoxFlag xmlns:ma14="http://schemas.microsoft.com/office/mac/drawingml/2011/main" xmlns:a14="http://schemas.microsoft.com/office/drawing/2010/main" xmlns:m="http://schemas.openxmlformats.org/officeDocument/2006/math" xmlns="" val="1"/>
               </a:ext>
             </a:extLst>
           </p:spPr>
@@ -7062,7 +7289,7 @@
             <a:effectLst/>
             <a:extLst>
               <a:ext uri="{C572A759-6A51-4108-AA02-DFA0A04FC94B}">
-                <ma14:wrappingTextBoxFlag xmlns="" xmlns:m="http://schemas.openxmlformats.org/officeDocument/2006/math" xmlns:a14="http://schemas.microsoft.com/office/drawing/2010/main" xmlns:ma14="http://schemas.microsoft.com/office/mac/drawingml/2011/main" val="1"/>
+                <ma14:wrappingTextBoxFlag xmlns:ma14="http://schemas.microsoft.com/office/mac/drawingml/2011/main" xmlns:a14="http://schemas.microsoft.com/office/drawing/2010/main" xmlns:m="http://schemas.openxmlformats.org/officeDocument/2006/math" xmlns="" val="1"/>
               </a:ext>
             </a:extLst>
           </p:spPr>
@@ -7365,7 +7592,7 @@
               <a:effectLst/>
               <a:extLst>
                 <a:ext uri="{C572A759-6A51-4108-AA02-DFA0A04FC94B}">
-                  <ma14:wrappingTextBoxFlag xmlns="" xmlns:m="http://schemas.openxmlformats.org/officeDocument/2006/math" xmlns:a14="http://schemas.microsoft.com/office/drawing/2010/main" xmlns:ma14="http://schemas.microsoft.com/office/mac/drawingml/2011/main" val="1"/>
+                  <ma14:wrappingTextBoxFlag xmlns:ma14="http://schemas.microsoft.com/office/mac/drawingml/2011/main" xmlns:a14="http://schemas.microsoft.com/office/drawing/2010/main" xmlns:m="http://schemas.openxmlformats.org/officeDocument/2006/math" xmlns="" val="1"/>
                 </a:ext>
               </a:extLst>
             </p:spPr>
@@ -7498,7 +7725,7 @@
                 <a:effectLst/>
                 <a:extLst>
                   <a:ext uri="{C572A759-6A51-4108-AA02-DFA0A04FC94B}">
-                    <ma14:wrappingTextBoxFlag xmlns="" xmlns:m="http://schemas.openxmlformats.org/officeDocument/2006/math" xmlns:a14="http://schemas.microsoft.com/office/drawing/2010/main" xmlns:ma14="http://schemas.microsoft.com/office/mac/drawingml/2011/main" val="1"/>
+                    <ma14:wrappingTextBoxFlag xmlns:ma14="http://schemas.microsoft.com/office/mac/drawingml/2011/main" xmlns:a14="http://schemas.microsoft.com/office/drawing/2010/main" xmlns:m="http://schemas.openxmlformats.org/officeDocument/2006/math" xmlns="" val="1"/>
                   </a:ext>
                 </a:extLst>
               </p:spPr>
@@ -7688,7 +7915,7 @@
               <a:effectLst/>
               <a:extLst>
                 <a:ext uri="{C572A759-6A51-4108-AA02-DFA0A04FC94B}">
-                  <ma14:wrappingTextBoxFlag xmlns="" xmlns:m="http://schemas.openxmlformats.org/officeDocument/2006/math" xmlns:a14="http://schemas.microsoft.com/office/drawing/2010/main" xmlns:ma14="http://schemas.microsoft.com/office/mac/drawingml/2011/main" val="1"/>
+                  <ma14:wrappingTextBoxFlag xmlns:ma14="http://schemas.microsoft.com/office/mac/drawingml/2011/main" xmlns:a14="http://schemas.microsoft.com/office/drawing/2010/main" xmlns:m="http://schemas.openxmlformats.org/officeDocument/2006/math" xmlns="" val="1"/>
                 </a:ext>
               </a:extLst>
             </p:spPr>
@@ -7824,7 +8051,7 @@
                 <a:effectLst/>
                 <a:extLst>
                   <a:ext uri="{C572A759-6A51-4108-AA02-DFA0A04FC94B}">
-                    <ma14:wrappingTextBoxFlag xmlns="" xmlns:m="http://schemas.openxmlformats.org/officeDocument/2006/math" xmlns:a14="http://schemas.microsoft.com/office/drawing/2010/main" xmlns:ma14="http://schemas.microsoft.com/office/mac/drawingml/2011/main" val="1"/>
+                    <ma14:wrappingTextBoxFlag xmlns:ma14="http://schemas.microsoft.com/office/mac/drawingml/2011/main" xmlns:a14="http://schemas.microsoft.com/office/drawing/2010/main" xmlns:m="http://schemas.openxmlformats.org/officeDocument/2006/math" xmlns="" val="1"/>
                   </a:ext>
                 </a:extLst>
               </p:spPr>
@@ -8015,7 +8242,7 @@
               <a:effectLst/>
               <a:extLst>
                 <a:ext uri="{C572A759-6A51-4108-AA02-DFA0A04FC94B}">
-                  <ma14:wrappingTextBoxFlag xmlns="" xmlns:m="http://schemas.openxmlformats.org/officeDocument/2006/math" xmlns:a14="http://schemas.microsoft.com/office/drawing/2010/main" xmlns:ma14="http://schemas.microsoft.com/office/mac/drawingml/2011/main" val="1"/>
+                  <ma14:wrappingTextBoxFlag xmlns:ma14="http://schemas.microsoft.com/office/mac/drawingml/2011/main" xmlns:a14="http://schemas.microsoft.com/office/drawing/2010/main" xmlns:m="http://schemas.openxmlformats.org/officeDocument/2006/math" xmlns="" val="1"/>
                 </a:ext>
               </a:extLst>
             </p:spPr>
@@ -8152,7 +8379,7 @@
                 <a:effectLst/>
                 <a:extLst>
                   <a:ext uri="{C572A759-6A51-4108-AA02-DFA0A04FC94B}">
-                    <ma14:wrappingTextBoxFlag xmlns="" xmlns:m="http://schemas.openxmlformats.org/officeDocument/2006/math" xmlns:a14="http://schemas.microsoft.com/office/drawing/2010/main" xmlns:ma14="http://schemas.microsoft.com/office/mac/drawingml/2011/main" val="1"/>
+                    <ma14:wrappingTextBoxFlag xmlns:ma14="http://schemas.microsoft.com/office/mac/drawingml/2011/main" xmlns:a14="http://schemas.microsoft.com/office/drawing/2010/main" xmlns:m="http://schemas.openxmlformats.org/officeDocument/2006/math" xmlns="" val="1"/>
                   </a:ext>
                 </a:extLst>
               </p:spPr>
@@ -8469,7 +8696,7 @@
           </a:ln>
           <a:extLst>
             <a:ext uri="{C572A759-6A51-4108-AA02-DFA0A04FC94B}">
-              <ma14:wrappingTextBoxFlag xmlns="" xmlns:m="http://schemas.openxmlformats.org/officeDocument/2006/math" xmlns:a14="http://schemas.microsoft.com/office/drawing/2010/main" xmlns:ma14="http://schemas.microsoft.com/office/mac/drawingml/2011/main" val="1"/>
+              <ma14:wrappingTextBoxFlag xmlns:ma14="http://schemas.microsoft.com/office/mac/drawingml/2011/main" xmlns:a14="http://schemas.microsoft.com/office/drawing/2010/main" xmlns:m="http://schemas.openxmlformats.org/officeDocument/2006/math" xmlns="" val="1"/>
             </a:ext>
           </a:extLst>
         </p:spPr>
@@ -8618,7 +8845,7 @@
               <a:effectLst/>
               <a:extLst>
                 <a:ext uri="{C572A759-6A51-4108-AA02-DFA0A04FC94B}">
-                  <ma14:wrappingTextBoxFlag xmlns:ma14="http://schemas.microsoft.com/office/mac/drawingml/2011/main" xmlns:a14="http://schemas.microsoft.com/office/drawing/2010/main" xmlns:m="http://schemas.openxmlformats.org/officeDocument/2006/math" xmlns="" val="1"/>
+                  <ma14:wrappingTextBoxFlag xmlns="" xmlns:m="http://schemas.openxmlformats.org/officeDocument/2006/math" xmlns:a14="http://schemas.microsoft.com/office/drawing/2010/main" xmlns:ma14="http://schemas.microsoft.com/office/mac/drawingml/2011/main" val="1"/>
                 </a:ext>
               </a:extLst>
             </p:spPr>
@@ -8819,7 +9046,7 @@
                 <a:effectLst/>
                 <a:extLst>
                   <a:ext uri="{C572A759-6A51-4108-AA02-DFA0A04FC94B}">
-                    <ma14:wrappingTextBoxFlag xmlns:ma14="http://schemas.microsoft.com/office/mac/drawingml/2011/main" xmlns:a14="http://schemas.microsoft.com/office/drawing/2010/main" xmlns:m="http://schemas.openxmlformats.org/officeDocument/2006/math" xmlns="" val="1"/>
+                    <ma14:wrappingTextBoxFlag xmlns="" xmlns:m="http://schemas.openxmlformats.org/officeDocument/2006/math" xmlns:a14="http://schemas.microsoft.com/office/drawing/2010/main" xmlns:ma14="http://schemas.microsoft.com/office/mac/drawingml/2011/main" val="1"/>
                   </a:ext>
                 </a:extLst>
               </p:spPr>
@@ -8963,7 +9190,7 @@
                 <a:effectLst/>
                 <a:extLst>
                   <a:ext uri="{C572A759-6A51-4108-AA02-DFA0A04FC94B}">
-                    <ma14:wrappingTextBoxFlag xmlns:ma14="http://schemas.microsoft.com/office/mac/drawingml/2011/main" xmlns:a14="http://schemas.microsoft.com/office/drawing/2010/main" xmlns:m="http://schemas.openxmlformats.org/officeDocument/2006/math" xmlns="" val="1"/>
+                    <ma14:wrappingTextBoxFlag xmlns="" xmlns:m="http://schemas.openxmlformats.org/officeDocument/2006/math" xmlns:a14="http://schemas.microsoft.com/office/drawing/2010/main" xmlns:ma14="http://schemas.microsoft.com/office/mac/drawingml/2011/main" val="1"/>
                   </a:ext>
                 </a:extLst>
               </p:spPr>
@@ -9187,7 +9414,7 @@
                 <a:effectLst/>
                 <a:extLst>
                   <a:ext uri="{C572A759-6A51-4108-AA02-DFA0A04FC94B}">
-                    <ma14:wrappingTextBoxFlag xmlns:ma14="http://schemas.microsoft.com/office/mac/drawingml/2011/main" xmlns:a14="http://schemas.microsoft.com/office/drawing/2010/main" xmlns:m="http://schemas.openxmlformats.org/officeDocument/2006/math" xmlns="" val="1"/>
+                    <ma14:wrappingTextBoxFlag xmlns="" xmlns:m="http://schemas.openxmlformats.org/officeDocument/2006/math" xmlns:a14="http://schemas.microsoft.com/office/drawing/2010/main" xmlns:ma14="http://schemas.microsoft.com/office/mac/drawingml/2011/main" val="1"/>
                   </a:ext>
                 </a:extLst>
               </p:spPr>
@@ -9339,7 +9566,7 @@
                   <a:effectLst/>
                   <a:extLst>
                     <a:ext uri="{C572A759-6A51-4108-AA02-DFA0A04FC94B}">
-                      <ma14:wrappingTextBoxFlag xmlns="" xmlns:m="http://schemas.openxmlformats.org/officeDocument/2006/math" xmlns:a14="http://schemas.microsoft.com/office/drawing/2010/main" xmlns:ma14="http://schemas.microsoft.com/office/mac/drawingml/2011/main" val="1"/>
+                      <ma14:wrappingTextBoxFlag xmlns:ma14="http://schemas.microsoft.com/office/mac/drawingml/2011/main" xmlns:a14="http://schemas.microsoft.com/office/drawing/2010/main" xmlns:m="http://schemas.openxmlformats.org/officeDocument/2006/math" xmlns="" val="1"/>
                     </a:ext>
                   </a:extLst>
                 </p:spPr>
@@ -9537,7 +9764,7 @@
               <a:effectLst/>
               <a:extLst>
                 <a:ext uri="{C572A759-6A51-4108-AA02-DFA0A04FC94B}">
-                  <ma14:wrappingTextBoxFlag xmlns:ma14="http://schemas.microsoft.com/office/mac/drawingml/2011/main" xmlns:a14="http://schemas.microsoft.com/office/drawing/2010/main" xmlns:m="http://schemas.openxmlformats.org/officeDocument/2006/math" xmlns="" val="1"/>
+                  <ma14:wrappingTextBoxFlag xmlns="" xmlns:m="http://schemas.openxmlformats.org/officeDocument/2006/math" xmlns:a14="http://schemas.microsoft.com/office/drawing/2010/main" xmlns:ma14="http://schemas.microsoft.com/office/mac/drawingml/2011/main" val="1"/>
                 </a:ext>
               </a:extLst>
             </p:spPr>
@@ -9689,7 +9916,7 @@
                 <a:effectLst/>
                 <a:extLst>
                   <a:ext uri="{C572A759-6A51-4108-AA02-DFA0A04FC94B}">
-                    <ma14:wrappingTextBoxFlag xmlns="" xmlns:m="http://schemas.openxmlformats.org/officeDocument/2006/math" xmlns:a14="http://schemas.microsoft.com/office/drawing/2010/main" xmlns:ma14="http://schemas.microsoft.com/office/mac/drawingml/2011/main" val="1"/>
+                    <ma14:wrappingTextBoxFlag xmlns:ma14="http://schemas.microsoft.com/office/mac/drawingml/2011/main" xmlns:a14="http://schemas.microsoft.com/office/drawing/2010/main" xmlns:m="http://schemas.openxmlformats.org/officeDocument/2006/math" xmlns="" val="1"/>
                   </a:ext>
                 </a:extLst>
               </p:spPr>
@@ -9990,7 +10217,7 @@
           </a:ln>
           <a:extLst>
             <a:ext uri="{C572A759-6A51-4108-AA02-DFA0A04FC94B}">
-              <ma14:wrappingTextBoxFlag xmlns="" xmlns:m="http://schemas.openxmlformats.org/officeDocument/2006/math" xmlns:a14="http://schemas.microsoft.com/office/drawing/2010/main" xmlns:ma14="http://schemas.microsoft.com/office/mac/drawingml/2011/main" val="1"/>
+              <ma14:wrappingTextBoxFlag xmlns:ma14="http://schemas.microsoft.com/office/mac/drawingml/2011/main" xmlns:a14="http://schemas.microsoft.com/office/drawing/2010/main" xmlns:m="http://schemas.openxmlformats.org/officeDocument/2006/math" xmlns="" val="1"/>
             </a:ext>
           </a:extLst>
         </p:spPr>
@@ -10046,7 +10273,7 @@
           </a:ln>
           <a:extLst>
             <a:ext uri="{C572A759-6A51-4108-AA02-DFA0A04FC94B}">
-              <ma14:wrappingTextBoxFlag xmlns="" xmlns:m="http://schemas.openxmlformats.org/officeDocument/2006/math" xmlns:a14="http://schemas.microsoft.com/office/drawing/2010/main" xmlns:ma14="http://schemas.microsoft.com/office/mac/drawingml/2011/main" val="1"/>
+              <ma14:wrappingTextBoxFlag xmlns:ma14="http://schemas.microsoft.com/office/mac/drawingml/2011/main" xmlns:a14="http://schemas.microsoft.com/office/drawing/2010/main" xmlns:m="http://schemas.openxmlformats.org/officeDocument/2006/math" xmlns="" val="1"/>
             </a:ext>
           </a:extLst>
         </p:spPr>
@@ -10148,7 +10375,7 @@
           </a:ln>
           <a:extLst>
             <a:ext uri="{C572A759-6A51-4108-AA02-DFA0A04FC94B}">
-              <ma14:wrappingTextBoxFlag xmlns="" xmlns:m="http://schemas.openxmlformats.org/officeDocument/2006/math" xmlns:a14="http://schemas.microsoft.com/office/drawing/2010/main" xmlns:ma14="http://schemas.microsoft.com/office/mac/drawingml/2011/main" val="1"/>
+              <ma14:wrappingTextBoxFlag xmlns:ma14="http://schemas.microsoft.com/office/mac/drawingml/2011/main" xmlns:a14="http://schemas.microsoft.com/office/drawing/2010/main" xmlns:m="http://schemas.openxmlformats.org/officeDocument/2006/math" xmlns="" val="1"/>
             </a:ext>
           </a:extLst>
         </p:spPr>
@@ -10198,7 +10425,7 @@
           </a:ln>
           <a:extLst>
             <a:ext uri="{C572A759-6A51-4108-AA02-DFA0A04FC94B}">
-              <ma14:wrappingTextBoxFlag xmlns="" xmlns:m="http://schemas.openxmlformats.org/officeDocument/2006/math" xmlns:a14="http://schemas.microsoft.com/office/drawing/2010/main" xmlns:ma14="http://schemas.microsoft.com/office/mac/drawingml/2011/main" val="1"/>
+              <ma14:wrappingTextBoxFlag xmlns:ma14="http://schemas.microsoft.com/office/mac/drawingml/2011/main" xmlns:a14="http://schemas.microsoft.com/office/drawing/2010/main" xmlns:m="http://schemas.openxmlformats.org/officeDocument/2006/math" xmlns="" val="1"/>
             </a:ext>
           </a:extLst>
         </p:spPr>
@@ -10273,7 +10500,7 @@
           </a:ln>
           <a:extLst>
             <a:ext uri="{C572A759-6A51-4108-AA02-DFA0A04FC94B}">
-              <ma14:wrappingTextBoxFlag xmlns="" xmlns:m="http://schemas.openxmlformats.org/officeDocument/2006/math" xmlns:a14="http://schemas.microsoft.com/office/drawing/2010/main" xmlns:ma14="http://schemas.microsoft.com/office/mac/drawingml/2011/main" val="1"/>
+              <ma14:wrappingTextBoxFlag xmlns:ma14="http://schemas.microsoft.com/office/mac/drawingml/2011/main" xmlns:a14="http://schemas.microsoft.com/office/drawing/2010/main" xmlns:m="http://schemas.openxmlformats.org/officeDocument/2006/math" xmlns="" val="1"/>
             </a:ext>
           </a:extLst>
         </p:spPr>
@@ -10323,21 +10550,26 @@
               <a:t> </a:t>
             </a:r>
             <a:r>
-              <a:rPr dirty="0" err="1"/>
-              <a:t>inicialmente</a:t>
+              <a:rPr lang="es-ES" dirty="0"/>
+              <a:t>e</a:t>
             </a:r>
             <a:r>
               <a:rPr dirty="0"/>
-              <a:t> </a:t>
-            </a:r>
-            <a:r>
-              <a:rPr dirty="0" err="1"/>
-              <a:t>en</a:t>
+              <a:t>n </a:t>
+            </a:r>
+            <a:r>
+              <a:rPr lang="es-ES" dirty="0"/>
+              <a:t>un </a:t>
             </a:r>
             <a:r>
               <a:rPr dirty="0"/>
-              <a:t> Java</a:t>
-            </a:r>
+              <a:t>Java</a:t>
+            </a:r>
+            <a:r>
+              <a:rPr lang="es-ES" dirty="0"/>
+              <a:t> “lite”</a:t>
+            </a:r>
+            <a:endParaRPr dirty="0"/>
           </a:p>
         </p:txBody>
       </p:sp>
@@ -10360,7 +10592,7 @@
           </a:ln>
           <a:extLst>
             <a:ext uri="{C572A759-6A51-4108-AA02-DFA0A04FC94B}">
-              <ma14:wrappingTextBoxFlag xmlns="" xmlns:m="http://schemas.openxmlformats.org/officeDocument/2006/math" xmlns:a14="http://schemas.microsoft.com/office/drawing/2010/main" xmlns:ma14="http://schemas.microsoft.com/office/mac/drawingml/2011/main" val="1"/>
+              <ma14:wrappingTextBoxFlag xmlns:ma14="http://schemas.microsoft.com/office/mac/drawingml/2011/main" xmlns:a14="http://schemas.microsoft.com/office/drawing/2010/main" xmlns:m="http://schemas.openxmlformats.org/officeDocument/2006/math" xmlns="" val="1"/>
             </a:ext>
           </a:extLst>
         </p:spPr>
@@ -10420,7 +10652,7 @@
           </a:ln>
           <a:extLst>
             <a:ext uri="{C572A759-6A51-4108-AA02-DFA0A04FC94B}">
-              <ma14:wrappingTextBoxFlag xmlns="" xmlns:m="http://schemas.openxmlformats.org/officeDocument/2006/math" xmlns:a14="http://schemas.microsoft.com/office/drawing/2010/main" xmlns:ma14="http://schemas.microsoft.com/office/mac/drawingml/2011/main" val="1"/>
+              <ma14:wrappingTextBoxFlag xmlns:ma14="http://schemas.microsoft.com/office/mac/drawingml/2011/main" xmlns:a14="http://schemas.microsoft.com/office/drawing/2010/main" xmlns:m="http://schemas.openxmlformats.org/officeDocument/2006/math" xmlns="" val="1"/>
             </a:ext>
           </a:extLst>
         </p:spPr>
@@ -10463,7 +10695,7 @@
         <p:spPr>
           <a:xfrm>
             <a:off x="900112" y="3668502"/>
-            <a:ext cx="7653195" cy="279401"/>
+            <a:ext cx="7653195" cy="276999"/>
           </a:xfrm>
           <a:prstGeom prst="rect">
             <a:avLst/>
@@ -10473,7 +10705,7 @@
           </a:ln>
           <a:extLst>
             <a:ext uri="{C572A759-6A51-4108-AA02-DFA0A04FC94B}">
-              <ma14:wrappingTextBoxFlag xmlns="" xmlns:m="http://schemas.openxmlformats.org/officeDocument/2006/math" xmlns:a14="http://schemas.microsoft.com/office/drawing/2010/main" xmlns:ma14="http://schemas.microsoft.com/office/mac/drawingml/2011/main" val="1"/>
+              <ma14:wrappingTextBoxFlag xmlns:ma14="http://schemas.microsoft.com/office/mac/drawingml/2011/main" xmlns:a14="http://schemas.microsoft.com/office/drawing/2010/main" xmlns:m="http://schemas.openxmlformats.org/officeDocument/2006/math" xmlns="" val="1"/>
             </a:ext>
           </a:extLst>
         </p:spPr>
@@ -10499,8 +10731,18 @@
           </a:lstStyle>
           <a:p>
             <a:r>
-              <a:t>Ganó tracción y Microsoft acabó adoptándolo en 1996</a:t>
-            </a:r>
+              <a:rPr lang="es-ES" dirty="0"/>
+              <a:t>Microsoft creó </a:t>
+            </a:r>
+            <a:r>
+              <a:rPr lang="es-ES" dirty="0" err="1"/>
+              <a:t>JScript</a:t>
+            </a:r>
+            <a:r>
+              <a:rPr lang="es-ES" dirty="0"/>
+              <a:t> en 1996 con ingeniería inversa sobre JavaScript</a:t>
+            </a:r>
+            <a:endParaRPr dirty="0"/>
           </a:p>
         </p:txBody>
       </p:sp>
@@ -10523,7 +10765,7 @@
           </a:ln>
           <a:extLst>
             <a:ext uri="{C572A759-6A51-4108-AA02-DFA0A04FC94B}">
-              <ma14:wrappingTextBoxFlag xmlns="" xmlns:m="http://schemas.openxmlformats.org/officeDocument/2006/math" xmlns:a14="http://schemas.microsoft.com/office/drawing/2010/main" xmlns:ma14="http://schemas.microsoft.com/office/mac/drawingml/2011/main" val="1"/>
+              <ma14:wrappingTextBoxFlag xmlns:ma14="http://schemas.microsoft.com/office/mac/drawingml/2011/main" xmlns:a14="http://schemas.microsoft.com/office/drawing/2010/main" xmlns:m="http://schemas.openxmlformats.org/officeDocument/2006/math" xmlns="" val="1"/>
             </a:ext>
           </a:extLst>
         </p:spPr>
@@ -10573,7 +10815,7 @@
           </a:ln>
           <a:extLst>
             <a:ext uri="{C572A759-6A51-4108-AA02-DFA0A04FC94B}">
-              <ma14:wrappingTextBoxFlag xmlns="" xmlns:m="http://schemas.openxmlformats.org/officeDocument/2006/math" xmlns:a14="http://schemas.microsoft.com/office/drawing/2010/main" xmlns:ma14="http://schemas.microsoft.com/office/mac/drawingml/2011/main" val="1"/>
+              <ma14:wrappingTextBoxFlag xmlns:ma14="http://schemas.microsoft.com/office/mac/drawingml/2011/main" xmlns:a14="http://schemas.microsoft.com/office/drawing/2010/main" xmlns:m="http://schemas.openxmlformats.org/officeDocument/2006/math" xmlns="" val="1"/>
             </a:ext>
           </a:extLst>
         </p:spPr>
@@ -10752,7 +10994,7 @@
             <a:effectLst/>
             <a:extLst>
               <a:ext uri="{C572A759-6A51-4108-AA02-DFA0A04FC94B}">
-                <ma14:wrappingTextBoxFlag xmlns="" xmlns:m="http://schemas.openxmlformats.org/officeDocument/2006/math" xmlns:a14="http://schemas.microsoft.com/office/drawing/2010/main" xmlns:ma14="http://schemas.microsoft.com/office/mac/drawingml/2011/main" val="1"/>
+                <ma14:wrappingTextBoxFlag xmlns:ma14="http://schemas.microsoft.com/office/mac/drawingml/2011/main" xmlns:a14="http://schemas.microsoft.com/office/drawing/2010/main" xmlns:m="http://schemas.openxmlformats.org/officeDocument/2006/math" xmlns="" val="1"/>
               </a:ext>
             </a:extLst>
           </p:spPr>
@@ -10804,7 +11046,7 @@
             <a:effectLst/>
             <a:extLst>
               <a:ext uri="{C572A759-6A51-4108-AA02-DFA0A04FC94B}">
-                <ma14:wrappingTextBoxFlag xmlns="" xmlns:m="http://schemas.openxmlformats.org/officeDocument/2006/math" xmlns:a14="http://schemas.microsoft.com/office/drawing/2010/main" xmlns:ma14="http://schemas.microsoft.com/office/mac/drawingml/2011/main" val="1"/>
+                <ma14:wrappingTextBoxFlag xmlns:ma14="http://schemas.microsoft.com/office/mac/drawingml/2011/main" xmlns:a14="http://schemas.microsoft.com/office/drawing/2010/main" xmlns:m="http://schemas.openxmlformats.org/officeDocument/2006/math" xmlns="" val="1"/>
               </a:ext>
             </a:extLst>
           </p:spPr>
@@ -10907,7 +11149,7 @@
             <a:effectLst/>
             <a:extLst>
               <a:ext uri="{C572A759-6A51-4108-AA02-DFA0A04FC94B}">
-                <ma14:wrappingTextBoxFlag xmlns="" xmlns:m="http://schemas.openxmlformats.org/officeDocument/2006/math" xmlns:a14="http://schemas.microsoft.com/office/drawing/2010/main" xmlns:ma14="http://schemas.microsoft.com/office/mac/drawingml/2011/main" val="1"/>
+                <ma14:wrappingTextBoxFlag xmlns:ma14="http://schemas.microsoft.com/office/mac/drawingml/2011/main" xmlns:a14="http://schemas.microsoft.com/office/drawing/2010/main" xmlns:m="http://schemas.openxmlformats.org/officeDocument/2006/math" xmlns="" val="1"/>
               </a:ext>
             </a:extLst>
           </p:spPr>
@@ -10957,7 +11199,7 @@
             <a:effectLst/>
             <a:extLst>
               <a:ext uri="{C572A759-6A51-4108-AA02-DFA0A04FC94B}">
-                <ma14:wrappingTextBoxFlag xmlns="" xmlns:m="http://schemas.openxmlformats.org/officeDocument/2006/math" xmlns:a14="http://schemas.microsoft.com/office/drawing/2010/main" xmlns:ma14="http://schemas.microsoft.com/office/mac/drawingml/2011/main" val="1"/>
+                <ma14:wrappingTextBoxFlag xmlns:ma14="http://schemas.microsoft.com/office/mac/drawingml/2011/main" xmlns:a14="http://schemas.microsoft.com/office/drawing/2010/main" xmlns:m="http://schemas.openxmlformats.org/officeDocument/2006/math" xmlns="" val="1"/>
               </a:ext>
             </a:extLst>
           </p:spPr>
@@ -11060,7 +11302,7 @@
             <a:effectLst/>
             <a:extLst>
               <a:ext uri="{C572A759-6A51-4108-AA02-DFA0A04FC94B}">
-                <ma14:wrappingTextBoxFlag xmlns="" xmlns:m="http://schemas.openxmlformats.org/officeDocument/2006/math" xmlns:a14="http://schemas.microsoft.com/office/drawing/2010/main" xmlns:ma14="http://schemas.microsoft.com/office/mac/drawingml/2011/main" val="1"/>
+                <ma14:wrappingTextBoxFlag xmlns:ma14="http://schemas.microsoft.com/office/mac/drawingml/2011/main" xmlns:a14="http://schemas.microsoft.com/office/drawing/2010/main" xmlns:m="http://schemas.openxmlformats.org/officeDocument/2006/math" xmlns="" val="1"/>
               </a:ext>
             </a:extLst>
           </p:spPr>
@@ -11109,7 +11351,7 @@
             <a:effectLst/>
             <a:extLst>
               <a:ext uri="{C572A759-6A51-4108-AA02-DFA0A04FC94B}">
-                <ma14:wrappingTextBoxFlag xmlns="" xmlns:m="http://schemas.openxmlformats.org/officeDocument/2006/math" xmlns:a14="http://schemas.microsoft.com/office/drawing/2010/main" xmlns:ma14="http://schemas.microsoft.com/office/mac/drawingml/2011/main" val="1"/>
+                <ma14:wrappingTextBoxFlag xmlns:ma14="http://schemas.microsoft.com/office/mac/drawingml/2011/main" xmlns:a14="http://schemas.microsoft.com/office/drawing/2010/main" xmlns:m="http://schemas.openxmlformats.org/officeDocument/2006/math" xmlns="" val="1"/>
               </a:ext>
             </a:extLst>
           </p:spPr>
@@ -11237,7 +11479,7 @@
             <a:effectLst/>
             <a:extLst>
               <a:ext uri="{C572A759-6A51-4108-AA02-DFA0A04FC94B}">
-                <ma14:wrappingTextBoxFlag xmlns="" xmlns:m="http://schemas.openxmlformats.org/officeDocument/2006/math" xmlns:a14="http://schemas.microsoft.com/office/drawing/2010/main" xmlns:ma14="http://schemas.microsoft.com/office/mac/drawingml/2011/main" val="1"/>
+                <ma14:wrappingTextBoxFlag xmlns:ma14="http://schemas.microsoft.com/office/mac/drawingml/2011/main" xmlns:a14="http://schemas.microsoft.com/office/drawing/2010/main" xmlns:m="http://schemas.openxmlformats.org/officeDocument/2006/math" xmlns="" val="1"/>
               </a:ext>
             </a:extLst>
           </p:spPr>
@@ -11287,7 +11529,7 @@
             <a:effectLst/>
             <a:extLst>
               <a:ext uri="{C572A759-6A51-4108-AA02-DFA0A04FC94B}">
-                <ma14:wrappingTextBoxFlag xmlns="" xmlns:m="http://schemas.openxmlformats.org/officeDocument/2006/math" xmlns:a14="http://schemas.microsoft.com/office/drawing/2010/main" xmlns:ma14="http://schemas.microsoft.com/office/mac/drawingml/2011/main" val="1"/>
+                <ma14:wrappingTextBoxFlag xmlns:ma14="http://schemas.microsoft.com/office/mac/drawingml/2011/main" xmlns:a14="http://schemas.microsoft.com/office/drawing/2010/main" xmlns:m="http://schemas.openxmlformats.org/officeDocument/2006/math" xmlns="" val="1"/>
               </a:ext>
             </a:extLst>
           </p:spPr>
@@ -11363,9 +11605,9 @@
         <p:grpSpPr>
           <a:xfrm>
             <a:off x="2294006" y="3229222"/>
-            <a:ext cx="4540834" cy="370841"/>
+            <a:ext cx="5316727" cy="369330"/>
             <a:chOff x="0" y="0"/>
-            <a:chExt cx="4540833" cy="370840"/>
+            <a:chExt cx="5316726" cy="369329"/>
           </a:xfrm>
         </p:grpSpPr>
         <p:sp>
@@ -11390,7 +11632,7 @@
             <a:effectLst/>
             <a:extLst>
               <a:ext uri="{C572A759-6A51-4108-AA02-DFA0A04FC94B}">
-                <ma14:wrappingTextBoxFlag xmlns="" xmlns:m="http://schemas.openxmlformats.org/officeDocument/2006/math" xmlns:a14="http://schemas.microsoft.com/office/drawing/2010/main" xmlns:ma14="http://schemas.microsoft.com/office/mac/drawingml/2011/main" val="1"/>
+                <ma14:wrappingTextBoxFlag xmlns:ma14="http://schemas.microsoft.com/office/mac/drawingml/2011/main" xmlns:a14="http://schemas.microsoft.com/office/drawing/2010/main" xmlns:m="http://schemas.openxmlformats.org/officeDocument/2006/math" xmlns="" val="1"/>
               </a:ext>
             </a:extLst>
           </p:spPr>
@@ -11427,7 +11669,7 @@
           <p:spPr>
             <a:xfrm>
               <a:off x="1438103" y="0"/>
-              <a:ext cx="3102730" cy="370840"/>
+              <a:ext cx="3878623" cy="369329"/>
             </a:xfrm>
             <a:prstGeom prst="rect">
               <a:avLst/>
@@ -11440,7 +11682,7 @@
             <a:effectLst/>
             <a:extLst>
               <a:ext uri="{C572A759-6A51-4108-AA02-DFA0A04FC94B}">
-                <ma14:wrappingTextBoxFlag xmlns="" xmlns:m="http://schemas.openxmlformats.org/officeDocument/2006/math" xmlns:a14="http://schemas.microsoft.com/office/drawing/2010/main" xmlns:ma14="http://schemas.microsoft.com/office/mac/drawingml/2011/main" val="1"/>
+                <ma14:wrappingTextBoxFlag xmlns:ma14="http://schemas.microsoft.com/office/mac/drawingml/2011/main" xmlns:a14="http://schemas.microsoft.com/office/drawing/2010/main" xmlns:m="http://schemas.openxmlformats.org/officeDocument/2006/math" xmlns="" val="1"/>
               </a:ext>
             </a:extLst>
           </p:spPr>
@@ -11463,8 +11705,34 @@
             </a:lstStyle>
             <a:p>
               <a:r>
-                <a:t>Herencia superior a la clásica</a:t>
+                <a:rPr dirty="0" err="1"/>
+                <a:t>Herencia</a:t>
               </a:r>
+              <a:r>
+                <a:rPr dirty="0"/>
+                <a:t> </a:t>
+              </a:r>
+              <a:r>
+                <a:rPr lang="es-ES" dirty="0"/>
+                <a:t>más flexible</a:t>
+              </a:r>
+              <a:r>
+                <a:rPr dirty="0"/>
+                <a:t> </a:t>
+              </a:r>
+              <a:r>
+                <a:rPr lang="es-ES" dirty="0"/>
+                <a:t>que</a:t>
+              </a:r>
+              <a:r>
+                <a:rPr dirty="0"/>
+                <a:t> la </a:t>
+              </a:r>
+              <a:r>
+                <a:rPr dirty="0" err="1"/>
+                <a:t>clásica</a:t>
+              </a:r>
+              <a:endParaRPr dirty="0"/>
             </a:p>
           </p:txBody>
         </p:sp>
@@ -11517,9 +11785,9 @@
         <p:grpSpPr>
           <a:xfrm>
             <a:off x="2814383" y="3682332"/>
-            <a:ext cx="3652331" cy="370841"/>
+            <a:ext cx="4603989" cy="369330"/>
             <a:chOff x="0" y="0"/>
-            <a:chExt cx="3652329" cy="370840"/>
+            <a:chExt cx="4603988" cy="369329"/>
           </a:xfrm>
         </p:grpSpPr>
         <p:sp>
@@ -11544,7 +11812,7 @@
             <a:effectLst/>
             <a:extLst>
               <a:ext uri="{C572A759-6A51-4108-AA02-DFA0A04FC94B}">
-                <ma14:wrappingTextBoxFlag xmlns="" xmlns:m="http://schemas.openxmlformats.org/officeDocument/2006/math" xmlns:a14="http://schemas.microsoft.com/office/drawing/2010/main" xmlns:ma14="http://schemas.microsoft.com/office/mac/drawingml/2011/main" val="1"/>
+                <ma14:wrappingTextBoxFlag xmlns:ma14="http://schemas.microsoft.com/office/mac/drawingml/2011/main" xmlns:a14="http://schemas.microsoft.com/office/drawing/2010/main" xmlns:m="http://schemas.openxmlformats.org/officeDocument/2006/math" xmlns="" val="1"/>
               </a:ext>
             </a:extLst>
           </p:spPr>
@@ -11581,7 +11849,7 @@
           <p:spPr>
             <a:xfrm>
               <a:off x="917725" y="0"/>
-              <a:ext cx="2734604" cy="370840"/>
+              <a:ext cx="3686263" cy="369329"/>
             </a:xfrm>
             <a:prstGeom prst="rect">
               <a:avLst/>
@@ -11594,7 +11862,7 @@
             <a:effectLst/>
             <a:extLst>
               <a:ext uri="{C572A759-6A51-4108-AA02-DFA0A04FC94B}">
-                <ma14:wrappingTextBoxFlag xmlns="" xmlns:m="http://schemas.openxmlformats.org/officeDocument/2006/math" xmlns:a14="http://schemas.microsoft.com/office/drawing/2010/main" xmlns:ma14="http://schemas.microsoft.com/office/mac/drawingml/2011/main" val="1"/>
+                <ma14:wrappingTextBoxFlag xmlns:ma14="http://schemas.microsoft.com/office/mac/drawingml/2011/main" xmlns:a14="http://schemas.microsoft.com/office/drawing/2010/main" xmlns:m="http://schemas.openxmlformats.org/officeDocument/2006/math" xmlns="" val="1"/>
               </a:ext>
             </a:extLst>
           </p:spPr>
@@ -11617,8 +11885,10 @@
             </a:lstStyle>
             <a:p>
               <a:r>
-                <a:t>Notación literal de objetos</a:t>
+                <a:rPr lang="es-ES" dirty="0"/>
+                <a:t>Formato de intercambio de datos</a:t>
               </a:r>
+              <a:endParaRPr dirty="0"/>
             </a:p>
           </p:txBody>
         </p:sp>
@@ -11697,7 +11967,7 @@
             <a:effectLst/>
             <a:extLst>
               <a:ext uri="{C572A759-6A51-4108-AA02-DFA0A04FC94B}">
-                <ma14:wrappingTextBoxFlag xmlns="" xmlns:m="http://schemas.openxmlformats.org/officeDocument/2006/math" xmlns:a14="http://schemas.microsoft.com/office/drawing/2010/main" xmlns:ma14="http://schemas.microsoft.com/office/mac/drawingml/2011/main" val="1"/>
+                <ma14:wrappingTextBoxFlag xmlns:ma14="http://schemas.microsoft.com/office/mac/drawingml/2011/main" xmlns:a14="http://schemas.microsoft.com/office/drawing/2010/main" xmlns:m="http://schemas.openxmlformats.org/officeDocument/2006/math" xmlns="" val="1"/>
               </a:ext>
             </a:extLst>
           </p:spPr>
@@ -11747,7 +12017,7 @@
             <a:effectLst/>
             <a:extLst>
               <a:ext uri="{C572A759-6A51-4108-AA02-DFA0A04FC94B}">
-                <ma14:wrappingTextBoxFlag xmlns="" xmlns:m="http://schemas.openxmlformats.org/officeDocument/2006/math" xmlns:a14="http://schemas.microsoft.com/office/drawing/2010/main" xmlns:ma14="http://schemas.microsoft.com/office/mac/drawingml/2011/main" val="1"/>
+                <ma14:wrappingTextBoxFlag xmlns:ma14="http://schemas.microsoft.com/office/mac/drawingml/2011/main" xmlns:a14="http://schemas.microsoft.com/office/drawing/2010/main" xmlns:m="http://schemas.openxmlformats.org/officeDocument/2006/math" xmlns="" val="1"/>
               </a:ext>
             </a:extLst>
           </p:spPr>
@@ -11850,7 +12120,7 @@
             <a:effectLst/>
             <a:extLst>
               <a:ext uri="{C572A759-6A51-4108-AA02-DFA0A04FC94B}">
-                <ma14:wrappingTextBoxFlag xmlns="" xmlns:m="http://schemas.openxmlformats.org/officeDocument/2006/math" xmlns:a14="http://schemas.microsoft.com/office/drawing/2010/main" xmlns:ma14="http://schemas.microsoft.com/office/mac/drawingml/2011/main" val="1"/>
+                <ma14:wrappingTextBoxFlag xmlns:ma14="http://schemas.microsoft.com/office/mac/drawingml/2011/main" xmlns:a14="http://schemas.microsoft.com/office/drawing/2010/main" xmlns:m="http://schemas.openxmlformats.org/officeDocument/2006/math" xmlns="" val="1"/>
               </a:ext>
             </a:extLst>
           </p:spPr>
@@ -11900,7 +12170,7 @@
             <a:effectLst/>
             <a:extLst>
               <a:ext uri="{C572A759-6A51-4108-AA02-DFA0A04FC94B}">
-                <ma14:wrappingTextBoxFlag xmlns="" xmlns:m="http://schemas.openxmlformats.org/officeDocument/2006/math" xmlns:a14="http://schemas.microsoft.com/office/drawing/2010/main" xmlns:ma14="http://schemas.microsoft.com/office/mac/drawingml/2011/main" val="1"/>
+                <ma14:wrappingTextBoxFlag xmlns:ma14="http://schemas.microsoft.com/office/mac/drawingml/2011/main" xmlns:a14="http://schemas.microsoft.com/office/drawing/2010/main" xmlns:m="http://schemas.openxmlformats.org/officeDocument/2006/math" xmlns="" val="1"/>
               </a:ext>
             </a:extLst>
           </p:spPr>
@@ -11976,9 +12246,9 @@
         <p:grpSpPr>
           <a:xfrm>
             <a:off x="1648580" y="1869890"/>
-            <a:ext cx="6294514" cy="370841"/>
+            <a:ext cx="6835119" cy="369330"/>
             <a:chOff x="-902011" y="0"/>
-            <a:chExt cx="6294513" cy="370840"/>
+            <a:chExt cx="6835118" cy="369329"/>
           </a:xfrm>
         </p:grpSpPr>
         <p:sp>
@@ -12003,7 +12273,7 @@
             <a:effectLst/>
             <a:extLst>
               <a:ext uri="{C572A759-6A51-4108-AA02-DFA0A04FC94B}">
-                <ma14:wrappingTextBoxFlag xmlns="" xmlns:m="http://schemas.openxmlformats.org/officeDocument/2006/math" xmlns:a14="http://schemas.microsoft.com/office/drawing/2010/main" xmlns:ma14="http://schemas.microsoft.com/office/mac/drawingml/2011/main" val="1"/>
+                <ma14:wrappingTextBoxFlag xmlns:ma14="http://schemas.microsoft.com/office/mac/drawingml/2011/main" xmlns:a14="http://schemas.microsoft.com/office/drawing/2010/main" xmlns:m="http://schemas.openxmlformats.org/officeDocument/2006/math" xmlns="" val="1"/>
               </a:ext>
             </a:extLst>
           </p:spPr>
@@ -12039,7 +12309,7 @@
           <p:spPr>
             <a:xfrm>
               <a:off x="1184053" y="0"/>
-              <a:ext cx="4208449" cy="370840"/>
+              <a:ext cx="4749054" cy="369329"/>
             </a:xfrm>
             <a:prstGeom prst="rect">
               <a:avLst/>
@@ -12052,7 +12322,7 @@
             <a:effectLst/>
             <a:extLst>
               <a:ext uri="{C572A759-6A51-4108-AA02-DFA0A04FC94B}">
-                <ma14:wrappingTextBoxFlag xmlns="" xmlns:m="http://schemas.openxmlformats.org/officeDocument/2006/math" xmlns:a14="http://schemas.microsoft.com/office/drawing/2010/main" xmlns:ma14="http://schemas.microsoft.com/office/mac/drawingml/2011/main" val="1"/>
+                <ma14:wrappingTextBoxFlag xmlns:ma14="http://schemas.microsoft.com/office/mac/drawingml/2011/main" xmlns:a14="http://schemas.microsoft.com/office/drawing/2010/main" xmlns:m="http://schemas.openxmlformats.org/officeDocument/2006/math" xmlns="" val="1"/>
               </a:ext>
             </a:extLst>
           </p:spPr>
@@ -12098,6 +12368,10 @@
                 <a:rPr dirty="0" err="1"/>
                 <a:t>compilación</a:t>
               </a:r>
+              <a:r>
+                <a:rPr lang="es-ES" dirty="0"/>
+                <a:t>**</a:t>
+              </a:r>
               <a:endParaRPr dirty="0"/>
             </a:p>
           </p:txBody>
@@ -12141,6 +12415,72 @@
           </p:spPr>
         </p:pic>
       </p:grpSp>
+      <p:sp>
+        <p:nvSpPr>
+          <p:cNvPr id="2" name="Rectángulo 43">
+            <a:extLst>
+              <a:ext uri="{FF2B5EF4-FFF2-40B4-BE49-F238E27FC236}">
+                <a16:creationId xmlns:a16="http://schemas.microsoft.com/office/drawing/2014/main" id="{3A0A3CDF-BB0F-0A91-764B-56C524BEF35F}"/>
+              </a:ext>
+            </a:extLst>
+          </p:cNvPr>
+          <p:cNvSpPr txBox="1"/>
+          <p:nvPr/>
+        </p:nvSpPr>
+        <p:spPr>
+          <a:xfrm>
+            <a:off x="7926601" y="4653862"/>
+            <a:ext cx="842536" cy="230830"/>
+          </a:xfrm>
+          <a:prstGeom prst="rect">
+            <a:avLst/>
+          </a:prstGeom>
+          <a:noFill/>
+          <a:ln w="12700" cap="flat">
+            <a:noFill/>
+            <a:miter lim="400000"/>
+          </a:ln>
+          <a:effectLst/>
+          <a:extLst>
+            <a:ext uri="{C572A759-6A51-4108-AA02-DFA0A04FC94B}">
+              <ma14:wrappingTextBoxFlag xmlns:ma14="http://schemas.microsoft.com/office/mac/drawingml/2011/main" xmlns:a14="http://schemas.microsoft.com/office/drawing/2010/main" xmlns:m="http://schemas.openxmlformats.org/officeDocument/2006/math" xmlns="" val="1"/>
+            </a:ext>
+          </a:extLst>
+        </p:spPr>
+        <p:txBody>
+          <a:bodyPr wrap="none" lIns="45719" tIns="45719" rIns="45719" bIns="45719" numCol="1" anchor="t">
+            <a:spAutoFit/>
+          </a:bodyPr>
+          <a:lstStyle>
+            <a:lvl1pPr>
+              <a:defRPr>
+                <a:solidFill>
+                  <a:srgbClr val="242415"/>
+                </a:solidFill>
+                <a:latin typeface="Open Sans"/>
+                <a:ea typeface="Open Sans"/>
+                <a:cs typeface="Open Sans"/>
+                <a:sym typeface="Open Sans"/>
+              </a:defRPr>
+            </a:lvl1pPr>
+          </a:lstStyle>
+          <a:p>
+            <a:r>
+              <a:rPr lang="es-ES" sz="900" dirty="0"/>
+              <a:t>**</a:t>
+            </a:r>
+            <a:r>
+              <a:rPr lang="es-ES" sz="900" i="1" dirty="0"/>
+              <a:t>JIT-</a:t>
+            </a:r>
+            <a:r>
+              <a:rPr lang="es-ES" sz="900" i="1" dirty="0" err="1"/>
+              <a:t>compiled</a:t>
+            </a:r>
+            <a:endParaRPr sz="900" i="1" dirty="0"/>
+          </a:p>
+        </p:txBody>
+      </p:sp>
     </p:spTree>
   </p:cSld>
   <p:clrMapOvr>
@@ -12192,7 +12532,7 @@
           </a:ln>
           <a:extLst>
             <a:ext uri="{C572A759-6A51-4108-AA02-DFA0A04FC94B}">
-              <ma14:wrappingTextBoxFlag xmlns="" xmlns:m="http://schemas.openxmlformats.org/officeDocument/2006/math" xmlns:a14="http://schemas.microsoft.com/office/drawing/2010/main" xmlns:ma14="http://schemas.microsoft.com/office/mac/drawingml/2011/main" val="1"/>
+              <ma14:wrappingTextBoxFlag xmlns:ma14="http://schemas.microsoft.com/office/mac/drawingml/2011/main" xmlns:a14="http://schemas.microsoft.com/office/drawing/2010/main" xmlns:m="http://schemas.openxmlformats.org/officeDocument/2006/math" xmlns="" val="1"/>
             </a:ext>
           </a:extLst>
         </p:spPr>
@@ -12397,7 +12737,7 @@
             <a:effectLst/>
             <a:extLst>
               <a:ext uri="{C572A759-6A51-4108-AA02-DFA0A04FC94B}">
-                <ma14:wrappingTextBoxFlag xmlns="" xmlns:m="http://schemas.openxmlformats.org/officeDocument/2006/math" xmlns:a14="http://schemas.microsoft.com/office/drawing/2010/main" xmlns:ma14="http://schemas.microsoft.com/office/mac/drawingml/2011/main" val="1"/>
+                <ma14:wrappingTextBoxFlag xmlns:ma14="http://schemas.microsoft.com/office/mac/drawingml/2011/main" xmlns:a14="http://schemas.microsoft.com/office/drawing/2010/main" xmlns:m="http://schemas.openxmlformats.org/officeDocument/2006/math" xmlns="" val="1"/>
               </a:ext>
             </a:extLst>
           </p:spPr>
@@ -12457,7 +12797,7 @@
             <a:effectLst/>
             <a:extLst>
               <a:ext uri="{C572A759-6A51-4108-AA02-DFA0A04FC94B}">
-                <ma14:wrappingTextBoxFlag xmlns="" xmlns:m="http://schemas.openxmlformats.org/officeDocument/2006/math" xmlns:a14="http://schemas.microsoft.com/office/drawing/2010/main" xmlns:ma14="http://schemas.microsoft.com/office/mac/drawingml/2011/main" val="1"/>
+                <ma14:wrappingTextBoxFlag xmlns:ma14="http://schemas.microsoft.com/office/mac/drawingml/2011/main" xmlns:a14="http://schemas.microsoft.com/office/drawing/2010/main" xmlns:m="http://schemas.openxmlformats.org/officeDocument/2006/math" xmlns="" val="1"/>
               </a:ext>
             </a:extLst>
           </p:spPr>
@@ -12701,7 +13041,7 @@
             </a:ln>
             <a:extLst>
               <a:ext uri="{C572A759-6A51-4108-AA02-DFA0A04FC94B}">
-                <ma14:wrappingTextBoxFlag xmlns="" xmlns:m="http://schemas.openxmlformats.org/officeDocument/2006/math" xmlns:a14="http://schemas.microsoft.com/office/drawing/2010/main" xmlns:ma14="http://schemas.microsoft.com/office/mac/drawingml/2011/main" val="1"/>
+                <ma14:wrappingTextBoxFlag xmlns:ma14="http://schemas.microsoft.com/office/mac/drawingml/2011/main" xmlns:a14="http://schemas.microsoft.com/office/drawing/2010/main" xmlns:m="http://schemas.openxmlformats.org/officeDocument/2006/math" xmlns="" val="1"/>
               </a:ext>
             </a:extLst>
           </p:spPr>
@@ -12954,7 +13294,7 @@
               </a:ln>
               <a:extLst>
                 <a:ext uri="{C572A759-6A51-4108-AA02-DFA0A04FC94B}">
-                  <ma14:wrappingTextBoxFlag xmlns="" xmlns:m="http://schemas.openxmlformats.org/officeDocument/2006/math" xmlns:a14="http://schemas.microsoft.com/office/drawing/2010/main" xmlns:ma14="http://schemas.microsoft.com/office/mac/drawingml/2011/main" val="1"/>
+                  <ma14:wrappingTextBoxFlag xmlns:ma14="http://schemas.microsoft.com/office/mac/drawingml/2011/main" xmlns:a14="http://schemas.microsoft.com/office/drawing/2010/main" xmlns:m="http://schemas.openxmlformats.org/officeDocument/2006/math" xmlns="" val="1"/>
                 </a:ext>
               </a:extLst>
             </p:spPr>
@@ -13079,7 +13419,7 @@
               </a:ln>
               <a:extLst>
                 <a:ext uri="{C572A759-6A51-4108-AA02-DFA0A04FC94B}">
-                  <ma14:wrappingTextBoxFlag xmlns="" xmlns:m="http://schemas.openxmlformats.org/officeDocument/2006/math" xmlns:a14="http://schemas.microsoft.com/office/drawing/2010/main" xmlns:ma14="http://schemas.microsoft.com/office/mac/drawingml/2011/main" val="1"/>
+                  <ma14:wrappingTextBoxFlag xmlns:ma14="http://schemas.microsoft.com/office/mac/drawingml/2011/main" xmlns:a14="http://schemas.microsoft.com/office/drawing/2010/main" xmlns:m="http://schemas.openxmlformats.org/officeDocument/2006/math" xmlns="" val="1"/>
                 </a:ext>
               </a:extLst>
             </p:spPr>
@@ -13256,7 +13596,7 @@
             </a:ln>
             <a:extLst>
               <a:ext uri="{C572A759-6A51-4108-AA02-DFA0A04FC94B}">
-                <ma14:wrappingTextBoxFlag xmlns="" xmlns:m="http://schemas.openxmlformats.org/officeDocument/2006/math" xmlns:a14="http://schemas.microsoft.com/office/drawing/2010/main" xmlns:ma14="http://schemas.microsoft.com/office/mac/drawingml/2011/main" val="1"/>
+                <ma14:wrappingTextBoxFlag xmlns:ma14="http://schemas.microsoft.com/office/mac/drawingml/2011/main" xmlns:a14="http://schemas.microsoft.com/office/drawing/2010/main" xmlns:m="http://schemas.openxmlformats.org/officeDocument/2006/math" xmlns="" val="1"/>
               </a:ext>
             </a:extLst>
           </p:spPr>
@@ -13508,7 +13848,7 @@
               </a:ln>
               <a:extLst>
                 <a:ext uri="{C572A759-6A51-4108-AA02-DFA0A04FC94B}">
-                  <ma14:wrappingTextBoxFlag xmlns="" xmlns:m="http://schemas.openxmlformats.org/officeDocument/2006/math" xmlns:a14="http://schemas.microsoft.com/office/drawing/2010/main" xmlns:ma14="http://schemas.microsoft.com/office/mac/drawingml/2011/main" val="1"/>
+                  <ma14:wrappingTextBoxFlag xmlns:ma14="http://schemas.microsoft.com/office/mac/drawingml/2011/main" xmlns:a14="http://schemas.microsoft.com/office/drawing/2010/main" xmlns:m="http://schemas.openxmlformats.org/officeDocument/2006/math" xmlns="" val="1"/>
                 </a:ext>
               </a:extLst>
             </p:spPr>
@@ -13634,7 +13974,7 @@
               </a:ln>
               <a:extLst>
                 <a:ext uri="{C572A759-6A51-4108-AA02-DFA0A04FC94B}">
-                  <ma14:wrappingTextBoxFlag xmlns="" xmlns:m="http://schemas.openxmlformats.org/officeDocument/2006/math" xmlns:a14="http://schemas.microsoft.com/office/drawing/2010/main" xmlns:ma14="http://schemas.microsoft.com/office/mac/drawingml/2011/main" val="1"/>
+                  <ma14:wrappingTextBoxFlag xmlns:ma14="http://schemas.microsoft.com/office/mac/drawingml/2011/main" xmlns:a14="http://schemas.microsoft.com/office/drawing/2010/main" xmlns:m="http://schemas.openxmlformats.org/officeDocument/2006/math" xmlns="" val="1"/>
                 </a:ext>
               </a:extLst>
             </p:spPr>
@@ -13720,7 +14060,7 @@
             <a:effectLst/>
             <a:extLst>
               <a:ext uri="{C572A759-6A51-4108-AA02-DFA0A04FC94B}">
-                <ma14:wrappingTextBoxFlag xmlns="" xmlns:m="http://schemas.openxmlformats.org/officeDocument/2006/math" xmlns:a14="http://schemas.microsoft.com/office/drawing/2010/main" xmlns:ma14="http://schemas.microsoft.com/office/mac/drawingml/2011/main" val="1"/>
+                <ma14:wrappingTextBoxFlag xmlns:ma14="http://schemas.microsoft.com/office/mac/drawingml/2011/main" xmlns:a14="http://schemas.microsoft.com/office/drawing/2010/main" xmlns:m="http://schemas.openxmlformats.org/officeDocument/2006/math" xmlns="" val="1"/>
               </a:ext>
             </a:extLst>
           </p:spPr>
@@ -13780,7 +14120,7 @@
             <a:effectLst/>
             <a:extLst>
               <a:ext uri="{C572A759-6A51-4108-AA02-DFA0A04FC94B}">
-                <ma14:wrappingTextBoxFlag xmlns="" xmlns:m="http://schemas.openxmlformats.org/officeDocument/2006/math" xmlns:a14="http://schemas.microsoft.com/office/drawing/2010/main" xmlns:ma14="http://schemas.microsoft.com/office/mac/drawingml/2011/main" val="1"/>
+                <ma14:wrappingTextBoxFlag xmlns:ma14="http://schemas.microsoft.com/office/mac/drawingml/2011/main" xmlns:a14="http://schemas.microsoft.com/office/drawing/2010/main" xmlns:m="http://schemas.openxmlformats.org/officeDocument/2006/math" xmlns="" val="1"/>
               </a:ext>
             </a:extLst>
           </p:spPr>
@@ -13904,7 +14244,7 @@
           </a:ln>
           <a:extLst>
             <a:ext uri="{C572A759-6A51-4108-AA02-DFA0A04FC94B}">
-              <ma14:wrappingTextBoxFlag xmlns="" xmlns:m="http://schemas.openxmlformats.org/officeDocument/2006/math" xmlns:a14="http://schemas.microsoft.com/office/drawing/2010/main" xmlns:ma14="http://schemas.microsoft.com/office/mac/drawingml/2011/main" val="1"/>
+              <ma14:wrappingTextBoxFlag xmlns:ma14="http://schemas.microsoft.com/office/mac/drawingml/2011/main" xmlns:a14="http://schemas.microsoft.com/office/drawing/2010/main" xmlns:m="http://schemas.openxmlformats.org/officeDocument/2006/math" xmlns="" val="1"/>
             </a:ext>
           </a:extLst>
         </p:spPr>
@@ -14023,7 +14363,7 @@
           </a:ln>
           <a:extLst>
             <a:ext uri="{C572A759-6A51-4108-AA02-DFA0A04FC94B}">
-              <ma14:wrappingTextBoxFlag xmlns="" xmlns:m="http://schemas.openxmlformats.org/officeDocument/2006/math" xmlns:a14="http://schemas.microsoft.com/office/drawing/2010/main" xmlns:ma14="http://schemas.microsoft.com/office/mac/drawingml/2011/main" val="1"/>
+              <ma14:wrappingTextBoxFlag xmlns:ma14="http://schemas.microsoft.com/office/mac/drawingml/2011/main" xmlns:a14="http://schemas.microsoft.com/office/drawing/2010/main" xmlns:m="http://schemas.openxmlformats.org/officeDocument/2006/math" xmlns="" val="1"/>
             </a:ext>
           </a:extLst>
         </p:spPr>
@@ -14699,7 +15039,7 @@
           </a:ln>
           <a:extLst>
             <a:ext uri="{C572A759-6A51-4108-AA02-DFA0A04FC94B}">
-              <ma14:wrappingTextBoxFlag xmlns="" xmlns:m="http://schemas.openxmlformats.org/officeDocument/2006/math" xmlns:a14="http://schemas.microsoft.com/office/drawing/2010/main" xmlns:ma14="http://schemas.microsoft.com/office/mac/drawingml/2011/main" val="1"/>
+              <ma14:wrappingTextBoxFlag xmlns:ma14="http://schemas.microsoft.com/office/mac/drawingml/2011/main" xmlns:a14="http://schemas.microsoft.com/office/drawing/2010/main" xmlns:m="http://schemas.openxmlformats.org/officeDocument/2006/math" xmlns="" val="1"/>
             </a:ext>
           </a:extLst>
         </p:spPr>
@@ -14798,7 +15138,7 @@
           </a:ln>
           <a:extLst>
             <a:ext uri="{C572A759-6A51-4108-AA02-DFA0A04FC94B}">
-              <ma14:wrappingTextBoxFlag xmlns="" xmlns:m="http://schemas.openxmlformats.org/officeDocument/2006/math" xmlns:a14="http://schemas.microsoft.com/office/drawing/2010/main" xmlns:ma14="http://schemas.microsoft.com/office/mac/drawingml/2011/main" val="1"/>
+              <ma14:wrappingTextBoxFlag xmlns:ma14="http://schemas.microsoft.com/office/mac/drawingml/2011/main" xmlns:a14="http://schemas.microsoft.com/office/drawing/2010/main" xmlns:m="http://schemas.openxmlformats.org/officeDocument/2006/math" xmlns="" val="1"/>
             </a:ext>
           </a:extLst>
         </p:spPr>
@@ -14917,7 +15257,7 @@
           </a:ln>
           <a:extLst>
             <a:ext uri="{C572A759-6A51-4108-AA02-DFA0A04FC94B}">
-              <ma14:wrappingTextBoxFlag xmlns="" xmlns:m="http://schemas.openxmlformats.org/officeDocument/2006/math" xmlns:a14="http://schemas.microsoft.com/office/drawing/2010/main" xmlns:ma14="http://schemas.microsoft.com/office/mac/drawingml/2011/main" val="1"/>
+              <ma14:wrappingTextBoxFlag xmlns:ma14="http://schemas.microsoft.com/office/mac/drawingml/2011/main" xmlns:a14="http://schemas.microsoft.com/office/drawing/2010/main" xmlns:m="http://schemas.openxmlformats.org/officeDocument/2006/math" xmlns="" val="1"/>
             </a:ext>
           </a:extLst>
         </p:spPr>
@@ -15214,7 +15554,7 @@
             <a:effectLst/>
             <a:extLst>
               <a:ext uri="{C572A759-6A51-4108-AA02-DFA0A04FC94B}">
-                <ma14:wrappingTextBoxFlag xmlns:ma14="http://schemas.microsoft.com/office/mac/drawingml/2011/main" xmlns:a14="http://schemas.microsoft.com/office/drawing/2010/main" xmlns:m="http://schemas.openxmlformats.org/officeDocument/2006/math" xmlns="" val="1"/>
+                <ma14:wrappingTextBoxFlag xmlns="" xmlns:m="http://schemas.openxmlformats.org/officeDocument/2006/math" xmlns:a14="http://schemas.microsoft.com/office/drawing/2010/main" xmlns:ma14="http://schemas.microsoft.com/office/mac/drawingml/2011/main" val="1"/>
               </a:ext>
             </a:extLst>
           </p:spPr>
@@ -15357,7 +15697,7 @@
             <a:effectLst/>
             <a:extLst>
               <a:ext uri="{C572A759-6A51-4108-AA02-DFA0A04FC94B}">
-                <ma14:wrappingTextBoxFlag xmlns:ma14="http://schemas.microsoft.com/office/mac/drawingml/2011/main" xmlns:a14="http://schemas.microsoft.com/office/drawing/2010/main" xmlns:m="http://schemas.openxmlformats.org/officeDocument/2006/math" xmlns="" val="1"/>
+                <ma14:wrappingTextBoxFlag xmlns="" xmlns:m="http://schemas.openxmlformats.org/officeDocument/2006/math" xmlns:a14="http://schemas.microsoft.com/office/drawing/2010/main" xmlns:ma14="http://schemas.microsoft.com/office/mac/drawingml/2011/main" val="1"/>
               </a:ext>
             </a:extLst>
           </p:spPr>
@@ -15485,7 +15825,7 @@
               <a:effectLst/>
               <a:extLst>
                 <a:ext uri="{C572A759-6A51-4108-AA02-DFA0A04FC94B}">
-                  <ma14:wrappingTextBoxFlag xmlns:ma14="http://schemas.microsoft.com/office/mac/drawingml/2011/main" xmlns:a14="http://schemas.microsoft.com/office/drawing/2010/main" xmlns:m="http://schemas.openxmlformats.org/officeDocument/2006/math" xmlns="" val="1"/>
+                  <ma14:wrappingTextBoxFlag xmlns="" xmlns:m="http://schemas.openxmlformats.org/officeDocument/2006/math" xmlns:a14="http://schemas.microsoft.com/office/drawing/2010/main" xmlns:ma14="http://schemas.microsoft.com/office/mac/drawingml/2011/main" val="1"/>
                 </a:ext>
               </a:extLst>
             </p:spPr>
@@ -15597,7 +15937,7 @@
               <a:effectLst/>
               <a:extLst>
                 <a:ext uri="{C572A759-6A51-4108-AA02-DFA0A04FC94B}">
-                  <ma14:wrappingTextBoxFlag xmlns:ma14="http://schemas.microsoft.com/office/mac/drawingml/2011/main" xmlns:a14="http://schemas.microsoft.com/office/drawing/2010/main" xmlns:m="http://schemas.openxmlformats.org/officeDocument/2006/math" xmlns="" val="1"/>
+                  <ma14:wrappingTextBoxFlag xmlns="" xmlns:m="http://schemas.openxmlformats.org/officeDocument/2006/math" xmlns:a14="http://schemas.microsoft.com/office/drawing/2010/main" xmlns:ma14="http://schemas.microsoft.com/office/mac/drawingml/2011/main" val="1"/>
                 </a:ext>
               </a:extLst>
             </p:spPr>
@@ -15649,7 +15989,7 @@
             <a:effectLst/>
             <a:extLst>
               <a:ext uri="{C572A759-6A51-4108-AA02-DFA0A04FC94B}">
-                <ma14:wrappingTextBoxFlag xmlns:ma14="http://schemas.microsoft.com/office/mac/drawingml/2011/main" xmlns:a14="http://schemas.microsoft.com/office/drawing/2010/main" xmlns:m="http://schemas.openxmlformats.org/officeDocument/2006/math" xmlns="" val="1"/>
+                <ma14:wrappingTextBoxFlag xmlns="" xmlns:m="http://schemas.openxmlformats.org/officeDocument/2006/math" xmlns:a14="http://schemas.microsoft.com/office/drawing/2010/main" xmlns:ma14="http://schemas.microsoft.com/office/mac/drawingml/2011/main" val="1"/>
               </a:ext>
             </a:extLst>
           </p:spPr>
@@ -15771,7 +16111,7 @@
             <a:effectLst/>
             <a:extLst>
               <a:ext uri="{C572A759-6A51-4108-AA02-DFA0A04FC94B}">
-                <ma14:wrappingTextBoxFlag xmlns:ma14="http://schemas.microsoft.com/office/mac/drawingml/2011/main" xmlns:a14="http://schemas.microsoft.com/office/drawing/2010/main" xmlns:m="http://schemas.openxmlformats.org/officeDocument/2006/math" xmlns="" val="1"/>
+                <ma14:wrappingTextBoxFlag xmlns="" xmlns:m="http://schemas.openxmlformats.org/officeDocument/2006/math" xmlns:a14="http://schemas.microsoft.com/office/drawing/2010/main" xmlns:ma14="http://schemas.microsoft.com/office/mac/drawingml/2011/main" val="1"/>
               </a:ext>
             </a:extLst>
           </p:spPr>
@@ -15847,7 +16187,7 @@
             <a:effectLst/>
             <a:extLst>
               <a:ext uri="{C572A759-6A51-4108-AA02-DFA0A04FC94B}">
-                <ma14:wrappingTextBoxFlag xmlns:ma14="http://schemas.microsoft.com/office/mac/drawingml/2011/main" xmlns:a14="http://schemas.microsoft.com/office/drawing/2010/main" xmlns:m="http://schemas.openxmlformats.org/officeDocument/2006/math" xmlns="" val="1"/>
+                <ma14:wrappingTextBoxFlag xmlns="" xmlns:m="http://schemas.openxmlformats.org/officeDocument/2006/math" xmlns:a14="http://schemas.microsoft.com/office/drawing/2010/main" xmlns:ma14="http://schemas.microsoft.com/office/mac/drawingml/2011/main" val="1"/>
               </a:ext>
             </a:extLst>
           </p:spPr>
@@ -15969,7 +16309,7 @@
             <a:effectLst/>
             <a:extLst>
               <a:ext uri="{C572A759-6A51-4108-AA02-DFA0A04FC94B}">
-                <ma14:wrappingTextBoxFlag xmlns:ma14="http://schemas.microsoft.com/office/mac/drawingml/2011/main" xmlns:a14="http://schemas.microsoft.com/office/drawing/2010/main" xmlns:m="http://schemas.openxmlformats.org/officeDocument/2006/math" xmlns="" val="1"/>
+                <ma14:wrappingTextBoxFlag xmlns="" xmlns:m="http://schemas.openxmlformats.org/officeDocument/2006/math" xmlns:a14="http://schemas.microsoft.com/office/drawing/2010/main" xmlns:ma14="http://schemas.microsoft.com/office/mac/drawingml/2011/main" val="1"/>
               </a:ext>
             </a:extLst>
           </p:spPr>
@@ -16025,7 +16365,7 @@
             <a:effectLst/>
             <a:extLst>
               <a:ext uri="{C572A759-6A51-4108-AA02-DFA0A04FC94B}">
-                <ma14:wrappingTextBoxFlag xmlns:ma14="http://schemas.microsoft.com/office/mac/drawingml/2011/main" xmlns:a14="http://schemas.microsoft.com/office/drawing/2010/main" xmlns:m="http://schemas.openxmlformats.org/officeDocument/2006/math" xmlns="" val="1"/>
+                <ma14:wrappingTextBoxFlag xmlns="" xmlns:m="http://schemas.openxmlformats.org/officeDocument/2006/math" xmlns:a14="http://schemas.microsoft.com/office/drawing/2010/main" xmlns:ma14="http://schemas.microsoft.com/office/mac/drawingml/2011/main" val="1"/>
               </a:ext>
             </a:extLst>
           </p:spPr>
@@ -16147,7 +16487,7 @@
             <a:effectLst/>
             <a:extLst>
               <a:ext uri="{C572A759-6A51-4108-AA02-DFA0A04FC94B}">
-                <ma14:wrappingTextBoxFlag xmlns:ma14="http://schemas.microsoft.com/office/mac/drawingml/2011/main" xmlns:a14="http://schemas.microsoft.com/office/drawing/2010/main" xmlns:m="http://schemas.openxmlformats.org/officeDocument/2006/math" xmlns="" val="1"/>
+                <ma14:wrappingTextBoxFlag xmlns="" xmlns:m="http://schemas.openxmlformats.org/officeDocument/2006/math" xmlns:a14="http://schemas.microsoft.com/office/drawing/2010/main" xmlns:ma14="http://schemas.microsoft.com/office/mac/drawingml/2011/main" val="1"/>
               </a:ext>
             </a:extLst>
           </p:spPr>
@@ -16198,7 +16538,7 @@
             <a:effectLst/>
             <a:extLst>
               <a:ext uri="{C572A759-6A51-4108-AA02-DFA0A04FC94B}">
-                <ma14:wrappingTextBoxFlag xmlns:ma14="http://schemas.microsoft.com/office/mac/drawingml/2011/main" xmlns:a14="http://schemas.microsoft.com/office/drawing/2010/main" xmlns:m="http://schemas.openxmlformats.org/officeDocument/2006/math" xmlns="" val="1"/>
+                <ma14:wrappingTextBoxFlag xmlns="" xmlns:m="http://schemas.openxmlformats.org/officeDocument/2006/math" xmlns:a14="http://schemas.microsoft.com/office/drawing/2010/main" xmlns:ma14="http://schemas.microsoft.com/office/mac/drawingml/2011/main" val="1"/>
               </a:ext>
             </a:extLst>
           </p:spPr>
@@ -16324,7 +16664,7 @@
             <a:effectLst/>
             <a:extLst>
               <a:ext uri="{C572A759-6A51-4108-AA02-DFA0A04FC94B}">
-                <ma14:wrappingTextBoxFlag xmlns:ma14="http://schemas.microsoft.com/office/mac/drawingml/2011/main" xmlns:a14="http://schemas.microsoft.com/office/drawing/2010/main" xmlns:m="http://schemas.openxmlformats.org/officeDocument/2006/math" xmlns="" val="1"/>
+                <ma14:wrappingTextBoxFlag xmlns="" xmlns:m="http://schemas.openxmlformats.org/officeDocument/2006/math" xmlns:a14="http://schemas.microsoft.com/office/drawing/2010/main" xmlns:ma14="http://schemas.microsoft.com/office/mac/drawingml/2011/main" val="1"/>
               </a:ext>
             </a:extLst>
           </p:spPr>
@@ -16380,7 +16720,7 @@
             <a:effectLst/>
             <a:extLst>
               <a:ext uri="{C572A759-6A51-4108-AA02-DFA0A04FC94B}">
-                <ma14:wrappingTextBoxFlag xmlns:ma14="http://schemas.microsoft.com/office/mac/drawingml/2011/main" xmlns:a14="http://schemas.microsoft.com/office/drawing/2010/main" xmlns:m="http://schemas.openxmlformats.org/officeDocument/2006/math" xmlns="" val="1"/>
+                <ma14:wrappingTextBoxFlag xmlns="" xmlns:m="http://schemas.openxmlformats.org/officeDocument/2006/math" xmlns:a14="http://schemas.microsoft.com/office/drawing/2010/main" xmlns:ma14="http://schemas.microsoft.com/office/mac/drawingml/2011/main" val="1"/>
               </a:ext>
             </a:extLst>
           </p:spPr>
@@ -16502,7 +16842,7 @@
             <a:effectLst/>
             <a:extLst>
               <a:ext uri="{C572A759-6A51-4108-AA02-DFA0A04FC94B}">
-                <ma14:wrappingTextBoxFlag xmlns:ma14="http://schemas.microsoft.com/office/mac/drawingml/2011/main" xmlns:a14="http://schemas.microsoft.com/office/drawing/2010/main" xmlns:m="http://schemas.openxmlformats.org/officeDocument/2006/math" xmlns="" val="1"/>
+                <ma14:wrappingTextBoxFlag xmlns="" xmlns:m="http://schemas.openxmlformats.org/officeDocument/2006/math" xmlns:a14="http://schemas.microsoft.com/office/drawing/2010/main" xmlns:ma14="http://schemas.microsoft.com/office/mac/drawingml/2011/main" val="1"/>
               </a:ext>
             </a:extLst>
           </p:spPr>
@@ -16625,7 +16965,7 @@
               <a:effectLst/>
               <a:extLst>
                 <a:ext uri="{C572A759-6A51-4108-AA02-DFA0A04FC94B}">
-                  <ma14:wrappingTextBoxFlag xmlns:ma14="http://schemas.microsoft.com/office/mac/drawingml/2011/main" xmlns:a14="http://schemas.microsoft.com/office/drawing/2010/main" xmlns:m="http://schemas.openxmlformats.org/officeDocument/2006/math" xmlns="" val="1"/>
+                  <ma14:wrappingTextBoxFlag xmlns="" xmlns:m="http://schemas.openxmlformats.org/officeDocument/2006/math" xmlns:a14="http://schemas.microsoft.com/office/drawing/2010/main" xmlns:ma14="http://schemas.microsoft.com/office/mac/drawingml/2011/main" val="1"/>
                 </a:ext>
               </a:extLst>
             </p:spPr>
@@ -16737,7 +17077,7 @@
               <a:effectLst/>
               <a:extLst>
                 <a:ext uri="{C572A759-6A51-4108-AA02-DFA0A04FC94B}">
-                  <ma14:wrappingTextBoxFlag xmlns:ma14="http://schemas.microsoft.com/office/mac/drawingml/2011/main" xmlns:a14="http://schemas.microsoft.com/office/drawing/2010/main" xmlns:m="http://schemas.openxmlformats.org/officeDocument/2006/math" xmlns="" val="1"/>
+                  <ma14:wrappingTextBoxFlag xmlns="" xmlns:m="http://schemas.openxmlformats.org/officeDocument/2006/math" xmlns:a14="http://schemas.microsoft.com/office/drawing/2010/main" xmlns:ma14="http://schemas.microsoft.com/office/mac/drawingml/2011/main" val="1"/>
                 </a:ext>
               </a:extLst>
             </p:spPr>
@@ -16788,7 +17128,7 @@
             <a:effectLst/>
             <a:extLst>
               <a:ext uri="{C572A759-6A51-4108-AA02-DFA0A04FC94B}">
-                <ma14:wrappingTextBoxFlag xmlns:ma14="http://schemas.microsoft.com/office/mac/drawingml/2011/main" xmlns:a14="http://schemas.microsoft.com/office/drawing/2010/main" xmlns:m="http://schemas.openxmlformats.org/officeDocument/2006/math" xmlns="" val="1"/>
+                <ma14:wrappingTextBoxFlag xmlns="" xmlns:m="http://schemas.openxmlformats.org/officeDocument/2006/math" xmlns:a14="http://schemas.microsoft.com/office/drawing/2010/main" xmlns:ma14="http://schemas.microsoft.com/office/mac/drawingml/2011/main" val="1"/>
               </a:ext>
             </a:extLst>
           </p:spPr>
@@ -16910,7 +17250,7 @@
             <a:effectLst/>
             <a:extLst>
               <a:ext uri="{C572A759-6A51-4108-AA02-DFA0A04FC94B}">
-                <ma14:wrappingTextBoxFlag xmlns:ma14="http://schemas.microsoft.com/office/mac/drawingml/2011/main" xmlns:a14="http://schemas.microsoft.com/office/drawing/2010/main" xmlns:m="http://schemas.openxmlformats.org/officeDocument/2006/math" xmlns="" val="1"/>
+                <ma14:wrappingTextBoxFlag xmlns="" xmlns:m="http://schemas.openxmlformats.org/officeDocument/2006/math" xmlns:a14="http://schemas.microsoft.com/office/drawing/2010/main" xmlns:ma14="http://schemas.microsoft.com/office/mac/drawingml/2011/main" val="1"/>
               </a:ext>
             </a:extLst>
           </p:spPr>
@@ -17021,7 +17361,7 @@
               <a:effectLst/>
               <a:extLst>
                 <a:ext uri="{C572A759-6A51-4108-AA02-DFA0A04FC94B}">
-                  <ma14:wrappingTextBoxFlag xmlns:ma14="http://schemas.microsoft.com/office/mac/drawingml/2011/main" xmlns:a14="http://schemas.microsoft.com/office/drawing/2010/main" xmlns:m="http://schemas.openxmlformats.org/officeDocument/2006/math" xmlns="" val="1"/>
+                  <ma14:wrappingTextBoxFlag xmlns="" xmlns:m="http://schemas.openxmlformats.org/officeDocument/2006/math" xmlns:a14="http://schemas.microsoft.com/office/drawing/2010/main" xmlns:ma14="http://schemas.microsoft.com/office/mac/drawingml/2011/main" val="1"/>
                 </a:ext>
               </a:extLst>
             </p:spPr>
@@ -17132,7 +17472,7 @@
               <a:effectLst/>
               <a:extLst>
                 <a:ext uri="{C572A759-6A51-4108-AA02-DFA0A04FC94B}">
-                  <ma14:wrappingTextBoxFlag xmlns:ma14="http://schemas.microsoft.com/office/mac/drawingml/2011/main" xmlns:a14="http://schemas.microsoft.com/office/drawing/2010/main" xmlns:m="http://schemas.openxmlformats.org/officeDocument/2006/math" xmlns="" val="1"/>
+                  <ma14:wrappingTextBoxFlag xmlns="" xmlns:m="http://schemas.openxmlformats.org/officeDocument/2006/math" xmlns:a14="http://schemas.microsoft.com/office/drawing/2010/main" xmlns:ma14="http://schemas.microsoft.com/office/mac/drawingml/2011/main" val="1"/>
                 </a:ext>
               </a:extLst>
             </p:spPr>
@@ -17183,7 +17523,7 @@
             <a:effectLst/>
             <a:extLst>
               <a:ext uri="{C572A759-6A51-4108-AA02-DFA0A04FC94B}">
-                <ma14:wrappingTextBoxFlag xmlns:ma14="http://schemas.microsoft.com/office/mac/drawingml/2011/main" xmlns:a14="http://schemas.microsoft.com/office/drawing/2010/main" xmlns:m="http://schemas.openxmlformats.org/officeDocument/2006/math" xmlns="" val="1"/>
+                <ma14:wrappingTextBoxFlag xmlns="" xmlns:m="http://schemas.openxmlformats.org/officeDocument/2006/math" xmlns:a14="http://schemas.microsoft.com/office/drawing/2010/main" xmlns:ma14="http://schemas.microsoft.com/office/mac/drawingml/2011/main" val="1"/>
               </a:ext>
             </a:extLst>
           </p:spPr>
@@ -17305,7 +17645,7 @@
             <a:effectLst/>
             <a:extLst>
               <a:ext uri="{C572A759-6A51-4108-AA02-DFA0A04FC94B}">
-                <ma14:wrappingTextBoxFlag xmlns:ma14="http://schemas.microsoft.com/office/mac/drawingml/2011/main" xmlns:a14="http://schemas.microsoft.com/office/drawing/2010/main" xmlns:m="http://schemas.openxmlformats.org/officeDocument/2006/math" xmlns="" val="1"/>
+                <ma14:wrappingTextBoxFlag xmlns="" xmlns:m="http://schemas.openxmlformats.org/officeDocument/2006/math" xmlns:a14="http://schemas.microsoft.com/office/drawing/2010/main" xmlns:ma14="http://schemas.microsoft.com/office/mac/drawingml/2011/main" val="1"/>
               </a:ext>
             </a:extLst>
           </p:spPr>
@@ -17429,7 +17769,7 @@
               <a:effectLst/>
               <a:extLst>
                 <a:ext uri="{C572A759-6A51-4108-AA02-DFA0A04FC94B}">
-                  <ma14:wrappingTextBoxFlag xmlns:ma14="http://schemas.microsoft.com/office/mac/drawingml/2011/main" xmlns:a14="http://schemas.microsoft.com/office/drawing/2010/main" xmlns:m="http://schemas.openxmlformats.org/officeDocument/2006/math" xmlns="" val="1"/>
+                  <ma14:wrappingTextBoxFlag xmlns="" xmlns:m="http://schemas.openxmlformats.org/officeDocument/2006/math" xmlns:a14="http://schemas.microsoft.com/office/drawing/2010/main" xmlns:ma14="http://schemas.microsoft.com/office/mac/drawingml/2011/main" val="1"/>
                 </a:ext>
               </a:extLst>
             </p:spPr>
@@ -17540,7 +17880,7 @@
               <a:effectLst/>
               <a:extLst>
                 <a:ext uri="{C572A759-6A51-4108-AA02-DFA0A04FC94B}">
-                  <ma14:wrappingTextBoxFlag xmlns:ma14="http://schemas.microsoft.com/office/mac/drawingml/2011/main" xmlns:a14="http://schemas.microsoft.com/office/drawing/2010/main" xmlns:m="http://schemas.openxmlformats.org/officeDocument/2006/math" xmlns="" val="1"/>
+                  <ma14:wrappingTextBoxFlag xmlns="" xmlns:m="http://schemas.openxmlformats.org/officeDocument/2006/math" xmlns:a14="http://schemas.microsoft.com/office/drawing/2010/main" xmlns:ma14="http://schemas.microsoft.com/office/mac/drawingml/2011/main" val="1"/>
                 </a:ext>
               </a:extLst>
             </p:spPr>
@@ -17592,7 +17932,7 @@
             <a:effectLst/>
             <a:extLst>
               <a:ext uri="{C572A759-6A51-4108-AA02-DFA0A04FC94B}">
-                <ma14:wrappingTextBoxFlag xmlns:ma14="http://schemas.microsoft.com/office/mac/drawingml/2011/main" xmlns:a14="http://schemas.microsoft.com/office/drawing/2010/main" xmlns:m="http://schemas.openxmlformats.org/officeDocument/2006/math" xmlns="" val="1"/>
+                <ma14:wrappingTextBoxFlag xmlns="" xmlns:m="http://schemas.openxmlformats.org/officeDocument/2006/math" xmlns:a14="http://schemas.microsoft.com/office/drawing/2010/main" xmlns:ma14="http://schemas.microsoft.com/office/mac/drawingml/2011/main" val="1"/>
               </a:ext>
             </a:extLst>
           </p:spPr>
@@ -17645,7 +17985,7 @@
           </a:ln>
           <a:extLst>
             <a:ext uri="{C572A759-6A51-4108-AA02-DFA0A04FC94B}">
-              <ma14:wrappingTextBoxFlag xmlns:ma14="http://schemas.microsoft.com/office/mac/drawingml/2011/main" xmlns:a14="http://schemas.microsoft.com/office/drawing/2010/main" xmlns:m="http://schemas.openxmlformats.org/officeDocument/2006/math" xmlns="" val="1"/>
+              <ma14:wrappingTextBoxFlag xmlns="" xmlns:m="http://schemas.openxmlformats.org/officeDocument/2006/math" xmlns:a14="http://schemas.microsoft.com/office/drawing/2010/main" xmlns:ma14="http://schemas.microsoft.com/office/mac/drawingml/2011/main" val="1"/>
             </a:ext>
           </a:extLst>
         </p:spPr>
@@ -17794,7 +18134,7 @@
           </a:ln>
           <a:extLst>
             <a:ext uri="{C572A759-6A51-4108-AA02-DFA0A04FC94B}">
-              <ma14:wrappingTextBoxFlag xmlns:ma14="http://schemas.microsoft.com/office/mac/drawingml/2011/main" xmlns:a14="http://schemas.microsoft.com/office/drawing/2010/main" xmlns:m="http://schemas.openxmlformats.org/officeDocument/2006/math" xmlns="" val="1"/>
+              <ma14:wrappingTextBoxFlag xmlns="" xmlns:m="http://schemas.openxmlformats.org/officeDocument/2006/math" xmlns:a14="http://schemas.microsoft.com/office/drawing/2010/main" xmlns:ma14="http://schemas.microsoft.com/office/mac/drawingml/2011/main" val="1"/>
             </a:ext>
           </a:extLst>
         </p:spPr>
@@ -17866,7 +18206,7 @@
           </a:ln>
           <a:extLst>
             <a:ext uri="{C572A759-6A51-4108-AA02-DFA0A04FC94B}">
-              <ma14:wrappingTextBoxFlag xmlns:ma14="http://schemas.microsoft.com/office/mac/drawingml/2011/main" xmlns:a14="http://schemas.microsoft.com/office/drawing/2010/main" xmlns:m="http://schemas.openxmlformats.org/officeDocument/2006/math" xmlns="" val="1"/>
+              <ma14:wrappingTextBoxFlag xmlns="" xmlns:m="http://schemas.openxmlformats.org/officeDocument/2006/math" xmlns:a14="http://schemas.microsoft.com/office/drawing/2010/main" xmlns:ma14="http://schemas.microsoft.com/office/mac/drawingml/2011/main" val="1"/>
             </a:ext>
           </a:extLst>
         </p:spPr>
@@ -17938,7 +18278,7 @@
           </a:ln>
           <a:extLst>
             <a:ext uri="{C572A759-6A51-4108-AA02-DFA0A04FC94B}">
-              <ma14:wrappingTextBoxFlag xmlns:ma14="http://schemas.microsoft.com/office/mac/drawingml/2011/main" xmlns:a14="http://schemas.microsoft.com/office/drawing/2010/main" xmlns:m="http://schemas.openxmlformats.org/officeDocument/2006/math" xmlns="" val="1"/>
+              <ma14:wrappingTextBoxFlag xmlns="" xmlns:m="http://schemas.openxmlformats.org/officeDocument/2006/math" xmlns:a14="http://schemas.microsoft.com/office/drawing/2010/main" xmlns:ma14="http://schemas.microsoft.com/office/mac/drawingml/2011/main" val="1"/>
             </a:ext>
           </a:extLst>
         </p:spPr>
@@ -18123,7 +18463,7 @@
           </a:ln>
           <a:extLst>
             <a:ext uri="{C572A759-6A51-4108-AA02-DFA0A04FC94B}">
-              <ma14:wrappingTextBoxFlag xmlns:ma14="http://schemas.microsoft.com/office/mac/drawingml/2011/main" xmlns:a14="http://schemas.microsoft.com/office/drawing/2010/main" xmlns:m="http://schemas.openxmlformats.org/officeDocument/2006/math" xmlns="" val="1"/>
+              <ma14:wrappingTextBoxFlag xmlns="" xmlns:m="http://schemas.openxmlformats.org/officeDocument/2006/math" xmlns:a14="http://schemas.microsoft.com/office/drawing/2010/main" xmlns:ma14="http://schemas.microsoft.com/office/mac/drawingml/2011/main" val="1"/>
             </a:ext>
           </a:extLst>
         </p:spPr>
@@ -18213,7 +18553,7 @@
           </a:ln>
           <a:extLst>
             <a:ext uri="{C572A759-6A51-4108-AA02-DFA0A04FC94B}">
-              <ma14:wrappingTextBoxFlag xmlns:ma14="http://schemas.microsoft.com/office/mac/drawingml/2011/main" xmlns:a14="http://schemas.microsoft.com/office/drawing/2010/main" xmlns:m="http://schemas.openxmlformats.org/officeDocument/2006/math" xmlns="" val="1"/>
+              <ma14:wrappingTextBoxFlag xmlns="" xmlns:m="http://schemas.openxmlformats.org/officeDocument/2006/math" xmlns:a14="http://schemas.microsoft.com/office/drawing/2010/main" xmlns:ma14="http://schemas.microsoft.com/office/mac/drawingml/2011/main" val="1"/>
             </a:ext>
           </a:extLst>
         </p:spPr>
@@ -18262,7 +18602,7 @@
           </a:ln>
           <a:extLst>
             <a:ext uri="{C572A759-6A51-4108-AA02-DFA0A04FC94B}">
-              <ma14:wrappingTextBoxFlag xmlns:ma14="http://schemas.microsoft.com/office/mac/drawingml/2011/main" xmlns:a14="http://schemas.microsoft.com/office/drawing/2010/main" xmlns:m="http://schemas.openxmlformats.org/officeDocument/2006/math" xmlns="" val="1"/>
+              <ma14:wrappingTextBoxFlag xmlns="" xmlns:m="http://schemas.openxmlformats.org/officeDocument/2006/math" xmlns:a14="http://schemas.microsoft.com/office/drawing/2010/main" xmlns:ma14="http://schemas.microsoft.com/office/mac/drawingml/2011/main" val="1"/>
             </a:ext>
           </a:extLst>
         </p:spPr>
@@ -18313,7 +18653,7 @@
           </a:ln>
           <a:extLst>
             <a:ext uri="{C572A759-6A51-4108-AA02-DFA0A04FC94B}">
-              <ma14:wrappingTextBoxFlag xmlns:ma14="http://schemas.microsoft.com/office/mac/drawingml/2011/main" xmlns:a14="http://schemas.microsoft.com/office/drawing/2010/main" xmlns:m="http://schemas.openxmlformats.org/officeDocument/2006/math" xmlns="" val="1"/>
+              <ma14:wrappingTextBoxFlag xmlns="" xmlns:m="http://schemas.openxmlformats.org/officeDocument/2006/math" xmlns:a14="http://schemas.microsoft.com/office/drawing/2010/main" xmlns:ma14="http://schemas.microsoft.com/office/mac/drawingml/2011/main" val="1"/>
             </a:ext>
           </a:extLst>
         </p:spPr>
@@ -18370,7 +18710,7 @@
           </a:ln>
           <a:extLst>
             <a:ext uri="{C572A759-6A51-4108-AA02-DFA0A04FC94B}">
-              <ma14:wrappingTextBoxFlag xmlns:ma14="http://schemas.microsoft.com/office/mac/drawingml/2011/main" xmlns:a14="http://schemas.microsoft.com/office/drawing/2010/main" xmlns:m="http://schemas.openxmlformats.org/officeDocument/2006/math" xmlns="" val="1"/>
+              <ma14:wrappingTextBoxFlag xmlns="" xmlns:m="http://schemas.openxmlformats.org/officeDocument/2006/math" xmlns:a14="http://schemas.microsoft.com/office/drawing/2010/main" xmlns:ma14="http://schemas.microsoft.com/office/mac/drawingml/2011/main" val="1"/>
             </a:ext>
           </a:extLst>
         </p:spPr>
@@ -18613,7 +18953,7 @@
             <a:effectLst/>
             <a:extLst>
               <a:ext uri="{C572A759-6A51-4108-AA02-DFA0A04FC94B}">
-                <ma14:wrappingTextBoxFlag xmlns:ma14="http://schemas.microsoft.com/office/mac/drawingml/2011/main" xmlns:a14="http://schemas.microsoft.com/office/drawing/2010/main" xmlns:m="http://schemas.openxmlformats.org/officeDocument/2006/math" xmlns="" val="1"/>
+                <ma14:wrappingTextBoxFlag xmlns="" xmlns:m="http://schemas.openxmlformats.org/officeDocument/2006/math" xmlns:a14="http://schemas.microsoft.com/office/drawing/2010/main" xmlns:ma14="http://schemas.microsoft.com/office/mac/drawingml/2011/main" val="1"/>
               </a:ext>
             </a:extLst>
           </p:spPr>
@@ -18675,7 +19015,7 @@
             <a:effectLst/>
             <a:extLst>
               <a:ext uri="{C572A759-6A51-4108-AA02-DFA0A04FC94B}">
-                <ma14:wrappingTextBoxFlag xmlns:ma14="http://schemas.microsoft.com/office/mac/drawingml/2011/main" xmlns:a14="http://schemas.microsoft.com/office/drawing/2010/main" xmlns:m="http://schemas.openxmlformats.org/officeDocument/2006/math" xmlns="" val="1"/>
+                <ma14:wrappingTextBoxFlag xmlns="" xmlns:m="http://schemas.openxmlformats.org/officeDocument/2006/math" xmlns:a14="http://schemas.microsoft.com/office/drawing/2010/main" xmlns:ma14="http://schemas.microsoft.com/office/mac/drawingml/2011/main" val="1"/>
               </a:ext>
             </a:extLst>
           </p:spPr>
@@ -19111,6 +19451,62 @@
       </p:grpSpPr>
       <p:sp>
         <p:nvSpPr>
+          <p:cNvPr id="55" name="Rectángulo redondeado">
+            <a:extLst>
+              <a:ext uri="{FF2B5EF4-FFF2-40B4-BE49-F238E27FC236}">
+                <a16:creationId xmlns:a16="http://schemas.microsoft.com/office/drawing/2014/main" id="{3771F8F4-ECB3-7A43-4382-4EBA032A09A8}"/>
+              </a:ext>
+            </a:extLst>
+          </p:cNvPr>
+          <p:cNvSpPr/>
+          <p:nvPr/>
+        </p:nvSpPr>
+        <p:spPr>
+          <a:xfrm>
+            <a:off x="3836865" y="2683101"/>
+            <a:ext cx="1473427" cy="2241112"/>
+          </a:xfrm>
+          <a:prstGeom prst="roundRect">
+            <a:avLst>
+              <a:gd name="adj" fmla="val 2360"/>
+            </a:avLst>
+          </a:prstGeom>
+          <a:solidFill>
+            <a:schemeClr val="bg2">
+              <a:lumMod val="20000"/>
+              <a:lumOff val="80000"/>
+            </a:schemeClr>
+          </a:solidFill>
+          <a:ln w="25400" cap="flat">
+            <a:noFill/>
+            <a:prstDash val="solid"/>
+            <a:round/>
+          </a:ln>
+          <a:effectLst/>
+        </p:spPr>
+        <p:txBody>
+          <a:bodyPr wrap="square" lIns="45719" tIns="45719" rIns="45719" bIns="45719" numCol="1" anchor="ctr">
+            <a:noAutofit/>
+          </a:bodyPr>
+          <a:lstStyle/>
+          <a:p>
+            <a:pPr>
+              <a:defRPr sz="2400">
+                <a:solidFill>
+                  <a:srgbClr val="404040"/>
+                </a:solidFill>
+                <a:latin typeface="Open Sans"/>
+                <a:ea typeface="Open Sans"/>
+                <a:cs typeface="Open Sans"/>
+                <a:sym typeface="Open Sans"/>
+              </a:defRPr>
+            </a:pPr>
+            <a:endParaRPr dirty="0"/>
+          </a:p>
+        </p:txBody>
+      </p:sp>
+      <p:sp>
+        <p:nvSpPr>
           <p:cNvPr id="153" name="Title 1"/>
           <p:cNvSpPr txBox="1">
             <a:spLocks noGrp="1"/>
@@ -19212,7 +19608,7 @@
           <a:effectLst/>
           <a:extLst>
             <a:ext uri="{C572A759-6A51-4108-AA02-DFA0A04FC94B}">
-              <ma14:wrappingTextBoxFlag xmlns="" xmlns:m="http://schemas.openxmlformats.org/officeDocument/2006/math" xmlns:a14="http://schemas.microsoft.com/office/drawing/2010/main" xmlns:ma14="http://schemas.microsoft.com/office/mac/drawingml/2011/main" val="1"/>
+              <ma14:wrappingTextBoxFlag xmlns:ma14="http://schemas.microsoft.com/office/mac/drawingml/2011/main" xmlns:a14="http://schemas.microsoft.com/office/drawing/2010/main" xmlns:m="http://schemas.openxmlformats.org/officeDocument/2006/math" xmlns="" val="1"/>
             </a:ext>
           </a:extLst>
         </p:spPr>
@@ -19261,7 +19657,7 @@
           </a:ln>
           <a:extLst>
             <a:ext uri="{C572A759-6A51-4108-AA02-DFA0A04FC94B}">
-              <ma14:wrappingTextBoxFlag xmlns="" xmlns:m="http://schemas.openxmlformats.org/officeDocument/2006/math" xmlns:a14="http://schemas.microsoft.com/office/drawing/2010/main" xmlns:ma14="http://schemas.microsoft.com/office/mac/drawingml/2011/main" val="1"/>
+              <ma14:wrappingTextBoxFlag xmlns:ma14="http://schemas.microsoft.com/office/mac/drawingml/2011/main" xmlns:a14="http://schemas.microsoft.com/office/drawing/2010/main" xmlns:m="http://schemas.openxmlformats.org/officeDocument/2006/math" xmlns="" val="1"/>
             </a:ext>
           </a:extLst>
         </p:spPr>
@@ -19334,7 +19730,7 @@
           <a:effectLst/>
           <a:extLst>
             <a:ext uri="{C572A759-6A51-4108-AA02-DFA0A04FC94B}">
-              <ma14:wrappingTextBoxFlag xmlns="" xmlns:m="http://schemas.openxmlformats.org/officeDocument/2006/math" xmlns:a14="http://schemas.microsoft.com/office/drawing/2010/main" xmlns:ma14="http://schemas.microsoft.com/office/mac/drawingml/2011/main" val="1"/>
+              <ma14:wrappingTextBoxFlag xmlns:ma14="http://schemas.microsoft.com/office/mac/drawingml/2011/main" xmlns:a14="http://schemas.microsoft.com/office/drawing/2010/main" xmlns:m="http://schemas.openxmlformats.org/officeDocument/2006/math" xmlns="" val="1"/>
             </a:ext>
           </a:extLst>
         </p:spPr>
@@ -19668,7 +20064,7 @@
           </a:ln>
           <a:extLst>
             <a:ext uri="{C572A759-6A51-4108-AA02-DFA0A04FC94B}">
-              <ma14:wrappingTextBoxFlag xmlns="" xmlns:m="http://schemas.openxmlformats.org/officeDocument/2006/math" xmlns:a14="http://schemas.microsoft.com/office/drawing/2010/main" xmlns:ma14="http://schemas.microsoft.com/office/mac/drawingml/2011/main" val="1"/>
+              <ma14:wrappingTextBoxFlag xmlns:ma14="http://schemas.microsoft.com/office/mac/drawingml/2011/main" xmlns:a14="http://schemas.microsoft.com/office/drawing/2010/main" xmlns:m="http://schemas.openxmlformats.org/officeDocument/2006/math" xmlns="" val="1"/>
             </a:ext>
           </a:extLst>
         </p:spPr>
@@ -19828,12 +20224,354 @@
           </a:prstGeom>
         </p:spPr>
       </p:pic>
+      <p:grpSp>
+        <p:nvGrpSpPr>
+          <p:cNvPr id="46" name="Grupo 45">
+            <a:extLst>
+              <a:ext uri="{FF2B5EF4-FFF2-40B4-BE49-F238E27FC236}">
+                <a16:creationId xmlns:a16="http://schemas.microsoft.com/office/drawing/2014/main" id="{EC23339B-DA81-8B62-E192-4616EBE5503E}"/>
+              </a:ext>
+            </a:extLst>
+          </p:cNvPr>
+          <p:cNvGrpSpPr/>
+          <p:nvPr/>
+        </p:nvGrpSpPr>
+        <p:grpSpPr>
+          <a:xfrm>
+            <a:off x="2172138" y="3607168"/>
+            <a:ext cx="4839837" cy="465949"/>
+            <a:chOff x="2172138" y="3607168"/>
+            <a:chExt cx="4839837" cy="465949"/>
+          </a:xfrm>
+          <a:effectLst/>
+        </p:grpSpPr>
+        <p:sp>
+          <p:nvSpPr>
+            <p:cNvPr id="129" name="Rectángulo redondeado">
+              <a:extLst>
+                <a:ext uri="{FF2B5EF4-FFF2-40B4-BE49-F238E27FC236}">
+                  <a16:creationId xmlns:a16="http://schemas.microsoft.com/office/drawing/2014/main" id="{ED124C5A-0070-43C8-B17C-56D9AE19DD32}"/>
+                </a:ext>
+              </a:extLst>
+            </p:cNvPr>
+            <p:cNvSpPr/>
+            <p:nvPr/>
+          </p:nvSpPr>
+          <p:spPr>
+            <a:xfrm>
+              <a:off x="2172138" y="3613489"/>
+              <a:ext cx="845433" cy="459627"/>
+            </a:xfrm>
+            <a:prstGeom prst="roundRect">
+              <a:avLst>
+                <a:gd name="adj" fmla="val 16044"/>
+              </a:avLst>
+            </a:prstGeom>
+            <a:solidFill>
+              <a:srgbClr val="EBD215">
+                <a:alpha val="50000"/>
+              </a:srgbClr>
+            </a:solidFill>
+            <a:ln w="12700" cap="flat">
+              <a:noFill/>
+              <a:miter lim="400000"/>
+            </a:ln>
+            <a:effectLst/>
+          </p:spPr>
+          <p:txBody>
+            <a:bodyPr wrap="square" lIns="45719" tIns="45719" rIns="45719" bIns="45719" numCol="1" anchor="ctr">
+              <a:noAutofit/>
+            </a:bodyPr>
+            <a:lstStyle/>
+            <a:p>
+              <a:pPr algn="ctr">
+                <a:defRPr sz="1000">
+                  <a:solidFill>
+                    <a:srgbClr val="FFFFFF"/>
+                  </a:solidFill>
+                  <a:latin typeface="Open Sans"/>
+                  <a:ea typeface="Open Sans"/>
+                  <a:cs typeface="Open Sans"/>
+                  <a:sym typeface="Open Sans"/>
+                </a:defRPr>
+              </a:pPr>
+              <a:r>
+                <a:rPr lang="es-ES" sz="2400" dirty="0"/>
+                <a:t>ES6+</a:t>
+              </a:r>
+              <a:endParaRPr sz="2400" dirty="0"/>
+            </a:p>
+          </p:txBody>
+        </p:sp>
+        <p:sp>
+          <p:nvSpPr>
+            <p:cNvPr id="131" name="Rectángulo redondeado">
+              <a:extLst>
+                <a:ext uri="{FF2B5EF4-FFF2-40B4-BE49-F238E27FC236}">
+                  <a16:creationId xmlns:a16="http://schemas.microsoft.com/office/drawing/2014/main" id="{782B69F7-B6D5-4318-814B-8FBAB4415941}"/>
+                </a:ext>
+              </a:extLst>
+            </p:cNvPr>
+            <p:cNvSpPr/>
+            <p:nvPr/>
+          </p:nvSpPr>
+          <p:spPr>
+            <a:xfrm>
+              <a:off x="6271746" y="3607168"/>
+              <a:ext cx="740229" cy="459627"/>
+            </a:xfrm>
+            <a:prstGeom prst="roundRect">
+              <a:avLst>
+                <a:gd name="adj" fmla="val 16044"/>
+              </a:avLst>
+            </a:prstGeom>
+            <a:solidFill>
+              <a:srgbClr val="EBD215">
+                <a:alpha val="50000"/>
+              </a:srgbClr>
+            </a:solidFill>
+            <a:ln w="12700" cap="flat">
+              <a:noFill/>
+              <a:miter lim="400000"/>
+            </a:ln>
+            <a:effectLst/>
+          </p:spPr>
+          <p:txBody>
+            <a:bodyPr wrap="square" lIns="45719" tIns="45719" rIns="45719" bIns="45719" numCol="1" anchor="ctr">
+              <a:noAutofit/>
+            </a:bodyPr>
+            <a:lstStyle/>
+            <a:p>
+              <a:pPr algn="ctr">
+                <a:defRPr sz="1000">
+                  <a:solidFill>
+                    <a:srgbClr val="FFFFFF"/>
+                  </a:solidFill>
+                  <a:latin typeface="Open Sans"/>
+                  <a:ea typeface="Open Sans"/>
+                  <a:cs typeface="Open Sans"/>
+                  <a:sym typeface="Open Sans"/>
+                </a:defRPr>
+              </a:pPr>
+              <a:r>
+                <a:rPr lang="es-ES" sz="2400" dirty="0"/>
+                <a:t>ES5</a:t>
+              </a:r>
+              <a:endParaRPr sz="2400" dirty="0"/>
+            </a:p>
+          </p:txBody>
+        </p:sp>
+        <p:sp>
+          <p:nvSpPr>
+            <p:cNvPr id="135" name="Rectángulo redondeado">
+              <a:extLst>
+                <a:ext uri="{FF2B5EF4-FFF2-40B4-BE49-F238E27FC236}">
+                  <a16:creationId xmlns:a16="http://schemas.microsoft.com/office/drawing/2014/main" id="{52F046AC-F84F-4592-A50A-0A6CA90D670F}"/>
+                </a:ext>
+              </a:extLst>
+            </p:cNvPr>
+            <p:cNvSpPr/>
+            <p:nvPr/>
+          </p:nvSpPr>
+          <p:spPr>
+            <a:xfrm>
+              <a:off x="4018249" y="3613490"/>
+              <a:ext cx="1107502" cy="459627"/>
+            </a:xfrm>
+            <a:prstGeom prst="roundRect">
+              <a:avLst>
+                <a:gd name="adj" fmla="val 10635"/>
+              </a:avLst>
+            </a:prstGeom>
+            <a:solidFill>
+              <a:schemeClr val="bg1"/>
+            </a:solidFill>
+            <a:ln w="25400" cap="flat">
+              <a:solidFill>
+                <a:schemeClr val="tx1">
+                  <a:lumMod val="50000"/>
+                  <a:lumOff val="50000"/>
+                  <a:alpha val="50000"/>
+                </a:schemeClr>
+              </a:solidFill>
+              <a:prstDash val="solid"/>
+              <a:round/>
+            </a:ln>
+            <a:effectLst/>
+          </p:spPr>
+          <p:txBody>
+            <a:bodyPr wrap="square" lIns="45719" tIns="45719" rIns="45719" bIns="45719" numCol="1" anchor="ctr">
+              <a:noAutofit/>
+            </a:bodyPr>
+            <a:lstStyle/>
+            <a:p>
+              <a:pPr>
+                <a:defRPr sz="2400">
+                  <a:solidFill>
+                    <a:srgbClr val="404040"/>
+                  </a:solidFill>
+                  <a:latin typeface="Open Sans"/>
+                  <a:ea typeface="Open Sans"/>
+                  <a:cs typeface="Open Sans"/>
+                  <a:sym typeface="Open Sans"/>
+                </a:defRPr>
+              </a:pPr>
+              <a:endParaRPr dirty="0"/>
+            </a:p>
+          </p:txBody>
+        </p:sp>
+        <p:cxnSp>
+          <p:nvCxnSpPr>
+            <p:cNvPr id="29" name="Conector recto de flecha 28">
+              <a:extLst>
+                <a:ext uri="{FF2B5EF4-FFF2-40B4-BE49-F238E27FC236}">
+                  <a16:creationId xmlns:a16="http://schemas.microsoft.com/office/drawing/2014/main" id="{02CFEC63-F3F7-4949-8975-4A709201A36F}"/>
+                </a:ext>
+              </a:extLst>
+            </p:cNvPr>
+            <p:cNvCxnSpPr>
+              <a:cxnSpLocks/>
+              <a:stCxn id="129" idx="3"/>
+              <a:endCxn id="135" idx="1"/>
+            </p:cNvCxnSpPr>
+            <p:nvPr/>
+          </p:nvCxnSpPr>
+          <p:spPr>
+            <a:xfrm>
+              <a:off x="3017571" y="3843303"/>
+              <a:ext cx="1000678" cy="1"/>
+            </a:xfrm>
+            <a:prstGeom prst="straightConnector1">
+              <a:avLst/>
+            </a:prstGeom>
+            <a:noFill/>
+            <a:ln w="25400" cap="flat">
+              <a:solidFill>
+                <a:schemeClr val="tx1">
+                  <a:lumMod val="50000"/>
+                  <a:lumOff val="50000"/>
+                  <a:alpha val="50000"/>
+                </a:schemeClr>
+              </a:solidFill>
+              <a:prstDash val="solid"/>
+              <a:round/>
+              <a:tailEnd type="triangle"/>
+            </a:ln>
+            <a:effectLst/>
+            <a:sp3d/>
+          </p:spPr>
+          <p:style>
+            <a:lnRef idx="0">
+              <a:scrgbClr r="0" g="0" b="0"/>
+            </a:lnRef>
+            <a:fillRef idx="0">
+              <a:scrgbClr r="0" g="0" b="0"/>
+            </a:fillRef>
+            <a:effectRef idx="0">
+              <a:scrgbClr r="0" g="0" b="0"/>
+            </a:effectRef>
+            <a:fontRef idx="none"/>
+          </p:style>
+        </p:cxnSp>
+        <p:cxnSp>
+          <p:nvCxnSpPr>
+            <p:cNvPr id="31" name="Conector recto de flecha 30">
+              <a:extLst>
+                <a:ext uri="{FF2B5EF4-FFF2-40B4-BE49-F238E27FC236}">
+                  <a16:creationId xmlns:a16="http://schemas.microsoft.com/office/drawing/2014/main" id="{702E9A5C-1F0F-40A4-8B87-1A6C7AE5B25D}"/>
+                </a:ext>
+              </a:extLst>
+            </p:cNvPr>
+            <p:cNvCxnSpPr>
+              <a:cxnSpLocks/>
+              <a:stCxn id="135" idx="3"/>
+              <a:endCxn id="131" idx="1"/>
+            </p:cNvCxnSpPr>
+            <p:nvPr/>
+          </p:nvCxnSpPr>
+          <p:spPr>
+            <a:xfrm flipV="1">
+              <a:off x="5125751" y="3836982"/>
+              <a:ext cx="1145995" cy="6322"/>
+            </a:xfrm>
+            <a:prstGeom prst="straightConnector1">
+              <a:avLst/>
+            </a:prstGeom>
+            <a:noFill/>
+            <a:ln w="25400" cap="flat">
+              <a:solidFill>
+                <a:schemeClr val="tx1">
+                  <a:lumMod val="50000"/>
+                  <a:lumOff val="50000"/>
+                  <a:alpha val="50000"/>
+                </a:schemeClr>
+              </a:solidFill>
+              <a:prstDash val="solid"/>
+              <a:round/>
+              <a:tailEnd type="triangle"/>
+            </a:ln>
+            <a:effectLst/>
+            <a:sp3d/>
+          </p:spPr>
+          <p:style>
+            <a:lnRef idx="0">
+              <a:scrgbClr r="0" g="0" b="0"/>
+            </a:lnRef>
+            <a:fillRef idx="0">
+              <a:scrgbClr r="0" g="0" b="0"/>
+            </a:fillRef>
+            <a:effectRef idx="0">
+              <a:scrgbClr r="0" g="0" b="0"/>
+            </a:effectRef>
+            <a:fontRef idx="none"/>
+          </p:style>
+        </p:cxnSp>
+        <p:pic>
+          <p:nvPicPr>
+            <p:cNvPr id="1026" name="Picture 2" descr="https://upload.wikimedia.org/wikipedia/commons/thumb/0/02/Babel_Logo.svg/2000px-Babel_Logo.svg.png">
+              <a:extLst>
+                <a:ext uri="{FF2B5EF4-FFF2-40B4-BE49-F238E27FC236}">
+                  <a16:creationId xmlns:a16="http://schemas.microsoft.com/office/drawing/2014/main" id="{0D83C3D3-3B06-4EFB-BA76-A4D543DE1738}"/>
+                </a:ext>
+              </a:extLst>
+            </p:cNvPr>
+            <p:cNvPicPr>
+              <a:picLocks noChangeAspect="1" noChangeArrowheads="1"/>
+            </p:cNvPicPr>
+            <p:nvPr/>
+          </p:nvPicPr>
+          <p:blipFill>
+            <a:blip r:embed="rId24" cstate="print">
+              <a:alphaModFix amt="35000"/>
+              <a:extLst>
+                <a:ext uri="{28A0092B-C50C-407E-A947-70E740481C1C}">
+                  <a14:useLocalDpi xmlns:a14="http://schemas.microsoft.com/office/drawing/2010/main" val="0"/>
+                </a:ext>
+              </a:extLst>
+            </a:blip>
+            <a:srcRect/>
+            <a:stretch>
+              <a:fillRect/>
+            </a:stretch>
+          </p:blipFill>
+          <p:spPr bwMode="auto">
+            <a:xfrm>
+              <a:off x="4171652" y="3661165"/>
+              <a:ext cx="848503" cy="385215"/>
+            </a:xfrm>
+            <a:prstGeom prst="rect">
+              <a:avLst/>
+            </a:prstGeom>
+            <a:noFill/>
+          </p:spPr>
+        </p:pic>
+      </p:grpSp>
       <p:sp>
         <p:nvSpPr>
-          <p:cNvPr id="129" name="Rectángulo redondeado">
+          <p:cNvPr id="241" name="Rectángulo redondeado">
             <a:extLst>
               <a:ext uri="{FF2B5EF4-FFF2-40B4-BE49-F238E27FC236}">
-                <a16:creationId xmlns:a16="http://schemas.microsoft.com/office/drawing/2014/main" id="{ED124C5A-0070-43C8-B17C-56D9AE19DD32}"/>
+                <a16:creationId xmlns:a16="http://schemas.microsoft.com/office/drawing/2014/main" id="{9D31BED0-90F0-46E8-A222-EDBFD1CA484A}"/>
               </a:ext>
             </a:extLst>
           </p:cNvPr>
@@ -19842,229 +20580,17 @@
         </p:nvSpPr>
         <p:spPr>
           <a:xfrm>
-            <a:off x="1665683" y="3782235"/>
-            <a:ext cx="1066088" cy="579588"/>
-          </a:xfrm>
-          <a:prstGeom prst="roundRect">
-            <a:avLst>
-              <a:gd name="adj" fmla="val 16044"/>
-            </a:avLst>
-          </a:prstGeom>
-          <a:solidFill>
-            <a:srgbClr val="EBD215"/>
-          </a:solidFill>
-          <a:ln w="12700" cap="flat">
-            <a:noFill/>
-            <a:miter lim="400000"/>
-          </a:ln>
-          <a:effectLst/>
-        </p:spPr>
-        <p:txBody>
-          <a:bodyPr wrap="square" lIns="45719" tIns="45719" rIns="45719" bIns="45719" numCol="1" anchor="ctr">
-            <a:noAutofit/>
-          </a:bodyPr>
-          <a:lstStyle/>
-          <a:p>
-            <a:pPr algn="ctr">
-              <a:defRPr sz="1000">
-                <a:solidFill>
-                  <a:srgbClr val="FFFFFF"/>
-                </a:solidFill>
-                <a:latin typeface="Open Sans"/>
-                <a:ea typeface="Open Sans"/>
-                <a:cs typeface="Open Sans"/>
-                <a:sym typeface="Open Sans"/>
-              </a:defRPr>
-            </a:pPr>
-            <a:r>
-              <a:rPr lang="es-ES" sz="2400" dirty="0"/>
-              <a:t>ES6+</a:t>
-            </a:r>
-            <a:endParaRPr sz="2400" dirty="0"/>
-          </a:p>
-        </p:txBody>
-      </p:sp>
-      <p:sp>
-        <p:nvSpPr>
-          <p:cNvPr id="131" name="Rectángulo redondeado">
-            <a:extLst>
-              <a:ext uri="{FF2B5EF4-FFF2-40B4-BE49-F238E27FC236}">
-                <a16:creationId xmlns:a16="http://schemas.microsoft.com/office/drawing/2014/main" id="{782B69F7-B6D5-4318-814B-8FBAB4415941}"/>
-              </a:ext>
-            </a:extLst>
-          </p:cNvPr>
-          <p:cNvSpPr/>
-          <p:nvPr/>
-        </p:nvSpPr>
-        <p:spPr>
-          <a:xfrm>
-            <a:off x="6366199" y="3782235"/>
-            <a:ext cx="933426" cy="579588"/>
-          </a:xfrm>
-          <a:prstGeom prst="roundRect">
-            <a:avLst>
-              <a:gd name="adj" fmla="val 16044"/>
-            </a:avLst>
-          </a:prstGeom>
-          <a:solidFill>
-            <a:srgbClr val="EBD215"/>
-          </a:solidFill>
-          <a:ln w="12700" cap="flat">
-            <a:noFill/>
-            <a:miter lim="400000"/>
-          </a:ln>
-          <a:effectLst/>
-        </p:spPr>
-        <p:txBody>
-          <a:bodyPr wrap="square" lIns="45719" tIns="45719" rIns="45719" bIns="45719" numCol="1" anchor="ctr">
-            <a:noAutofit/>
-          </a:bodyPr>
-          <a:lstStyle/>
-          <a:p>
-            <a:pPr algn="ctr">
-              <a:defRPr sz="1000">
-                <a:solidFill>
-                  <a:srgbClr val="FFFFFF"/>
-                </a:solidFill>
-                <a:latin typeface="Open Sans"/>
-                <a:ea typeface="Open Sans"/>
-                <a:cs typeface="Open Sans"/>
-                <a:sym typeface="Open Sans"/>
-              </a:defRPr>
-            </a:pPr>
-            <a:r>
-              <a:rPr lang="es-ES" sz="2400" dirty="0"/>
-              <a:t>ES5</a:t>
-            </a:r>
-            <a:endParaRPr sz="2400" dirty="0"/>
-          </a:p>
-        </p:txBody>
-      </p:sp>
-      <p:sp>
-        <p:nvSpPr>
-          <p:cNvPr id="132" name="TextBox 3">
-            <a:extLst>
-              <a:ext uri="{FF2B5EF4-FFF2-40B4-BE49-F238E27FC236}">
-                <a16:creationId xmlns:a16="http://schemas.microsoft.com/office/drawing/2014/main" id="{94C42C01-156D-4402-848A-259AFC783035}"/>
-              </a:ext>
-            </a:extLst>
-          </p:cNvPr>
-          <p:cNvSpPr txBox="1"/>
-          <p:nvPr/>
-        </p:nvSpPr>
-        <p:spPr>
-          <a:xfrm>
-            <a:off x="4210052" y="2940909"/>
-            <a:ext cx="768854" cy="184666"/>
-          </a:xfrm>
-          <a:prstGeom prst="rect">
-            <a:avLst/>
-          </a:prstGeom>
-          <a:ln w="12700">
-            <a:miter lim="400000"/>
-          </a:ln>
-          <a:extLst>
-            <a:ext uri="{C572A759-6A51-4108-AA02-DFA0A04FC94B}">
-              <ma14:wrappingTextBoxFlag xmlns="" xmlns:m="http://schemas.openxmlformats.org/officeDocument/2006/math" xmlns:a14="http://schemas.microsoft.com/office/drawing/2010/main" xmlns:ma14="http://schemas.microsoft.com/office/mac/drawingml/2011/main" val="1"/>
-            </a:ext>
-          </a:extLst>
-        </p:spPr>
-        <p:txBody>
-          <a:bodyPr wrap="square" lIns="0" tIns="0" rIns="0" bIns="0">
-            <a:spAutoFit/>
-          </a:bodyPr>
-          <a:lstStyle/>
-          <a:p>
-            <a:pPr algn="ctr">
-              <a:defRPr sz="1200">
-                <a:solidFill>
-                  <a:srgbClr val="595959"/>
-                </a:solidFill>
-                <a:latin typeface="Open Sans"/>
-                <a:ea typeface="Open Sans"/>
-                <a:cs typeface="Open Sans"/>
-                <a:sym typeface="Open Sans"/>
-              </a:defRPr>
-            </a:pPr>
-            <a:r>
-              <a:rPr lang="es-ES" dirty="0"/>
-              <a:t>POLYFILLS</a:t>
-            </a:r>
-            <a:endParaRPr u="sng" dirty="0">
-              <a:solidFill>
-                <a:srgbClr val="0000FF"/>
-              </a:solidFill>
-              <a:uFill>
-                <a:solidFill>
-                  <a:srgbClr val="0000FF"/>
-                </a:solidFill>
-              </a:uFill>
-              <a:hlinkClick r:id="rId3"/>
-            </a:endParaRPr>
-          </a:p>
-        </p:txBody>
-      </p:sp>
-      <p:pic>
-        <p:nvPicPr>
-          <p:cNvPr id="1026" name="Picture 2" descr="https://upload.wikimedia.org/wikipedia/commons/thumb/0/02/Babel_Logo.svg/2000px-Babel_Logo.svg.png">
-            <a:extLst>
-              <a:ext uri="{FF2B5EF4-FFF2-40B4-BE49-F238E27FC236}">
-                <a16:creationId xmlns:a16="http://schemas.microsoft.com/office/drawing/2014/main" id="{0D83C3D3-3B06-4EFB-BA76-A4D543DE1738}"/>
-              </a:ext>
-            </a:extLst>
-          </p:cNvPr>
-          <p:cNvPicPr>
-            <a:picLocks noChangeAspect="1" noChangeArrowheads="1"/>
-          </p:cNvPicPr>
-          <p:nvPr/>
-        </p:nvPicPr>
-        <p:blipFill>
-          <a:blip r:embed="rId24" cstate="print">
-            <a:extLst>
-              <a:ext uri="{28A0092B-C50C-407E-A947-70E740481C1C}">
-                <a14:useLocalDpi xmlns:a14="http://schemas.microsoft.com/office/drawing/2010/main" val="0"/>
-              </a:ext>
-            </a:extLst>
-          </a:blip>
-          <a:srcRect/>
-          <a:stretch>
-            <a:fillRect/>
-          </a:stretch>
-        </p:blipFill>
-        <p:spPr bwMode="auto">
-          <a:xfrm>
-            <a:off x="3797597" y="3734033"/>
-            <a:ext cx="1634944" cy="742253"/>
-          </a:xfrm>
-          <a:prstGeom prst="rect">
-            <a:avLst/>
-          </a:prstGeom>
-          <a:noFill/>
-        </p:spPr>
-      </p:pic>
-      <p:sp>
-        <p:nvSpPr>
-          <p:cNvPr id="135" name="Rectángulo redondeado">
-            <a:extLst>
-              <a:ext uri="{FF2B5EF4-FFF2-40B4-BE49-F238E27FC236}">
-                <a16:creationId xmlns:a16="http://schemas.microsoft.com/office/drawing/2014/main" id="{52F046AC-F84F-4592-A50A-0A6CA90D670F}"/>
-              </a:ext>
-            </a:extLst>
-          </p:cNvPr>
-          <p:cNvSpPr/>
-          <p:nvPr/>
-        </p:nvSpPr>
-        <p:spPr>
-          <a:xfrm>
-            <a:off x="3524133" y="3605188"/>
-            <a:ext cx="2095734" cy="933680"/>
+            <a:off x="4018249" y="2861489"/>
+            <a:ext cx="1107502" cy="522188"/>
           </a:xfrm>
           <a:prstGeom prst="roundRect">
             <a:avLst>
               <a:gd name="adj" fmla="val 10635"/>
             </a:avLst>
           </a:prstGeom>
-          <a:noFill/>
+          <a:solidFill>
+            <a:srgbClr val="FFFFFF"/>
+          </a:solidFill>
           <a:ln w="25400" cap="flat">
             <a:solidFill>
               <a:schemeClr val="tx1">
@@ -20094,217 +20620,7 @@
                 <a:sym typeface="Open Sans"/>
               </a:defRPr>
             </a:pPr>
-            <a:endParaRPr/>
-          </a:p>
-        </p:txBody>
-      </p:sp>
-      <p:cxnSp>
-        <p:nvCxnSpPr>
-          <p:cNvPr id="29" name="Conector recto de flecha 28">
-            <a:extLst>
-              <a:ext uri="{FF2B5EF4-FFF2-40B4-BE49-F238E27FC236}">
-                <a16:creationId xmlns:a16="http://schemas.microsoft.com/office/drawing/2014/main" id="{02CFEC63-F3F7-4949-8975-4A709201A36F}"/>
-              </a:ext>
-            </a:extLst>
-          </p:cNvPr>
-          <p:cNvCxnSpPr>
-            <a:stCxn id="129" idx="3"/>
-            <a:endCxn id="135" idx="1"/>
-          </p:cNvCxnSpPr>
-          <p:nvPr/>
-        </p:nvCxnSpPr>
-        <p:spPr>
-          <a:xfrm flipV="1">
-            <a:off x="2731771" y="4072028"/>
-            <a:ext cx="792362" cy="1"/>
-          </a:xfrm>
-          <a:prstGeom prst="straightConnector1">
-            <a:avLst/>
-          </a:prstGeom>
-          <a:noFill/>
-          <a:ln w="25400" cap="flat">
-            <a:solidFill>
-              <a:schemeClr val="tx1">
-                <a:lumMod val="50000"/>
-                <a:lumOff val="50000"/>
-              </a:schemeClr>
-            </a:solidFill>
-            <a:prstDash val="solid"/>
-            <a:round/>
-            <a:tailEnd type="triangle"/>
-          </a:ln>
-          <a:effectLst/>
-          <a:sp3d/>
-        </p:spPr>
-        <p:style>
-          <a:lnRef idx="0">
-            <a:scrgbClr r="0" g="0" b="0"/>
-          </a:lnRef>
-          <a:fillRef idx="0">
-            <a:scrgbClr r="0" g="0" b="0"/>
-          </a:fillRef>
-          <a:effectRef idx="0">
-            <a:scrgbClr r="0" g="0" b="0"/>
-          </a:effectRef>
-          <a:fontRef idx="none"/>
-        </p:style>
-      </p:cxnSp>
-      <p:cxnSp>
-        <p:nvCxnSpPr>
-          <p:cNvPr id="31" name="Conector recto de flecha 30">
-            <a:extLst>
-              <a:ext uri="{FF2B5EF4-FFF2-40B4-BE49-F238E27FC236}">
-                <a16:creationId xmlns:a16="http://schemas.microsoft.com/office/drawing/2014/main" id="{702E9A5C-1F0F-40A4-8B87-1A6C7AE5B25D}"/>
-              </a:ext>
-            </a:extLst>
-          </p:cNvPr>
-          <p:cNvCxnSpPr>
-            <a:stCxn id="135" idx="3"/>
-            <a:endCxn id="131" idx="1"/>
-          </p:cNvCxnSpPr>
-          <p:nvPr/>
-        </p:nvCxnSpPr>
-        <p:spPr>
-          <a:xfrm>
-            <a:off x="5619867" y="4072028"/>
-            <a:ext cx="746332" cy="1"/>
-          </a:xfrm>
-          <a:prstGeom prst="straightConnector1">
-            <a:avLst/>
-          </a:prstGeom>
-          <a:noFill/>
-          <a:ln w="25400" cap="flat">
-            <a:solidFill>
-              <a:schemeClr val="tx1">
-                <a:lumMod val="50000"/>
-                <a:lumOff val="50000"/>
-              </a:schemeClr>
-            </a:solidFill>
-            <a:prstDash val="solid"/>
-            <a:round/>
-            <a:tailEnd type="triangle"/>
-          </a:ln>
-          <a:effectLst/>
-          <a:sp3d/>
-        </p:spPr>
-        <p:style>
-          <a:lnRef idx="0">
-            <a:scrgbClr r="0" g="0" b="0"/>
-          </a:lnRef>
-          <a:fillRef idx="0">
-            <a:scrgbClr r="0" g="0" b="0"/>
-          </a:fillRef>
-          <a:effectRef idx="0">
-            <a:scrgbClr r="0" g="0" b="0"/>
-          </a:effectRef>
-          <a:fontRef idx="none"/>
-        </p:style>
-      </p:cxnSp>
-      <p:cxnSp>
-        <p:nvCxnSpPr>
-          <p:cNvPr id="33" name="Conector recto de flecha 32">
-            <a:extLst>
-              <a:ext uri="{FF2B5EF4-FFF2-40B4-BE49-F238E27FC236}">
-                <a16:creationId xmlns:a16="http://schemas.microsoft.com/office/drawing/2014/main" id="{34531F86-8497-4AEC-89BB-F3FD3ECC6815}"/>
-              </a:ext>
-            </a:extLst>
-          </p:cNvPr>
-          <p:cNvCxnSpPr>
-            <a:cxnSpLocks/>
-            <a:stCxn id="241" idx="2"/>
-            <a:endCxn id="135" idx="0"/>
-          </p:cNvCxnSpPr>
-          <p:nvPr/>
-        </p:nvCxnSpPr>
-        <p:spPr>
-          <a:xfrm>
-            <a:off x="4572000" y="3214251"/>
-            <a:ext cx="0" cy="390937"/>
-          </a:xfrm>
-          <a:prstGeom prst="straightConnector1">
-            <a:avLst/>
-          </a:prstGeom>
-          <a:noFill/>
-          <a:ln w="25400" cap="flat">
-            <a:solidFill>
-              <a:schemeClr val="tx1">
-                <a:lumMod val="50000"/>
-                <a:lumOff val="50000"/>
-              </a:schemeClr>
-            </a:solidFill>
-            <a:prstDash val="solid"/>
-            <a:round/>
-            <a:tailEnd type="triangle"/>
-          </a:ln>
-          <a:effectLst/>
-          <a:sp3d/>
-        </p:spPr>
-        <p:style>
-          <a:lnRef idx="0">
-            <a:scrgbClr r="0" g="0" b="0"/>
-          </a:lnRef>
-          <a:fillRef idx="0">
-            <a:scrgbClr r="0" g="0" b="0"/>
-          </a:fillRef>
-          <a:effectRef idx="0">
-            <a:scrgbClr r="0" g="0" b="0"/>
-          </a:effectRef>
-          <a:fontRef idx="none"/>
-        </p:style>
-      </p:cxnSp>
-      <p:sp>
-        <p:nvSpPr>
-          <p:cNvPr id="241" name="Rectángulo redondeado">
-            <a:extLst>
-              <a:ext uri="{FF2B5EF4-FFF2-40B4-BE49-F238E27FC236}">
-                <a16:creationId xmlns:a16="http://schemas.microsoft.com/office/drawing/2014/main" id="{9D31BED0-90F0-46E8-A222-EDBFD1CA484A}"/>
-              </a:ext>
-            </a:extLst>
-          </p:cNvPr>
-          <p:cNvSpPr/>
-          <p:nvPr/>
-        </p:nvSpPr>
-        <p:spPr>
-          <a:xfrm>
-            <a:off x="4018249" y="2861489"/>
-            <a:ext cx="1107502" cy="352762"/>
-          </a:xfrm>
-          <a:prstGeom prst="roundRect">
-            <a:avLst>
-              <a:gd name="adj" fmla="val 10635"/>
-            </a:avLst>
-          </a:prstGeom>
-          <a:noFill/>
-          <a:ln w="25400" cap="flat">
-            <a:solidFill>
-              <a:schemeClr val="tx1">
-                <a:lumMod val="50000"/>
-                <a:lumOff val="50000"/>
-              </a:schemeClr>
-            </a:solidFill>
-            <a:prstDash val="solid"/>
-            <a:round/>
-          </a:ln>
-          <a:effectLst/>
-        </p:spPr>
-        <p:txBody>
-          <a:bodyPr wrap="square" lIns="45719" tIns="45719" rIns="45719" bIns="45719" numCol="1" anchor="ctr">
-            <a:noAutofit/>
-          </a:bodyPr>
-          <a:lstStyle/>
-          <a:p>
-            <a:pPr>
-              <a:defRPr sz="2400">
-                <a:solidFill>
-                  <a:srgbClr val="404040"/>
-                </a:solidFill>
-                <a:latin typeface="Open Sans"/>
-                <a:ea typeface="Open Sans"/>
-                <a:cs typeface="Open Sans"/>
-                <a:sym typeface="Open Sans"/>
-              </a:defRPr>
-            </a:pPr>
-            <a:endParaRPr/>
+            <a:endParaRPr dirty="0"/>
           </a:p>
         </p:txBody>
       </p:sp>
@@ -20386,6 +20702,753 @@
           </a:prstGeom>
         </p:spPr>
       </p:pic>
+      <p:sp>
+        <p:nvSpPr>
+          <p:cNvPr id="21" name="Rectángulo redondeado">
+            <a:extLst>
+              <a:ext uri="{FF2B5EF4-FFF2-40B4-BE49-F238E27FC236}">
+                <a16:creationId xmlns:a16="http://schemas.microsoft.com/office/drawing/2014/main" id="{BA9CFA02-CC5C-0731-A583-2B1C8F225EAA}"/>
+              </a:ext>
+            </a:extLst>
+          </p:cNvPr>
+          <p:cNvSpPr/>
+          <p:nvPr/>
+        </p:nvSpPr>
+        <p:spPr>
+          <a:xfrm>
+            <a:off x="1983845" y="4281133"/>
+            <a:ext cx="1031676" cy="459627"/>
+          </a:xfrm>
+          <a:prstGeom prst="roundRect">
+            <a:avLst>
+              <a:gd name="adj" fmla="val 16044"/>
+            </a:avLst>
+          </a:prstGeom>
+          <a:solidFill>
+            <a:srgbClr val="EBD215"/>
+          </a:solidFill>
+          <a:ln w="12700" cap="flat">
+            <a:noFill/>
+            <a:miter lim="400000"/>
+          </a:ln>
+          <a:effectLst/>
+        </p:spPr>
+        <p:txBody>
+          <a:bodyPr wrap="square" lIns="45719" tIns="45719" rIns="45719" bIns="45719" numCol="1" anchor="ctr">
+            <a:noAutofit/>
+          </a:bodyPr>
+          <a:lstStyle/>
+          <a:p>
+            <a:pPr algn="ctr">
+              <a:defRPr sz="1000">
+                <a:solidFill>
+                  <a:srgbClr val="FFFFFF"/>
+                </a:solidFill>
+                <a:latin typeface="Open Sans"/>
+                <a:ea typeface="Open Sans"/>
+                <a:cs typeface="Open Sans"/>
+                <a:sym typeface="Open Sans"/>
+              </a:defRPr>
+            </a:pPr>
+            <a:r>
+              <a:rPr lang="es-ES" sz="2400" dirty="0"/>
+              <a:t>TS/JSX</a:t>
+            </a:r>
+            <a:endParaRPr sz="2400" dirty="0"/>
+          </a:p>
+        </p:txBody>
+      </p:sp>
+      <p:sp>
+        <p:nvSpPr>
+          <p:cNvPr id="23" name="Rectángulo redondeado">
+            <a:extLst>
+              <a:ext uri="{FF2B5EF4-FFF2-40B4-BE49-F238E27FC236}">
+                <a16:creationId xmlns:a16="http://schemas.microsoft.com/office/drawing/2014/main" id="{E49B4889-8BE8-AA8E-03B0-73C2806C442B}"/>
+              </a:ext>
+            </a:extLst>
+          </p:cNvPr>
+          <p:cNvSpPr/>
+          <p:nvPr/>
+        </p:nvSpPr>
+        <p:spPr>
+          <a:xfrm>
+            <a:off x="6269695" y="4274812"/>
+            <a:ext cx="1384172" cy="459627"/>
+          </a:xfrm>
+          <a:prstGeom prst="roundRect">
+            <a:avLst>
+              <a:gd name="adj" fmla="val 16044"/>
+            </a:avLst>
+          </a:prstGeom>
+          <a:solidFill>
+            <a:srgbClr val="EBD215"/>
+          </a:solidFill>
+          <a:ln w="12700" cap="flat">
+            <a:noFill/>
+            <a:miter lim="400000"/>
+          </a:ln>
+          <a:effectLst/>
+        </p:spPr>
+        <p:txBody>
+          <a:bodyPr wrap="square" lIns="45719" tIns="45719" rIns="45719" bIns="45719" numCol="1" anchor="ctr">
+            <a:noAutofit/>
+          </a:bodyPr>
+          <a:lstStyle/>
+          <a:p>
+            <a:pPr algn="ctr">
+              <a:defRPr sz="1000">
+                <a:solidFill>
+                  <a:srgbClr val="FFFFFF"/>
+                </a:solidFill>
+                <a:latin typeface="Open Sans"/>
+                <a:ea typeface="Open Sans"/>
+                <a:cs typeface="Open Sans"/>
+                <a:sym typeface="Open Sans"/>
+              </a:defRPr>
+            </a:pPr>
+            <a:r>
+              <a:rPr lang="es-ES" sz="2400" dirty="0"/>
+              <a:t>ES2020+</a:t>
+            </a:r>
+            <a:endParaRPr sz="2400" dirty="0"/>
+          </a:p>
+        </p:txBody>
+      </p:sp>
+      <p:cxnSp>
+        <p:nvCxnSpPr>
+          <p:cNvPr id="28" name="Conector recto de flecha 27">
+            <a:extLst>
+              <a:ext uri="{FF2B5EF4-FFF2-40B4-BE49-F238E27FC236}">
+                <a16:creationId xmlns:a16="http://schemas.microsoft.com/office/drawing/2014/main" id="{5A1EDF3F-1D98-C189-2C7E-2A18C87C69AF}"/>
+              </a:ext>
+            </a:extLst>
+          </p:cNvPr>
+          <p:cNvCxnSpPr>
+            <a:cxnSpLocks/>
+            <a:stCxn id="21" idx="3"/>
+            <a:endCxn id="27" idx="1"/>
+          </p:cNvCxnSpPr>
+          <p:nvPr/>
+        </p:nvCxnSpPr>
+        <p:spPr>
+          <a:xfrm>
+            <a:off x="3015521" y="4510947"/>
+            <a:ext cx="1002728" cy="1"/>
+          </a:xfrm>
+          <a:prstGeom prst="straightConnector1">
+            <a:avLst/>
+          </a:prstGeom>
+          <a:noFill/>
+          <a:ln w="25400" cap="flat">
+            <a:solidFill>
+              <a:schemeClr val="tx1">
+                <a:lumMod val="50000"/>
+                <a:lumOff val="50000"/>
+              </a:schemeClr>
+            </a:solidFill>
+            <a:prstDash val="solid"/>
+            <a:round/>
+            <a:tailEnd type="triangle"/>
+          </a:ln>
+          <a:effectLst/>
+          <a:sp3d/>
+        </p:spPr>
+        <p:style>
+          <a:lnRef idx="0">
+            <a:scrgbClr r="0" g="0" b="0"/>
+          </a:lnRef>
+          <a:fillRef idx="0">
+            <a:scrgbClr r="0" g="0" b="0"/>
+          </a:fillRef>
+          <a:effectRef idx="0">
+            <a:scrgbClr r="0" g="0" b="0"/>
+          </a:effectRef>
+          <a:fontRef idx="none"/>
+        </p:style>
+      </p:cxnSp>
+      <p:cxnSp>
+        <p:nvCxnSpPr>
+          <p:cNvPr id="30" name="Conector recto de flecha 29">
+            <a:extLst>
+              <a:ext uri="{FF2B5EF4-FFF2-40B4-BE49-F238E27FC236}">
+                <a16:creationId xmlns:a16="http://schemas.microsoft.com/office/drawing/2014/main" id="{7F84C6CC-C10A-ECEC-C5E1-A41EDE7513E5}"/>
+              </a:ext>
+            </a:extLst>
+          </p:cNvPr>
+          <p:cNvCxnSpPr>
+            <a:cxnSpLocks/>
+            <a:stCxn id="27" idx="3"/>
+            <a:endCxn id="23" idx="1"/>
+          </p:cNvCxnSpPr>
+          <p:nvPr/>
+        </p:nvCxnSpPr>
+        <p:spPr>
+          <a:xfrm flipV="1">
+            <a:off x="5125751" y="4504626"/>
+            <a:ext cx="1143944" cy="6322"/>
+          </a:xfrm>
+          <a:prstGeom prst="straightConnector1">
+            <a:avLst/>
+          </a:prstGeom>
+          <a:noFill/>
+          <a:ln w="25400" cap="flat">
+            <a:solidFill>
+              <a:schemeClr val="tx1">
+                <a:lumMod val="50000"/>
+                <a:lumOff val="50000"/>
+              </a:schemeClr>
+            </a:solidFill>
+            <a:prstDash val="solid"/>
+            <a:round/>
+            <a:tailEnd type="triangle"/>
+          </a:ln>
+          <a:effectLst/>
+          <a:sp3d/>
+        </p:spPr>
+        <p:style>
+          <a:lnRef idx="0">
+            <a:scrgbClr r="0" g="0" b="0"/>
+          </a:lnRef>
+          <a:fillRef idx="0">
+            <a:scrgbClr r="0" g="0" b="0"/>
+          </a:fillRef>
+          <a:effectRef idx="0">
+            <a:scrgbClr r="0" g="0" b="0"/>
+          </a:effectRef>
+          <a:fontRef idx="none"/>
+        </p:style>
+      </p:cxnSp>
+      <p:sp>
+        <p:nvSpPr>
+          <p:cNvPr id="36" name="TextBox 3">
+            <a:extLst>
+              <a:ext uri="{FF2B5EF4-FFF2-40B4-BE49-F238E27FC236}">
+                <a16:creationId xmlns:a16="http://schemas.microsoft.com/office/drawing/2014/main" id="{7043836E-68D4-7A5D-4253-DD08585E9CFF}"/>
+              </a:ext>
+            </a:extLst>
+          </p:cNvPr>
+          <p:cNvSpPr txBox="1"/>
+          <p:nvPr/>
+        </p:nvSpPr>
+        <p:spPr>
+          <a:xfrm>
+            <a:off x="447371" y="3756640"/>
+            <a:ext cx="1205471" cy="184666"/>
+          </a:xfrm>
+          <a:prstGeom prst="rect">
+            <a:avLst/>
+          </a:prstGeom>
+          <a:ln w="12700">
+            <a:miter lim="400000"/>
+          </a:ln>
+          <a:extLst>
+            <a:ext uri="{C572A759-6A51-4108-AA02-DFA0A04FC94B}">
+              <ma14:wrappingTextBoxFlag xmlns:ma14="http://schemas.microsoft.com/office/mac/drawingml/2011/main" xmlns:a14="http://schemas.microsoft.com/office/drawing/2010/main" xmlns:m="http://schemas.openxmlformats.org/officeDocument/2006/math" xmlns="" val="1"/>
+            </a:ext>
+          </a:extLst>
+        </p:spPr>
+        <p:txBody>
+          <a:bodyPr wrap="square" lIns="0" tIns="0" rIns="0" bIns="0">
+            <a:spAutoFit/>
+          </a:bodyPr>
+          <a:lstStyle/>
+          <a:p>
+            <a:pPr algn="r">
+              <a:defRPr sz="1200">
+                <a:solidFill>
+                  <a:srgbClr val="595959"/>
+                </a:solidFill>
+                <a:latin typeface="Open Sans"/>
+                <a:ea typeface="Open Sans"/>
+                <a:cs typeface="Open Sans"/>
+                <a:sym typeface="Open Sans"/>
+              </a:defRPr>
+            </a:pPr>
+            <a:r>
+              <a:rPr lang="es-ES" i="1" dirty="0" err="1">
+                <a:solidFill>
+                  <a:schemeClr val="bg2">
+                    <a:lumMod val="40000"/>
+                    <a:lumOff val="60000"/>
+                  </a:schemeClr>
+                </a:solidFill>
+              </a:rPr>
+              <a:t>Historicamente</a:t>
+            </a:r>
+            <a:endParaRPr i="1" u="sng" dirty="0">
+              <a:solidFill>
+                <a:schemeClr val="bg2">
+                  <a:lumMod val="40000"/>
+                  <a:lumOff val="60000"/>
+                </a:schemeClr>
+              </a:solidFill>
+              <a:uFill>
+                <a:solidFill>
+                  <a:srgbClr val="0000FF"/>
+                </a:solidFill>
+              </a:uFill>
+              <a:hlinkClick r:id="rId3"/>
+            </a:endParaRPr>
+          </a:p>
+        </p:txBody>
+      </p:sp>
+      <p:sp>
+        <p:nvSpPr>
+          <p:cNvPr id="37" name="TextBox 3">
+            <a:extLst>
+              <a:ext uri="{FF2B5EF4-FFF2-40B4-BE49-F238E27FC236}">
+                <a16:creationId xmlns:a16="http://schemas.microsoft.com/office/drawing/2014/main" id="{C7EDD089-1572-8C67-84B2-4D1AB2BD9E6E}"/>
+              </a:ext>
+            </a:extLst>
+          </p:cNvPr>
+          <p:cNvSpPr txBox="1"/>
+          <p:nvPr/>
+        </p:nvSpPr>
+        <p:spPr>
+          <a:xfrm>
+            <a:off x="437965" y="4409470"/>
+            <a:ext cx="1205471" cy="184666"/>
+          </a:xfrm>
+          <a:prstGeom prst="rect">
+            <a:avLst/>
+          </a:prstGeom>
+          <a:ln w="12700">
+            <a:miter lim="400000"/>
+          </a:ln>
+          <a:extLst>
+            <a:ext uri="{C572A759-6A51-4108-AA02-DFA0A04FC94B}">
+              <ma14:wrappingTextBoxFlag xmlns:ma14="http://schemas.microsoft.com/office/mac/drawingml/2011/main" xmlns:a14="http://schemas.microsoft.com/office/drawing/2010/main" xmlns:m="http://schemas.openxmlformats.org/officeDocument/2006/math" xmlns="" val="1"/>
+            </a:ext>
+          </a:extLst>
+        </p:spPr>
+        <p:txBody>
+          <a:bodyPr wrap="square" lIns="0" tIns="0" rIns="0" bIns="0">
+            <a:spAutoFit/>
+          </a:bodyPr>
+          <a:lstStyle/>
+          <a:p>
+            <a:pPr algn="r">
+              <a:defRPr sz="1200">
+                <a:solidFill>
+                  <a:srgbClr val="595959"/>
+                </a:solidFill>
+                <a:latin typeface="Open Sans"/>
+                <a:ea typeface="Open Sans"/>
+                <a:cs typeface="Open Sans"/>
+                <a:sym typeface="Open Sans"/>
+              </a:defRPr>
+            </a:pPr>
+            <a:r>
+              <a:rPr lang="es-ES" i="1" dirty="0">
+                <a:solidFill>
+                  <a:schemeClr val="tx2">
+                    <a:lumMod val="75000"/>
+                  </a:schemeClr>
+                </a:solidFill>
+              </a:rPr>
+              <a:t>Actualmente</a:t>
+            </a:r>
+            <a:endParaRPr i="1" u="sng" dirty="0">
+              <a:solidFill>
+                <a:schemeClr val="tx2">
+                  <a:lumMod val="75000"/>
+                </a:schemeClr>
+              </a:solidFill>
+              <a:uFill>
+                <a:solidFill>
+                  <a:srgbClr val="0000FF"/>
+                </a:solidFill>
+              </a:uFill>
+              <a:hlinkClick r:id="rId3"/>
+            </a:endParaRPr>
+          </a:p>
+        </p:txBody>
+      </p:sp>
+      <p:sp>
+        <p:nvSpPr>
+          <p:cNvPr id="132" name="TextBox 3">
+            <a:extLst>
+              <a:ext uri="{FF2B5EF4-FFF2-40B4-BE49-F238E27FC236}">
+                <a16:creationId xmlns:a16="http://schemas.microsoft.com/office/drawing/2014/main" id="{94C42C01-156D-4402-848A-259AFC783035}"/>
+              </a:ext>
+            </a:extLst>
+          </p:cNvPr>
+          <p:cNvSpPr txBox="1"/>
+          <p:nvPr/>
+        </p:nvSpPr>
+        <p:spPr>
+          <a:xfrm>
+            <a:off x="4187573" y="3160395"/>
+            <a:ext cx="768854" cy="153888"/>
+          </a:xfrm>
+          <a:prstGeom prst="rect">
+            <a:avLst/>
+          </a:prstGeom>
+          <a:ln w="12700">
+            <a:miter lim="400000"/>
+          </a:ln>
+          <a:extLst>
+            <a:ext uri="{C572A759-6A51-4108-AA02-DFA0A04FC94B}">
+              <ma14:wrappingTextBoxFlag xmlns:ma14="http://schemas.microsoft.com/office/mac/drawingml/2011/main" xmlns:a14="http://schemas.microsoft.com/office/drawing/2010/main" xmlns:m="http://schemas.openxmlformats.org/officeDocument/2006/math" xmlns="" val="1"/>
+            </a:ext>
+          </a:extLst>
+        </p:spPr>
+        <p:txBody>
+          <a:bodyPr wrap="square" lIns="0" tIns="0" rIns="0" bIns="0">
+            <a:spAutoFit/>
+          </a:bodyPr>
+          <a:lstStyle/>
+          <a:p>
+            <a:pPr algn="ctr">
+              <a:defRPr sz="1200">
+                <a:solidFill>
+                  <a:srgbClr val="595959"/>
+                </a:solidFill>
+                <a:latin typeface="Open Sans"/>
+                <a:ea typeface="Open Sans"/>
+                <a:cs typeface="Open Sans"/>
+                <a:sym typeface="Open Sans"/>
+              </a:defRPr>
+            </a:pPr>
+            <a:r>
+              <a:rPr lang="es-ES" sz="1000" b="1" dirty="0"/>
+              <a:t>POLYFILLS</a:t>
+            </a:r>
+            <a:endParaRPr sz="1000" b="1" u="sng" dirty="0">
+              <a:solidFill>
+                <a:srgbClr val="0000FF"/>
+              </a:solidFill>
+              <a:uFill>
+                <a:solidFill>
+                  <a:srgbClr val="0000FF"/>
+                </a:solidFill>
+              </a:uFill>
+              <a:hlinkClick r:id="rId3"/>
+            </a:endParaRPr>
+          </a:p>
+        </p:txBody>
+      </p:sp>
+      <p:sp>
+        <p:nvSpPr>
+          <p:cNvPr id="27" name="Rectángulo redondeado">
+            <a:extLst>
+              <a:ext uri="{FF2B5EF4-FFF2-40B4-BE49-F238E27FC236}">
+                <a16:creationId xmlns:a16="http://schemas.microsoft.com/office/drawing/2014/main" id="{0E559680-9768-12BD-CA3D-19686FACDA97}"/>
+              </a:ext>
+            </a:extLst>
+          </p:cNvPr>
+          <p:cNvSpPr/>
+          <p:nvPr/>
+        </p:nvSpPr>
+        <p:spPr>
+          <a:xfrm>
+            <a:off x="4018249" y="4281134"/>
+            <a:ext cx="1107502" cy="459627"/>
+          </a:xfrm>
+          <a:prstGeom prst="roundRect">
+            <a:avLst>
+              <a:gd name="adj" fmla="val 10635"/>
+            </a:avLst>
+          </a:prstGeom>
+          <a:solidFill>
+            <a:schemeClr val="bg1"/>
+          </a:solidFill>
+          <a:ln w="25400" cap="flat">
+            <a:solidFill>
+              <a:schemeClr val="tx1">
+                <a:lumMod val="50000"/>
+                <a:lumOff val="50000"/>
+              </a:schemeClr>
+            </a:solidFill>
+            <a:prstDash val="solid"/>
+            <a:round/>
+          </a:ln>
+          <a:effectLst/>
+        </p:spPr>
+        <p:txBody>
+          <a:bodyPr wrap="square" lIns="45719" tIns="45719" rIns="45719" bIns="45719" numCol="1" anchor="ctr">
+            <a:noAutofit/>
+          </a:bodyPr>
+          <a:lstStyle/>
+          <a:p>
+            <a:pPr>
+              <a:defRPr sz="2400">
+                <a:solidFill>
+                  <a:srgbClr val="404040"/>
+                </a:solidFill>
+                <a:latin typeface="Open Sans"/>
+                <a:ea typeface="Open Sans"/>
+                <a:cs typeface="Open Sans"/>
+                <a:sym typeface="Open Sans"/>
+              </a:defRPr>
+            </a:pPr>
+            <a:endParaRPr/>
+          </a:p>
+        </p:txBody>
+      </p:sp>
+      <p:pic>
+        <p:nvPicPr>
+          <p:cNvPr id="57" name="Imagen 56">
+            <a:extLst>
+              <a:ext uri="{FF2B5EF4-FFF2-40B4-BE49-F238E27FC236}">
+                <a16:creationId xmlns:a16="http://schemas.microsoft.com/office/drawing/2014/main" id="{93735028-1FCC-4FE1-260A-04540F3332B6}"/>
+              </a:ext>
+            </a:extLst>
+          </p:cNvPr>
+          <p:cNvPicPr>
+            <a:picLocks noChangeAspect="1"/>
+          </p:cNvPicPr>
+          <p:nvPr/>
+        </p:nvPicPr>
+        <p:blipFill>
+          <a:blip r:embed="rId27"/>
+          <a:srcRect r="1672"/>
+          <a:stretch/>
+        </p:blipFill>
+        <p:spPr>
+          <a:xfrm>
+            <a:off x="4086667" y="4328262"/>
+            <a:ext cx="539112" cy="189574"/>
+          </a:xfrm>
+          <a:prstGeom prst="rect">
+            <a:avLst/>
+          </a:prstGeom>
+        </p:spPr>
+      </p:pic>
+      <p:pic>
+        <p:nvPicPr>
+          <p:cNvPr id="58" name="Picture 2" descr="Rust-based platform for the Web">
+            <a:extLst>
+              <a:ext uri="{FF2B5EF4-FFF2-40B4-BE49-F238E27FC236}">
+                <a16:creationId xmlns:a16="http://schemas.microsoft.com/office/drawing/2014/main" id="{BD596A7C-D1E3-DC7A-C32B-4F6963B861ED}"/>
+              </a:ext>
+            </a:extLst>
+          </p:cNvPr>
+          <p:cNvPicPr>
+            <a:picLocks noChangeAspect="1" noChangeArrowheads="1"/>
+          </p:cNvPicPr>
+          <p:nvPr/>
+        </p:nvPicPr>
+        <p:blipFill>
+          <a:blip r:embed="rId28" cstate="print">
+            <a:extLst>
+              <a:ext uri="{28A0092B-C50C-407E-A947-70E740481C1C}">
+                <a14:useLocalDpi xmlns:a14="http://schemas.microsoft.com/office/drawing/2010/main" val="0"/>
+              </a:ext>
+            </a:extLst>
+          </a:blip>
+          <a:srcRect/>
+          <a:stretch>
+            <a:fillRect/>
+          </a:stretch>
+        </p:blipFill>
+        <p:spPr bwMode="auto">
+          <a:xfrm>
+            <a:off x="4710101" y="4349906"/>
+            <a:ext cx="345401" cy="122450"/>
+          </a:xfrm>
+          <a:prstGeom prst="rect">
+            <a:avLst/>
+          </a:prstGeom>
+          <a:noFill/>
+          <a:extLst>
+            <a:ext uri="{909E8E84-426E-40DD-AFC4-6F175D3DCCD1}">
+              <a14:hiddenFill xmlns:a14="http://schemas.microsoft.com/office/drawing/2010/main">
+                <a:solidFill>
+                  <a:srgbClr val="FFFFFF"/>
+                </a:solidFill>
+              </a14:hiddenFill>
+            </a:ext>
+          </a:extLst>
+        </p:spPr>
+      </p:pic>
+      <p:pic>
+        <p:nvPicPr>
+          <p:cNvPr id="60" name="Imagen 59">
+            <a:extLst>
+              <a:ext uri="{FF2B5EF4-FFF2-40B4-BE49-F238E27FC236}">
+                <a16:creationId xmlns:a16="http://schemas.microsoft.com/office/drawing/2014/main" id="{8769CE3D-C7D0-04CE-76C1-E7A64AA67FD9}"/>
+              </a:ext>
+            </a:extLst>
+          </p:cNvPr>
+          <p:cNvPicPr>
+            <a:picLocks noChangeAspect="1"/>
+          </p:cNvPicPr>
+          <p:nvPr/>
+        </p:nvPicPr>
+        <p:blipFill>
+          <a:blip r:embed="rId29"/>
+          <a:srcRect l="42443" t="27139" b="22957"/>
+          <a:stretch/>
+        </p:blipFill>
+        <p:spPr>
+          <a:xfrm>
+            <a:off x="4496116" y="4537442"/>
+            <a:ext cx="388209" cy="138233"/>
+          </a:xfrm>
+          <a:prstGeom prst="rect">
+            <a:avLst/>
+          </a:prstGeom>
+        </p:spPr>
+      </p:pic>
+      <p:pic>
+        <p:nvPicPr>
+          <p:cNvPr id="64" name="Imagen 63">
+            <a:extLst>
+              <a:ext uri="{FF2B5EF4-FFF2-40B4-BE49-F238E27FC236}">
+                <a16:creationId xmlns:a16="http://schemas.microsoft.com/office/drawing/2014/main" id="{AAB9E3AF-06B4-610F-CC4B-915C150C062C}"/>
+              </a:ext>
+            </a:extLst>
+          </p:cNvPr>
+          <p:cNvPicPr>
+            <a:picLocks noChangeAspect="1"/>
+          </p:cNvPicPr>
+          <p:nvPr/>
+        </p:nvPicPr>
+        <p:blipFill>
+          <a:blip r:embed="rId30"/>
+          <a:stretch>
+            <a:fillRect/>
+          </a:stretch>
+        </p:blipFill>
+        <p:spPr>
+          <a:xfrm>
+            <a:off x="4310140" y="4517836"/>
+            <a:ext cx="171647" cy="165242"/>
+          </a:xfrm>
+          <a:prstGeom prst="rect">
+            <a:avLst/>
+          </a:prstGeom>
+        </p:spPr>
+      </p:pic>
+      <p:sp>
+        <p:nvSpPr>
+          <p:cNvPr id="65" name="TextBox 3">
+            <a:extLst>
+              <a:ext uri="{FF2B5EF4-FFF2-40B4-BE49-F238E27FC236}">
+                <a16:creationId xmlns:a16="http://schemas.microsoft.com/office/drawing/2014/main" id="{71E12163-EA4D-EAAD-E997-202584261047}"/>
+              </a:ext>
+            </a:extLst>
+          </p:cNvPr>
+          <p:cNvSpPr txBox="1"/>
+          <p:nvPr/>
+        </p:nvSpPr>
+        <p:spPr>
+          <a:xfrm>
+            <a:off x="4023643" y="2927176"/>
+            <a:ext cx="1107502" cy="153888"/>
+          </a:xfrm>
+          <a:prstGeom prst="rect">
+            <a:avLst/>
+          </a:prstGeom>
+          <a:ln w="12700">
+            <a:miter lim="400000"/>
+          </a:ln>
+          <a:extLst>
+            <a:ext uri="{C572A759-6A51-4108-AA02-DFA0A04FC94B}">
+              <ma14:wrappingTextBoxFlag xmlns:ma14="http://schemas.microsoft.com/office/mac/drawingml/2011/main" xmlns:a14="http://schemas.microsoft.com/office/drawing/2010/main" xmlns:m="http://schemas.openxmlformats.org/officeDocument/2006/math" xmlns="" val="1"/>
+            </a:ext>
+          </a:extLst>
+        </p:spPr>
+        <p:txBody>
+          <a:bodyPr wrap="square" lIns="0" tIns="0" rIns="0" bIns="0">
+            <a:spAutoFit/>
+          </a:bodyPr>
+          <a:lstStyle/>
+          <a:p>
+            <a:pPr algn="ctr">
+              <a:defRPr sz="1200">
+                <a:solidFill>
+                  <a:srgbClr val="595959"/>
+                </a:solidFill>
+                <a:latin typeface="Open Sans"/>
+                <a:ea typeface="Open Sans"/>
+                <a:cs typeface="Open Sans"/>
+                <a:sym typeface="Open Sans"/>
+              </a:defRPr>
+            </a:pPr>
+            <a:r>
+              <a:rPr lang="es-ES" sz="1000" b="1" dirty="0"/>
+              <a:t>TRANSPILACIÓN</a:t>
+            </a:r>
+            <a:endParaRPr sz="1000" b="1" u="sng" dirty="0">
+              <a:solidFill>
+                <a:srgbClr val="0000FF"/>
+              </a:solidFill>
+              <a:uFill>
+                <a:solidFill>
+                  <a:srgbClr val="0000FF"/>
+                </a:solidFill>
+              </a:uFill>
+              <a:hlinkClick r:id="rId3"/>
+            </a:endParaRPr>
+          </a:p>
+        </p:txBody>
+      </p:sp>
+      <p:sp>
+        <p:nvSpPr>
+          <p:cNvPr id="67" name="TextBox 3">
+            <a:extLst>
+              <a:ext uri="{FF2B5EF4-FFF2-40B4-BE49-F238E27FC236}">
+                <a16:creationId xmlns:a16="http://schemas.microsoft.com/office/drawing/2014/main" id="{237394D4-CE42-9E7F-88DD-F4FF6B511CE0}"/>
+              </a:ext>
+            </a:extLst>
+          </p:cNvPr>
+          <p:cNvSpPr txBox="1"/>
+          <p:nvPr/>
+        </p:nvSpPr>
+        <p:spPr>
+          <a:xfrm>
+            <a:off x="4528854" y="3040530"/>
+            <a:ext cx="134097" cy="153888"/>
+          </a:xfrm>
+          <a:prstGeom prst="rect">
+            <a:avLst/>
+          </a:prstGeom>
+          <a:ln w="12700">
+            <a:miter lim="400000"/>
+          </a:ln>
+          <a:extLst>
+            <a:ext uri="{C572A759-6A51-4108-AA02-DFA0A04FC94B}">
+              <ma14:wrappingTextBoxFlag xmlns:ma14="http://schemas.microsoft.com/office/mac/drawingml/2011/main" xmlns:a14="http://schemas.microsoft.com/office/drawing/2010/main" xmlns:m="http://schemas.openxmlformats.org/officeDocument/2006/math" xmlns="" val="1"/>
+            </a:ext>
+          </a:extLst>
+        </p:spPr>
+        <p:txBody>
+          <a:bodyPr wrap="square" lIns="0" tIns="0" rIns="0" bIns="0">
+            <a:spAutoFit/>
+          </a:bodyPr>
+          <a:lstStyle/>
+          <a:p>
+            <a:pPr algn="ctr">
+              <a:defRPr sz="1200">
+                <a:solidFill>
+                  <a:srgbClr val="595959"/>
+                </a:solidFill>
+                <a:latin typeface="Open Sans"/>
+                <a:ea typeface="Open Sans"/>
+                <a:cs typeface="Open Sans"/>
+                <a:sym typeface="Open Sans"/>
+              </a:defRPr>
+            </a:pPr>
+            <a:r>
+              <a:rPr lang="es-ES" sz="1000" b="1" dirty="0"/>
+              <a:t>+</a:t>
+            </a:r>
+            <a:endParaRPr sz="1000" b="1" u="sng" dirty="0">
+              <a:solidFill>
+                <a:srgbClr val="0000FF"/>
+              </a:solidFill>
+              <a:uFill>
+                <a:solidFill>
+                  <a:srgbClr val="0000FF"/>
+                </a:solidFill>
+              </a:uFill>
+              <a:hlinkClick r:id="rId3"/>
+            </a:endParaRPr>
+          </a:p>
+        </p:txBody>
+      </p:sp>
     </p:spTree>
     <p:extLst>
       <p:ext uri="{BB962C8B-B14F-4D97-AF65-F5344CB8AC3E}">
@@ -20426,7 +21489,7 @@
           <p:nvPr/>
         </p:nvPicPr>
         <p:blipFill>
-          <a:blip r:embed="rId2"/>
+          <a:blip r:embed="rId3"/>
           <a:stretch>
             <a:fillRect/>
           </a:stretch>
@@ -20499,7 +21562,7 @@
           </a:ln>
           <a:extLst>
             <a:ext uri="{C572A759-6A51-4108-AA02-DFA0A04FC94B}">
-              <ma14:wrappingTextBoxFlag xmlns="" xmlns:m="http://schemas.openxmlformats.org/officeDocument/2006/math" xmlns:a14="http://schemas.microsoft.com/office/drawing/2010/main" xmlns:ma14="http://schemas.microsoft.com/office/mac/drawingml/2011/main" val="1"/>
+              <ma14:wrappingTextBoxFlag xmlns:ma14="http://schemas.microsoft.com/office/mac/drawingml/2011/main" xmlns:a14="http://schemas.microsoft.com/office/drawing/2010/main" xmlns:m="http://schemas.openxmlformats.org/officeDocument/2006/math" xmlns="" val="1"/>
             </a:ext>
           </a:extLst>
         </p:spPr>
